--- a/Submission/00_技术报告/汇报PPT_20261019.pptx
+++ b/Submission/00_技术报告/汇报PPT_20261019.pptx
@@ -4,25 +4,27 @@
   <p:sldMasterIdLst>
     <p:sldMasterId id="2147483648" r:id="rId1"/>
   </p:sldMasterIdLst>
+  <p:notesMasterIdLst>
+    <p:notesMasterId r:id="rId17"/>
+  </p:notesMasterIdLst>
   <p:sldIdLst>
-    <p:sldId id="256" r:id="rId7"/>
-    <p:sldId id="257" r:id="rId9"/>
-    <p:sldId id="258" r:id="rId10"/>
-    <p:sldId id="259" r:id="rId11"/>
-    <p:sldId id="260" r:id="rId12"/>
-    <p:sldId id="261" r:id="rId13"/>
-    <p:sldId id="262" r:id="rId14"/>
-    <p:sldId id="263" r:id="rId15"/>
-    <p:sldId id="264" r:id="rId16"/>
-    <p:sldId id="265" r:id="rId17"/>
-    <p:sldId id="266" r:id="rId18"/>
-    <p:sldId id="267" r:id="rId19"/>
-    <p:sldId id="268" r:id="rId20"/>
-    <p:sldId id="269" r:id="rId21"/>
-    <p:sldId id="270" r:id="rId22"/>
-    <p:sldId id="271" r:id="rId23"/>
+    <p:sldId id="256" r:id="rId2"/>
+    <p:sldId id="257" r:id="rId3"/>
+    <p:sldId id="258" r:id="rId4"/>
+    <p:sldId id="259" r:id="rId5"/>
+    <p:sldId id="260" r:id="rId6"/>
+    <p:sldId id="261" r:id="rId7"/>
+    <p:sldId id="262" r:id="rId8"/>
+    <p:sldId id="263" r:id="rId9"/>
+    <p:sldId id="264" r:id="rId10"/>
+    <p:sldId id="266" r:id="rId11"/>
+    <p:sldId id="267" r:id="rId12"/>
+    <p:sldId id="268" r:id="rId13"/>
+    <p:sldId id="269" r:id="rId14"/>
+    <p:sldId id="270" r:id="rId15"/>
+    <p:sldId id="271" r:id="rId16"/>
   </p:sldIdLst>
-  <p:sldSz cx="12191695" cy="6858000" type="screen4x3"/>
+  <p:sldSz cx="12192000" cy="6858000"/>
   <p:notesSz cx="6858000" cy="9144000"/>
   <p:defaultTextStyle>
     <a:defPPr>
@@ -119,11 +121,27 @@
       </a:defRPr>
     </a:lvl9pPr>
   </p:defaultTextStyle>
+  <p:extLst>
+    <p:ext uri="{EFAFB233-063F-42B5-8137-9DF3F51BA10A}">
+      <p15:sldGuideLst xmlns:p15="http://schemas.microsoft.com/office/powerpoint/2012/main">
+        <p15:guide id="1" orient="horz" pos="2160">
+          <p15:clr>
+            <a:srgbClr val="A4A3A4"/>
+          </p15:clr>
+        </p15:guide>
+        <p15:guide id="2" pos="2880">
+          <p15:clr>
+            <a:srgbClr val="A4A3A4"/>
+          </p15:clr>
+        </p15:guide>
+      </p15:sldGuideLst>
+    </p:ext>
+  </p:extLst>
 </p:presentation>
 </file>
 
 <file path=ppt/notesMasters/notesMaster1.xml><?xml version="1.0" encoding="utf-8"?>
-<p:notesMaster xmlns:a="http://schemas.openxmlformats.org/drawingml/2006/main" xmlns:p="http://schemas.openxmlformats.org/presentationml/2006/main" xmlns:r="http://schemas.openxmlformats.org/officeDocument/2006/relationships">
+<p:notesMaster xmlns:a="http://schemas.openxmlformats.org/drawingml/2006/main" xmlns:r="http://schemas.openxmlformats.org/officeDocument/2006/relationships" xmlns:p="http://schemas.openxmlformats.org/presentationml/2006/main">
   <p:cSld>
     <p:bg>
       <p:bgRef idx="1001">
@@ -144,241 +162,16 @@
           <a:chExt cx="0" cy="0"/>
         </a:xfrm>
       </p:grpSpPr>
-      <p:sp>
-        <p:nvSpPr>
-          <p:cNvPr id="2" name="Header Placeholder 1"/>
-          <p:cNvSpPr>
-            <a:spLocks noGrp="1"/>
-          </p:cNvSpPr>
-          <p:nvPr>
-            <p:ph type="hdr" sz="quarter"/>
-          </p:nvPr>
-        </p:nvSpPr>
-        <p:spPr>
-          <a:xfrm>
-            <a:off x="0" y="0"/>
-            <a:ext cx="2971800" cy="457200"/>
-          </a:xfrm>
-          <a:prstGeom prst="rect">
-            <a:avLst/>
-          </a:prstGeom>
-        </p:spPr>
-        <p:txBody>
-          <a:bodyPr vert="horz" lIns="91440" tIns="45720" rIns="91440" bIns="45720" rtlCol="0"/>
-          <a:lstStyle>
-            <a:lvl1pPr algn="l">
-              <a:defRPr sz="1200"/>
-            </a:lvl1pPr>
-          </a:lstStyle>
-          <a:p>
-            <a:endParaRPr lang="en-US"/>
-          </a:p>
-        </p:txBody>
-      </p:sp>
-      <p:sp>
-        <p:nvSpPr>
-          <p:cNvPr id="3" name="Date Placeholder 2"/>
-          <p:cNvSpPr>
-            <a:spLocks noGrp="1"/>
-          </p:cNvSpPr>
-          <p:nvPr>
-            <p:ph type="dt" idx="1"/>
-          </p:nvPr>
-        </p:nvSpPr>
-        <p:spPr>
-          <a:xfrm>
-            <a:off x="3884613" y="0"/>
-            <a:ext cx="2971800" cy="457200"/>
-          </a:xfrm>
-          <a:prstGeom prst="rect">
-            <a:avLst/>
-          </a:prstGeom>
-        </p:spPr>
-        <p:txBody>
-          <a:bodyPr vert="horz" lIns="91440" tIns="45720" rIns="91440" bIns="45720" rtlCol="0"/>
-          <a:lstStyle>
-            <a:lvl1pPr algn="r">
-              <a:defRPr sz="1200"/>
-            </a:lvl1pPr>
-          </a:lstStyle>
-          <a:p>
-            <a:fld id="{0F89C1C7-3DCD-1040-A9CF-14679D8B5DDD}" type="datetimeFigureOut">
-              <a:rPr lang="en-US" smtClean="0"/>
-              <a:t>10/17/16</a:t>
-            </a:fld>
-            <a:endParaRPr lang="en-US"/>
-          </a:p>
-        </p:txBody>
-      </p:sp>
-      <p:sp>
-        <p:nvSpPr>
-          <p:cNvPr id="4" name="Slide Image Placeholder 3"/>
-          <p:cNvSpPr>
-            <a:spLocks noGrp="1" noRot="1" noChangeAspect="1"/>
-          </p:cNvSpPr>
-          <p:nvPr>
-            <p:ph type="sldImg" idx="2"/>
-          </p:nvPr>
-        </p:nvSpPr>
-        <p:spPr>
-          <a:xfrm>
-            <a:off x="1143000" y="685800"/>
-            <a:ext cx="4572000" cy="3429000"/>
-          </a:xfrm>
-          <a:prstGeom prst="rect">
-            <a:avLst/>
-          </a:prstGeom>
-          <a:noFill/>
-          <a:ln w="12700">
-            <a:solidFill>
-              <a:prstClr val="black"/>
-            </a:solidFill>
-          </a:ln>
-        </p:spPr>
-        <p:txBody>
-          <a:bodyPr vert="horz" lIns="91440" tIns="45720" rIns="91440" bIns="45720" rtlCol="0" anchor="ctr"/>
-          <a:lstStyle/>
-          <a:p>
-            <a:endParaRPr lang="en-US"/>
-          </a:p>
-        </p:txBody>
-      </p:sp>
-      <p:sp>
-        <p:nvSpPr>
-          <p:cNvPr id="5" name="Notes Placeholder 4"/>
-          <p:cNvSpPr>
-            <a:spLocks noGrp="1"/>
-          </p:cNvSpPr>
-          <p:nvPr>
-            <p:ph type="body" sz="quarter" idx="3"/>
-          </p:nvPr>
-        </p:nvSpPr>
-        <p:spPr>
-          <a:xfrm>
-            <a:off x="685800" y="4343400"/>
-            <a:ext cx="5486400" cy="4114800"/>
-          </a:xfrm>
-          <a:prstGeom prst="rect">
-            <a:avLst/>
-          </a:prstGeom>
-        </p:spPr>
-        <p:txBody>
-          <a:bodyPr vert="horz" lIns="91440" tIns="45720" rIns="91440" bIns="45720" rtlCol="0"/>
-          <a:lstStyle/>
-          <a:p>
-            <a:pPr lvl="0"/>
-            <a:r>
-              <a:rPr lang="en-US" smtClean="0"/>
-              <a:t>Click to edit Master text styles</a:t>
-            </a:r>
-          </a:p>
-          <a:p>
-            <a:pPr lvl="1"/>
-            <a:r>
-              <a:rPr lang="en-US" smtClean="0"/>
-              <a:t>Second level</a:t>
-            </a:r>
-          </a:p>
-          <a:p>
-            <a:pPr lvl="2"/>
-            <a:r>
-              <a:rPr lang="en-US" smtClean="0"/>
-              <a:t>Third level</a:t>
-            </a:r>
-          </a:p>
-          <a:p>
-            <a:pPr lvl="3"/>
-            <a:r>
-              <a:rPr lang="en-US" smtClean="0"/>
-              <a:t>Fourth level</a:t>
-            </a:r>
-          </a:p>
-          <a:p>
-            <a:pPr lvl="4"/>
-            <a:r>
-              <a:rPr lang="en-US" smtClean="0"/>
-              <a:t>Fifth level</a:t>
-            </a:r>
-            <a:endParaRPr lang="en-US"/>
-          </a:p>
-        </p:txBody>
-      </p:sp>
-      <p:sp>
-        <p:nvSpPr>
-          <p:cNvPr id="6" name="Footer Placeholder 5"/>
-          <p:cNvSpPr>
-            <a:spLocks noGrp="1"/>
-          </p:cNvSpPr>
-          <p:nvPr>
-            <p:ph type="ftr" sz="quarter" idx="4"/>
-          </p:nvPr>
-        </p:nvSpPr>
-        <p:spPr>
-          <a:xfrm>
-            <a:off x="0" y="8685213"/>
-            <a:ext cx="2971800" cy="457200"/>
-          </a:xfrm>
-          <a:prstGeom prst="rect">
-            <a:avLst/>
-          </a:prstGeom>
-        </p:spPr>
-        <p:txBody>
-          <a:bodyPr vert="horz" lIns="91440" tIns="45720" rIns="91440" bIns="45720" rtlCol="0" anchor="b"/>
-          <a:lstStyle>
-            <a:lvl1pPr algn="l">
-              <a:defRPr sz="1200"/>
-            </a:lvl1pPr>
-          </a:lstStyle>
-          <a:p>
-            <a:endParaRPr lang="en-US"/>
-          </a:p>
-        </p:txBody>
-      </p:sp>
-      <p:sp>
-        <p:nvSpPr>
-          <p:cNvPr id="7" name="Slide Number Placeholder 6"/>
-          <p:cNvSpPr>
-            <a:spLocks noGrp="1"/>
-          </p:cNvSpPr>
-          <p:nvPr>
-            <p:ph type="sldNum" sz="quarter" idx="5"/>
-          </p:nvPr>
-        </p:nvSpPr>
-        <p:spPr>
-          <a:xfrm>
-            <a:off x="3884613" y="8685213"/>
-            <a:ext cx="2971800" cy="457200"/>
-          </a:xfrm>
-          <a:prstGeom prst="rect">
-            <a:avLst/>
-          </a:prstGeom>
-        </p:spPr>
-        <p:txBody>
-          <a:bodyPr vert="horz" lIns="91440" tIns="45720" rIns="91440" bIns="45720" rtlCol="0" anchor="b"/>
-          <a:lstStyle>
-            <a:lvl1pPr algn="r">
-              <a:defRPr sz="1200"/>
-            </a:lvl1pPr>
-          </a:lstStyle>
-          <a:p>
-            <a:fld id="{BB5E49A5-4136-284D-997B-48E1D791AD67}" type="slidenum">
-              <a:rPr lang="en-US" smtClean="0"/>
-              <a:t>‹#›</a:t>
-            </a:fld>
-            <a:endParaRPr lang="en-US"/>
-          </a:p>
-        </p:txBody>
-      </p:sp>
     </p:spTree>
     <p:extLst>
       <p:ext uri="{BB962C8B-B14F-4D97-AF65-F5344CB8AC3E}">
-        <p14:creationId xmlns:p14="http://schemas.microsoft.com/office/powerpoint/2010/main" val="2623252185"/>
+        <p14:creationId xmlns:p14="http://schemas.microsoft.com/office/powerpoint/2010/main" val="1462548496"/>
       </p:ext>
     </p:extLst>
   </p:cSld>
   <p:clrMap bg1="lt1" tx1="dk1" bg2="lt2" tx2="dk2" accent1="accent1" accent2="accent2" accent3="accent3" accent4="accent4" accent5="accent5" accent6="accent6" hlink="hlink" folHlink="folHlink"/>
   <p:notesStyle>
-    <a:lvl1pPr marL="0" algn="l" defTabSz="457200" rtl="0" eaLnBrk="1" latinLnBrk="0" hangingPunct="1">
+    <a:lvl1pPr marL="0" algn="l" defTabSz="914400" rtl="0" eaLnBrk="1" latinLnBrk="0" hangingPunct="1">
       <a:defRPr sz="1200" kern="1200">
         <a:solidFill>
           <a:schemeClr val="tx1"/>
@@ -388,7 +181,7 @@
         <a:cs typeface="+mn-cs"/>
       </a:defRPr>
     </a:lvl1pPr>
-    <a:lvl2pPr marL="457200" algn="l" defTabSz="457200" rtl="0" eaLnBrk="1" latinLnBrk="0" hangingPunct="1">
+    <a:lvl2pPr marL="457200" algn="l" defTabSz="914400" rtl="0" eaLnBrk="1" latinLnBrk="0" hangingPunct="1">
       <a:defRPr sz="1200" kern="1200">
         <a:solidFill>
           <a:schemeClr val="tx1"/>
@@ -398,7 +191,7 @@
         <a:cs typeface="+mn-cs"/>
       </a:defRPr>
     </a:lvl2pPr>
-    <a:lvl3pPr marL="914400" algn="l" defTabSz="457200" rtl="0" eaLnBrk="1" latinLnBrk="0" hangingPunct="1">
+    <a:lvl3pPr marL="914400" algn="l" defTabSz="914400" rtl="0" eaLnBrk="1" latinLnBrk="0" hangingPunct="1">
       <a:defRPr sz="1200" kern="1200">
         <a:solidFill>
           <a:schemeClr val="tx1"/>
@@ -408,7 +201,7 @@
         <a:cs typeface="+mn-cs"/>
       </a:defRPr>
     </a:lvl3pPr>
-    <a:lvl4pPr marL="1371600" algn="l" defTabSz="457200" rtl="0" eaLnBrk="1" latinLnBrk="0" hangingPunct="1">
+    <a:lvl4pPr marL="1371600" algn="l" defTabSz="914400" rtl="0" eaLnBrk="1" latinLnBrk="0" hangingPunct="1">
       <a:defRPr sz="1200" kern="1200">
         <a:solidFill>
           <a:schemeClr val="tx1"/>
@@ -418,7 +211,7 @@
         <a:cs typeface="+mn-cs"/>
       </a:defRPr>
     </a:lvl4pPr>
-    <a:lvl5pPr marL="1828800" algn="l" defTabSz="457200" rtl="0" eaLnBrk="1" latinLnBrk="0" hangingPunct="1">
+    <a:lvl5pPr marL="1828800" algn="l" defTabSz="914400" rtl="0" eaLnBrk="1" latinLnBrk="0" hangingPunct="1">
       <a:defRPr sz="1200" kern="1200">
         <a:solidFill>
           <a:schemeClr val="tx1"/>
@@ -428,7 +221,7 @@
         <a:cs typeface="+mn-cs"/>
       </a:defRPr>
     </a:lvl5pPr>
-    <a:lvl6pPr marL="2286000" algn="l" defTabSz="457200" rtl="0" eaLnBrk="1" latinLnBrk="0" hangingPunct="1">
+    <a:lvl6pPr marL="2286000" algn="l" defTabSz="914400" rtl="0" eaLnBrk="1" latinLnBrk="0" hangingPunct="1">
       <a:defRPr sz="1200" kern="1200">
         <a:solidFill>
           <a:schemeClr val="tx1"/>
@@ -438,7 +231,7 @@
         <a:cs typeface="+mn-cs"/>
       </a:defRPr>
     </a:lvl6pPr>
-    <a:lvl7pPr marL="2743200" algn="l" defTabSz="457200" rtl="0" eaLnBrk="1" latinLnBrk="0" hangingPunct="1">
+    <a:lvl7pPr marL="2743200" algn="l" defTabSz="914400" rtl="0" eaLnBrk="1" latinLnBrk="0" hangingPunct="1">
       <a:defRPr sz="1200" kern="1200">
         <a:solidFill>
           <a:schemeClr val="tx1"/>
@@ -448,7 +241,7 @@
         <a:cs typeface="+mn-cs"/>
       </a:defRPr>
     </a:lvl7pPr>
-    <a:lvl8pPr marL="3200400" algn="l" defTabSz="457200" rtl="0" eaLnBrk="1" latinLnBrk="0" hangingPunct="1">
+    <a:lvl8pPr marL="3200400" algn="l" defTabSz="914400" rtl="0" eaLnBrk="1" latinLnBrk="0" hangingPunct="1">
       <a:defRPr sz="1200" kern="1200">
         <a:solidFill>
           <a:schemeClr val="tx1"/>
@@ -458,7 +251,7 @@
         <a:cs typeface="+mn-cs"/>
       </a:defRPr>
     </a:lvl8pPr>
-    <a:lvl9pPr marL="3657600" algn="l" defTabSz="457200" rtl="0" eaLnBrk="1" latinLnBrk="0" hangingPunct="1">
+    <a:lvl9pPr marL="3657600" algn="l" defTabSz="914400" rtl="0" eaLnBrk="1" latinLnBrk="0" hangingPunct="1">
       <a:defRPr sz="1200" kern="1200">
         <a:solidFill>
           <a:schemeClr val="tx1"/>
@@ -473,7 +266,7 @@
 </file>
 
 <file path=ppt/notesSlides/notesSlide1.xml><?xml version="1.0" encoding="utf-8"?>
-<p:notes xmlns:a="http://schemas.openxmlformats.org/drawingml/2006/main" xmlns:p="http://schemas.openxmlformats.org/presentationml/2006/main" xmlns:r="http://schemas.openxmlformats.org/officeDocument/2006/relationships">
+<p:notes xmlns:a="http://schemas.openxmlformats.org/drawingml/2006/main" xmlns:r="http://schemas.openxmlformats.org/officeDocument/2006/relationships" xmlns:p="http://schemas.openxmlformats.org/presentationml/2006/main">
   <p:cSld>
     <p:spTree>
       <p:nvGrpSpPr>
@@ -493,7 +286,7 @@
         <p:nvSpPr>
           <p:cNvPr id="2" name="Slide Image Placeholder 1"/>
           <p:cNvSpPr>
-            <a:spLocks noGrp="1"/>
+            <a:spLocks noGrp="1" noRot="1" noChangeAspect="1"/>
           </p:cNvSpPr>
           <p:nvPr>
             <p:ph type="sldImg" idx="2"/>
@@ -508,7 +301,7 @@
             <a:spLocks noGrp="1"/>
           </p:cNvSpPr>
           <p:nvPr>
-            <p:ph type="body" idx="3" sz="quarter"/>
+            <p:ph type="body" sz="quarter" idx="3"/>
           </p:nvPr>
         </p:nvSpPr>
         <p:spPr/>
@@ -517,7 +310,28 @@
           <a:lstStyle/>
           <a:p>
             <a:r>
-              <a:t>开场 15 秒：我们做的是把自然语言需求一路推到可交的电路尺寸。一句话给结果——平台自动分 84.96，四项硬约束在全部工艺角都满足。</a:t>
+              <a:rPr dirty="0" err="1"/>
+              <a:t>开场</a:t>
+            </a:r>
+            <a:r>
+              <a:rPr dirty="0"/>
+              <a:t> 15 </a:t>
+            </a:r>
+            <a:r>
+              <a:rPr dirty="0" err="1"/>
+              <a:t>秒：我们做的是把自然语言需求一路推到可交的电路尺寸。一句话给结果</a:t>
+            </a:r>
+            <a:r>
+              <a:rPr dirty="0"/>
+              <a:t>——</a:t>
+            </a:r>
+            <a:r>
+              <a:rPr dirty="0" err="1"/>
+              <a:t>平台自动分</a:t>
+            </a:r>
+            <a:r>
+              <a:rPr dirty="0"/>
+              <a:t> 84.96，四项硬约束在全部工艺角都满足。</a:t>
             </a:r>
           </a:p>
         </p:txBody>
@@ -529,7 +343,7 @@
             <a:spLocks noGrp="1"/>
           </p:cNvSpPr>
           <p:nvPr>
-            <p:ph type="sldNum" idx="5" sz="quarter"/>
+            <p:ph type="sldNum" sz="quarter" idx="5"/>
           </p:nvPr>
         </p:nvSpPr>
         <p:spPr/>
@@ -543,7 +357,7 @@
 </file>
 
 <file path=ppt/notesSlides/notesSlide10.xml><?xml version="1.0" encoding="utf-8"?>
-<p:notes xmlns:a="http://schemas.openxmlformats.org/drawingml/2006/main" xmlns:p="http://schemas.openxmlformats.org/presentationml/2006/main" xmlns:r="http://schemas.openxmlformats.org/officeDocument/2006/relationships">
+<p:notes xmlns:a="http://schemas.openxmlformats.org/drawingml/2006/main" xmlns:r="http://schemas.openxmlformats.org/officeDocument/2006/relationships" xmlns:p="http://schemas.openxmlformats.org/presentationml/2006/main">
   <p:cSld>
     <p:spTree>
       <p:nvGrpSpPr>
@@ -563,7 +377,7 @@
         <p:nvSpPr>
           <p:cNvPr id="2" name="Slide Image Placeholder 1"/>
           <p:cNvSpPr>
-            <a:spLocks noGrp="1"/>
+            <a:spLocks noGrp="1" noRot="1" noChangeAspect="1"/>
           </p:cNvSpPr>
           <p:nvPr>
             <p:ph type="sldImg" idx="2"/>
@@ -578,7 +392,7 @@
             <a:spLocks noGrp="1"/>
           </p:cNvSpPr>
           <p:nvPr>
-            <p:ph type="body" idx="3" sz="quarter"/>
+            <p:ph type="body" sz="quarter" idx="3"/>
           </p:nvPr>
         </p:nvSpPr>
         <p:spPr/>
@@ -587,7 +401,7 @@
           <a:lstStyle/>
           <a:p>
             <a:r>
-              <a:t>这是最终成绩。四项硬约束满分，时间分满分。六个物理量给我们念一遍。</a:t>
+              <a:t>模块四是工具链。设计原则是保守：宁可功能少一点，也不能把原始电路图改坏——只有一次提交机会。</a:t>
             </a:r>
           </a:p>
         </p:txBody>
@@ -599,7 +413,7 @@
             <a:spLocks noGrp="1"/>
           </p:cNvSpPr>
           <p:nvPr>
-            <p:ph type="sldNum" idx="5" sz="quarter"/>
+            <p:ph type="sldNum" sz="quarter" idx="5"/>
           </p:nvPr>
         </p:nvSpPr>
         <p:spPr/>
@@ -613,7 +427,7 @@
 </file>
 
 <file path=ppt/notesSlides/notesSlide11.xml><?xml version="1.0" encoding="utf-8"?>
-<p:notes xmlns:a="http://schemas.openxmlformats.org/drawingml/2006/main" xmlns:p="http://schemas.openxmlformats.org/presentationml/2006/main" xmlns:r="http://schemas.openxmlformats.org/officeDocument/2006/relationships">
+<p:notes xmlns:a="http://schemas.openxmlformats.org/drawingml/2006/main" xmlns:r="http://schemas.openxmlformats.org/officeDocument/2006/relationships" xmlns:p="http://schemas.openxmlformats.org/presentationml/2006/main">
   <p:cSld>
     <p:spTree>
       <p:nvGrpSpPr>
@@ -633,7 +447,7 @@
         <p:nvSpPr>
           <p:cNvPr id="2" name="Slide Image Placeholder 1"/>
           <p:cNvSpPr>
-            <a:spLocks noGrp="1"/>
+            <a:spLocks noGrp="1" noRot="1" noChangeAspect="1"/>
           </p:cNvSpPr>
           <p:nvPr>
             <p:ph type="sldImg" idx="2"/>
@@ -648,7 +462,7 @@
             <a:spLocks noGrp="1"/>
           </p:cNvSpPr>
           <p:nvPr>
-            <p:ph type="body" idx="3" sz="quarter"/>
+            <p:ph type="body" sz="quarter" idx="3"/>
           </p:nvPr>
         </p:nvSpPr>
         <p:spPr/>
@@ -657,7 +471,24 @@
           <a:lstStyle/>
           <a:p>
             <a:r>
-              <a:t>模块四是工具链。设计原则是保守：宁可功能少一点，也不能把原始电路图改坏——只有一次提交机会。</a:t>
+              <a:rPr dirty="0"/>
+              <a:t>全 PVT </a:t>
+            </a:r>
+            <a:r>
+              <a:rPr dirty="0" err="1"/>
+              <a:t>这一页要强调口径：最坏值才是结论，不是典型值。GM</a:t>
+            </a:r>
+            <a:r>
+              <a:rPr dirty="0"/>
+              <a:t> </a:t>
+            </a:r>
+            <a:r>
+              <a:rPr dirty="0" err="1"/>
+              <a:t>裕度最小，只有</a:t>
+            </a:r>
+            <a:r>
+              <a:rPr dirty="0"/>
+              <a:t> 0.84 dB。</a:t>
             </a:r>
           </a:p>
         </p:txBody>
@@ -669,7 +500,7 @@
             <a:spLocks noGrp="1"/>
           </p:cNvSpPr>
           <p:nvPr>
-            <p:ph type="sldNum" idx="5" sz="quarter"/>
+            <p:ph type="sldNum" sz="quarter" idx="5"/>
           </p:nvPr>
         </p:nvSpPr>
         <p:spPr/>
@@ -683,7 +514,7 @@
 </file>
 
 <file path=ppt/notesSlides/notesSlide12.xml><?xml version="1.0" encoding="utf-8"?>
-<p:notes xmlns:a="http://schemas.openxmlformats.org/drawingml/2006/main" xmlns:p="http://schemas.openxmlformats.org/presentationml/2006/main" xmlns:r="http://schemas.openxmlformats.org/officeDocument/2006/relationships">
+<p:notes xmlns:a="http://schemas.openxmlformats.org/drawingml/2006/main" xmlns:r="http://schemas.openxmlformats.org/officeDocument/2006/relationships" xmlns:p="http://schemas.openxmlformats.org/presentationml/2006/main">
   <p:cSld>
     <p:spTree>
       <p:nvGrpSpPr>
@@ -703,7 +534,7 @@
         <p:nvSpPr>
           <p:cNvPr id="2" name="Slide Image Placeholder 1"/>
           <p:cNvSpPr>
-            <a:spLocks noGrp="1"/>
+            <a:spLocks noGrp="1" noRot="1" noChangeAspect="1"/>
           </p:cNvSpPr>
           <p:nvPr>
             <p:ph type="sldImg" idx="2"/>
@@ -718,7 +549,7 @@
             <a:spLocks noGrp="1"/>
           </p:cNvSpPr>
           <p:nvPr>
-            <p:ph type="body" idx="3" sz="quarter"/>
+            <p:ph type="body" sz="quarter" idx="3"/>
           </p:nvPr>
         </p:nvSpPr>
         <p:spPr/>
@@ -727,7 +558,7 @@
           <a:lstStyle/>
           <a:p>
             <a:r>
-              <a:t>全 PVT 这一页要强调口径：最坏值才是结论，不是典型值。GM 裕度最小，只有 0.84 dB。</a:t>
+              <a:t>左边是参数化后的图，尺寸都是变量名；右边是反标后的图，写的是具体数值。这一步让评委能直接打开图看到最终尺寸。</a:t>
             </a:r>
           </a:p>
         </p:txBody>
@@ -739,7 +570,7 @@
             <a:spLocks noGrp="1"/>
           </p:cNvSpPr>
           <p:nvPr>
-            <p:ph type="sldNum" idx="5" sz="quarter"/>
+            <p:ph type="sldNum" sz="quarter" idx="5"/>
           </p:nvPr>
         </p:nvSpPr>
         <p:spPr/>
@@ -753,7 +584,7 @@
 </file>
 
 <file path=ppt/notesSlides/notesSlide13.xml><?xml version="1.0" encoding="utf-8"?>
-<p:notes xmlns:a="http://schemas.openxmlformats.org/drawingml/2006/main" xmlns:p="http://schemas.openxmlformats.org/presentationml/2006/main" xmlns:r="http://schemas.openxmlformats.org/officeDocument/2006/relationships">
+<p:notes xmlns:a="http://schemas.openxmlformats.org/drawingml/2006/main" xmlns:r="http://schemas.openxmlformats.org/officeDocument/2006/relationships" xmlns:p="http://schemas.openxmlformats.org/presentationml/2006/main">
   <p:cSld>
     <p:spTree>
       <p:nvGrpSpPr>
@@ -773,7 +604,7 @@
         <p:nvSpPr>
           <p:cNvPr id="2" name="Slide Image Placeholder 1"/>
           <p:cNvSpPr>
-            <a:spLocks noGrp="1"/>
+            <a:spLocks noGrp="1" noRot="1" noChangeAspect="1"/>
           </p:cNvSpPr>
           <p:nvPr>
             <p:ph type="sldImg" idx="2"/>
@@ -788,7 +619,7 @@
             <a:spLocks noGrp="1"/>
           </p:cNvSpPr>
           <p:nvPr>
-            <p:ph type="body" idx="3" sz="quarter"/>
+            <p:ph type="body" sz="quarter" idx="3"/>
           </p:nvPr>
         </p:nvSpPr>
         <p:spPr/>
@@ -797,7 +628,7 @@
           <a:lstStyle/>
           <a:p>
             <a:r>
-              <a:t>左边是参数化后的图，尺寸都是变量名；右边是反标后的图，写的是具体数值。这一步让评委能直接打开图看到最终尺寸。</a:t>
+              <a:t>性能这页给三个数：6951 秒、204 次评估、556 MB。失败率高是预期内的，代价换覆盖。</a:t>
             </a:r>
           </a:p>
         </p:txBody>
@@ -809,7 +640,7 @@
             <a:spLocks noGrp="1"/>
           </p:cNvSpPr>
           <p:nvPr>
-            <p:ph type="sldNum" idx="5" sz="quarter"/>
+            <p:ph type="sldNum" sz="quarter" idx="5"/>
           </p:nvPr>
         </p:nvSpPr>
         <p:spPr/>
@@ -823,7 +654,7 @@
 </file>
 
 <file path=ppt/notesSlides/notesSlide14.xml><?xml version="1.0" encoding="utf-8"?>
-<p:notes xmlns:a="http://schemas.openxmlformats.org/drawingml/2006/main" xmlns:p="http://schemas.openxmlformats.org/presentationml/2006/main" xmlns:r="http://schemas.openxmlformats.org/officeDocument/2006/relationships">
+<p:notes xmlns:a="http://schemas.openxmlformats.org/drawingml/2006/main" xmlns:r="http://schemas.openxmlformats.org/officeDocument/2006/relationships" xmlns:p="http://schemas.openxmlformats.org/presentationml/2006/main">
   <p:cSld>
     <p:spTree>
       <p:nvGrpSpPr>
@@ -843,7 +674,7 @@
         <p:nvSpPr>
           <p:cNvPr id="2" name="Slide Image Placeholder 1"/>
           <p:cNvSpPr>
-            <a:spLocks noGrp="1"/>
+            <a:spLocks noGrp="1" noRot="1" noChangeAspect="1"/>
           </p:cNvSpPr>
           <p:nvPr>
             <p:ph type="sldImg" idx="2"/>
@@ -858,7 +689,7 @@
             <a:spLocks noGrp="1"/>
           </p:cNvSpPr>
           <p:nvPr>
-            <p:ph type="body" idx="3" sz="quarter"/>
+            <p:ph type="body" sz="quarter" idx="3"/>
           </p:nvPr>
         </p:nvSpPr>
         <p:spPr/>
@@ -867,7 +698,7 @@
           <a:lstStyle/>
           <a:p>
             <a:r>
-              <a:t>性能这页给三个数：6951 秒、204 次评估、556 MB。失败率高是预期内的，代价换覆盖。</a:t>
+              <a:t>这页讲我们和其他队伍可能的差别。核心是工程严谨性，不是算法花哨。</a:t>
             </a:r>
           </a:p>
         </p:txBody>
@@ -879,7 +710,7 @@
             <a:spLocks noGrp="1"/>
           </p:cNvSpPr>
           <p:nvPr>
-            <p:ph type="sldNum" idx="5" sz="quarter"/>
+            <p:ph type="sldNum" sz="quarter" idx="5"/>
           </p:nvPr>
         </p:nvSpPr>
         <p:spPr/>
@@ -893,7 +724,7 @@
 </file>
 
 <file path=ppt/notesSlides/notesSlide15.xml><?xml version="1.0" encoding="utf-8"?>
-<p:notes xmlns:a="http://schemas.openxmlformats.org/drawingml/2006/main" xmlns:p="http://schemas.openxmlformats.org/presentationml/2006/main" xmlns:r="http://schemas.openxmlformats.org/officeDocument/2006/relationships">
+<p:notes xmlns:a="http://schemas.openxmlformats.org/drawingml/2006/main" xmlns:r="http://schemas.openxmlformats.org/officeDocument/2006/relationships" xmlns:p="http://schemas.openxmlformats.org/presentationml/2006/main">
   <p:cSld>
     <p:spTree>
       <p:nvGrpSpPr>
@@ -913,7 +744,7 @@
         <p:nvSpPr>
           <p:cNvPr id="2" name="Slide Image Placeholder 1"/>
           <p:cNvSpPr>
-            <a:spLocks noGrp="1"/>
+            <a:spLocks noGrp="1" noRot="1" noChangeAspect="1"/>
           </p:cNvSpPr>
           <p:nvPr>
             <p:ph type="sldImg" idx="2"/>
@@ -928,7 +759,7 @@
             <a:spLocks noGrp="1"/>
           </p:cNvSpPr>
           <p:nvPr>
-            <p:ph type="body" idx="3" sz="quarter"/>
+            <p:ph type="body" sz="quarter" idx="3"/>
           </p:nvPr>
         </p:nvSpPr>
         <p:spPr/>
@@ -937,7 +768,7 @@
           <a:lstStyle/>
           <a:p>
             <a:r>
-              <a:t>这页讲我们和其他队伍可能的差别。核心是工程严谨性，不是算法花哨。</a:t>
+              <a:t>收尾：一句话总结成果，再给三条后续——都是我们清楚知道还没做完的部分。</a:t>
             </a:r>
           </a:p>
         </p:txBody>
@@ -949,7 +780,7 @@
             <a:spLocks noGrp="1"/>
           </p:cNvSpPr>
           <p:nvPr>
-            <p:ph type="sldNum" idx="5" sz="quarter"/>
+            <p:ph type="sldNum" sz="quarter" idx="5"/>
           </p:nvPr>
         </p:nvSpPr>
         <p:spPr/>
@@ -962,8 +793,8 @@
 </p:notes>
 </file>
 
-<file path=ppt/notesSlides/notesSlide16.xml><?xml version="1.0" encoding="utf-8"?>
-<p:notes xmlns:a="http://schemas.openxmlformats.org/drawingml/2006/main" xmlns:p="http://schemas.openxmlformats.org/presentationml/2006/main" xmlns:r="http://schemas.openxmlformats.org/officeDocument/2006/relationships">
+<file path=ppt/notesSlides/notesSlide2.xml><?xml version="1.0" encoding="utf-8"?>
+<p:notes xmlns:a="http://schemas.openxmlformats.org/drawingml/2006/main" xmlns:r="http://schemas.openxmlformats.org/officeDocument/2006/relationships" xmlns:p="http://schemas.openxmlformats.org/presentationml/2006/main">
   <p:cSld>
     <p:spTree>
       <p:nvGrpSpPr>
@@ -983,7 +814,7 @@
         <p:nvSpPr>
           <p:cNvPr id="2" name="Slide Image Placeholder 1"/>
           <p:cNvSpPr>
-            <a:spLocks noGrp="1"/>
+            <a:spLocks noGrp="1" noRot="1" noChangeAspect="1"/>
           </p:cNvSpPr>
           <p:nvPr>
             <p:ph type="sldImg" idx="2"/>
@@ -998,7 +829,7 @@
             <a:spLocks noGrp="1"/>
           </p:cNvSpPr>
           <p:nvPr>
-            <p:ph type="body" idx="3" sz="quarter"/>
+            <p:ph type="body" sz="quarter" idx="3"/>
           </p:nvPr>
         </p:nvSpPr>
         <p:spPr/>
@@ -1007,7 +838,7 @@
           <a:lstStyle/>
           <a:p>
             <a:r>
-              <a:t>收尾：一句话总结成果，再给三条后续——都是我们清楚知道还没做完的部分。</a:t>
+              <a:t>四个模块按数据流串起来。这里强调一句：我们所有数字口径都以平台的 score.py 为准，因为 PDF 的评分表和平台实际给分并不完全一致，比如时间分上限。</a:t>
             </a:r>
           </a:p>
         </p:txBody>
@@ -1019,7 +850,7 @@
             <a:spLocks noGrp="1"/>
           </p:cNvSpPr>
           <p:nvPr>
-            <p:ph type="sldNum" idx="5" sz="quarter"/>
+            <p:ph type="sldNum" sz="quarter" idx="5"/>
           </p:nvPr>
         </p:nvSpPr>
         <p:spPr/>
@@ -1032,8 +863,8 @@
 </p:notes>
 </file>
 
-<file path=ppt/notesSlides/notesSlide2.xml><?xml version="1.0" encoding="utf-8"?>
-<p:notes xmlns:a="http://schemas.openxmlformats.org/drawingml/2006/main" xmlns:p="http://schemas.openxmlformats.org/presentationml/2006/main" xmlns:r="http://schemas.openxmlformats.org/officeDocument/2006/relationships">
+<file path=ppt/notesSlides/notesSlide3.xml><?xml version="1.0" encoding="utf-8"?>
+<p:notes xmlns:a="http://schemas.openxmlformats.org/drawingml/2006/main" xmlns:r="http://schemas.openxmlformats.org/officeDocument/2006/relationships" xmlns:p="http://schemas.openxmlformats.org/presentationml/2006/main">
   <p:cSld>
     <p:spTree>
       <p:nvGrpSpPr>
@@ -1053,7 +884,7 @@
         <p:nvSpPr>
           <p:cNvPr id="2" name="Slide Image Placeholder 1"/>
           <p:cNvSpPr>
-            <a:spLocks noGrp="1"/>
+            <a:spLocks noGrp="1" noRot="1" noChangeAspect="1"/>
           </p:cNvSpPr>
           <p:nvPr>
             <p:ph type="sldImg" idx="2"/>
@@ -1068,7 +899,7 @@
             <a:spLocks noGrp="1"/>
           </p:cNvSpPr>
           <p:nvPr>
-            <p:ph type="body" idx="3" sz="quarter"/>
+            <p:ph type="body" sz="quarter" idx="3"/>
           </p:nvPr>
         </p:nvSpPr>
         <p:spPr/>
@@ -1077,7 +908,7 @@
           <a:lstStyle/>
           <a:p>
             <a:r>
-              <a:t>四个模块按数据流串起来。这里强调一句：我们所有数字口径都以平台的 score.py 为准，因为 PDF 的评分表和平台实际给分并不完全一致，比如时间分上限。</a:t>
+              <a:t>架构上刻意做了切割：本地能做的绝不放到服务器上做。服务器是按小时排队用的资源，把网表分析、Spec 解析放在本地，迭代速度差好几倍。</a:t>
             </a:r>
           </a:p>
         </p:txBody>
@@ -1089,7 +920,7 @@
             <a:spLocks noGrp="1"/>
           </p:cNvSpPr>
           <p:nvPr>
-            <p:ph type="sldNum" idx="5" sz="quarter"/>
+            <p:ph type="sldNum" sz="quarter" idx="5"/>
           </p:nvPr>
         </p:nvSpPr>
         <p:spPr/>
@@ -1102,8 +933,8 @@
 </p:notes>
 </file>
 
-<file path=ppt/notesSlides/notesSlide3.xml><?xml version="1.0" encoding="utf-8"?>
-<p:notes xmlns:a="http://schemas.openxmlformats.org/drawingml/2006/main" xmlns:p="http://schemas.openxmlformats.org/presentationml/2006/main" xmlns:r="http://schemas.openxmlformats.org/officeDocument/2006/relationships">
+<file path=ppt/notesSlides/notesSlide4.xml><?xml version="1.0" encoding="utf-8"?>
+<p:notes xmlns:a="http://schemas.openxmlformats.org/drawingml/2006/main" xmlns:r="http://schemas.openxmlformats.org/officeDocument/2006/relationships" xmlns:p="http://schemas.openxmlformats.org/presentationml/2006/main">
   <p:cSld>
     <p:spTree>
       <p:nvGrpSpPr>
@@ -1123,7 +954,7 @@
         <p:nvSpPr>
           <p:cNvPr id="2" name="Slide Image Placeholder 1"/>
           <p:cNvSpPr>
-            <a:spLocks noGrp="1"/>
+            <a:spLocks noGrp="1" noRot="1" noChangeAspect="1"/>
           </p:cNvSpPr>
           <p:nvPr>
             <p:ph type="sldImg" idx="2"/>
@@ -1138,7 +969,7 @@
             <a:spLocks noGrp="1"/>
           </p:cNvSpPr>
           <p:nvPr>
-            <p:ph type="body" idx="3" sz="quarter"/>
+            <p:ph type="body" sz="quarter" idx="3"/>
           </p:nvPr>
         </p:nvSpPr>
         <p:spPr/>
@@ -1147,7 +978,7 @@
           <a:lstStyle/>
           <a:p>
             <a:r>
-              <a:t>架构上刻意做了切割：本地能做的绝不放到服务器上做。服务器是按小时排队用的资源，把网表分析、Spec 解析放在本地，迭代速度差好几倍。</a:t>
+              <a:t>为什么强调「智能体」：赛题原文就写了智能体。我们的实现是工具注册表加决策循环。关键取舍是数值不进模型，模型只选工具。</a:t>
             </a:r>
           </a:p>
         </p:txBody>
@@ -1159,7 +990,7 @@
             <a:spLocks noGrp="1"/>
           </p:cNvSpPr>
           <p:nvPr>
-            <p:ph type="sldNum" idx="5" sz="quarter"/>
+            <p:ph type="sldNum" sz="quarter" idx="5"/>
           </p:nvPr>
         </p:nvSpPr>
         <p:spPr/>
@@ -1172,8 +1003,8 @@
 </p:notes>
 </file>
 
-<file path=ppt/notesSlides/notesSlide4.xml><?xml version="1.0" encoding="utf-8"?>
-<p:notes xmlns:a="http://schemas.openxmlformats.org/drawingml/2006/main" xmlns:p="http://schemas.openxmlformats.org/presentationml/2006/main" xmlns:r="http://schemas.openxmlformats.org/officeDocument/2006/relationships">
+<file path=ppt/notesSlides/notesSlide5.xml><?xml version="1.0" encoding="utf-8"?>
+<p:notes xmlns:a="http://schemas.openxmlformats.org/drawingml/2006/main" xmlns:r="http://schemas.openxmlformats.org/officeDocument/2006/relationships" xmlns:p="http://schemas.openxmlformats.org/presentationml/2006/main">
   <p:cSld>
     <p:spTree>
       <p:nvGrpSpPr>
@@ -1193,7 +1024,7 @@
         <p:nvSpPr>
           <p:cNvPr id="2" name="Slide Image Placeholder 1"/>
           <p:cNvSpPr>
-            <a:spLocks noGrp="1"/>
+            <a:spLocks noGrp="1" noRot="1" noChangeAspect="1"/>
           </p:cNvSpPr>
           <p:nvPr>
             <p:ph type="sldImg" idx="2"/>
@@ -1208,7 +1039,7 @@
             <a:spLocks noGrp="1"/>
           </p:cNvSpPr>
           <p:nvPr>
-            <p:ph type="body" idx="3" sz="quarter"/>
+            <p:ph type="body" sz="quarter" idx="3"/>
           </p:nvPr>
         </p:nvSpPr>
         <p:spPr/>
@@ -1217,7 +1048,7 @@
           <a:lstStyle/>
           <a:p>
             <a:r>
-              <a:t>为什么强调「智能体」：赛题原文就写了智能体。我们的实现是工具注册表加决策循环。关键取舍是数值不进模型，模型只选工具。</a:t>
+              <a:t>这页是模块一的得分点。赛题给的例句里其实没写 PM、GM、电流的具体数值，但评分表里这三项各占 10 分，不满足直接 0 分，所以我们把补齐底线写成了硬规则。</a:t>
             </a:r>
           </a:p>
         </p:txBody>
@@ -1229,7 +1060,7 @@
             <a:spLocks noGrp="1"/>
           </p:cNvSpPr>
           <p:nvPr>
-            <p:ph type="sldNum" idx="5" sz="quarter"/>
+            <p:ph type="sldNum" sz="quarter" idx="5"/>
           </p:nvPr>
         </p:nvSpPr>
         <p:spPr/>
@@ -1242,8 +1073,8 @@
 </p:notes>
 </file>
 
-<file path=ppt/notesSlides/notesSlide5.xml><?xml version="1.0" encoding="utf-8"?>
-<p:notes xmlns:a="http://schemas.openxmlformats.org/drawingml/2006/main" xmlns:p="http://schemas.openxmlformats.org/presentationml/2006/main" xmlns:r="http://schemas.openxmlformats.org/officeDocument/2006/relationships">
+<file path=ppt/notesSlides/notesSlide6.xml><?xml version="1.0" encoding="utf-8"?>
+<p:notes xmlns:a="http://schemas.openxmlformats.org/drawingml/2006/main" xmlns:r="http://schemas.openxmlformats.org/officeDocument/2006/relationships" xmlns:p="http://schemas.openxmlformats.org/presentationml/2006/main">
   <p:cSld>
     <p:spTree>
       <p:nvGrpSpPr>
@@ -1263,7 +1094,7 @@
         <p:nvSpPr>
           <p:cNvPr id="2" name="Slide Image Placeholder 1"/>
           <p:cNvSpPr>
-            <a:spLocks noGrp="1"/>
+            <a:spLocks noGrp="1" noRot="1" noChangeAspect="1"/>
           </p:cNvSpPr>
           <p:nvPr>
             <p:ph type="sldImg" idx="2"/>
@@ -1278,7 +1109,7 @@
             <a:spLocks noGrp="1"/>
           </p:cNvSpPr>
           <p:nvPr>
-            <p:ph type="body" idx="3" sz="quarter"/>
+            <p:ph type="body" sz="quarter" idx="3"/>
           </p:nvPr>
         </p:nvSpPr>
         <p:spPr/>
@@ -1287,7 +1118,7 @@
           <a:lstStyle/>
           <a:p>
             <a:r>
-              <a:t>这页是模块一的得分点。赛题给的例句里其实没写 PM、GM、电流的具体数值，但评分表里这三项各占 10 分，不满足直接 0 分，所以我们把补齐底线写成了硬规则。</a:t>
+              <a:t>这页讲方法论。最容易犯的错是拿尺寸或型号判断对称，我们的做法是把电路当成图，用颜色细化找候选，再用全局校验兜底。</a:t>
             </a:r>
           </a:p>
         </p:txBody>
@@ -1299,7 +1130,7 @@
             <a:spLocks noGrp="1"/>
           </p:cNvSpPr>
           <p:nvPr>
-            <p:ph type="sldNum" idx="5" sz="quarter"/>
+            <p:ph type="sldNum" sz="quarter" idx="5"/>
           </p:nvPr>
         </p:nvSpPr>
         <p:spPr/>
@@ -1312,8 +1143,8 @@
 </p:notes>
 </file>
 
-<file path=ppt/notesSlides/notesSlide6.xml><?xml version="1.0" encoding="utf-8"?>
-<p:notes xmlns:a="http://schemas.openxmlformats.org/drawingml/2006/main" xmlns:p="http://schemas.openxmlformats.org/presentationml/2006/main" xmlns:r="http://schemas.openxmlformats.org/officeDocument/2006/relationships">
+<file path=ppt/notesSlides/notesSlide7.xml><?xml version="1.0" encoding="utf-8"?>
+<p:notes xmlns:a="http://schemas.openxmlformats.org/drawingml/2006/main" xmlns:r="http://schemas.openxmlformats.org/officeDocument/2006/relationships" xmlns:p="http://schemas.openxmlformats.org/presentationml/2006/main">
   <p:cSld>
     <p:spTree>
       <p:nvGrpSpPr>
@@ -1333,7 +1164,7 @@
         <p:nvSpPr>
           <p:cNvPr id="2" name="Slide Image Placeholder 1"/>
           <p:cNvSpPr>
-            <a:spLocks noGrp="1"/>
+            <a:spLocks noGrp="1" noRot="1" noChangeAspect="1"/>
           </p:cNvSpPr>
           <p:nvPr>
             <p:ph type="sldImg" idx="2"/>
@@ -1348,7 +1179,7 @@
             <a:spLocks noGrp="1"/>
           </p:cNvSpPr>
           <p:nvPr>
-            <p:ph type="body" idx="3" sz="quarter"/>
+            <p:ph type="body" sz="quarter" idx="3"/>
           </p:nvPr>
         </p:nvSpPr>
         <p:spPr/>
@@ -1357,7 +1188,7 @@
           <a:lstStyle/>
           <a:p>
             <a:r>
-              <a:t>这页讲方法论。最容易犯的错是拿尺寸或型号判断对称，我们的做法是把电路当成图，用颜色细化找候选，再用全局校验兜底。</a:t>
+              <a:t>三个数字要分清：105 是回写面，47 是搜索空间，53 是约减后网表符号数。闭环校验是这页最有说服力的地方——证明我们只是改了变量名，没动连接。</a:t>
             </a:r>
           </a:p>
         </p:txBody>
@@ -1369,7 +1200,7 @@
             <a:spLocks noGrp="1"/>
           </p:cNvSpPr>
           <p:nvPr>
-            <p:ph type="sldNum" idx="5" sz="quarter"/>
+            <p:ph type="sldNum" sz="quarter" idx="5"/>
           </p:nvPr>
         </p:nvSpPr>
         <p:spPr/>
@@ -1382,8 +1213,8 @@
 </p:notes>
 </file>
 
-<file path=ppt/notesSlides/notesSlide7.xml><?xml version="1.0" encoding="utf-8"?>
-<p:notes xmlns:a="http://schemas.openxmlformats.org/drawingml/2006/main" xmlns:p="http://schemas.openxmlformats.org/presentationml/2006/main" xmlns:r="http://schemas.openxmlformats.org/officeDocument/2006/relationships">
+<file path=ppt/notesSlides/notesSlide8.xml><?xml version="1.0" encoding="utf-8"?>
+<p:notes xmlns:a="http://schemas.openxmlformats.org/drawingml/2006/main" xmlns:r="http://schemas.openxmlformats.org/officeDocument/2006/relationships" xmlns:p="http://schemas.openxmlformats.org/presentationml/2006/main">
   <p:cSld>
     <p:spTree>
       <p:nvGrpSpPr>
@@ -1403,7 +1234,7 @@
         <p:nvSpPr>
           <p:cNvPr id="2" name="Slide Image Placeholder 1"/>
           <p:cNvSpPr>
-            <a:spLocks noGrp="1"/>
+            <a:spLocks noGrp="1" noRot="1" noChangeAspect="1"/>
           </p:cNvSpPr>
           <p:nvPr>
             <p:ph type="sldImg" idx="2"/>
@@ -1418,7 +1249,7 @@
             <a:spLocks noGrp="1"/>
           </p:cNvSpPr>
           <p:nvPr>
-            <p:ph type="body" idx="3" sz="quarter"/>
+            <p:ph type="body" sz="quarter" idx="3"/>
           </p:nvPr>
         </p:nvSpPr>
         <p:spPr/>
@@ -1427,7 +1258,7 @@
           <a:lstStyle/>
           <a:p>
             <a:r>
-              <a:t>三个数字要分清：105 是回写面，47 是搜索空间，53 是约减后网表符号数。闭环校验是这页最有说服力的地方——证明我们只是改了变量名，没动连接。</a:t>
+              <a:t>建模这页的关键词是「对齐」。约束、目标、面积公式、变量边界，四样全部对齐评分器。</a:t>
             </a:r>
           </a:p>
         </p:txBody>
@@ -1439,7 +1270,7 @@
             <a:spLocks noGrp="1"/>
           </p:cNvSpPr>
           <p:nvPr>
-            <p:ph type="sldNum" idx="5" sz="quarter"/>
+            <p:ph type="sldNum" sz="quarter" idx="5"/>
           </p:nvPr>
         </p:nvSpPr>
         <p:spPr/>
@@ -1452,8 +1283,8 @@
 </p:notes>
 </file>
 
-<file path=ppt/notesSlides/notesSlide8.xml><?xml version="1.0" encoding="utf-8"?>
-<p:notes xmlns:a="http://schemas.openxmlformats.org/drawingml/2006/main" xmlns:p="http://schemas.openxmlformats.org/presentationml/2006/main" xmlns:r="http://schemas.openxmlformats.org/officeDocument/2006/relationships">
+<file path=ppt/notesSlides/notesSlide9.xml><?xml version="1.0" encoding="utf-8"?>
+<p:notes xmlns:a="http://schemas.openxmlformats.org/drawingml/2006/main" xmlns:r="http://schemas.openxmlformats.org/officeDocument/2006/relationships" xmlns:p="http://schemas.openxmlformats.org/presentationml/2006/main">
   <p:cSld>
     <p:spTree>
       <p:nvGrpSpPr>
@@ -1473,7 +1304,7 @@
         <p:nvSpPr>
           <p:cNvPr id="2" name="Slide Image Placeholder 1"/>
           <p:cNvSpPr>
-            <a:spLocks noGrp="1"/>
+            <a:spLocks noGrp="1" noRot="1" noChangeAspect="1"/>
           </p:cNvSpPr>
           <p:nvPr>
             <p:ph type="sldImg" idx="2"/>
@@ -1488,7 +1319,7 @@
             <a:spLocks noGrp="1"/>
           </p:cNvSpPr>
           <p:nvPr>
-            <p:ph type="body" idx="3" sz="quarter"/>
+            <p:ph type="body" sz="quarter" idx="3"/>
           </p:nvPr>
         </p:nvSpPr>
         <p:spPr/>
@@ -1497,7 +1328,7 @@
           <a:lstStyle/>
           <a:p>
             <a:r>
-              <a:t>建模这页的关键词是「对齐」。约束、目标、面积公式、变量边界，四样全部对齐评分器。</a:t>
+              <a:t>这页两个重点：一是算法配置为什么这么选，二是那个把所有人打成 0 分的环境问题。后者才是这次最有价值的发现。</a:t>
             </a:r>
           </a:p>
         </p:txBody>
@@ -1509,77 +1340,7 @@
             <a:spLocks noGrp="1"/>
           </p:cNvSpPr>
           <p:nvPr>
-            <p:ph type="sldNum" idx="5" sz="quarter"/>
-          </p:nvPr>
-        </p:nvSpPr>
-        <p:spPr/>
-      </p:sp>
-    </p:spTree>
-  </p:cSld>
-  <p:clrMapOvr>
-    <a:masterClrMapping/>
-  </p:clrMapOvr>
-</p:notes>
-</file>
-
-<file path=ppt/notesSlides/notesSlide9.xml><?xml version="1.0" encoding="utf-8"?>
-<p:notes xmlns:a="http://schemas.openxmlformats.org/drawingml/2006/main" xmlns:p="http://schemas.openxmlformats.org/presentationml/2006/main" xmlns:r="http://schemas.openxmlformats.org/officeDocument/2006/relationships">
-  <p:cSld>
-    <p:spTree>
-      <p:nvGrpSpPr>
-        <p:cNvPr id="1" name=""/>
-        <p:cNvGrpSpPr/>
-        <p:nvPr/>
-      </p:nvGrpSpPr>
-      <p:grpSpPr>
-        <a:xfrm>
-          <a:off x="0" y="0"/>
-          <a:ext cx="0" cy="0"/>
-          <a:chOff x="0" y="0"/>
-          <a:chExt cx="0" cy="0"/>
-        </a:xfrm>
-      </p:grpSpPr>
-      <p:sp>
-        <p:nvSpPr>
-          <p:cNvPr id="2" name="Slide Image Placeholder 1"/>
-          <p:cNvSpPr>
-            <a:spLocks noGrp="1"/>
-          </p:cNvSpPr>
-          <p:nvPr>
-            <p:ph type="sldImg" idx="2"/>
-          </p:nvPr>
-        </p:nvSpPr>
-        <p:spPr/>
-      </p:sp>
-      <p:sp>
-        <p:nvSpPr>
-          <p:cNvPr id="3" name="Notes Placeholder 2"/>
-          <p:cNvSpPr>
-            <a:spLocks noGrp="1"/>
-          </p:cNvSpPr>
-          <p:nvPr>
-            <p:ph type="body" idx="3" sz="quarter"/>
-          </p:nvPr>
-        </p:nvSpPr>
-        <p:spPr/>
-        <p:txBody>
-          <a:bodyPr/>
-          <a:lstStyle/>
-          <a:p>
-            <a:r>
-              <a:t>这页两个重点：一是算法配置为什么这么选，二是那个把所有人打成 0 分的环境问题。后者才是这次最有价值的发现。</a:t>
-            </a:r>
-          </a:p>
-        </p:txBody>
-      </p:sp>
-      <p:sp>
-        <p:nvSpPr>
-          <p:cNvPr id="4" name="Slide Number Placeholder 3"/>
-          <p:cNvSpPr>
-            <a:spLocks noGrp="1"/>
-          </p:cNvSpPr>
-          <p:nvPr>
-            <p:ph type="sldNum" idx="5" sz="quarter"/>
+            <p:ph type="sldNum" sz="quarter" idx="5"/>
           </p:nvPr>
         </p:nvSpPr>
         <p:spPr/>
@@ -1630,10 +1391,9 @@
           <a:lstStyle/>
           <a:p>
             <a:r>
-              <a:rPr lang="en-US" smtClean="0"/>
+              <a:rPr lang="en-US"/>
               <a:t>Click to edit Master title style</a:t>
             </a:r>
-            <a:endParaRPr lang="en-US"/>
           </a:p>
         </p:txBody>
       </p:sp>
@@ -1749,10 +1509,9 @@
           </a:lstStyle>
           <a:p>
             <a:r>
-              <a:rPr lang="en-US" smtClean="0"/>
+              <a:rPr lang="en-US"/>
               <a:t>Click to edit Master subtitle style</a:t>
             </a:r>
-            <a:endParaRPr lang="en-US"/>
           </a:p>
         </p:txBody>
       </p:sp>
@@ -1773,7 +1532,7 @@
           <a:p>
             <a:fld id="{5BCAD085-E8A6-8845-BD4E-CB4CCA059FC4}" type="datetimeFigureOut">
               <a:rPr lang="en-US" smtClean="0"/>
-              <a:t>1/27/13</a:t>
+              <a:t>10/19/2026</a:t>
             </a:fld>
             <a:endParaRPr lang="en-US"/>
           </a:p>
@@ -1867,10 +1626,9 @@
           <a:lstStyle/>
           <a:p>
             <a:r>
-              <a:rPr lang="en-US" smtClean="0"/>
+              <a:rPr lang="en-US"/>
               <a:t>Click to edit Master title style</a:t>
             </a:r>
-            <a:endParaRPr lang="en-US"/>
           </a:p>
         </p:txBody>
       </p:sp>
@@ -1891,38 +1649,37 @@
           <a:p>
             <a:pPr lvl="0"/>
             <a:r>
-              <a:rPr lang="en-US" smtClean="0"/>
+              <a:rPr lang="en-US"/>
               <a:t>Click to edit Master text styles</a:t>
             </a:r>
           </a:p>
           <a:p>
             <a:pPr lvl="1"/>
             <a:r>
-              <a:rPr lang="en-US" smtClean="0"/>
+              <a:rPr lang="en-US"/>
               <a:t>Second level</a:t>
             </a:r>
           </a:p>
           <a:p>
             <a:pPr lvl="2"/>
             <a:r>
-              <a:rPr lang="en-US" smtClean="0"/>
+              <a:rPr lang="en-US"/>
               <a:t>Third level</a:t>
             </a:r>
           </a:p>
           <a:p>
             <a:pPr lvl="3"/>
             <a:r>
-              <a:rPr lang="en-US" smtClean="0"/>
+              <a:rPr lang="en-US"/>
               <a:t>Fourth level</a:t>
             </a:r>
           </a:p>
           <a:p>
             <a:pPr lvl="4"/>
             <a:r>
-              <a:rPr lang="en-US" smtClean="0"/>
+              <a:rPr lang="en-US"/>
               <a:t>Fifth level</a:t>
             </a:r>
-            <a:endParaRPr lang="en-US"/>
           </a:p>
         </p:txBody>
       </p:sp>
@@ -1943,7 +1700,7 @@
           <a:p>
             <a:fld id="{5BCAD085-E8A6-8845-BD4E-CB4CCA059FC4}" type="datetimeFigureOut">
               <a:rPr lang="en-US" smtClean="0"/>
-              <a:t>1/27/13</a:t>
+              <a:t>10/19/2026</a:t>
             </a:fld>
             <a:endParaRPr lang="en-US"/>
           </a:p>
@@ -2042,10 +1799,9 @@
           <a:lstStyle/>
           <a:p>
             <a:r>
-              <a:rPr lang="en-US" smtClean="0"/>
+              <a:rPr lang="en-US"/>
               <a:t>Click to edit Master title style</a:t>
             </a:r>
-            <a:endParaRPr lang="en-US"/>
           </a:p>
         </p:txBody>
       </p:sp>
@@ -2071,38 +1827,37 @@
           <a:p>
             <a:pPr lvl="0"/>
             <a:r>
-              <a:rPr lang="en-US" smtClean="0"/>
+              <a:rPr lang="en-US"/>
               <a:t>Click to edit Master text styles</a:t>
             </a:r>
           </a:p>
           <a:p>
             <a:pPr lvl="1"/>
             <a:r>
-              <a:rPr lang="en-US" smtClean="0"/>
+              <a:rPr lang="en-US"/>
               <a:t>Second level</a:t>
             </a:r>
           </a:p>
           <a:p>
             <a:pPr lvl="2"/>
             <a:r>
-              <a:rPr lang="en-US" smtClean="0"/>
+              <a:rPr lang="en-US"/>
               <a:t>Third level</a:t>
             </a:r>
           </a:p>
           <a:p>
             <a:pPr lvl="3"/>
             <a:r>
-              <a:rPr lang="en-US" smtClean="0"/>
+              <a:rPr lang="en-US"/>
               <a:t>Fourth level</a:t>
             </a:r>
           </a:p>
           <a:p>
             <a:pPr lvl="4"/>
             <a:r>
-              <a:rPr lang="en-US" smtClean="0"/>
+              <a:rPr lang="en-US"/>
               <a:t>Fifth level</a:t>
             </a:r>
-            <a:endParaRPr lang="en-US"/>
           </a:p>
         </p:txBody>
       </p:sp>
@@ -2123,7 +1878,7 @@
           <a:p>
             <a:fld id="{5BCAD085-E8A6-8845-BD4E-CB4CCA059FC4}" type="datetimeFigureOut">
               <a:rPr lang="en-US" smtClean="0"/>
-              <a:t>1/27/13</a:t>
+              <a:t>10/19/2026</a:t>
             </a:fld>
             <a:endParaRPr lang="en-US"/>
           </a:p>
@@ -2217,10 +1972,9 @@
           <a:lstStyle/>
           <a:p>
             <a:r>
-              <a:rPr lang="en-US" smtClean="0"/>
+              <a:rPr lang="en-US"/>
               <a:t>Click to edit Master title style</a:t>
             </a:r>
-            <a:endParaRPr lang="en-US"/>
           </a:p>
         </p:txBody>
       </p:sp>
@@ -2241,38 +1995,37 @@
           <a:p>
             <a:pPr lvl="0"/>
             <a:r>
-              <a:rPr lang="en-US" smtClean="0"/>
+              <a:rPr lang="en-US"/>
               <a:t>Click to edit Master text styles</a:t>
             </a:r>
           </a:p>
           <a:p>
             <a:pPr lvl="1"/>
             <a:r>
-              <a:rPr lang="en-US" smtClean="0"/>
+              <a:rPr lang="en-US"/>
               <a:t>Second level</a:t>
             </a:r>
           </a:p>
           <a:p>
             <a:pPr lvl="2"/>
             <a:r>
-              <a:rPr lang="en-US" smtClean="0"/>
+              <a:rPr lang="en-US"/>
               <a:t>Third level</a:t>
             </a:r>
           </a:p>
           <a:p>
             <a:pPr lvl="3"/>
             <a:r>
-              <a:rPr lang="en-US" smtClean="0"/>
+              <a:rPr lang="en-US"/>
               <a:t>Fourth level</a:t>
             </a:r>
           </a:p>
           <a:p>
             <a:pPr lvl="4"/>
             <a:r>
-              <a:rPr lang="en-US" smtClean="0"/>
+              <a:rPr lang="en-US"/>
               <a:t>Fifth level</a:t>
             </a:r>
-            <a:endParaRPr lang="en-US"/>
           </a:p>
         </p:txBody>
       </p:sp>
@@ -2293,7 +2046,7 @@
           <a:p>
             <a:fld id="{5BCAD085-E8A6-8845-BD4E-CB4CCA059FC4}" type="datetimeFigureOut">
               <a:rPr lang="en-US" smtClean="0"/>
-              <a:t>1/27/13</a:t>
+              <a:t>10/19/2026</a:t>
             </a:fld>
             <a:endParaRPr lang="en-US"/>
           </a:p>
@@ -2396,10 +2149,9 @@
           </a:lstStyle>
           <a:p>
             <a:r>
-              <a:rPr lang="en-US" smtClean="0"/>
+              <a:rPr lang="en-US"/>
               <a:t>Click to edit Master title style</a:t>
             </a:r>
-            <a:endParaRPr lang="en-US"/>
           </a:p>
         </p:txBody>
       </p:sp>
@@ -2516,7 +2268,7 @@
           <a:p>
             <a:pPr lvl="0"/>
             <a:r>
-              <a:rPr lang="en-US" smtClean="0"/>
+              <a:rPr lang="en-US"/>
               <a:t>Click to edit Master text styles</a:t>
             </a:r>
           </a:p>
@@ -2539,7 +2291,7 @@
           <a:p>
             <a:fld id="{5BCAD085-E8A6-8845-BD4E-CB4CCA059FC4}" type="datetimeFigureOut">
               <a:rPr lang="en-US" smtClean="0"/>
-              <a:t>1/27/13</a:t>
+              <a:t>10/19/2026</a:t>
             </a:fld>
             <a:endParaRPr lang="en-US"/>
           </a:p>
@@ -2633,10 +2385,9 @@
           <a:lstStyle/>
           <a:p>
             <a:r>
-              <a:rPr lang="en-US" smtClean="0"/>
+              <a:rPr lang="en-US"/>
               <a:t>Click to edit Master title style</a:t>
             </a:r>
-            <a:endParaRPr lang="en-US"/>
           </a:p>
         </p:txBody>
       </p:sp>
@@ -2690,38 +2441,37 @@
           <a:p>
             <a:pPr lvl="0"/>
             <a:r>
-              <a:rPr lang="en-US" smtClean="0"/>
+              <a:rPr lang="en-US"/>
               <a:t>Click to edit Master text styles</a:t>
             </a:r>
           </a:p>
           <a:p>
             <a:pPr lvl="1"/>
             <a:r>
-              <a:rPr lang="en-US" smtClean="0"/>
+              <a:rPr lang="en-US"/>
               <a:t>Second level</a:t>
             </a:r>
           </a:p>
           <a:p>
             <a:pPr lvl="2"/>
             <a:r>
-              <a:rPr lang="en-US" smtClean="0"/>
+              <a:rPr lang="en-US"/>
               <a:t>Third level</a:t>
             </a:r>
           </a:p>
           <a:p>
             <a:pPr lvl="3"/>
             <a:r>
-              <a:rPr lang="en-US" smtClean="0"/>
+              <a:rPr lang="en-US"/>
               <a:t>Fourth level</a:t>
             </a:r>
           </a:p>
           <a:p>
             <a:pPr lvl="4"/>
             <a:r>
-              <a:rPr lang="en-US" smtClean="0"/>
+              <a:rPr lang="en-US"/>
               <a:t>Fifth level</a:t>
             </a:r>
-            <a:endParaRPr lang="en-US"/>
           </a:p>
         </p:txBody>
       </p:sp>
@@ -2775,38 +2525,37 @@
           <a:p>
             <a:pPr lvl="0"/>
             <a:r>
-              <a:rPr lang="en-US" smtClean="0"/>
+              <a:rPr lang="en-US"/>
               <a:t>Click to edit Master text styles</a:t>
             </a:r>
           </a:p>
           <a:p>
             <a:pPr lvl="1"/>
             <a:r>
-              <a:rPr lang="en-US" smtClean="0"/>
+              <a:rPr lang="en-US"/>
               <a:t>Second level</a:t>
             </a:r>
           </a:p>
           <a:p>
             <a:pPr lvl="2"/>
             <a:r>
-              <a:rPr lang="en-US" smtClean="0"/>
+              <a:rPr lang="en-US"/>
               <a:t>Third level</a:t>
             </a:r>
           </a:p>
           <a:p>
             <a:pPr lvl="3"/>
             <a:r>
-              <a:rPr lang="en-US" smtClean="0"/>
+              <a:rPr lang="en-US"/>
               <a:t>Fourth level</a:t>
             </a:r>
           </a:p>
           <a:p>
             <a:pPr lvl="4"/>
             <a:r>
-              <a:rPr lang="en-US" smtClean="0"/>
+              <a:rPr lang="en-US"/>
               <a:t>Fifth level</a:t>
             </a:r>
-            <a:endParaRPr lang="en-US"/>
           </a:p>
         </p:txBody>
       </p:sp>
@@ -2827,7 +2576,7 @@
           <a:p>
             <a:fld id="{5BCAD085-E8A6-8845-BD4E-CB4CCA059FC4}" type="datetimeFigureOut">
               <a:rPr lang="en-US" smtClean="0"/>
-              <a:t>1/27/13</a:t>
+              <a:t>10/19/2026</a:t>
             </a:fld>
             <a:endParaRPr lang="en-US"/>
           </a:p>
@@ -2925,10 +2674,9 @@
           </a:lstStyle>
           <a:p>
             <a:r>
-              <a:rPr lang="en-US" smtClean="0"/>
+              <a:rPr lang="en-US"/>
               <a:t>Click to edit Master title style</a:t>
             </a:r>
-            <a:endParaRPr lang="en-US"/>
           </a:p>
         </p:txBody>
       </p:sp>
@@ -2991,7 +2739,7 @@
           <a:p>
             <a:pPr lvl="0"/>
             <a:r>
-              <a:rPr lang="en-US" smtClean="0"/>
+              <a:rPr lang="en-US"/>
               <a:t>Click to edit Master text styles</a:t>
             </a:r>
           </a:p>
@@ -3047,38 +2795,37 @@
           <a:p>
             <a:pPr lvl="0"/>
             <a:r>
-              <a:rPr lang="en-US" smtClean="0"/>
+              <a:rPr lang="en-US"/>
               <a:t>Click to edit Master text styles</a:t>
             </a:r>
           </a:p>
           <a:p>
             <a:pPr lvl="1"/>
             <a:r>
-              <a:rPr lang="en-US" smtClean="0"/>
+              <a:rPr lang="en-US"/>
               <a:t>Second level</a:t>
             </a:r>
           </a:p>
           <a:p>
             <a:pPr lvl="2"/>
             <a:r>
-              <a:rPr lang="en-US" smtClean="0"/>
+              <a:rPr lang="en-US"/>
               <a:t>Third level</a:t>
             </a:r>
           </a:p>
           <a:p>
             <a:pPr lvl="3"/>
             <a:r>
-              <a:rPr lang="en-US" smtClean="0"/>
+              <a:rPr lang="en-US"/>
               <a:t>Fourth level</a:t>
             </a:r>
           </a:p>
           <a:p>
             <a:pPr lvl="4"/>
             <a:r>
-              <a:rPr lang="en-US" smtClean="0"/>
+              <a:rPr lang="en-US"/>
               <a:t>Fifth level</a:t>
             </a:r>
-            <a:endParaRPr lang="en-US"/>
           </a:p>
         </p:txBody>
       </p:sp>
@@ -3141,7 +2888,7 @@
           <a:p>
             <a:pPr lvl="0"/>
             <a:r>
-              <a:rPr lang="en-US" smtClean="0"/>
+              <a:rPr lang="en-US"/>
               <a:t>Click to edit Master text styles</a:t>
             </a:r>
           </a:p>
@@ -3197,38 +2944,37 @@
           <a:p>
             <a:pPr lvl="0"/>
             <a:r>
-              <a:rPr lang="en-US" smtClean="0"/>
+              <a:rPr lang="en-US"/>
               <a:t>Click to edit Master text styles</a:t>
             </a:r>
           </a:p>
           <a:p>
             <a:pPr lvl="1"/>
             <a:r>
-              <a:rPr lang="en-US" smtClean="0"/>
+              <a:rPr lang="en-US"/>
               <a:t>Second level</a:t>
             </a:r>
           </a:p>
           <a:p>
             <a:pPr lvl="2"/>
             <a:r>
-              <a:rPr lang="en-US" smtClean="0"/>
+              <a:rPr lang="en-US"/>
               <a:t>Third level</a:t>
             </a:r>
           </a:p>
           <a:p>
             <a:pPr lvl="3"/>
             <a:r>
-              <a:rPr lang="en-US" smtClean="0"/>
+              <a:rPr lang="en-US"/>
               <a:t>Fourth level</a:t>
             </a:r>
           </a:p>
           <a:p>
             <a:pPr lvl="4"/>
             <a:r>
-              <a:rPr lang="en-US" smtClean="0"/>
+              <a:rPr lang="en-US"/>
               <a:t>Fifth level</a:t>
             </a:r>
-            <a:endParaRPr lang="en-US"/>
           </a:p>
         </p:txBody>
       </p:sp>
@@ -3249,7 +2995,7 @@
           <a:p>
             <a:fld id="{5BCAD085-E8A6-8845-BD4E-CB4CCA059FC4}" type="datetimeFigureOut">
               <a:rPr lang="en-US" smtClean="0"/>
-              <a:t>1/27/13</a:t>
+              <a:t>10/19/2026</a:t>
             </a:fld>
             <a:endParaRPr lang="en-US"/>
           </a:p>
@@ -3343,10 +3089,9 @@
           <a:lstStyle/>
           <a:p>
             <a:r>
-              <a:rPr lang="en-US" smtClean="0"/>
+              <a:rPr lang="en-US"/>
               <a:t>Click to edit Master title style</a:t>
             </a:r>
-            <a:endParaRPr lang="en-US"/>
           </a:p>
         </p:txBody>
       </p:sp>
@@ -3367,7 +3112,7 @@
           <a:p>
             <a:fld id="{5BCAD085-E8A6-8845-BD4E-CB4CCA059FC4}" type="datetimeFigureOut">
               <a:rPr lang="en-US" smtClean="0"/>
-              <a:t>1/27/13</a:t>
+              <a:t>10/19/2026</a:t>
             </a:fld>
             <a:endParaRPr lang="en-US"/>
           </a:p>
@@ -3462,7 +3207,7 @@
           <a:p>
             <a:fld id="{5BCAD085-E8A6-8845-BD4E-CB4CCA059FC4}" type="datetimeFigureOut">
               <a:rPr lang="en-US" smtClean="0"/>
-              <a:t>1/27/13</a:t>
+              <a:t>10/19/2026</a:t>
             </a:fld>
             <a:endParaRPr lang="en-US"/>
           </a:p>
@@ -3565,10 +3310,9 @@
           </a:lstStyle>
           <a:p>
             <a:r>
-              <a:rPr lang="en-US" smtClean="0"/>
+              <a:rPr lang="en-US"/>
               <a:t>Click to edit Master title style</a:t>
             </a:r>
-            <a:endParaRPr lang="en-US"/>
           </a:p>
         </p:txBody>
       </p:sp>
@@ -3622,38 +3366,37 @@
           <a:p>
             <a:pPr lvl="0"/>
             <a:r>
-              <a:rPr lang="en-US" smtClean="0"/>
+              <a:rPr lang="en-US"/>
               <a:t>Click to edit Master text styles</a:t>
             </a:r>
           </a:p>
           <a:p>
             <a:pPr lvl="1"/>
             <a:r>
-              <a:rPr lang="en-US" smtClean="0"/>
+              <a:rPr lang="en-US"/>
               <a:t>Second level</a:t>
             </a:r>
           </a:p>
           <a:p>
             <a:pPr lvl="2"/>
             <a:r>
-              <a:rPr lang="en-US" smtClean="0"/>
+              <a:rPr lang="en-US"/>
               <a:t>Third level</a:t>
             </a:r>
           </a:p>
           <a:p>
             <a:pPr lvl="3"/>
             <a:r>
-              <a:rPr lang="en-US" smtClean="0"/>
+              <a:rPr lang="en-US"/>
               <a:t>Fourth level</a:t>
             </a:r>
           </a:p>
           <a:p>
             <a:pPr lvl="4"/>
             <a:r>
-              <a:rPr lang="en-US" smtClean="0"/>
+              <a:rPr lang="en-US"/>
               <a:t>Fifth level</a:t>
             </a:r>
-            <a:endParaRPr lang="en-US"/>
           </a:p>
         </p:txBody>
       </p:sp>
@@ -3716,7 +3459,7 @@
           <a:p>
             <a:pPr lvl="0"/>
             <a:r>
-              <a:rPr lang="en-US" smtClean="0"/>
+              <a:rPr lang="en-US"/>
               <a:t>Click to edit Master text styles</a:t>
             </a:r>
           </a:p>
@@ -3739,7 +3482,7 @@
           <a:p>
             <a:fld id="{5BCAD085-E8A6-8845-BD4E-CB4CCA059FC4}" type="datetimeFigureOut">
               <a:rPr lang="en-US" smtClean="0"/>
-              <a:t>1/27/13</a:t>
+              <a:t>10/19/2026</a:t>
             </a:fld>
             <a:endParaRPr lang="en-US"/>
           </a:p>
@@ -3842,10 +3585,9 @@
           </a:lstStyle>
           <a:p>
             <a:r>
-              <a:rPr lang="en-US" smtClean="0"/>
+              <a:rPr lang="en-US"/>
               <a:t>Click to edit Master title style</a:t>
             </a:r>
-            <a:endParaRPr lang="en-US"/>
           </a:p>
         </p:txBody>
       </p:sp>
@@ -3969,7 +3711,7 @@
           <a:p>
             <a:pPr lvl="0"/>
             <a:r>
-              <a:rPr lang="en-US" smtClean="0"/>
+              <a:rPr lang="en-US"/>
               <a:t>Click to edit Master text styles</a:t>
             </a:r>
           </a:p>
@@ -3992,7 +3734,7 @@
           <a:p>
             <a:fld id="{5BCAD085-E8A6-8845-BD4E-CB4CCA059FC4}" type="datetimeFigureOut">
               <a:rPr lang="en-US" smtClean="0"/>
-              <a:t>1/27/13</a:t>
+              <a:t>10/19/2026</a:t>
             </a:fld>
             <a:endParaRPr lang="en-US"/>
           </a:p>
@@ -4101,10 +3843,9 @@
           <a:lstStyle/>
           <a:p>
             <a:r>
-              <a:rPr lang="en-US" smtClean="0"/>
+              <a:rPr lang="en-US"/>
               <a:t>Click to edit Master title style</a:t>
             </a:r>
-            <a:endParaRPr lang="en-US"/>
           </a:p>
         </p:txBody>
       </p:sp>
@@ -4135,38 +3876,37 @@
           <a:p>
             <a:pPr lvl="0"/>
             <a:r>
-              <a:rPr lang="en-US" smtClean="0"/>
+              <a:rPr lang="en-US"/>
               <a:t>Click to edit Master text styles</a:t>
             </a:r>
           </a:p>
           <a:p>
             <a:pPr lvl="1"/>
             <a:r>
-              <a:rPr lang="en-US" smtClean="0"/>
+              <a:rPr lang="en-US"/>
               <a:t>Second level</a:t>
             </a:r>
           </a:p>
           <a:p>
             <a:pPr lvl="2"/>
             <a:r>
-              <a:rPr lang="en-US" smtClean="0"/>
+              <a:rPr lang="en-US"/>
               <a:t>Third level</a:t>
             </a:r>
           </a:p>
           <a:p>
             <a:pPr lvl="3"/>
             <a:r>
-              <a:rPr lang="en-US" smtClean="0"/>
+              <a:rPr lang="en-US"/>
               <a:t>Fourth level</a:t>
             </a:r>
           </a:p>
           <a:p>
             <a:pPr lvl="4"/>
             <a:r>
-              <a:rPr lang="en-US" smtClean="0"/>
+              <a:rPr lang="en-US"/>
               <a:t>Fifth level</a:t>
             </a:r>
-            <a:endParaRPr lang="en-US"/>
           </a:p>
         </p:txBody>
       </p:sp>
@@ -4205,7 +3945,7 @@
           <a:p>
             <a:fld id="{5BCAD085-E8A6-8845-BD4E-CB4CCA059FC4}" type="datetimeFigureOut">
               <a:rPr lang="en-US" smtClean="0"/>
-              <a:t>1/27/13</a:t>
+              <a:t>10/19/2026</a:t>
             </a:fld>
             <a:endParaRPr lang="en-US"/>
           </a:p>
@@ -4564,7 +4304,7 @@
 </file>
 
 <file path=ppt/slides/slide1.xml><?xml version="1.0" encoding="utf-8"?>
-<p:sld xmlns:a="http://schemas.openxmlformats.org/drawingml/2006/main" xmlns:p="http://schemas.openxmlformats.org/presentationml/2006/main" xmlns:r="http://schemas.openxmlformats.org/officeDocument/2006/relationships">
+<p:sld xmlns:a="http://schemas.openxmlformats.org/drawingml/2006/main" xmlns:r="http://schemas.openxmlformats.org/officeDocument/2006/relationships" xmlns:p="http://schemas.openxmlformats.org/presentationml/2006/main">
   <p:cSld>
     <p:spTree>
       <p:nvGrpSpPr>
@@ -4572,7 +4312,14 @@
         <p:cNvGrpSpPr/>
         <p:nvPr/>
       </p:nvGrpSpPr>
-      <p:grpSpPr/>
+      <p:grpSpPr>
+        <a:xfrm>
+          <a:off x="0" y="0"/>
+          <a:ext cx="0" cy="0"/>
+          <a:chOff x="0" y="0"/>
+          <a:chExt cx="0" cy="0"/>
+        </a:xfrm>
+      </p:grpSpPr>
       <p:sp>
         <p:nvSpPr>
           <p:cNvPr id="2" name="Rectangle 1"/>
@@ -4614,6 +4361,7 @@
           <a:lstStyle/>
           <a:p>
             <a:pPr algn="ctr"/>
+            <a:endParaRPr/>
           </a:p>
         </p:txBody>
       </p:sp>
@@ -4762,6 +4510,7 @@
           <a:lstStyle/>
           <a:p>
             <a:pPr algn="ctr"/>
+            <a:endParaRPr/>
           </a:p>
         </p:txBody>
       </p:sp>
@@ -4774,7 +4523,7 @@
         <p:spPr>
           <a:xfrm>
             <a:off x="822960" y="4526280"/>
-            <a:ext cx="10789920" cy="1097280"/>
+            <a:ext cx="10789920" cy="584775"/>
           </a:xfrm>
           <a:prstGeom prst="rect">
             <a:avLst/>
@@ -4788,26 +4537,113 @@
           <a:lstStyle/>
           <a:p>
             <a:r>
-              <a:rPr sz="1600" b="0">
+              <a:rPr sz="1600" b="0" dirty="0" err="1">
                 <a:solidFill>
                   <a:srgbClr val="FFFFFF"/>
                 </a:solidFill>
                 <a:latin typeface="微软雅黑"/>
                 <a:ea typeface="微软雅黑"/>
               </a:rPr>
-              <a:t>平台自动分 84.9584 / 100（初始解 78.27） ｜ 四项硬约束全 PVT 通过</a:t>
-            </a:r>
-          </a:p>
-          <a:p>
-            <a:r>
-              <a:rPr sz="1600" b="0">
+              <a:t>四项硬约束全</a:t>
+            </a:r>
+            <a:r>
+              <a:rPr sz="1600" b="0" dirty="0">
                 <a:solidFill>
                   <a:srgbClr val="FFFFFF"/>
                 </a:solidFill>
                 <a:latin typeface="微软雅黑"/>
                 <a:ea typeface="微软雅黑"/>
               </a:rPr>
-              <a:t>105 → 47 参数约减 ｜ 9 个工艺角验证 ｜ 单人运行 6951 秒</a:t>
+              <a:t> PVT </a:t>
+            </a:r>
+            <a:r>
+              <a:rPr sz="1600" b="0" dirty="0" err="1">
+                <a:solidFill>
+                  <a:srgbClr val="FFFFFF"/>
+                </a:solidFill>
+                <a:latin typeface="微软雅黑"/>
+                <a:ea typeface="微软雅黑"/>
+              </a:rPr>
+              <a:t>通过</a:t>
+            </a:r>
+            <a:endParaRPr sz="1600" b="0" dirty="0">
+              <a:solidFill>
+                <a:srgbClr val="FFFFFF"/>
+              </a:solidFill>
+              <a:latin typeface="微软雅黑"/>
+              <a:ea typeface="微软雅黑"/>
+            </a:endParaRPr>
+          </a:p>
+          <a:p>
+            <a:r>
+              <a:rPr sz="1600" b="0" dirty="0">
+                <a:solidFill>
+                  <a:srgbClr val="FFFFFF"/>
+                </a:solidFill>
+                <a:latin typeface="微软雅黑"/>
+                <a:ea typeface="微软雅黑"/>
+              </a:rPr>
+              <a:t>105 → 47 </a:t>
+            </a:r>
+            <a:r>
+              <a:rPr sz="1600" b="0" dirty="0" err="1">
+                <a:solidFill>
+                  <a:srgbClr val="FFFFFF"/>
+                </a:solidFill>
+                <a:latin typeface="微软雅黑"/>
+                <a:ea typeface="微软雅黑"/>
+              </a:rPr>
+              <a:t>参数约减</a:t>
+            </a:r>
+            <a:r>
+              <a:rPr sz="1600" b="0" dirty="0">
+                <a:solidFill>
+                  <a:srgbClr val="FFFFFF"/>
+                </a:solidFill>
+                <a:latin typeface="微软雅黑"/>
+                <a:ea typeface="微软雅黑"/>
+              </a:rPr>
+              <a:t> ｜ 9 </a:t>
+            </a:r>
+            <a:r>
+              <a:rPr sz="1600" b="0" dirty="0" err="1">
+                <a:solidFill>
+                  <a:srgbClr val="FFFFFF"/>
+                </a:solidFill>
+                <a:latin typeface="微软雅黑"/>
+                <a:ea typeface="微软雅黑"/>
+              </a:rPr>
+              <a:t>个工艺角验证</a:t>
+            </a:r>
+            <a:r>
+              <a:rPr sz="1600" b="0" dirty="0">
+                <a:solidFill>
+                  <a:srgbClr val="FFFFFF"/>
+                </a:solidFill>
+                <a:latin typeface="微软雅黑"/>
+                <a:ea typeface="微软雅黑"/>
+              </a:rPr>
+              <a:t> ｜ </a:t>
+            </a:r>
+            <a:r>
+              <a:rPr sz="1600" b="0" dirty="0" err="1">
+                <a:solidFill>
+                  <a:srgbClr val="FFFFFF"/>
+                </a:solidFill>
+                <a:latin typeface="微软雅黑"/>
+                <a:ea typeface="微软雅黑"/>
+              </a:rPr>
+              <a:t>单人运行</a:t>
+            </a:r>
+            <a:r>
+              <a:rPr sz="1600" b="0" dirty="0">
+                <a:solidFill>
+                  <a:srgbClr val="FFFFFF"/>
+                </a:solidFill>
+                <a:latin typeface="微软雅黑"/>
+                <a:ea typeface="微软雅黑"/>
+              </a:rPr>
+              <a:t> 6951 秒</a:t>
             </a:r>
           </a:p>
         </p:txBody>
@@ -4856,7 +4692,7 @@
 </file>
 
 <file path=ppt/slides/slide10.xml><?xml version="1.0" encoding="utf-8"?>
-<p:sld xmlns:a="http://schemas.openxmlformats.org/drawingml/2006/main" xmlns:p="http://schemas.openxmlformats.org/presentationml/2006/main" xmlns:r="http://schemas.openxmlformats.org/officeDocument/2006/relationships">
+<p:sld xmlns:a="http://schemas.openxmlformats.org/drawingml/2006/main" xmlns:r="http://schemas.openxmlformats.org/officeDocument/2006/relationships" xmlns:p="http://schemas.openxmlformats.org/presentationml/2006/main">
   <p:cSld>
     <p:spTree>
       <p:nvGrpSpPr>
@@ -4864,7 +4700,14 @@
         <p:cNvGrpSpPr/>
         <p:nvPr/>
       </p:nvGrpSpPr>
-      <p:grpSpPr/>
+      <p:grpSpPr>
+        <a:xfrm>
+          <a:off x="0" y="0"/>
+          <a:ext cx="0" cy="0"/>
+          <a:chOff x="0" y="0"/>
+          <a:chExt cx="0" cy="0"/>
+        </a:xfrm>
+      </p:grpSpPr>
       <p:sp>
         <p:nvSpPr>
           <p:cNvPr id="2" name="Rectangle 1"/>
@@ -4906,6 +4749,7 @@
           <a:lstStyle/>
           <a:p>
             <a:pPr algn="ctr"/>
+            <a:endParaRPr/>
           </a:p>
         </p:txBody>
       </p:sp>
@@ -4932,15 +4776,42 @@
           <a:lstStyle/>
           <a:p>
             <a:r>
-              <a:rPr sz="2600" b="1">
+              <a:rPr sz="2600" b="1" dirty="0" err="1">
                 <a:solidFill>
                   <a:srgbClr val="FFFFFF"/>
                 </a:solidFill>
                 <a:latin typeface="微软雅黑"/>
                 <a:ea typeface="微软雅黑"/>
               </a:rPr>
-              <a:t>模块三：平台自动分 84.9584</a:t>
-            </a:r>
+              <a:t>模块四：赛题</a:t>
+            </a:r>
+            <a:r>
+              <a:rPr sz="2600" b="1" dirty="0">
+                <a:solidFill>
+                  <a:srgbClr val="FFFFFF"/>
+                </a:solidFill>
+                <a:latin typeface="微软雅黑"/>
+                <a:ea typeface="微软雅黑"/>
+              </a:rPr>
+              <a:t> 5 </a:t>
+            </a:r>
+            <a:r>
+              <a:rPr sz="2600" b="1" dirty="0" err="1">
+                <a:solidFill>
+                  <a:srgbClr val="FFFFFF"/>
+                </a:solidFill>
+                <a:latin typeface="微软雅黑"/>
+                <a:ea typeface="微软雅黑"/>
+              </a:rPr>
+              <a:t>个子项，一一落位</a:t>
+            </a:r>
+            <a:endParaRPr sz="2600" b="1" dirty="0">
+              <a:solidFill>
+                <a:srgbClr val="FFFFFF"/>
+              </a:solidFill>
+              <a:latin typeface="微软雅黑"/>
+              <a:ea typeface="微软雅黑"/>
+            </a:endParaRPr>
           </a:p>
         </p:txBody>
       </p:sp>
@@ -4975,7 +4846,7 @@
                 <a:latin typeface="微软雅黑"/>
                 <a:ea typeface="微软雅黑"/>
               </a:rPr>
-              <a:t>05 模块三</a:t>
+              <a:t>06 模块四</a:t>
             </a:r>
           </a:p>
         </p:txBody>
@@ -5046,7 +4917,7 @@
                 <a:latin typeface="微软雅黑"/>
                 <a:ea typeface="微软雅黑"/>
               </a:rPr>
-              <a:t>10</a:t>
+              <a:t>11</a:t>
             </a:r>
           </a:p>
         </p:txBody>
@@ -5060,8 +4931,8 @@
           <p:nvPr/>
         </p:nvGraphicFramePr>
         <p:xfrm>
-          <a:off x="594360" y="1188720"/>
-          <a:ext cx="10972800" cy="2743200"/>
+          <a:off x="594360" y="1170432"/>
+          <a:ext cx="10972797" cy="2743200"/>
         </p:xfrm>
         <a:graphic>
           <a:graphicData uri="http://schemas.openxmlformats.org/drawingml/2006/table">
@@ -5070,9 +4941,34 @@
                 <a:tableStyleId>{5C22544A-7EE6-4342-B048-85BDC9FD1C3A}</a:tableStyleId>
               </a:tblPr>
               <a:tblGrid>
-                <a:gridCol w="4023360"/>
-                <a:gridCol w="2743200"/>
-                <a:gridCol w="4206240"/>
+                <a:gridCol w="548639">
+                  <a:extLst>
+                    <a:ext uri="{9D8B030D-6E8A-4147-A177-3AD203B41FA5}">
+                      <a16:colId xmlns:a16="http://schemas.microsoft.com/office/drawing/2014/main" val="20000"/>
+                    </a:ext>
+                  </a:extLst>
+                </a:gridCol>
+                <a:gridCol w="4232365">
+                  <a:extLst>
+                    <a:ext uri="{9D8B030D-6E8A-4147-A177-3AD203B41FA5}">
+                      <a16:colId xmlns:a16="http://schemas.microsoft.com/office/drawing/2014/main" val="20001"/>
+                    </a:ext>
+                  </a:extLst>
+                </a:gridCol>
+                <a:gridCol w="2664822">
+                  <a:extLst>
+                    <a:ext uri="{9D8B030D-6E8A-4147-A177-3AD203B41FA5}">
+                      <a16:colId xmlns:a16="http://schemas.microsoft.com/office/drawing/2014/main" val="20002"/>
+                    </a:ext>
+                  </a:extLst>
+                </a:gridCol>
+                <a:gridCol w="3526971">
+                  <a:extLst>
+                    <a:ext uri="{9D8B030D-6E8A-4147-A177-3AD203B41FA5}">
+                      <a16:colId xmlns:a16="http://schemas.microsoft.com/office/drawing/2014/main" val="20003"/>
+                    </a:ext>
+                  </a:extLst>
+                </a:gridCol>
               </a:tblGrid>
               <a:tr h="457200">
                 <a:tc>
@@ -5088,7 +4984,7 @@
                           <a:latin typeface="微软雅黑"/>
                           <a:ea typeface="微软雅黑"/>
                         </a:rPr>
-                        <a:t>分项</a:t>
+                        <a:t>#</a:t>
                       </a:r>
                     </a:p>
                   </a:txBody>
@@ -5111,7 +5007,7 @@
                           <a:latin typeface="微软雅黑"/>
                           <a:ea typeface="微软雅黑"/>
                         </a:rPr>
-                        <a:t>得分</a:t>
+                        <a:t>赛题子项</a:t>
                       </a:r>
                     </a:p>
                   </a:txBody>
@@ -5134,7 +5030,7 @@
                           <a:latin typeface="微软雅黑"/>
                           <a:ea typeface="微软雅黑"/>
                         </a:rPr>
-                        <a:t>说明</a:t>
+                        <a:t>实现</a:t>
                       </a:r>
                     </a:p>
                   </a:txBody>
@@ -5144,6 +5040,34 @@
                     </a:solidFill>
                   </a:tcPr>
                 </a:tc>
+                <a:tc>
+                  <a:txBody>
+                    <a:bodyPr/>
+                    <a:lstStyle/>
+                    <a:p>
+                      <a:r>
+                        <a:rPr sz="1300" b="1">
+                          <a:solidFill>
+                            <a:srgbClr val="FFFFFF"/>
+                          </a:solidFill>
+                          <a:latin typeface="微软雅黑"/>
+                          <a:ea typeface="微软雅黑"/>
+                        </a:rPr>
+                        <a:t>产物</a:t>
+                      </a:r>
+                    </a:p>
+                  </a:txBody>
+                  <a:tcPr>
+                    <a:solidFill>
+                      <a:srgbClr val="1F3864"/>
+                    </a:solidFill>
+                  </a:tcPr>
+                </a:tc>
+                <a:extLst>
+                  <a:ext uri="{0D108BD9-81ED-4DB2-BD59-A6C34878D82A}">
+                    <a16:rowId xmlns:a16="http://schemas.microsoft.com/office/drawing/2014/main" val="10000"/>
+                  </a:ext>
+                </a:extLst>
               </a:tr>
               <a:tr h="457200">
                 <a:tc>
@@ -5152,14 +5076,14 @@
                     <a:lstStyle/>
                     <a:p>
                       <a:r>
-                        <a:rPr sz="1400" b="1">
+                        <a:rPr sz="1300" b="1">
                           <a:solidFill>
                             <a:srgbClr val="1F3864"/>
                           </a:solidFill>
                           <a:latin typeface="微软雅黑"/>
                           <a:ea typeface="微软雅黑"/>
                         </a:rPr>
-                        <a:t>PM / GM / DC Gain / I_OPA</a:t>
+                        <a:t>1</a:t>
                       </a:r>
                     </a:p>
                   </a:txBody>
@@ -5175,14 +5099,14 @@
                     <a:lstStyle/>
                     <a:p>
                       <a:r>
-                        <a:rPr sz="1400" b="0">
+                        <a:rPr sz="1300" b="0">
                           <a:solidFill>
                             <a:srgbClr val="595959"/>
                           </a:solidFill>
                           <a:latin typeface="微软雅黑"/>
                           <a:ea typeface="微软雅黑"/>
                         </a:rPr>
-                        <a:t>10 / 10 / 10 / 10</a:t>
+                        <a:t>器件尺寸转为待优化变量</a:t>
                       </a:r>
                     </a:p>
                   </a:txBody>
@@ -5198,14 +5122,14 @@
                     <a:lstStyle/>
                     <a:p>
                       <a:r>
-                        <a:rPr sz="1400" b="0">
+                        <a:rPr sz="1300" b="0">
                           <a:solidFill>
                             <a:srgbClr val="595959"/>
                           </a:solidFill>
                           <a:latin typeface="微软雅黑"/>
                           <a:ea typeface="微软雅黑"/>
                         </a:rPr>
-                        <a:t>四项硬约束全 PVT 通过</a:t>
+                        <a:t>param_extract.py</a:t>
                       </a:r>
                     </a:p>
                   </a:txBody>
@@ -5215,6 +5139,34 @@
                     </a:solidFill>
                   </a:tcPr>
                 </a:tc>
+                <a:tc>
+                  <a:txBody>
+                    <a:bodyPr/>
+                    <a:lstStyle/>
+                    <a:p>
+                      <a:r>
+                        <a:rPr sz="1300" b="0">
+                          <a:solidFill>
+                            <a:srgbClr val="595959"/>
+                          </a:solidFill>
+                          <a:latin typeface="微软雅黑"/>
+                          <a:ea typeface="微软雅黑"/>
+                        </a:rPr>
+                        <a:t>105 变量 + 元数据</a:t>
+                      </a:r>
+                    </a:p>
+                  </a:txBody>
+                  <a:tcPr>
+                    <a:solidFill>
+                      <a:srgbClr val="EEF2F8"/>
+                    </a:solidFill>
+                  </a:tcPr>
+                </a:tc>
+                <a:extLst>
+                  <a:ext uri="{0D108BD9-81ED-4DB2-BD59-A6C34878D82A}">
+                    <a16:rowId xmlns:a16="http://schemas.microsoft.com/office/drawing/2014/main" val="10001"/>
+                  </a:ext>
+                </a:extLst>
               </a:tr>
               <a:tr h="457200">
                 <a:tc>
@@ -5223,14 +5175,14 @@
                     <a:lstStyle/>
                     <a:p>
                       <a:r>
-                        <a:rPr sz="1400" b="1">
+                        <a:rPr sz="1300" b="1">
                           <a:solidFill>
                             <a:srgbClr val="1F3864"/>
                           </a:solidFill>
                           <a:latin typeface="微软雅黑"/>
                           <a:ea typeface="微软雅黑"/>
                         </a:rPr>
-                        <a:t>UGB</a:t>
+                        <a:t>2</a:t>
                       </a:r>
                     </a:p>
                   </a:txBody>
@@ -5246,14 +5198,14 @@
                     <a:lstStyle/>
                     <a:p>
                       <a:r>
-                        <a:rPr sz="1400" b="0">
+                        <a:rPr sz="1300" b="0">
                           <a:solidFill>
                             <a:srgbClr val="595959"/>
                           </a:solidFill>
                           <a:latin typeface="微软雅黑"/>
                           <a:ea typeface="微软雅黑"/>
                         </a:rPr>
-                        <a:t>1.0381</a:t>
+                        <a:t>读取器件连接关系</a:t>
                       </a:r>
                     </a:p>
                   </a:txBody>
@@ -5269,14 +5221,14 @@
                     <a:lstStyle/>
                     <a:p>
                       <a:r>
-                        <a:rPr sz="1400" b="0">
+                        <a:rPr sz="1300" b="0">
                           <a:solidFill>
                             <a:srgbClr val="595959"/>
                           </a:solidFill>
                           <a:latin typeface="微软雅黑"/>
                           <a:ea typeface="微软雅黑"/>
                         </a:rPr>
-                        <a:t>排名类分项</a:t>
+                        <a:t>netlist_export.py</a:t>
                       </a:r>
                     </a:p>
                   </a:txBody>
@@ -5286,6 +5238,34 @@
                     </a:solidFill>
                   </a:tcPr>
                 </a:tc>
+                <a:tc>
+                  <a:txBody>
+                    <a:bodyPr/>
+                    <a:lstStyle/>
+                    <a:p>
+                      <a:r>
+                        <a:rPr sz="1300" b="0">
+                          <a:solidFill>
+                            <a:srgbClr val="595959"/>
+                          </a:solidFill>
+                          <a:latin typeface="微软雅黑"/>
+                          <a:ea typeface="微软雅黑"/>
+                        </a:rPr>
+                        <a:t>网表 + 连接表</a:t>
+                      </a:r>
+                    </a:p>
+                  </a:txBody>
+                  <a:tcPr>
+                    <a:solidFill>
+                      <a:srgbClr val="FFFFFF"/>
+                    </a:solidFill>
+                  </a:tcPr>
+                </a:tc>
+                <a:extLst>
+                  <a:ext uri="{0D108BD9-81ED-4DB2-BD59-A6C34878D82A}">
+                    <a16:rowId xmlns:a16="http://schemas.microsoft.com/office/drawing/2014/main" val="10002"/>
+                  </a:ext>
+                </a:extLst>
               </a:tr>
               <a:tr h="457200">
                 <a:tc>
@@ -5294,14 +5274,14 @@
                     <a:lstStyle/>
                     <a:p>
                       <a:r>
-                        <a:rPr sz="1400" b="1">
+                        <a:rPr sz="1300" b="1">
                           <a:solidFill>
                             <a:srgbClr val="1F3864"/>
                           </a:solidFill>
                           <a:latin typeface="微软雅黑"/>
                           <a:ea typeface="微软雅黑"/>
                         </a:rPr>
-                        <a:t>Area</a:t>
+                        <a:t>3</a:t>
                       </a:r>
                     </a:p>
                   </a:txBody>
@@ -5317,14 +5297,14 @@
                     <a:lstStyle/>
                     <a:p>
                       <a:r>
-                        <a:rPr sz="1400" b="0">
+                        <a:rPr sz="1300" b="0">
                           <a:solidFill>
                             <a:srgbClr val="595959"/>
                           </a:solidFill>
                           <a:latin typeface="微软雅黑"/>
                           <a:ea typeface="微软雅黑"/>
                         </a:rPr>
-                        <a:t>23.9204</a:t>
+                        <a:t>调用 MDE 仿真并提取指标</a:t>
                       </a:r>
                     </a:p>
                   </a:txBody>
@@ -5340,14 +5320,14 @@
                     <a:lstStyle/>
                     <a:p>
                       <a:r>
-                        <a:rPr sz="1400" b="0">
+                        <a:rPr sz="1300" b="0">
                           <a:solidFill>
                             <a:srgbClr val="595959"/>
                           </a:solidFill>
                           <a:latin typeface="微软雅黑"/>
                           <a:ea typeface="微软雅黑"/>
                         </a:rPr>
-                        <a:t>排名类分项</a:t>
+                        <a:t>sim_engine.py</a:t>
                       </a:r>
                     </a:p>
                   </a:txBody>
@@ -5357,6 +5337,34 @@
                     </a:solidFill>
                   </a:tcPr>
                 </a:tc>
+                <a:tc>
+                  <a:txBody>
+                    <a:bodyPr/>
+                    <a:lstStyle/>
+                    <a:p>
+                      <a:r>
+                        <a:rPr sz="1300" b="0">
+                          <a:solidFill>
+                            <a:srgbClr val="595959"/>
+                          </a:solidFill>
+                          <a:latin typeface="微软雅黑"/>
+                          <a:ea typeface="微软雅黑"/>
+                        </a:rPr>
+                        <a:t>六项指标 + 波形</a:t>
+                      </a:r>
+                    </a:p>
+                  </a:txBody>
+                  <a:tcPr>
+                    <a:solidFill>
+                      <a:srgbClr val="EEF2F8"/>
+                    </a:solidFill>
+                  </a:tcPr>
+                </a:tc>
+                <a:extLst>
+                  <a:ext uri="{0D108BD9-81ED-4DB2-BD59-A6C34878D82A}">
+                    <a16:rowId xmlns:a16="http://schemas.microsoft.com/office/drawing/2014/main" val="10003"/>
+                  </a:ext>
+                </a:extLst>
               </a:tr>
               <a:tr h="457200">
                 <a:tc>
@@ -5365,14 +5373,14 @@
                     <a:lstStyle/>
                     <a:p>
                       <a:r>
-                        <a:rPr sz="1400" b="1">
+                        <a:rPr sz="1300" b="1">
                           <a:solidFill>
                             <a:srgbClr val="1F3864"/>
                           </a:solidFill>
                           <a:latin typeface="微软雅黑"/>
                           <a:ea typeface="微软雅黑"/>
                         </a:rPr>
-                        <a:t>Time</a:t>
+                        <a:t>4</a:t>
                       </a:r>
                     </a:p>
                   </a:txBody>
@@ -5388,14 +5396,14 @@
                     <a:lstStyle/>
                     <a:p>
                       <a:r>
-                        <a:rPr sz="1400" b="0">
+                        <a:rPr sz="1300" b="0">
                           <a:solidFill>
                             <a:srgbClr val="595959"/>
                           </a:solidFill>
                           <a:latin typeface="微软雅黑"/>
                           <a:ea typeface="微软雅黑"/>
                         </a:rPr>
-                        <a:t>20.0000</a:t>
+                        <a:t>最优尺寸回写电路图</a:t>
                       </a:r>
                     </a:p>
                   </a:txBody>
@@ -5411,14 +5419,14 @@
                     <a:lstStyle/>
                     <a:p>
                       <a:r>
-                        <a:rPr sz="1400" b="0">
+                        <a:rPr sz="1300" b="0">
                           <a:solidFill>
                             <a:srgbClr val="595959"/>
                           </a:solidFill>
                           <a:latin typeface="微软雅黑"/>
                           <a:ea typeface="微软雅黑"/>
                         </a:rPr>
-                        <a:t>6951 s &lt; 7200 s，满分</a:t>
+                        <a:t>writeback.py</a:t>
                       </a:r>
                     </a:p>
                   </a:txBody>
@@ -5428,6 +5436,34 @@
                     </a:solidFill>
                   </a:tcPr>
                 </a:tc>
+                <a:tc>
+                  <a:txBody>
+                    <a:bodyPr/>
+                    <a:lstStyle/>
+                    <a:p>
+                      <a:r>
+                        <a:rPr sz="1300" b="0">
+                          <a:solidFill>
+                            <a:srgbClr val="595959"/>
+                          </a:solidFill>
+                          <a:latin typeface="微软雅黑"/>
+                          <a:ea typeface="微软雅黑"/>
+                        </a:rPr>
+                        <a:t>schematic_var_best + 读回校验</a:t>
+                      </a:r>
+                    </a:p>
+                  </a:txBody>
+                  <a:tcPr>
+                    <a:solidFill>
+                      <a:srgbClr val="FFFFFF"/>
+                    </a:solidFill>
+                  </a:tcPr>
+                </a:tc>
+                <a:extLst>
+                  <a:ext uri="{0D108BD9-81ED-4DB2-BD59-A6C34878D82A}">
+                    <a16:rowId xmlns:a16="http://schemas.microsoft.com/office/drawing/2014/main" val="10004"/>
+                  </a:ext>
+                </a:extLst>
               </a:tr>
               <a:tr h="457200">
                 <a:tc>
@@ -5436,14 +5472,14 @@
                     <a:lstStyle/>
                     <a:p>
                       <a:r>
-                        <a:rPr sz="1400" b="1">
+                        <a:rPr sz="1300" b="1">
                           <a:solidFill>
                             <a:srgbClr val="1F3864"/>
                           </a:solidFill>
                           <a:latin typeface="微软雅黑"/>
                           <a:ea typeface="微软雅黑"/>
                         </a:rPr>
-                        <a:t>合计</a:t>
+                        <a:t>5</a:t>
                       </a:r>
                     </a:p>
                   </a:txBody>
@@ -5459,14 +5495,14 @@
                     <a:lstStyle/>
                     <a:p>
                       <a:r>
-                        <a:rPr sz="1400" b="0">
+                        <a:rPr sz="1300" b="0">
                           <a:solidFill>
                             <a:srgbClr val="595959"/>
                           </a:solidFill>
                           <a:latin typeface="微软雅黑"/>
                           <a:ea typeface="微软雅黑"/>
                         </a:rPr>
-                        <a:t>84.9584</a:t>
+                        <a:t>高集成自动优化接口</a:t>
                       </a:r>
                     </a:p>
                   </a:txBody>
@@ -5482,14 +5518,14 @@
                     <a:lstStyle/>
                     <a:p>
                       <a:r>
-                        <a:rPr sz="1400" b="0">
+                        <a:rPr sz="1300" b="0">
                           <a:solidFill>
                             <a:srgbClr val="595959"/>
                           </a:solidFill>
                           <a:latin typeface="微软雅黑"/>
                           <a:ea typeface="微软雅黑"/>
                         </a:rPr>
-                        <a:t>初始解 78.27，提升 6.69</a:t>
+                        <a:t>run_auto.sh</a:t>
                       </a:r>
                     </a:p>
                   </a:txBody>
@@ -5499,321 +5535,113 @@
                     </a:solidFill>
                   </a:tcPr>
                 </a:tc>
+                <a:tc>
+                  <a:txBody>
+                    <a:bodyPr/>
+                    <a:lstStyle/>
+                    <a:p>
+                      <a:r>
+                        <a:rPr sz="1300" b="0">
+                          <a:solidFill>
+                            <a:srgbClr val="595959"/>
+                          </a:solidFill>
+                          <a:latin typeface="微软雅黑"/>
+                          <a:ea typeface="微软雅黑"/>
+                        </a:rPr>
+                        <a:t>输入尺寸 → 输出性能</a:t>
+                      </a:r>
+                    </a:p>
+                  </a:txBody>
+                  <a:tcPr>
+                    <a:solidFill>
+                      <a:srgbClr val="EEF2F8"/>
+                    </a:solidFill>
+                  </a:tcPr>
+                </a:tc>
+                <a:extLst>
+                  <a:ext uri="{0D108BD9-81ED-4DB2-BD59-A6C34878D82A}">
+                    <a16:rowId xmlns:a16="http://schemas.microsoft.com/office/drawing/2014/main" val="10005"/>
+                  </a:ext>
+                </a:extLst>
               </a:tr>
             </a:tbl>
           </a:graphicData>
         </a:graphic>
       </p:graphicFrame>
-      <p:graphicFrame>
-        <p:nvGraphicFramePr>
-          <p:cNvPr id="8" name="Table 7"/>
-          <p:cNvGraphicFramePr>
-            <a:graphicFrameLocks noGrp="1"/>
-          </p:cNvGraphicFramePr>
+      <p:sp>
+        <p:nvSpPr>
+          <p:cNvPr id="8" name="TextBox 7"/>
+          <p:cNvSpPr txBox="1"/>
           <p:nvPr/>
-        </p:nvGraphicFramePr>
-        <p:xfrm>
-          <a:off x="594360" y="4206240"/>
-          <a:ext cx="10972800" cy="1133856"/>
-        </p:xfrm>
-        <a:graphic>
-          <a:graphicData uri="http://schemas.openxmlformats.org/drawingml/2006/table">
-            <a:tbl>
-              <a:tblPr firstRow="1" bandRow="1">
-                <a:tableStyleId>{5C22544A-7EE6-4342-B048-85BDC9FD1C3A}</a:tableStyleId>
-              </a:tblPr>
-              <a:tblGrid>
-                <a:gridCol w="1828800"/>
-                <a:gridCol w="1828800"/>
-                <a:gridCol w="1828800"/>
-                <a:gridCol w="1828800"/>
-                <a:gridCol w="1828800"/>
-                <a:gridCol w="1828800"/>
-              </a:tblGrid>
-              <a:tr h="566928">
-                <a:tc>
-                  <a:txBody>
-                    <a:bodyPr/>
-                    <a:lstStyle/>
-                    <a:p>
-                      <a:r>
-                        <a:rPr sz="1300" b="1">
-                          <a:solidFill>
-                            <a:srgbClr val="FFFFFF"/>
-                          </a:solidFill>
-                          <a:latin typeface="微软雅黑"/>
-                          <a:ea typeface="微软雅黑"/>
-                        </a:rPr>
-                        <a:t>Gain</a:t>
-                      </a:r>
-                    </a:p>
-                  </a:txBody>
-                  <a:tcPr>
-                    <a:solidFill>
-                      <a:srgbClr val="1F3864"/>
-                    </a:solidFill>
-                  </a:tcPr>
-                </a:tc>
-                <a:tc>
-                  <a:txBody>
-                    <a:bodyPr/>
-                    <a:lstStyle/>
-                    <a:p>
-                      <a:r>
-                        <a:rPr sz="1300" b="1">
-                          <a:solidFill>
-                            <a:srgbClr val="FFFFFF"/>
-                          </a:solidFill>
-                          <a:latin typeface="微软雅黑"/>
-                          <a:ea typeface="微软雅黑"/>
-                        </a:rPr>
-                        <a:t>UGB</a:t>
-                      </a:r>
-                    </a:p>
-                  </a:txBody>
-                  <a:tcPr>
-                    <a:solidFill>
-                      <a:srgbClr val="1F3864"/>
-                    </a:solidFill>
-                  </a:tcPr>
-                </a:tc>
-                <a:tc>
-                  <a:txBody>
-                    <a:bodyPr/>
-                    <a:lstStyle/>
-                    <a:p>
-                      <a:r>
-                        <a:rPr sz="1300" b="1">
-                          <a:solidFill>
-                            <a:srgbClr val="FFFFFF"/>
-                          </a:solidFill>
-                          <a:latin typeface="微软雅黑"/>
-                          <a:ea typeface="微软雅黑"/>
-                        </a:rPr>
-                        <a:t>PM</a:t>
-                      </a:r>
-                    </a:p>
-                  </a:txBody>
-                  <a:tcPr>
-                    <a:solidFill>
-                      <a:srgbClr val="1F3864"/>
-                    </a:solidFill>
-                  </a:tcPr>
-                </a:tc>
-                <a:tc>
-                  <a:txBody>
-                    <a:bodyPr/>
-                    <a:lstStyle/>
-                    <a:p>
-                      <a:r>
-                        <a:rPr sz="1300" b="1">
-                          <a:solidFill>
-                            <a:srgbClr val="FFFFFF"/>
-                          </a:solidFill>
-                          <a:latin typeface="微软雅黑"/>
-                          <a:ea typeface="微软雅黑"/>
-                        </a:rPr>
-                        <a:t>GM</a:t>
-                      </a:r>
-                    </a:p>
-                  </a:txBody>
-                  <a:tcPr>
-                    <a:solidFill>
-                      <a:srgbClr val="1F3864"/>
-                    </a:solidFill>
-                  </a:tcPr>
-                </a:tc>
-                <a:tc>
-                  <a:txBody>
-                    <a:bodyPr/>
-                    <a:lstStyle/>
-                    <a:p>
-                      <a:r>
-                        <a:rPr sz="1300" b="1">
-                          <a:solidFill>
-                            <a:srgbClr val="FFFFFF"/>
-                          </a:solidFill>
-                          <a:latin typeface="微软雅黑"/>
-                          <a:ea typeface="微软雅黑"/>
-                        </a:rPr>
-                        <a:t>I_OPA</a:t>
-                      </a:r>
-                    </a:p>
-                  </a:txBody>
-                  <a:tcPr>
-                    <a:solidFill>
-                      <a:srgbClr val="1F3864"/>
-                    </a:solidFill>
-                  </a:tcPr>
-                </a:tc>
-                <a:tc>
-                  <a:txBody>
-                    <a:bodyPr/>
-                    <a:lstStyle/>
-                    <a:p>
-                      <a:r>
-                        <a:rPr sz="1300" b="1">
-                          <a:solidFill>
-                            <a:srgbClr val="FFFFFF"/>
-                          </a:solidFill>
-                          <a:latin typeface="微软雅黑"/>
-                          <a:ea typeface="微软雅黑"/>
-                        </a:rPr>
-                        <a:t>Area</a:t>
-                      </a:r>
-                    </a:p>
-                  </a:txBody>
-                  <a:tcPr>
-                    <a:solidFill>
-                      <a:srgbClr val="1F3864"/>
-                    </a:solidFill>
-                  </a:tcPr>
-                </a:tc>
-              </a:tr>
-              <a:tr h="566928">
-                <a:tc>
-                  <a:txBody>
-                    <a:bodyPr/>
-                    <a:lstStyle/>
-                    <a:p>
-                      <a:r>
-                        <a:rPr sz="1500" b="1">
-                          <a:solidFill>
-                            <a:srgbClr val="1F3864"/>
-                          </a:solidFill>
-                          <a:latin typeface="微软雅黑"/>
-                          <a:ea typeface="微软雅黑"/>
-                        </a:rPr>
-                        <a:t>45.85 dB</a:t>
-                      </a:r>
-                    </a:p>
-                  </a:txBody>
-                  <a:tcPr>
-                    <a:solidFill>
-                      <a:srgbClr val="EEF2F8"/>
-                    </a:solidFill>
-                  </a:tcPr>
-                </a:tc>
-                <a:tc>
-                  <a:txBody>
-                    <a:bodyPr/>
-                    <a:lstStyle/>
-                    <a:p>
-                      <a:r>
-                        <a:rPr sz="1500" b="0">
-                          <a:solidFill>
-                            <a:srgbClr val="595959"/>
-                          </a:solidFill>
-                          <a:latin typeface="微软雅黑"/>
-                          <a:ea typeface="微软雅黑"/>
-                        </a:rPr>
-                        <a:t>13.84 MHz</a:t>
-                      </a:r>
-                    </a:p>
-                  </a:txBody>
-                  <a:tcPr>
-                    <a:solidFill>
-                      <a:srgbClr val="EEF2F8"/>
-                    </a:solidFill>
-                  </a:tcPr>
-                </a:tc>
-                <a:tc>
-                  <a:txBody>
-                    <a:bodyPr/>
-                    <a:lstStyle/>
-                    <a:p>
-                      <a:r>
-                        <a:rPr sz="1500" b="0">
-                          <a:solidFill>
-                            <a:srgbClr val="595959"/>
-                          </a:solidFill>
-                          <a:latin typeface="微软雅黑"/>
-                          <a:ea typeface="微软雅黑"/>
-                        </a:rPr>
-                        <a:t>61.20°</a:t>
-                      </a:r>
-                    </a:p>
-                  </a:txBody>
-                  <a:tcPr>
-                    <a:solidFill>
-                      <a:srgbClr val="EEF2F8"/>
-                    </a:solidFill>
-                  </a:tcPr>
-                </a:tc>
-                <a:tc>
-                  <a:txBody>
-                    <a:bodyPr/>
-                    <a:lstStyle/>
-                    <a:p>
-                      <a:r>
-                        <a:rPr sz="1500" b="0">
-                          <a:solidFill>
-                            <a:srgbClr val="595959"/>
-                          </a:solidFill>
-                          <a:latin typeface="微软雅黑"/>
-                          <a:ea typeface="微软雅黑"/>
-                        </a:rPr>
-                        <a:t>−10.84 dB</a:t>
-                      </a:r>
-                    </a:p>
-                  </a:txBody>
-                  <a:tcPr>
-                    <a:solidFill>
-                      <a:srgbClr val="EEF2F8"/>
-                    </a:solidFill>
-                  </a:tcPr>
-                </a:tc>
-                <a:tc>
-                  <a:txBody>
-                    <a:bodyPr/>
-                    <a:lstStyle/>
-                    <a:p>
-                      <a:r>
-                        <a:rPr sz="1500" b="0">
-                          <a:solidFill>
-                            <a:srgbClr val="595959"/>
-                          </a:solidFill>
-                          <a:latin typeface="微软雅黑"/>
-                          <a:ea typeface="微软雅黑"/>
-                        </a:rPr>
-                        <a:t>0.839 mA</a:t>
-                      </a:r>
-                    </a:p>
-                  </a:txBody>
-                  <a:tcPr>
-                    <a:solidFill>
-                      <a:srgbClr val="EEF2F8"/>
-                    </a:solidFill>
-                  </a:tcPr>
-                </a:tc>
-                <a:tc>
-                  <a:txBody>
-                    <a:bodyPr/>
-                    <a:lstStyle/>
-                    <a:p>
-                      <a:r>
-                        <a:rPr sz="1500" b="0">
-                          <a:solidFill>
-                            <a:srgbClr val="595959"/>
-                          </a:solidFill>
-                          <a:latin typeface="微软雅黑"/>
-                          <a:ea typeface="微软雅黑"/>
-                        </a:rPr>
-                        <a:t>8361.08 µm²</a:t>
-                      </a:r>
-                    </a:p>
-                  </a:txBody>
-                  <a:tcPr>
-                    <a:solidFill>
-                      <a:srgbClr val="EEF2F8"/>
-                    </a:solidFill>
-                  </a:tcPr>
-                </a:tc>
-              </a:tr>
-            </a:tbl>
-          </a:graphicData>
-        </a:graphic>
-      </p:graphicFrame>
+        </p:nvSpPr>
+        <p:spPr>
+          <a:xfrm>
+            <a:off x="594360" y="4114800"/>
+            <a:ext cx="10972800" cy="2011680"/>
+          </a:xfrm>
+          <a:prstGeom prst="rect">
+            <a:avLst/>
+          </a:prstGeom>
+          <a:noFill/>
+        </p:spPr>
+        <p:txBody>
+          <a:bodyPr wrap="square">
+            <a:spAutoFit/>
+          </a:bodyPr>
+          <a:lstStyle/>
+          <a:p>
+            <a:pPr>
+              <a:spcAft>
+                <a:spcPts val="1000"/>
+              </a:spcAft>
+            </a:pPr>
+            <a:r>
+              <a:rPr sz="1500" b="0">
+                <a:solidFill>
+                  <a:srgbClr val="595959"/>
+                </a:solidFill>
+                <a:latin typeface="微软雅黑"/>
+                <a:ea typeface="微软雅黑"/>
+              </a:rPr>
+              <a:t>• 五个脚本共用 m4_common.py 一套口径（边界/单位/schema/旧路径修复），避免各写一份而走样</a:t>
+            </a:r>
+          </a:p>
+          <a:p>
+            <a:pPr>
+              <a:spcAft>
+                <a:spcPts val="1000"/>
+              </a:spcAft>
+            </a:pPr>
+            <a:r>
+              <a:rPr sz="1500" b="0">
+                <a:solidFill>
+                  <a:srgbClr val="595959"/>
+                </a:solidFill>
+                <a:latin typeface="微软雅黑"/>
+                <a:ea typeface="微软雅黑"/>
+              </a:rPr>
+              <a:t>• 反标默认不动原图：目标视图不存在先尝试拷贝，无拷贝接口就中止，只有 --in_place 才改原图</a:t>
+            </a:r>
+          </a:p>
+          <a:p>
+            <a:pPr>
+              <a:spcAft>
+                <a:spcPts val="1000"/>
+              </a:spcAft>
+            </a:pPr>
+            <a:r>
+              <a:rPr sz="1500" b="0">
+                <a:solidFill>
+                  <a:srgbClr val="595959"/>
+                </a:solidFill>
+                <a:latin typeface="微软雅黑"/>
+                <a:ea typeface="微软雅黑"/>
+              </a:rPr>
+              <a:t>• 所有脚本支持 --mock，评审在没有 license 的机器上也能复核</a:t>
+            </a:r>
+          </a:p>
+        </p:txBody>
+      </p:sp>
     </p:spTree>
   </p:cSld>
   <p:clrMapOvr>
@@ -5823,7 +5651,7 @@
 </file>
 
 <file path=ppt/slides/slide11.xml><?xml version="1.0" encoding="utf-8"?>
-<p:sld xmlns:a="http://schemas.openxmlformats.org/drawingml/2006/main" xmlns:p="http://schemas.openxmlformats.org/presentationml/2006/main" xmlns:r="http://schemas.openxmlformats.org/officeDocument/2006/relationships">
+<p:sld xmlns:a="http://schemas.openxmlformats.org/drawingml/2006/main" xmlns:r="http://schemas.openxmlformats.org/officeDocument/2006/relationships" xmlns:p="http://schemas.openxmlformats.org/presentationml/2006/main">
   <p:cSld>
     <p:spTree>
       <p:nvGrpSpPr>
@@ -5831,7 +5659,14 @@
         <p:cNvGrpSpPr/>
         <p:nvPr/>
       </p:nvGrpSpPr>
-      <p:grpSpPr/>
+      <p:grpSpPr>
+        <a:xfrm>
+          <a:off x="0" y="0"/>
+          <a:ext cx="0" cy="0"/>
+          <a:chOff x="0" y="0"/>
+          <a:chExt cx="0" cy="0"/>
+        </a:xfrm>
+      </p:grpSpPr>
       <p:sp>
         <p:nvSpPr>
           <p:cNvPr id="2" name="Rectangle 1"/>
@@ -5873,6 +5708,7 @@
           <a:lstStyle/>
           <a:p>
             <a:pPr algn="ctr"/>
+            <a:endParaRPr/>
           </a:p>
         </p:txBody>
       </p:sp>
@@ -5906,7 +5742,7 @@
                 <a:latin typeface="微软雅黑"/>
                 <a:ea typeface="微软雅黑"/>
               </a:rPr>
-              <a:t>模块四：赛题 5 个子项，一一落位</a:t>
+              <a:t>全 PVT 验证：9 个工艺角全部达标</a:t>
             </a:r>
           </a:p>
         </p:txBody>
@@ -5942,7 +5778,7 @@
                 <a:latin typeface="微软雅黑"/>
                 <a:ea typeface="微软雅黑"/>
               </a:rPr>
-              <a:t>06 模块四</a:t>
+              <a:t>07 验证</a:t>
             </a:r>
           </a:p>
         </p:txBody>
@@ -6013,7 +5849,7 @@
                 <a:latin typeface="微软雅黑"/>
                 <a:ea typeface="微软雅黑"/>
               </a:rPr>
-              <a:t>11</a:t>
+              <a:t>12</a:t>
             </a:r>
           </a:p>
         </p:txBody>
@@ -6028,7 +5864,7 @@
         </p:nvGraphicFramePr>
         <p:xfrm>
           <a:off x="594360" y="1170432"/>
-          <a:ext cx="10972797" cy="2743200"/>
+          <a:ext cx="10972798" cy="2743200"/>
         </p:xfrm>
         <a:graphic>
           <a:graphicData uri="http://schemas.openxmlformats.org/drawingml/2006/table">
@@ -6037,10 +5873,34 @@
                 <a:tableStyleId>{5C22544A-7EE6-4342-B048-85BDC9FD1C3A}</a:tableStyleId>
               </a:tblPr>
               <a:tblGrid>
-                <a:gridCol w="548639"/>
-                <a:gridCol w="4232365"/>
-                <a:gridCol w="2664822"/>
-                <a:gridCol w="3526971"/>
+                <a:gridCol w="2698229">
+                  <a:extLst>
+                    <a:ext uri="{9D8B030D-6E8A-4147-A177-3AD203B41FA5}">
+                      <a16:colId xmlns:a16="http://schemas.microsoft.com/office/drawing/2014/main" val="20000"/>
+                    </a:ext>
+                  </a:extLst>
+                </a:gridCol>
+                <a:gridCol w="3957403">
+                  <a:extLst>
+                    <a:ext uri="{9D8B030D-6E8A-4147-A177-3AD203B41FA5}">
+                      <a16:colId xmlns:a16="http://schemas.microsoft.com/office/drawing/2014/main" val="20001"/>
+                    </a:ext>
+                  </a:extLst>
+                </a:gridCol>
+                <a:gridCol w="2878111">
+                  <a:extLst>
+                    <a:ext uri="{9D8B030D-6E8A-4147-A177-3AD203B41FA5}">
+                      <a16:colId xmlns:a16="http://schemas.microsoft.com/office/drawing/2014/main" val="20002"/>
+                    </a:ext>
+                  </a:extLst>
+                </a:gridCol>
+                <a:gridCol w="1439055">
+                  <a:extLst>
+                    <a:ext uri="{9D8B030D-6E8A-4147-A177-3AD203B41FA5}">
+                      <a16:colId xmlns:a16="http://schemas.microsoft.com/office/drawing/2014/main" val="20003"/>
+                    </a:ext>
+                  </a:extLst>
+                </a:gridCol>
               </a:tblGrid>
               <a:tr h="457200">
                 <a:tc>
@@ -6049,6 +5909,36 @@
                     <a:lstStyle/>
                     <a:p>
                       <a:r>
+                        <a:rPr sz="1300" b="1" dirty="0" err="1">
+                          <a:solidFill>
+                            <a:srgbClr val="FFFFFF"/>
+                          </a:solidFill>
+                          <a:latin typeface="微软雅黑"/>
+                          <a:ea typeface="微软雅黑"/>
+                        </a:rPr>
+                        <a:t>指标</a:t>
+                      </a:r>
+                      <a:endParaRPr sz="1300" b="1" dirty="0">
+                        <a:solidFill>
+                          <a:srgbClr val="FFFFFF"/>
+                        </a:solidFill>
+                        <a:latin typeface="微软雅黑"/>
+                        <a:ea typeface="微软雅黑"/>
+                      </a:endParaRPr>
+                    </a:p>
+                  </a:txBody>
+                  <a:tcPr>
+                    <a:solidFill>
+                      <a:srgbClr val="1F3864"/>
+                    </a:solidFill>
+                  </a:tcPr>
+                </a:tc>
+                <a:tc>
+                  <a:txBody>
+                    <a:bodyPr/>
+                    <a:lstStyle/>
+                    <a:p>
+                      <a:r>
                         <a:rPr sz="1300" b="1">
                           <a:solidFill>
                             <a:srgbClr val="FFFFFF"/>
@@ -6056,7 +5946,7 @@
                           <a:latin typeface="微软雅黑"/>
                           <a:ea typeface="微软雅黑"/>
                         </a:rPr>
-                        <a:t>#</a:t>
+                        <a:t>最坏值</a:t>
                       </a:r>
                     </a:p>
                   </a:txBody>
@@ -6079,7 +5969,7 @@
                           <a:latin typeface="微软雅黑"/>
                           <a:ea typeface="微软雅黑"/>
                         </a:rPr>
-                        <a:t>赛题子项</a:t>
+                        <a:t>门限</a:t>
                       </a:r>
                     </a:p>
                   </a:txBody>
@@ -6102,7 +5992,7 @@
                           <a:latin typeface="微软雅黑"/>
                           <a:ea typeface="微软雅黑"/>
                         </a:rPr>
-                        <a:t>实现</a:t>
+                        <a:t>判定</a:t>
                       </a:r>
                     </a:p>
                   </a:txBody>
@@ -6112,29 +6002,11 @@
                     </a:solidFill>
                   </a:tcPr>
                 </a:tc>
-                <a:tc>
-                  <a:txBody>
-                    <a:bodyPr/>
-                    <a:lstStyle/>
-                    <a:p>
-                      <a:r>
-                        <a:rPr sz="1300" b="1">
-                          <a:solidFill>
-                            <a:srgbClr val="FFFFFF"/>
-                          </a:solidFill>
-                          <a:latin typeface="微软雅黑"/>
-                          <a:ea typeface="微软雅黑"/>
-                        </a:rPr>
-                        <a:t>产物</a:t>
-                      </a:r>
-                    </a:p>
-                  </a:txBody>
-                  <a:tcPr>
-                    <a:solidFill>
-                      <a:srgbClr val="1F3864"/>
-                    </a:solidFill>
-                  </a:tcPr>
-                </a:tc>
+                <a:extLst>
+                  <a:ext uri="{0D108BD9-81ED-4DB2-BD59-A6C34878D82A}">
+                    <a16:rowId xmlns:a16="http://schemas.microsoft.com/office/drawing/2014/main" val="10000"/>
+                  </a:ext>
+                </a:extLst>
               </a:tr>
               <a:tr h="457200">
                 <a:tc>
@@ -6143,14 +6015,14 @@
                     <a:lstStyle/>
                     <a:p>
                       <a:r>
-                        <a:rPr sz="1300" b="1">
+                        <a:rPr sz="1400" b="1">
                           <a:solidFill>
                             <a:srgbClr val="1F3864"/>
                           </a:solidFill>
                           <a:latin typeface="微软雅黑"/>
                           <a:ea typeface="微软雅黑"/>
                         </a:rPr>
-                        <a:t>1</a:t>
+                        <a:t>DC Gain</a:t>
                       </a:r>
                     </a:p>
                   </a:txBody>
@@ -6166,14 +6038,14 @@
                     <a:lstStyle/>
                     <a:p>
                       <a:r>
-                        <a:rPr sz="1300" b="0">
+                        <a:rPr sz="1400" b="0">
                           <a:solidFill>
                             <a:srgbClr val="595959"/>
                           </a:solidFill>
                           <a:latin typeface="微软雅黑"/>
                           <a:ea typeface="微软雅黑"/>
                         </a:rPr>
-                        <a:t>器件尺寸转为待优化变量</a:t>
+                        <a:t>45.85 dB（Min）</a:t>
                       </a:r>
                     </a:p>
                   </a:txBody>
@@ -6189,14 +6061,14 @@
                     <a:lstStyle/>
                     <a:p>
                       <a:r>
-                        <a:rPr sz="1300" b="0">
+                        <a:rPr sz="1400" b="0">
                           <a:solidFill>
                             <a:srgbClr val="595959"/>
                           </a:solidFill>
                           <a:latin typeface="微软雅黑"/>
                           <a:ea typeface="微软雅黑"/>
                         </a:rPr>
-                        <a:t>param_extract.py</a:t>
+                        <a:t>≥ 40 dB</a:t>
                       </a:r>
                     </a:p>
                   </a:txBody>
@@ -6212,14 +6084,14 @@
                     <a:lstStyle/>
                     <a:p>
                       <a:r>
-                        <a:rPr sz="1300" b="0">
+                        <a:rPr sz="1400" b="0">
                           <a:solidFill>
                             <a:srgbClr val="595959"/>
                           </a:solidFill>
                           <a:latin typeface="微软雅黑"/>
                           <a:ea typeface="微软雅黑"/>
                         </a:rPr>
-                        <a:t>105 变量 + 元数据</a:t>
+                        <a:t>✅</a:t>
                       </a:r>
                     </a:p>
                   </a:txBody>
@@ -6229,6 +6101,11 @@
                     </a:solidFill>
                   </a:tcPr>
                 </a:tc>
+                <a:extLst>
+                  <a:ext uri="{0D108BD9-81ED-4DB2-BD59-A6C34878D82A}">
+                    <a16:rowId xmlns:a16="http://schemas.microsoft.com/office/drawing/2014/main" val="10001"/>
+                  </a:ext>
+                </a:extLst>
               </a:tr>
               <a:tr h="457200">
                 <a:tc>
@@ -6237,14 +6114,14 @@
                     <a:lstStyle/>
                     <a:p>
                       <a:r>
-                        <a:rPr sz="1300" b="1">
+                        <a:rPr sz="1400" b="1">
                           <a:solidFill>
                             <a:srgbClr val="1F3864"/>
                           </a:solidFill>
                           <a:latin typeface="微软雅黑"/>
                           <a:ea typeface="微软雅黑"/>
                         </a:rPr>
-                        <a:t>2</a:t>
+                        <a:t>Phase Margin</a:t>
                       </a:r>
                     </a:p>
                   </a:txBody>
@@ -6260,14 +6137,14 @@
                     <a:lstStyle/>
                     <a:p>
                       <a:r>
-                        <a:rPr sz="1300" b="0">
+                        <a:rPr sz="1400" b="0">
                           <a:solidFill>
                             <a:srgbClr val="595959"/>
                           </a:solidFill>
                           <a:latin typeface="微软雅黑"/>
                           <a:ea typeface="微软雅黑"/>
                         </a:rPr>
-                        <a:t>读取器件连接关系</a:t>
+                        <a:t>61.20°（Min）</a:t>
                       </a:r>
                     </a:p>
                   </a:txBody>
@@ -6283,14 +6160,14 @@
                     <a:lstStyle/>
                     <a:p>
                       <a:r>
-                        <a:rPr sz="1300" b="0">
+                        <a:rPr sz="1400" b="0">
                           <a:solidFill>
                             <a:srgbClr val="595959"/>
                           </a:solidFill>
                           <a:latin typeface="微软雅黑"/>
                           <a:ea typeface="微软雅黑"/>
                         </a:rPr>
-                        <a:t>netlist_export.py</a:t>
+                        <a:t>≥ 50°</a:t>
                       </a:r>
                     </a:p>
                   </a:txBody>
@@ -6306,14 +6183,14 @@
                     <a:lstStyle/>
                     <a:p>
                       <a:r>
-                        <a:rPr sz="1300" b="0">
+                        <a:rPr sz="1400" b="0">
                           <a:solidFill>
                             <a:srgbClr val="595959"/>
                           </a:solidFill>
                           <a:latin typeface="微软雅黑"/>
                           <a:ea typeface="微软雅黑"/>
                         </a:rPr>
-                        <a:t>网表 + 连接表</a:t>
+                        <a:t>✅</a:t>
                       </a:r>
                     </a:p>
                   </a:txBody>
@@ -6323,6 +6200,11 @@
                     </a:solidFill>
                   </a:tcPr>
                 </a:tc>
+                <a:extLst>
+                  <a:ext uri="{0D108BD9-81ED-4DB2-BD59-A6C34878D82A}">
+                    <a16:rowId xmlns:a16="http://schemas.microsoft.com/office/drawing/2014/main" val="10002"/>
+                  </a:ext>
+                </a:extLst>
               </a:tr>
               <a:tr h="457200">
                 <a:tc>
@@ -6331,14 +6213,14 @@
                     <a:lstStyle/>
                     <a:p>
                       <a:r>
-                        <a:rPr sz="1300" b="1">
+                        <a:rPr sz="1400" b="1">
                           <a:solidFill>
                             <a:srgbClr val="1F3864"/>
                           </a:solidFill>
                           <a:latin typeface="微软雅黑"/>
                           <a:ea typeface="微软雅黑"/>
                         </a:rPr>
-                        <a:t>3</a:t>
+                        <a:t>Gain Margin</a:t>
                       </a:r>
                     </a:p>
                   </a:txBody>
@@ -6354,14 +6236,34 @@
                     <a:lstStyle/>
                     <a:p>
                       <a:r>
-                        <a:rPr sz="1300" b="0">
+                        <a:rPr sz="1400" b="0" dirty="0">
                           <a:solidFill>
                             <a:srgbClr val="595959"/>
                           </a:solidFill>
                           <a:latin typeface="微软雅黑"/>
                           <a:ea typeface="微软雅黑"/>
                         </a:rPr>
-                        <a:t>调用 MDE 仿真并提取指标</a:t>
+                        <a:t>−10.84 </a:t>
+                      </a:r>
+                      <a:r>
+                        <a:rPr sz="1400" b="0" dirty="0" err="1">
+                          <a:solidFill>
+                            <a:srgbClr val="595959"/>
+                          </a:solidFill>
+                          <a:latin typeface="微软雅黑"/>
+                          <a:ea typeface="微软雅黑"/>
+                        </a:rPr>
+                        <a:t>dB（Max</a:t>
+                      </a:r>
+                      <a:r>
+                        <a:rPr sz="1400" b="0" dirty="0">
+                          <a:solidFill>
+                            <a:srgbClr val="595959"/>
+                          </a:solidFill>
+                          <a:latin typeface="微软雅黑"/>
+                          <a:ea typeface="微软雅黑"/>
+                        </a:rPr>
+                        <a:t>）</a:t>
                       </a:r>
                     </a:p>
                   </a:txBody>
@@ -6377,14 +6279,14 @@
                     <a:lstStyle/>
                     <a:p>
                       <a:r>
-                        <a:rPr sz="1300" b="0">
+                        <a:rPr sz="1400" b="0">
                           <a:solidFill>
                             <a:srgbClr val="595959"/>
                           </a:solidFill>
                           <a:latin typeface="微软雅黑"/>
                           <a:ea typeface="微软雅黑"/>
                         </a:rPr>
-                        <a:t>sim_engine.py</a:t>
+                        <a:t>≤ −10 dB</a:t>
                       </a:r>
                     </a:p>
                   </a:txBody>
@@ -6400,14 +6302,14 @@
                     <a:lstStyle/>
                     <a:p>
                       <a:r>
-                        <a:rPr sz="1300" b="0">
+                        <a:rPr sz="1400" b="0">
                           <a:solidFill>
                             <a:srgbClr val="595959"/>
                           </a:solidFill>
                           <a:latin typeface="微软雅黑"/>
                           <a:ea typeface="微软雅黑"/>
                         </a:rPr>
-                        <a:t>六项指标 + 波形</a:t>
+                        <a:t>✅</a:t>
                       </a:r>
                     </a:p>
                   </a:txBody>
@@ -6417,6 +6319,11 @@
                     </a:solidFill>
                   </a:tcPr>
                 </a:tc>
+                <a:extLst>
+                  <a:ext uri="{0D108BD9-81ED-4DB2-BD59-A6C34878D82A}">
+                    <a16:rowId xmlns:a16="http://schemas.microsoft.com/office/drawing/2014/main" val="10003"/>
+                  </a:ext>
+                </a:extLst>
               </a:tr>
               <a:tr h="457200">
                 <a:tc>
@@ -6425,14 +6332,14 @@
                     <a:lstStyle/>
                     <a:p>
                       <a:r>
-                        <a:rPr sz="1300" b="1">
+                        <a:rPr sz="1400" b="1">
                           <a:solidFill>
                             <a:srgbClr val="1F3864"/>
                           </a:solidFill>
                           <a:latin typeface="微软雅黑"/>
                           <a:ea typeface="微软雅黑"/>
                         </a:rPr>
-                        <a:t>4</a:t>
+                        <a:t>I_OPA</a:t>
                       </a:r>
                     </a:p>
                   </a:txBody>
@@ -6448,14 +6355,14 @@
                     <a:lstStyle/>
                     <a:p>
                       <a:r>
-                        <a:rPr sz="1300" b="0">
+                        <a:rPr sz="1400" b="0">
                           <a:solidFill>
                             <a:srgbClr val="595959"/>
                           </a:solidFill>
                           <a:latin typeface="微软雅黑"/>
                           <a:ea typeface="微软雅黑"/>
                         </a:rPr>
-                        <a:t>最优尺寸回写电路图</a:t>
+                        <a:t>0.839 mA（Max）</a:t>
                       </a:r>
                     </a:p>
                   </a:txBody>
@@ -6471,14 +6378,14 @@
                     <a:lstStyle/>
                     <a:p>
                       <a:r>
-                        <a:rPr sz="1300" b="0">
+                        <a:rPr sz="1400" b="0">
                           <a:solidFill>
                             <a:srgbClr val="595959"/>
                           </a:solidFill>
                           <a:latin typeface="微软雅黑"/>
                           <a:ea typeface="微软雅黑"/>
                         </a:rPr>
-                        <a:t>writeback.py</a:t>
+                        <a:t>≤ 3 mA</a:t>
                       </a:r>
                     </a:p>
                   </a:txBody>
@@ -6494,14 +6401,14 @@
                     <a:lstStyle/>
                     <a:p>
                       <a:r>
-                        <a:rPr sz="1300" b="0">
+                        <a:rPr sz="1400" b="0">
                           <a:solidFill>
                             <a:srgbClr val="595959"/>
                           </a:solidFill>
                           <a:latin typeface="微软雅黑"/>
                           <a:ea typeface="微软雅黑"/>
                         </a:rPr>
-                        <a:t>schematic_var_best + 读回校验</a:t>
+                        <a:t>✅</a:t>
                       </a:r>
                     </a:p>
                   </a:txBody>
@@ -6511,6 +6418,11 @@
                     </a:solidFill>
                   </a:tcPr>
                 </a:tc>
+                <a:extLst>
+                  <a:ext uri="{0D108BD9-81ED-4DB2-BD59-A6C34878D82A}">
+                    <a16:rowId xmlns:a16="http://schemas.microsoft.com/office/drawing/2014/main" val="10004"/>
+                  </a:ext>
+                </a:extLst>
               </a:tr>
               <a:tr h="457200">
                 <a:tc>
@@ -6519,14 +6431,14 @@
                     <a:lstStyle/>
                     <a:p>
                       <a:r>
-                        <a:rPr sz="1300" b="1">
+                        <a:rPr sz="1400" b="1">
                           <a:solidFill>
                             <a:srgbClr val="1F3864"/>
                           </a:solidFill>
                           <a:latin typeface="微软雅黑"/>
                           <a:ea typeface="微软雅黑"/>
                         </a:rPr>
-                        <a:t>5</a:t>
+                        <a:t>UGB / Area</a:t>
                       </a:r>
                     </a:p>
                   </a:txBody>
@@ -6542,14 +6454,14 @@
                     <a:lstStyle/>
                     <a:p>
                       <a:r>
-                        <a:rPr sz="1300" b="0">
+                        <a:rPr sz="1400" b="0" dirty="0">
                           <a:solidFill>
                             <a:srgbClr val="595959"/>
                           </a:solidFill>
                           <a:latin typeface="微软雅黑"/>
                           <a:ea typeface="微软雅黑"/>
                         </a:rPr>
-                        <a:t>高集成自动优化接口</a:t>
+                        <a:t>13.84 MHz / 8361 µm²</a:t>
                       </a:r>
                     </a:p>
                   </a:txBody>
@@ -6565,14 +6477,14 @@
                     <a:lstStyle/>
                     <a:p>
                       <a:r>
-                        <a:rPr sz="1300" b="0">
+                        <a:rPr sz="1400" b="0">
                           <a:solidFill>
                             <a:srgbClr val="595959"/>
                           </a:solidFill>
                           <a:latin typeface="微软雅黑"/>
                           <a:ea typeface="微软雅黑"/>
                         </a:rPr>
-                        <a:t>run_auto.sh</a:t>
+                        <a:t>排名项</a:t>
                       </a:r>
                     </a:p>
                   </a:txBody>
@@ -6588,14 +6500,14 @@
                     <a:lstStyle/>
                     <a:p>
                       <a:r>
-                        <a:rPr sz="1300" b="0">
+                        <a:rPr sz="1400" b="0">
                           <a:solidFill>
                             <a:srgbClr val="595959"/>
                           </a:solidFill>
                           <a:latin typeface="微软雅黑"/>
                           <a:ea typeface="微软雅黑"/>
                         </a:rPr>
-                        <a:t>输入尺寸 → 输出性能</a:t>
+                        <a:t>—</a:t>
                       </a:r>
                     </a:p>
                   </a:txBody>
@@ -6605,6 +6517,11 @@
                     </a:solidFill>
                   </a:tcPr>
                 </a:tc>
+                <a:extLst>
+                  <a:ext uri="{0D108BD9-81ED-4DB2-BD59-A6C34878D82A}">
+                    <a16:rowId xmlns:a16="http://schemas.microsoft.com/office/drawing/2014/main" val="10005"/>
+                  </a:ext>
+                </a:extLst>
               </a:tr>
             </a:tbl>
           </a:graphicData>
@@ -6618,8 +6535,8 @@
         </p:nvSpPr>
         <p:spPr>
           <a:xfrm>
-            <a:off x="594360" y="4114800"/>
-            <a:ext cx="10972800" cy="2011680"/>
+            <a:off x="594360" y="4160520"/>
+            <a:ext cx="10972800" cy="1737360"/>
           </a:xfrm>
           <a:prstGeom prst="rect">
             <a:avLst/>
@@ -6638,49 +6555,166 @@
               </a:spcAft>
             </a:pPr>
             <a:r>
-              <a:rPr sz="1500" b="0">
+              <a:rPr sz="1500" b="0" dirty="0">
                 <a:solidFill>
                   <a:srgbClr val="595959"/>
                 </a:solidFill>
                 <a:latin typeface="微软雅黑"/>
                 <a:ea typeface="微软雅黑"/>
               </a:rPr>
-              <a:t>• 五个脚本共用 m4_common.py 一套口径（边界/单位/schema/旧路径修复），避免各写一份而走样</a:t>
-            </a:r>
-          </a:p>
-          <a:p>
-            <a:pPr>
-              <a:spcAft>
-                <a:spcPts val="1000"/>
-              </a:spcAft>
-            </a:pPr>
-            <a:r>
-              <a:rPr sz="1500" b="0">
+              <a:t>• </a:t>
+            </a:r>
+            <a:r>
+              <a:rPr sz="1500" b="0" dirty="0" err="1">
                 <a:solidFill>
                   <a:srgbClr val="595959"/>
                 </a:solidFill>
                 <a:latin typeface="微软雅黑"/>
                 <a:ea typeface="微软雅黑"/>
               </a:rPr>
-              <a:t>• 反标默认不动原图：目标视图不存在先尝试拷贝，无拷贝接口就中止，只有 --in_place 才改原图</a:t>
-            </a:r>
-          </a:p>
-          <a:p>
-            <a:pPr>
-              <a:spcAft>
-                <a:spcPts val="1000"/>
-              </a:spcAft>
-            </a:pPr>
-            <a:r>
-              <a:rPr sz="1500" b="0">
+              <a:t>覆盖：TT</a:t>
+            </a:r>
+            <a:r>
+              <a:rPr sz="1500" b="0" dirty="0">
                 <a:solidFill>
                   <a:srgbClr val="595959"/>
                 </a:solidFill>
                 <a:latin typeface="微软雅黑"/>
                 <a:ea typeface="微软雅黑"/>
               </a:rPr>
-              <a:t>• 所有脚本支持 --mock，评审在没有 license 的机器上也能复核</a:t>
-            </a:r>
+              <a:t>/FF/SS × 1.62/1.8/1.98 V × −40/27/125 ℃，共 9 角</a:t>
+            </a:r>
+          </a:p>
+          <a:p>
+            <a:pPr>
+              <a:spcAft>
+                <a:spcPts val="1000"/>
+              </a:spcAft>
+            </a:pPr>
+            <a:r>
+              <a:rPr sz="1500" b="0" dirty="0">
+                <a:solidFill>
+                  <a:srgbClr val="595959"/>
+                </a:solidFill>
+                <a:latin typeface="微软雅黑"/>
+                <a:ea typeface="微软雅黑"/>
+              </a:rPr>
+              <a:t>• </a:t>
+            </a:r>
+            <a:r>
+              <a:rPr sz="1500" b="0" dirty="0" err="1">
+                <a:solidFill>
+                  <a:srgbClr val="595959"/>
+                </a:solidFill>
+                <a:latin typeface="微软雅黑"/>
+                <a:ea typeface="微软雅黑"/>
+              </a:rPr>
+              <a:t>口径与</a:t>
+            </a:r>
+            <a:r>
+              <a:rPr sz="1500" b="0" dirty="0">
+                <a:solidFill>
+                  <a:srgbClr val="595959"/>
+                </a:solidFill>
+                <a:latin typeface="微软雅黑"/>
+                <a:ea typeface="微软雅黑"/>
+              </a:rPr>
+              <a:t> score.py </a:t>
+            </a:r>
+            <a:r>
+              <a:rPr sz="1500" b="0" dirty="0" err="1">
+                <a:solidFill>
+                  <a:srgbClr val="595959"/>
+                </a:solidFill>
+                <a:latin typeface="微软雅黑"/>
+                <a:ea typeface="微软雅黑"/>
+              </a:rPr>
+              <a:t>一致：PM</a:t>
+            </a:r>
+            <a:r>
+              <a:rPr sz="1500" b="0" dirty="0">
+                <a:solidFill>
+                  <a:srgbClr val="595959"/>
+                </a:solidFill>
+                <a:latin typeface="微软雅黑"/>
+                <a:ea typeface="微软雅黑"/>
+              </a:rPr>
+              <a:t>/Gain/UGB 取 </a:t>
+            </a:r>
+            <a:r>
+              <a:rPr sz="1500" b="0" dirty="0" err="1">
+                <a:solidFill>
+                  <a:srgbClr val="595959"/>
+                </a:solidFill>
+                <a:latin typeface="微软雅黑"/>
+                <a:ea typeface="微软雅黑"/>
+              </a:rPr>
+              <a:t>Min，GM</a:t>
+            </a:r>
+            <a:r>
+              <a:rPr sz="1500" b="0" dirty="0">
+                <a:solidFill>
+                  <a:srgbClr val="595959"/>
+                </a:solidFill>
+                <a:latin typeface="微软雅黑"/>
+                <a:ea typeface="微软雅黑"/>
+              </a:rPr>
+              <a:t>/I_OPA 取 Max</a:t>
+            </a:r>
+          </a:p>
+          <a:p>
+            <a:pPr>
+              <a:spcAft>
+                <a:spcPts val="1000"/>
+              </a:spcAft>
+            </a:pPr>
+            <a:r>
+              <a:rPr sz="1500" b="0" dirty="0">
+                <a:solidFill>
+                  <a:srgbClr val="595959"/>
+                </a:solidFill>
+                <a:latin typeface="微软雅黑"/>
+                <a:ea typeface="微软雅黑"/>
+              </a:rPr>
+              <a:t>• </a:t>
+            </a:r>
+            <a:r>
+              <a:rPr sz="1500" b="0" dirty="0" err="1">
+                <a:solidFill>
+                  <a:srgbClr val="595959"/>
+                </a:solidFill>
+                <a:latin typeface="微软雅黑"/>
+                <a:ea typeface="微软雅黑"/>
+              </a:rPr>
+              <a:t>裕度最小的是</a:t>
+            </a:r>
+            <a:r>
+              <a:rPr sz="1500" b="0" dirty="0">
+                <a:solidFill>
+                  <a:srgbClr val="595959"/>
+                </a:solidFill>
+                <a:latin typeface="微软雅黑"/>
+                <a:ea typeface="微软雅黑"/>
+              </a:rPr>
+              <a:t> GM（0.84 dB），</a:t>
+            </a:r>
+            <a:r>
+              <a:rPr sz="1500" b="0" dirty="0" err="1">
+                <a:solidFill>
+                  <a:srgbClr val="595959"/>
+                </a:solidFill>
+                <a:latin typeface="微软雅黑"/>
+                <a:ea typeface="微软雅黑"/>
+              </a:rPr>
+              <a:t>是最需要关注的指标</a:t>
+            </a:r>
+            <a:endParaRPr sz="1500" b="0" dirty="0">
+              <a:solidFill>
+                <a:srgbClr val="595959"/>
+              </a:solidFill>
+              <a:latin typeface="微软雅黑"/>
+              <a:ea typeface="微软雅黑"/>
+            </a:endParaRPr>
           </a:p>
         </p:txBody>
       </p:sp>
@@ -6693,7 +6727,7 @@
 </file>
 
 <file path=ppt/slides/slide12.xml><?xml version="1.0" encoding="utf-8"?>
-<p:sld xmlns:a="http://schemas.openxmlformats.org/drawingml/2006/main" xmlns:p="http://schemas.openxmlformats.org/presentationml/2006/main" xmlns:r="http://schemas.openxmlformats.org/officeDocument/2006/relationships">
+<p:sld xmlns:a="http://schemas.openxmlformats.org/drawingml/2006/main" xmlns:r="http://schemas.openxmlformats.org/officeDocument/2006/relationships" xmlns:p="http://schemas.openxmlformats.org/presentationml/2006/main">
   <p:cSld>
     <p:spTree>
       <p:nvGrpSpPr>
@@ -6701,7 +6735,14 @@
         <p:cNvGrpSpPr/>
         <p:nvPr/>
       </p:nvGrpSpPr>
-      <p:grpSpPr/>
+      <p:grpSpPr>
+        <a:xfrm>
+          <a:off x="0" y="0"/>
+          <a:ext cx="0" cy="0"/>
+          <a:chOff x="0" y="0"/>
+          <a:chExt cx="0" cy="0"/>
+        </a:xfrm>
+      </p:grpSpPr>
       <p:sp>
         <p:nvSpPr>
           <p:cNvPr id="2" name="Rectangle 1"/>
@@ -6743,6 +6784,7 @@
           <a:lstStyle/>
           <a:p>
             <a:pPr algn="ctr"/>
+            <a:endParaRPr/>
           </a:p>
         </p:txBody>
       </p:sp>
@@ -6776,7 +6818,7 @@
                 <a:latin typeface="微软雅黑"/>
                 <a:ea typeface="微软雅黑"/>
               </a:rPr>
-              <a:t>全 PVT 验证：9 个工艺角全部达标</a:t>
+              <a:t>电路图：参数化视图与反标视图</a:t>
             </a:r>
           </a:p>
         </p:txBody>
@@ -6812,7 +6854,7 @@
                 <a:latin typeface="微软雅黑"/>
                 <a:ea typeface="微软雅黑"/>
               </a:rPr>
-              <a:t>07 验证</a:t>
+              <a:t>08 结果</a:t>
             </a:r>
           </a:p>
         </p:txBody>
@@ -6883,603 +6925,35 @@
                 <a:latin typeface="微软雅黑"/>
                 <a:ea typeface="微软雅黑"/>
               </a:rPr>
-              <a:t>12</a:t>
-            </a:r>
-          </a:p>
-        </p:txBody>
-      </p:sp>
-      <p:graphicFrame>
-        <p:nvGraphicFramePr>
-          <p:cNvPr id="7" name="Table 6"/>
-          <p:cNvGraphicFramePr>
-            <a:graphicFrameLocks noGrp="1"/>
-          </p:cNvGraphicFramePr>
+              <a:t>13</a:t>
+            </a:r>
+          </a:p>
+        </p:txBody>
+      </p:sp>
+      <p:pic>
+        <p:nvPicPr>
+          <p:cNvPr id="7" name="Picture 6" descr="01_schematic_parameterized.png"/>
+          <p:cNvPicPr>
+            <a:picLocks noChangeAspect="1"/>
+          </p:cNvPicPr>
           <p:nvPr/>
-        </p:nvGraphicFramePr>
-        <p:xfrm>
-          <a:off x="594360" y="1170432"/>
-          <a:ext cx="10972798" cy="2743200"/>
-        </p:xfrm>
-        <a:graphic>
-          <a:graphicData uri="http://schemas.openxmlformats.org/drawingml/2006/table">
-            <a:tbl>
-              <a:tblPr firstRow="1" bandRow="1">
-                <a:tableStyleId>{5C22544A-7EE6-4342-B048-85BDC9FD1C3A}</a:tableStyleId>
-              </a:tblPr>
-              <a:tblGrid>
-                <a:gridCol w="2698229"/>
-                <a:gridCol w="3957403"/>
-                <a:gridCol w="2878111"/>
-                <a:gridCol w="1439055"/>
-              </a:tblGrid>
-              <a:tr h="457200">
-                <a:tc>
-                  <a:txBody>
-                    <a:bodyPr/>
-                    <a:lstStyle/>
-                    <a:p>
-                      <a:r>
-                        <a:rPr sz="1300" b="1">
-                          <a:solidFill>
-                            <a:srgbClr val="FFFFFF"/>
-                          </a:solidFill>
-                          <a:latin typeface="微软雅黑"/>
-                          <a:ea typeface="微软雅黑"/>
-                        </a:rPr>
-                        <a:t>指标</a:t>
-                      </a:r>
-                    </a:p>
-                  </a:txBody>
-                  <a:tcPr>
-                    <a:solidFill>
-                      <a:srgbClr val="1F3864"/>
-                    </a:solidFill>
-                  </a:tcPr>
-                </a:tc>
-                <a:tc>
-                  <a:txBody>
-                    <a:bodyPr/>
-                    <a:lstStyle/>
-                    <a:p>
-                      <a:r>
-                        <a:rPr sz="1300" b="1">
-                          <a:solidFill>
-                            <a:srgbClr val="FFFFFF"/>
-                          </a:solidFill>
-                          <a:latin typeface="微软雅黑"/>
-                          <a:ea typeface="微软雅黑"/>
-                        </a:rPr>
-                        <a:t>最坏值</a:t>
-                      </a:r>
-                    </a:p>
-                  </a:txBody>
-                  <a:tcPr>
-                    <a:solidFill>
-                      <a:srgbClr val="1F3864"/>
-                    </a:solidFill>
-                  </a:tcPr>
-                </a:tc>
-                <a:tc>
-                  <a:txBody>
-                    <a:bodyPr/>
-                    <a:lstStyle/>
-                    <a:p>
-                      <a:r>
-                        <a:rPr sz="1300" b="1">
-                          <a:solidFill>
-                            <a:srgbClr val="FFFFFF"/>
-                          </a:solidFill>
-                          <a:latin typeface="微软雅黑"/>
-                          <a:ea typeface="微软雅黑"/>
-                        </a:rPr>
-                        <a:t>门限</a:t>
-                      </a:r>
-                    </a:p>
-                  </a:txBody>
-                  <a:tcPr>
-                    <a:solidFill>
-                      <a:srgbClr val="1F3864"/>
-                    </a:solidFill>
-                  </a:tcPr>
-                </a:tc>
-                <a:tc>
-                  <a:txBody>
-                    <a:bodyPr/>
-                    <a:lstStyle/>
-                    <a:p>
-                      <a:r>
-                        <a:rPr sz="1300" b="1">
-                          <a:solidFill>
-                            <a:srgbClr val="FFFFFF"/>
-                          </a:solidFill>
-                          <a:latin typeface="微软雅黑"/>
-                          <a:ea typeface="微软雅黑"/>
-                        </a:rPr>
-                        <a:t>判定</a:t>
-                      </a:r>
-                    </a:p>
-                  </a:txBody>
-                  <a:tcPr>
-                    <a:solidFill>
-                      <a:srgbClr val="1F3864"/>
-                    </a:solidFill>
-                  </a:tcPr>
-                </a:tc>
-              </a:tr>
-              <a:tr h="457200">
-                <a:tc>
-                  <a:txBody>
-                    <a:bodyPr/>
-                    <a:lstStyle/>
-                    <a:p>
-                      <a:r>
-                        <a:rPr sz="1400" b="1">
-                          <a:solidFill>
-                            <a:srgbClr val="1F3864"/>
-                          </a:solidFill>
-                          <a:latin typeface="微软雅黑"/>
-                          <a:ea typeface="微软雅黑"/>
-                        </a:rPr>
-                        <a:t>DC Gain</a:t>
-                      </a:r>
-                    </a:p>
-                  </a:txBody>
-                  <a:tcPr>
-                    <a:solidFill>
-                      <a:srgbClr val="EEF2F8"/>
-                    </a:solidFill>
-                  </a:tcPr>
-                </a:tc>
-                <a:tc>
-                  <a:txBody>
-                    <a:bodyPr/>
-                    <a:lstStyle/>
-                    <a:p>
-                      <a:r>
-                        <a:rPr sz="1400" b="0">
-                          <a:solidFill>
-                            <a:srgbClr val="595959"/>
-                          </a:solidFill>
-                          <a:latin typeface="微软雅黑"/>
-                          <a:ea typeface="微软雅黑"/>
-                        </a:rPr>
-                        <a:t>45.85 dB（Min）</a:t>
-                      </a:r>
-                    </a:p>
-                  </a:txBody>
-                  <a:tcPr>
-                    <a:solidFill>
-                      <a:srgbClr val="EEF2F8"/>
-                    </a:solidFill>
-                  </a:tcPr>
-                </a:tc>
-                <a:tc>
-                  <a:txBody>
-                    <a:bodyPr/>
-                    <a:lstStyle/>
-                    <a:p>
-                      <a:r>
-                        <a:rPr sz="1400" b="0">
-                          <a:solidFill>
-                            <a:srgbClr val="595959"/>
-                          </a:solidFill>
-                          <a:latin typeface="微软雅黑"/>
-                          <a:ea typeface="微软雅黑"/>
-                        </a:rPr>
-                        <a:t>≥ 40 dB</a:t>
-                      </a:r>
-                    </a:p>
-                  </a:txBody>
-                  <a:tcPr>
-                    <a:solidFill>
-                      <a:srgbClr val="EEF2F8"/>
-                    </a:solidFill>
-                  </a:tcPr>
-                </a:tc>
-                <a:tc>
-                  <a:txBody>
-                    <a:bodyPr/>
-                    <a:lstStyle/>
-                    <a:p>
-                      <a:r>
-                        <a:rPr sz="1400" b="0">
-                          <a:solidFill>
-                            <a:srgbClr val="595959"/>
-                          </a:solidFill>
-                          <a:latin typeface="微软雅黑"/>
-                          <a:ea typeface="微软雅黑"/>
-                        </a:rPr>
-                        <a:t>✅</a:t>
-                      </a:r>
-                    </a:p>
-                  </a:txBody>
-                  <a:tcPr>
-                    <a:solidFill>
-                      <a:srgbClr val="EEF2F8"/>
-                    </a:solidFill>
-                  </a:tcPr>
-                </a:tc>
-              </a:tr>
-              <a:tr h="457200">
-                <a:tc>
-                  <a:txBody>
-                    <a:bodyPr/>
-                    <a:lstStyle/>
-                    <a:p>
-                      <a:r>
-                        <a:rPr sz="1400" b="1">
-                          <a:solidFill>
-                            <a:srgbClr val="1F3864"/>
-                          </a:solidFill>
-                          <a:latin typeface="微软雅黑"/>
-                          <a:ea typeface="微软雅黑"/>
-                        </a:rPr>
-                        <a:t>Phase Margin</a:t>
-                      </a:r>
-                    </a:p>
-                  </a:txBody>
-                  <a:tcPr>
-                    <a:solidFill>
-                      <a:srgbClr val="FFFFFF"/>
-                    </a:solidFill>
-                  </a:tcPr>
-                </a:tc>
-                <a:tc>
-                  <a:txBody>
-                    <a:bodyPr/>
-                    <a:lstStyle/>
-                    <a:p>
-                      <a:r>
-                        <a:rPr sz="1400" b="0">
-                          <a:solidFill>
-                            <a:srgbClr val="595959"/>
-                          </a:solidFill>
-                          <a:latin typeface="微软雅黑"/>
-                          <a:ea typeface="微软雅黑"/>
-                        </a:rPr>
-                        <a:t>61.20°（Min）</a:t>
-                      </a:r>
-                    </a:p>
-                  </a:txBody>
-                  <a:tcPr>
-                    <a:solidFill>
-                      <a:srgbClr val="FFFFFF"/>
-                    </a:solidFill>
-                  </a:tcPr>
-                </a:tc>
-                <a:tc>
-                  <a:txBody>
-                    <a:bodyPr/>
-                    <a:lstStyle/>
-                    <a:p>
-                      <a:r>
-                        <a:rPr sz="1400" b="0">
-                          <a:solidFill>
-                            <a:srgbClr val="595959"/>
-                          </a:solidFill>
-                          <a:latin typeface="微软雅黑"/>
-                          <a:ea typeface="微软雅黑"/>
-                        </a:rPr>
-                        <a:t>≥ 50°</a:t>
-                      </a:r>
-                    </a:p>
-                  </a:txBody>
-                  <a:tcPr>
-                    <a:solidFill>
-                      <a:srgbClr val="FFFFFF"/>
-                    </a:solidFill>
-                  </a:tcPr>
-                </a:tc>
-                <a:tc>
-                  <a:txBody>
-                    <a:bodyPr/>
-                    <a:lstStyle/>
-                    <a:p>
-                      <a:r>
-                        <a:rPr sz="1400" b="0">
-                          <a:solidFill>
-                            <a:srgbClr val="595959"/>
-                          </a:solidFill>
-                          <a:latin typeface="微软雅黑"/>
-                          <a:ea typeface="微软雅黑"/>
-                        </a:rPr>
-                        <a:t>✅</a:t>
-                      </a:r>
-                    </a:p>
-                  </a:txBody>
-                  <a:tcPr>
-                    <a:solidFill>
-                      <a:srgbClr val="FFFFFF"/>
-                    </a:solidFill>
-                  </a:tcPr>
-                </a:tc>
-              </a:tr>
-              <a:tr h="457200">
-                <a:tc>
-                  <a:txBody>
-                    <a:bodyPr/>
-                    <a:lstStyle/>
-                    <a:p>
-                      <a:r>
-                        <a:rPr sz="1400" b="1">
-                          <a:solidFill>
-                            <a:srgbClr val="1F3864"/>
-                          </a:solidFill>
-                          <a:latin typeface="微软雅黑"/>
-                          <a:ea typeface="微软雅黑"/>
-                        </a:rPr>
-                        <a:t>Gain Margin</a:t>
-                      </a:r>
-                    </a:p>
-                  </a:txBody>
-                  <a:tcPr>
-                    <a:solidFill>
-                      <a:srgbClr val="EEF2F8"/>
-                    </a:solidFill>
-                  </a:tcPr>
-                </a:tc>
-                <a:tc>
-                  <a:txBody>
-                    <a:bodyPr/>
-                    <a:lstStyle/>
-                    <a:p>
-                      <a:r>
-                        <a:rPr sz="1400" b="0">
-                          <a:solidFill>
-                            <a:srgbClr val="595959"/>
-                          </a:solidFill>
-                          <a:latin typeface="微软雅黑"/>
-                          <a:ea typeface="微软雅黑"/>
-                        </a:rPr>
-                        <a:t>−10.84 dB（Max）</a:t>
-                      </a:r>
-                    </a:p>
-                  </a:txBody>
-                  <a:tcPr>
-                    <a:solidFill>
-                      <a:srgbClr val="EEF2F8"/>
-                    </a:solidFill>
-                  </a:tcPr>
-                </a:tc>
-                <a:tc>
-                  <a:txBody>
-                    <a:bodyPr/>
-                    <a:lstStyle/>
-                    <a:p>
-                      <a:r>
-                        <a:rPr sz="1400" b="0">
-                          <a:solidFill>
-                            <a:srgbClr val="595959"/>
-                          </a:solidFill>
-                          <a:latin typeface="微软雅黑"/>
-                          <a:ea typeface="微软雅黑"/>
-                        </a:rPr>
-                        <a:t>≤ −10 dB</a:t>
-                      </a:r>
-                    </a:p>
-                  </a:txBody>
-                  <a:tcPr>
-                    <a:solidFill>
-                      <a:srgbClr val="EEF2F8"/>
-                    </a:solidFill>
-                  </a:tcPr>
-                </a:tc>
-                <a:tc>
-                  <a:txBody>
-                    <a:bodyPr/>
-                    <a:lstStyle/>
-                    <a:p>
-                      <a:r>
-                        <a:rPr sz="1400" b="0">
-                          <a:solidFill>
-                            <a:srgbClr val="595959"/>
-                          </a:solidFill>
-                          <a:latin typeface="微软雅黑"/>
-                          <a:ea typeface="微软雅黑"/>
-                        </a:rPr>
-                        <a:t>✅</a:t>
-                      </a:r>
-                    </a:p>
-                  </a:txBody>
-                  <a:tcPr>
-                    <a:solidFill>
-                      <a:srgbClr val="EEF2F8"/>
-                    </a:solidFill>
-                  </a:tcPr>
-                </a:tc>
-              </a:tr>
-              <a:tr h="457200">
-                <a:tc>
-                  <a:txBody>
-                    <a:bodyPr/>
-                    <a:lstStyle/>
-                    <a:p>
-                      <a:r>
-                        <a:rPr sz="1400" b="1">
-                          <a:solidFill>
-                            <a:srgbClr val="1F3864"/>
-                          </a:solidFill>
-                          <a:latin typeface="微软雅黑"/>
-                          <a:ea typeface="微软雅黑"/>
-                        </a:rPr>
-                        <a:t>I_OPA</a:t>
-                      </a:r>
-                    </a:p>
-                  </a:txBody>
-                  <a:tcPr>
-                    <a:solidFill>
-                      <a:srgbClr val="FFFFFF"/>
-                    </a:solidFill>
-                  </a:tcPr>
-                </a:tc>
-                <a:tc>
-                  <a:txBody>
-                    <a:bodyPr/>
-                    <a:lstStyle/>
-                    <a:p>
-                      <a:r>
-                        <a:rPr sz="1400" b="0">
-                          <a:solidFill>
-                            <a:srgbClr val="595959"/>
-                          </a:solidFill>
-                          <a:latin typeface="微软雅黑"/>
-                          <a:ea typeface="微软雅黑"/>
-                        </a:rPr>
-                        <a:t>0.839 mA（Max）</a:t>
-                      </a:r>
-                    </a:p>
-                  </a:txBody>
-                  <a:tcPr>
-                    <a:solidFill>
-                      <a:srgbClr val="FFFFFF"/>
-                    </a:solidFill>
-                  </a:tcPr>
-                </a:tc>
-                <a:tc>
-                  <a:txBody>
-                    <a:bodyPr/>
-                    <a:lstStyle/>
-                    <a:p>
-                      <a:r>
-                        <a:rPr sz="1400" b="0">
-                          <a:solidFill>
-                            <a:srgbClr val="595959"/>
-                          </a:solidFill>
-                          <a:latin typeface="微软雅黑"/>
-                          <a:ea typeface="微软雅黑"/>
-                        </a:rPr>
-                        <a:t>≤ 3 mA</a:t>
-                      </a:r>
-                    </a:p>
-                  </a:txBody>
-                  <a:tcPr>
-                    <a:solidFill>
-                      <a:srgbClr val="FFFFFF"/>
-                    </a:solidFill>
-                  </a:tcPr>
-                </a:tc>
-                <a:tc>
-                  <a:txBody>
-                    <a:bodyPr/>
-                    <a:lstStyle/>
-                    <a:p>
-                      <a:r>
-                        <a:rPr sz="1400" b="0">
-                          <a:solidFill>
-                            <a:srgbClr val="595959"/>
-                          </a:solidFill>
-                          <a:latin typeface="微软雅黑"/>
-                          <a:ea typeface="微软雅黑"/>
-                        </a:rPr>
-                        <a:t>✅</a:t>
-                      </a:r>
-                    </a:p>
-                  </a:txBody>
-                  <a:tcPr>
-                    <a:solidFill>
-                      <a:srgbClr val="FFFFFF"/>
-                    </a:solidFill>
-                  </a:tcPr>
-                </a:tc>
-              </a:tr>
-              <a:tr h="457200">
-                <a:tc>
-                  <a:txBody>
-                    <a:bodyPr/>
-                    <a:lstStyle/>
-                    <a:p>
-                      <a:r>
-                        <a:rPr sz="1400" b="1">
-                          <a:solidFill>
-                            <a:srgbClr val="1F3864"/>
-                          </a:solidFill>
-                          <a:latin typeface="微软雅黑"/>
-                          <a:ea typeface="微软雅黑"/>
-                        </a:rPr>
-                        <a:t>UGB / Area</a:t>
-                      </a:r>
-                    </a:p>
-                  </a:txBody>
-                  <a:tcPr>
-                    <a:solidFill>
-                      <a:srgbClr val="EEF2F8"/>
-                    </a:solidFill>
-                  </a:tcPr>
-                </a:tc>
-                <a:tc>
-                  <a:txBody>
-                    <a:bodyPr/>
-                    <a:lstStyle/>
-                    <a:p>
-                      <a:r>
-                        <a:rPr sz="1400" b="0">
-                          <a:solidFill>
-                            <a:srgbClr val="595959"/>
-                          </a:solidFill>
-                          <a:latin typeface="微软雅黑"/>
-                          <a:ea typeface="微软雅黑"/>
-                        </a:rPr>
-                        <a:t>13.84 MHz / 8361 µm²</a:t>
-                      </a:r>
-                    </a:p>
-                  </a:txBody>
-                  <a:tcPr>
-                    <a:solidFill>
-                      <a:srgbClr val="EEF2F8"/>
-                    </a:solidFill>
-                  </a:tcPr>
-                </a:tc>
-                <a:tc>
-                  <a:txBody>
-                    <a:bodyPr/>
-                    <a:lstStyle/>
-                    <a:p>
-                      <a:r>
-                        <a:rPr sz="1400" b="0">
-                          <a:solidFill>
-                            <a:srgbClr val="595959"/>
-                          </a:solidFill>
-                          <a:latin typeface="微软雅黑"/>
-                          <a:ea typeface="微软雅黑"/>
-                        </a:rPr>
-                        <a:t>排名项</a:t>
-                      </a:r>
-                    </a:p>
-                  </a:txBody>
-                  <a:tcPr>
-                    <a:solidFill>
-                      <a:srgbClr val="EEF2F8"/>
-                    </a:solidFill>
-                  </a:tcPr>
-                </a:tc>
-                <a:tc>
-                  <a:txBody>
-                    <a:bodyPr/>
-                    <a:lstStyle/>
-                    <a:p>
-                      <a:r>
-                        <a:rPr sz="1400" b="0">
-                          <a:solidFill>
-                            <a:srgbClr val="595959"/>
-                          </a:solidFill>
-                          <a:latin typeface="微软雅黑"/>
-                          <a:ea typeface="微软雅黑"/>
-                        </a:rPr>
-                        <a:t>—</a:t>
-                      </a:r>
-                    </a:p>
-                  </a:txBody>
-                  <a:tcPr>
-                    <a:solidFill>
-                      <a:srgbClr val="EEF2F8"/>
-                    </a:solidFill>
-                  </a:tcPr>
-                </a:tc>
-              </a:tr>
-            </a:tbl>
-          </a:graphicData>
-        </a:graphic>
-      </p:graphicFrame>
+        </p:nvPicPr>
+        <p:blipFill>
+          <a:blip r:embed="rId3"/>
+          <a:stretch>
+            <a:fillRect/>
+          </a:stretch>
+        </p:blipFill>
+        <p:spPr>
+          <a:xfrm>
+            <a:off x="640080" y="1325880"/>
+            <a:ext cx="5394960" cy="3213373"/>
+          </a:xfrm>
+          <a:prstGeom prst="rect">
+            <a:avLst/>
+          </a:prstGeom>
+        </p:spPr>
+      </p:pic>
       <p:sp>
         <p:nvSpPr>
           <p:cNvPr id="8" name="TextBox 7"/>
@@ -7488,8 +6962,8 @@
         </p:nvSpPr>
         <p:spPr>
           <a:xfrm>
-            <a:off x="594360" y="4160520"/>
-            <a:ext cx="10972800" cy="1737360"/>
+            <a:off x="640080" y="5349240"/>
+            <a:ext cx="5394960" cy="365760"/>
           </a:xfrm>
           <a:prstGeom prst="rect">
             <a:avLst/>
@@ -7497,59 +6971,114 @@
           <a:noFill/>
         </p:spPr>
         <p:txBody>
-          <a:bodyPr wrap="square">
+          <a:bodyPr wrap="none">
             <a:spAutoFit/>
           </a:bodyPr>
           <a:lstStyle/>
           <a:p>
-            <a:pPr>
-              <a:spcAft>
-                <a:spcPts val="1000"/>
-              </a:spcAft>
-            </a:pPr>
-            <a:r>
-              <a:rPr sz="1500" b="0">
+            <a:r>
+              <a:rPr sz="1200" b="0">
                 <a:solidFill>
                   <a:srgbClr val="595959"/>
                 </a:solidFill>
                 <a:latin typeface="微软雅黑"/>
                 <a:ea typeface="微软雅黑"/>
               </a:rPr>
-              <a:t>• 覆盖：TT/FF/SS × 1.62/1.8/1.98 V × −40/27/125 ℃，共 9 角</a:t>
-            </a:r>
-          </a:p>
-          <a:p>
-            <a:pPr>
-              <a:spcAft>
-                <a:spcPts val="1000"/>
-              </a:spcAft>
-            </a:pPr>
-            <a:r>
-              <a:rPr sz="1500" b="0">
+              <a:t>参数化视图（尺寸为变量）</a:t>
+            </a:r>
+          </a:p>
+        </p:txBody>
+      </p:sp>
+      <p:pic>
+        <p:nvPicPr>
+          <p:cNvPr id="9" name="Picture 8" descr="02_schematic_var_best.png"/>
+          <p:cNvPicPr>
+            <a:picLocks noChangeAspect="1"/>
+          </p:cNvPicPr>
+          <p:nvPr/>
+        </p:nvPicPr>
+        <p:blipFill>
+          <a:blip r:embed="rId4"/>
+          <a:stretch>
+            <a:fillRect/>
+          </a:stretch>
+        </p:blipFill>
+        <p:spPr>
+          <a:xfrm>
+            <a:off x="6172200" y="1325880"/>
+            <a:ext cx="5394960" cy="3203258"/>
+          </a:xfrm>
+          <a:prstGeom prst="rect">
+            <a:avLst/>
+          </a:prstGeom>
+        </p:spPr>
+      </p:pic>
+      <p:sp>
+        <p:nvSpPr>
+          <p:cNvPr id="10" name="TextBox 9"/>
+          <p:cNvSpPr txBox="1"/>
+          <p:nvPr/>
+        </p:nvSpPr>
+        <p:spPr>
+          <a:xfrm>
+            <a:off x="6172200" y="5349240"/>
+            <a:ext cx="5394960" cy="365760"/>
+          </a:xfrm>
+          <a:prstGeom prst="rect">
+            <a:avLst/>
+          </a:prstGeom>
+          <a:noFill/>
+        </p:spPr>
+        <p:txBody>
+          <a:bodyPr wrap="none">
+            <a:spAutoFit/>
+          </a:bodyPr>
+          <a:lstStyle/>
+          <a:p>
+            <a:r>
+              <a:rPr sz="1200" b="0">
                 <a:solidFill>
                   <a:srgbClr val="595959"/>
                 </a:solidFill>
                 <a:latin typeface="微软雅黑"/>
                 <a:ea typeface="微软雅黑"/>
               </a:rPr>
-              <a:t>• 口径与 score.py 一致：PM/Gain/UGB 取 Min，GM/I_OPA 取 Max</a:t>
-            </a:r>
-          </a:p>
-          <a:p>
-            <a:pPr>
-              <a:spcAft>
-                <a:spcPts val="1000"/>
-              </a:spcAft>
-            </a:pPr>
-            <a:r>
-              <a:rPr sz="1500" b="0">
+              <a:t>反标视图（尺寸已写回数值）</a:t>
+            </a:r>
+          </a:p>
+        </p:txBody>
+      </p:sp>
+      <p:sp>
+        <p:nvSpPr>
+          <p:cNvPr id="11" name="TextBox 10"/>
+          <p:cNvSpPr txBox="1"/>
+          <p:nvPr/>
+        </p:nvSpPr>
+        <p:spPr>
+          <a:xfrm>
+            <a:off x="640080" y="5852160"/>
+            <a:ext cx="10972800" cy="365760"/>
+          </a:xfrm>
+          <a:prstGeom prst="rect">
+            <a:avLst/>
+          </a:prstGeom>
+          <a:noFill/>
+        </p:spPr>
+        <p:txBody>
+          <a:bodyPr wrap="none">
+            <a:spAutoFit/>
+          </a:bodyPr>
+          <a:lstStyle/>
+          <a:p>
+            <a:r>
+              <a:rPr sz="1100" b="0">
                 <a:solidFill>
-                  <a:srgbClr val="595959"/>
+                  <a:srgbClr val="8C8C8C"/>
                 </a:solidFill>
                 <a:latin typeface="微软雅黑"/>
                 <a:ea typeface="微软雅黑"/>
               </a:rPr>
-              <a:t>• 裕度最小的是 GM（0.84 dB），是最需要关注的指标</a:t>
+              <a:t>截图来自流程演示运行；最终尺寸见 2026_EDA_case1_best_params.txt（105 行）</a:t>
             </a:r>
           </a:p>
         </p:txBody>
@@ -7563,7 +7092,7 @@
 </file>
 
 <file path=ppt/slides/slide13.xml><?xml version="1.0" encoding="utf-8"?>
-<p:sld xmlns:a="http://schemas.openxmlformats.org/drawingml/2006/main" xmlns:p="http://schemas.openxmlformats.org/presentationml/2006/main" xmlns:r="http://schemas.openxmlformats.org/officeDocument/2006/relationships">
+<p:sld xmlns:a="http://schemas.openxmlformats.org/drawingml/2006/main" xmlns:r="http://schemas.openxmlformats.org/officeDocument/2006/relationships" xmlns:p="http://schemas.openxmlformats.org/presentationml/2006/main">
   <p:cSld>
     <p:spTree>
       <p:nvGrpSpPr>
@@ -7571,7 +7100,14 @@
         <p:cNvGrpSpPr/>
         <p:nvPr/>
       </p:nvGrpSpPr>
-      <p:grpSpPr/>
+      <p:grpSpPr>
+        <a:xfrm>
+          <a:off x="0" y="0"/>
+          <a:ext cx="0" cy="0"/>
+          <a:chOff x="0" y="0"/>
+          <a:chExt cx="0" cy="0"/>
+        </a:xfrm>
+      </p:grpSpPr>
       <p:sp>
         <p:nvSpPr>
           <p:cNvPr id="2" name="Rectangle 1"/>
@@ -7613,6 +7149,7 @@
           <a:lstStyle/>
           <a:p>
             <a:pPr algn="ctr"/>
+            <a:endParaRPr/>
           </a:p>
         </p:txBody>
       </p:sp>
@@ -7646,7 +7183,7 @@
                 <a:latin typeface="微软雅黑"/>
                 <a:ea typeface="微软雅黑"/>
               </a:rPr>
-              <a:t>电路图：参数化视图与反标视图</a:t>
+              <a:t>算法性能与代码质量</a:t>
             </a:r>
           </a:p>
         </p:txBody>
@@ -7682,7 +7219,7 @@
                 <a:latin typeface="微软雅黑"/>
                 <a:ea typeface="微软雅黑"/>
               </a:rPr>
-              <a:t>08 结果</a:t>
+              <a:t>09 工程</a:t>
             </a:r>
           </a:p>
         </p:txBody>
@@ -7753,35 +7290,420 @@
                 <a:latin typeface="微软雅黑"/>
                 <a:ea typeface="微软雅黑"/>
               </a:rPr>
-              <a:t>13</a:t>
-            </a:r>
-          </a:p>
-        </p:txBody>
-      </p:sp>
-      <p:pic>
-        <p:nvPicPr>
-          <p:cNvPr id="7" name="Picture 6" descr="01_schematic_parameterized.png"/>
-          <p:cNvPicPr>
-            <a:picLocks noChangeAspect="1"/>
-          </p:cNvPicPr>
+              <a:t>14</a:t>
+            </a:r>
+          </a:p>
+        </p:txBody>
+      </p:sp>
+      <p:graphicFrame>
+        <p:nvGraphicFramePr>
+          <p:cNvPr id="7" name="Table 6"/>
+          <p:cNvGraphicFramePr>
+            <a:graphicFrameLocks noGrp="1"/>
+          </p:cNvGraphicFramePr>
           <p:nvPr/>
-        </p:nvPicPr>
-        <p:blipFill>
-          <a:blip r:embed="rId2"/>
-          <a:stretch>
-            <a:fillRect/>
-          </a:stretch>
-        </p:blipFill>
-        <p:spPr>
-          <a:xfrm>
-            <a:off x="640080" y="1325880"/>
-            <a:ext cx="5394960" cy="3213373"/>
-          </a:xfrm>
-          <a:prstGeom prst="rect">
-            <a:avLst/>
-          </a:prstGeom>
-        </p:spPr>
-      </p:pic>
+        </p:nvGraphicFramePr>
+        <p:xfrm>
+          <a:off x="594360" y="1188720"/>
+          <a:ext cx="10972800" cy="3200400"/>
+        </p:xfrm>
+        <a:graphic>
+          <a:graphicData uri="http://schemas.openxmlformats.org/drawingml/2006/table">
+            <a:tbl>
+              <a:tblPr firstRow="1" bandRow="1">
+                <a:tableStyleId>{5C22544A-7EE6-4342-B048-85BDC9FD1C3A}</a:tableStyleId>
+              </a:tblPr>
+              <a:tblGrid>
+                <a:gridCol w="4206240">
+                  <a:extLst>
+                    <a:ext uri="{9D8B030D-6E8A-4147-A177-3AD203B41FA5}">
+                      <a16:colId xmlns:a16="http://schemas.microsoft.com/office/drawing/2014/main" val="20000"/>
+                    </a:ext>
+                  </a:extLst>
+                </a:gridCol>
+                <a:gridCol w="6766560">
+                  <a:extLst>
+                    <a:ext uri="{9D8B030D-6E8A-4147-A177-3AD203B41FA5}">
+                      <a16:colId xmlns:a16="http://schemas.microsoft.com/office/drawing/2014/main" val="20001"/>
+                    </a:ext>
+                  </a:extLst>
+                </a:gridCol>
+              </a:tblGrid>
+              <a:tr h="457200">
+                <a:tc>
+                  <a:txBody>
+                    <a:bodyPr/>
+                    <a:lstStyle/>
+                    <a:p>
+                      <a:r>
+                        <a:rPr sz="1300" b="1">
+                          <a:solidFill>
+                            <a:srgbClr val="FFFFFF"/>
+                          </a:solidFill>
+                          <a:latin typeface="微软雅黑"/>
+                          <a:ea typeface="微软雅黑"/>
+                        </a:rPr>
+                        <a:t>指标</a:t>
+                      </a:r>
+                    </a:p>
+                  </a:txBody>
+                  <a:tcPr>
+                    <a:solidFill>
+                      <a:srgbClr val="1F3864"/>
+                    </a:solidFill>
+                  </a:tcPr>
+                </a:tc>
+                <a:tc>
+                  <a:txBody>
+                    <a:bodyPr/>
+                    <a:lstStyle/>
+                    <a:p>
+                      <a:r>
+                        <a:rPr sz="1300" b="1">
+                          <a:solidFill>
+                            <a:srgbClr val="FFFFFF"/>
+                          </a:solidFill>
+                          <a:latin typeface="微软雅黑"/>
+                          <a:ea typeface="微软雅黑"/>
+                        </a:rPr>
+                        <a:t>数值</a:t>
+                      </a:r>
+                    </a:p>
+                  </a:txBody>
+                  <a:tcPr>
+                    <a:solidFill>
+                      <a:srgbClr val="1F3864"/>
+                    </a:solidFill>
+                  </a:tcPr>
+                </a:tc>
+                <a:extLst>
+                  <a:ext uri="{0D108BD9-81ED-4DB2-BD59-A6C34878D82A}">
+                    <a16:rowId xmlns:a16="http://schemas.microsoft.com/office/drawing/2014/main" val="10000"/>
+                  </a:ext>
+                </a:extLst>
+              </a:tr>
+              <a:tr h="457200">
+                <a:tc>
+                  <a:txBody>
+                    <a:bodyPr/>
+                    <a:lstStyle/>
+                    <a:p>
+                      <a:r>
+                        <a:rPr sz="1400" b="1">
+                          <a:solidFill>
+                            <a:srgbClr val="1F3864"/>
+                          </a:solidFill>
+                          <a:latin typeface="微软雅黑"/>
+                          <a:ea typeface="微软雅黑"/>
+                        </a:rPr>
+                        <a:t>总运行时间</a:t>
+                      </a:r>
+                    </a:p>
+                  </a:txBody>
+                  <a:tcPr>
+                    <a:solidFill>
+                      <a:srgbClr val="EEF2F8"/>
+                    </a:solidFill>
+                  </a:tcPr>
+                </a:tc>
+                <a:tc>
+                  <a:txBody>
+                    <a:bodyPr/>
+                    <a:lstStyle/>
+                    <a:p>
+                      <a:r>
+                        <a:rPr sz="1400" b="0">
+                          <a:solidFill>
+                            <a:srgbClr val="595959"/>
+                          </a:solidFill>
+                          <a:latin typeface="微软雅黑"/>
+                          <a:ea typeface="微软雅黑"/>
+                        </a:rPr>
+                        <a:t>6941.5 s（外壳计时 6951 s）</a:t>
+                      </a:r>
+                    </a:p>
+                  </a:txBody>
+                  <a:tcPr>
+                    <a:solidFill>
+                      <a:srgbClr val="EEF2F8"/>
+                    </a:solidFill>
+                  </a:tcPr>
+                </a:tc>
+                <a:extLst>
+                  <a:ext uri="{0D108BD9-81ED-4DB2-BD59-A6C34878D82A}">
+                    <a16:rowId xmlns:a16="http://schemas.microsoft.com/office/drawing/2014/main" val="10001"/>
+                  </a:ext>
+                </a:extLst>
+              </a:tr>
+              <a:tr h="457200">
+                <a:tc>
+                  <a:txBody>
+                    <a:bodyPr/>
+                    <a:lstStyle/>
+                    <a:p>
+                      <a:r>
+                        <a:rPr sz="1400" b="1">
+                          <a:solidFill>
+                            <a:srgbClr val="1F3864"/>
+                          </a:solidFill>
+                          <a:latin typeface="微软雅黑"/>
+                          <a:ea typeface="微软雅黑"/>
+                        </a:rPr>
+                        <a:t>目标函数评估次数</a:t>
+                      </a:r>
+                    </a:p>
+                  </a:txBody>
+                  <a:tcPr>
+                    <a:solidFill>
+                      <a:srgbClr val="FFFFFF"/>
+                    </a:solidFill>
+                  </a:tcPr>
+                </a:tc>
+                <a:tc>
+                  <a:txBody>
+                    <a:bodyPr/>
+                    <a:lstStyle/>
+                    <a:p>
+                      <a:r>
+                        <a:rPr sz="1400" b="0">
+                          <a:solidFill>
+                            <a:srgbClr val="595959"/>
+                          </a:solidFill>
+                          <a:latin typeface="微软雅黑"/>
+                          <a:ea typeface="微软雅黑"/>
+                        </a:rPr>
+                        <a:t>204 次，单次约 34 s</a:t>
+                      </a:r>
+                    </a:p>
+                  </a:txBody>
+                  <a:tcPr>
+                    <a:solidFill>
+                      <a:srgbClr val="FFFFFF"/>
+                    </a:solidFill>
+                  </a:tcPr>
+                </a:tc>
+                <a:extLst>
+                  <a:ext uri="{0D108BD9-81ED-4DB2-BD59-A6C34878D82A}">
+                    <a16:rowId xmlns:a16="http://schemas.microsoft.com/office/drawing/2014/main" val="10002"/>
+                  </a:ext>
+                </a:extLst>
+              </a:tr>
+              <a:tr h="457200">
+                <a:tc>
+                  <a:txBody>
+                    <a:bodyPr/>
+                    <a:lstStyle/>
+                    <a:p>
+                      <a:r>
+                        <a:rPr sz="1400" b="1">
+                          <a:solidFill>
+                            <a:srgbClr val="1F3864"/>
+                          </a:solidFill>
+                          <a:latin typeface="微软雅黑"/>
+                          <a:ea typeface="微软雅黑"/>
+                        </a:rPr>
+                        <a:t>达到增益门槛的点</a:t>
+                      </a:r>
+                    </a:p>
+                  </a:txBody>
+                  <a:tcPr>
+                    <a:solidFill>
+                      <a:srgbClr val="EEF2F8"/>
+                    </a:solidFill>
+                  </a:tcPr>
+                </a:tc>
+                <a:tc>
+                  <a:txBody>
+                    <a:bodyPr/>
+                    <a:lstStyle/>
+                    <a:p>
+                      <a:r>
+                        <a:rPr sz="1400" b="0">
+                          <a:solidFill>
+                            <a:srgbClr val="595959"/>
+                          </a:solidFill>
+                          <a:latin typeface="微软雅黑"/>
+                          <a:ea typeface="微软雅黑"/>
+                        </a:rPr>
+                        <a:t>39 个（Gain ≥ 41 dB）</a:t>
+                      </a:r>
+                    </a:p>
+                  </a:txBody>
+                  <a:tcPr>
+                    <a:solidFill>
+                      <a:srgbClr val="EEF2F8"/>
+                    </a:solidFill>
+                  </a:tcPr>
+                </a:tc>
+                <a:extLst>
+                  <a:ext uri="{0D108BD9-81ED-4DB2-BD59-A6C34878D82A}">
+                    <a16:rowId xmlns:a16="http://schemas.microsoft.com/office/drawing/2014/main" val="10003"/>
+                  </a:ext>
+                </a:extLst>
+              </a:tr>
+              <a:tr h="457200">
+                <a:tc>
+                  <a:txBody>
+                    <a:bodyPr/>
+                    <a:lstStyle/>
+                    <a:p>
+                      <a:r>
+                        <a:rPr sz="1400" b="1">
+                          <a:solidFill>
+                            <a:srgbClr val="1F3864"/>
+                          </a:solidFill>
+                          <a:latin typeface="微软雅黑"/>
+                          <a:ea typeface="微软雅黑"/>
+                        </a:rPr>
+                        <a:t>仿真失败点</a:t>
+                      </a:r>
+                    </a:p>
+                  </a:txBody>
+                  <a:tcPr>
+                    <a:solidFill>
+                      <a:srgbClr val="FFFFFF"/>
+                    </a:solidFill>
+                  </a:tcPr>
+                </a:tc>
+                <a:tc>
+                  <a:txBody>
+                    <a:bodyPr/>
+                    <a:lstStyle/>
+                    <a:p>
+                      <a:r>
+                        <a:rPr sz="1400" b="0">
+                          <a:solidFill>
+                            <a:srgbClr val="595959"/>
+                          </a:solidFill>
+                          <a:latin typeface="微软雅黑"/>
+                          <a:ea typeface="微软雅黑"/>
+                        </a:rPr>
+                        <a:t>95 个（46.6%，激进扰动的代价）</a:t>
+                      </a:r>
+                    </a:p>
+                  </a:txBody>
+                  <a:tcPr>
+                    <a:solidFill>
+                      <a:srgbClr val="FFFFFF"/>
+                    </a:solidFill>
+                  </a:tcPr>
+                </a:tc>
+                <a:extLst>
+                  <a:ext uri="{0D108BD9-81ED-4DB2-BD59-A6C34878D82A}">
+                    <a16:rowId xmlns:a16="http://schemas.microsoft.com/office/drawing/2014/main" val="10004"/>
+                  </a:ext>
+                </a:extLst>
+              </a:tr>
+              <a:tr h="457200">
+                <a:tc>
+                  <a:txBody>
+                    <a:bodyPr/>
+                    <a:lstStyle/>
+                    <a:p>
+                      <a:r>
+                        <a:rPr sz="1400" b="1">
+                          <a:solidFill>
+                            <a:srgbClr val="1F3864"/>
+                          </a:solidFill>
+                          <a:latin typeface="微软雅黑"/>
+                          <a:ea typeface="微软雅黑"/>
+                        </a:rPr>
+                        <a:t>内存峰值</a:t>
+                      </a:r>
+                    </a:p>
+                  </a:txBody>
+                  <a:tcPr>
+                    <a:solidFill>
+                      <a:srgbClr val="EEF2F8"/>
+                    </a:solidFill>
+                  </a:tcPr>
+                </a:tc>
+                <a:tc>
+                  <a:txBody>
+                    <a:bodyPr/>
+                    <a:lstStyle/>
+                    <a:p>
+                      <a:r>
+                        <a:rPr sz="1400" b="0">
+                          <a:solidFill>
+                            <a:srgbClr val="595959"/>
+                          </a:solidFill>
+                          <a:latin typeface="微软雅黑"/>
+                          <a:ea typeface="微软雅黑"/>
+                        </a:rPr>
+                        <a:t>556 MB</a:t>
+                      </a:r>
+                    </a:p>
+                  </a:txBody>
+                  <a:tcPr>
+                    <a:solidFill>
+                      <a:srgbClr val="EEF2F8"/>
+                    </a:solidFill>
+                  </a:tcPr>
+                </a:tc>
+                <a:extLst>
+                  <a:ext uri="{0D108BD9-81ED-4DB2-BD59-A6C34878D82A}">
+                    <a16:rowId xmlns:a16="http://schemas.microsoft.com/office/drawing/2014/main" val="10005"/>
+                  </a:ext>
+                </a:extLst>
+              </a:tr>
+              <a:tr h="457200">
+                <a:tc>
+                  <a:txBody>
+                    <a:bodyPr/>
+                    <a:lstStyle/>
+                    <a:p>
+                      <a:r>
+                        <a:rPr sz="1400" b="1">
+                          <a:solidFill>
+                            <a:srgbClr val="1F3864"/>
+                          </a:solidFill>
+                          <a:latin typeface="微软雅黑"/>
+                          <a:ea typeface="微软雅黑"/>
+                        </a:rPr>
+                        <a:t>本地自检</a:t>
+                      </a:r>
+                    </a:p>
+                  </a:txBody>
+                  <a:tcPr>
+                    <a:solidFill>
+                      <a:srgbClr val="FFFFFF"/>
+                    </a:solidFill>
+                  </a:tcPr>
+                </a:tc>
+                <a:tc>
+                  <a:txBody>
+                    <a:bodyPr/>
+                    <a:lstStyle/>
+                    <a:p>
+                      <a:r>
+                        <a:rPr sz="1400" b="0">
+                          <a:solidFill>
+                            <a:srgbClr val="595959"/>
+                          </a:solidFill>
+                          <a:latin typeface="微软雅黑"/>
+                          <a:ea typeface="微软雅黑"/>
+                        </a:rPr>
+                        <a:t>模块三 8 项断言；模块四 60 项检查</a:t>
+                      </a:r>
+                    </a:p>
+                  </a:txBody>
+                  <a:tcPr>
+                    <a:solidFill>
+                      <a:srgbClr val="FFFFFF"/>
+                    </a:solidFill>
+                  </a:tcPr>
+                </a:tc>
+                <a:extLst>
+                  <a:ext uri="{0D108BD9-81ED-4DB2-BD59-A6C34878D82A}">
+                    <a16:rowId xmlns:a16="http://schemas.microsoft.com/office/drawing/2014/main" val="10006"/>
+                  </a:ext>
+                </a:extLst>
+              </a:tr>
+            </a:tbl>
+          </a:graphicData>
+        </a:graphic>
+      </p:graphicFrame>
       <p:sp>
         <p:nvSpPr>
           <p:cNvPr id="8" name="TextBox 7"/>
@@ -7790,8 +7712,8 @@
         </p:nvSpPr>
         <p:spPr>
           <a:xfrm>
-            <a:off x="640080" y="5349240"/>
-            <a:ext cx="5394960" cy="365760"/>
+            <a:off x="594360" y="4663440"/>
+            <a:ext cx="10972800" cy="1280160"/>
           </a:xfrm>
           <a:prstGeom prst="rect">
             <a:avLst/>
@@ -7799,114 +7721,42 @@
           <a:noFill/>
         </p:spPr>
         <p:txBody>
-          <a:bodyPr wrap="none">
+          <a:bodyPr wrap="square">
             <a:spAutoFit/>
           </a:bodyPr>
           <a:lstStyle/>
           <a:p>
-            <a:r>
-              <a:rPr sz="1200" b="0">
+            <a:pPr>
+              <a:spcAft>
+                <a:spcPts val="1000"/>
+              </a:spcAft>
+            </a:pPr>
+            <a:r>
+              <a:rPr sz="1500" b="0">
                 <a:solidFill>
                   <a:srgbClr val="595959"/>
                 </a:solidFill>
                 <a:latin typeface="微软雅黑"/>
                 <a:ea typeface="微软雅黑"/>
               </a:rPr>
-              <a:t>参数化视图（尺寸为变量）</a:t>
-            </a:r>
-          </a:p>
-        </p:txBody>
-      </p:sp>
-      <p:pic>
-        <p:nvPicPr>
-          <p:cNvPr id="9" name="Picture 8" descr="02_schematic_var_best.png"/>
-          <p:cNvPicPr>
-            <a:picLocks noChangeAspect="1"/>
-          </p:cNvPicPr>
-          <p:nvPr/>
-        </p:nvPicPr>
-        <p:blipFill>
-          <a:blip r:embed="rId3"/>
-          <a:stretch>
-            <a:fillRect/>
-          </a:stretch>
-        </p:blipFill>
-        <p:spPr>
-          <a:xfrm>
-            <a:off x="6172200" y="1325880"/>
-            <a:ext cx="5394960" cy="3203258"/>
-          </a:xfrm>
-          <a:prstGeom prst="rect">
-            <a:avLst/>
-          </a:prstGeom>
-        </p:spPr>
-      </p:pic>
-      <p:sp>
-        <p:nvSpPr>
-          <p:cNvPr id="10" name="TextBox 9"/>
-          <p:cNvSpPr txBox="1"/>
-          <p:nvPr/>
-        </p:nvSpPr>
-        <p:spPr>
-          <a:xfrm>
-            <a:off x="6172200" y="5349240"/>
-            <a:ext cx="5394960" cy="365760"/>
-          </a:xfrm>
-          <a:prstGeom prst="rect">
-            <a:avLst/>
-          </a:prstGeom>
-          <a:noFill/>
-        </p:spPr>
-        <p:txBody>
-          <a:bodyPr wrap="none">
-            <a:spAutoFit/>
-          </a:bodyPr>
-          <a:lstStyle/>
-          <a:p>
-            <a:r>
-              <a:rPr sz="1200" b="0">
+              <a:t>• 46.6% 的失败率听起来高，但它换来的是搜索空间的真实覆盖；失败点按「最差解」处理，不中断优化</a:t>
+            </a:r>
+          </a:p>
+          <a:p>
+            <a:pPr>
+              <a:spcAft>
+                <a:spcPts val="1000"/>
+              </a:spcAft>
+            </a:pPr>
+            <a:r>
+              <a:rPr sz="1500" b="0">
                 <a:solidFill>
                   <a:srgbClr val="595959"/>
                 </a:solidFill>
                 <a:latin typeface="微软雅黑"/>
                 <a:ea typeface="微软雅黑"/>
               </a:rPr>
-              <a:t>反标视图（尺寸已写回数值）</a:t>
-            </a:r>
-          </a:p>
-        </p:txBody>
-      </p:sp>
-      <p:sp>
-        <p:nvSpPr>
-          <p:cNvPr id="11" name="TextBox 10"/>
-          <p:cNvSpPr txBox="1"/>
-          <p:nvPr/>
-        </p:nvSpPr>
-        <p:spPr>
-          <a:xfrm>
-            <a:off x="640080" y="5852160"/>
-            <a:ext cx="10972800" cy="365760"/>
-          </a:xfrm>
-          <a:prstGeom prst="rect">
-            <a:avLst/>
-          </a:prstGeom>
-          <a:noFill/>
-        </p:spPr>
-        <p:txBody>
-          <a:bodyPr wrap="none">
-            <a:spAutoFit/>
-          </a:bodyPr>
-          <a:lstStyle/>
-          <a:p>
-            <a:r>
-              <a:rPr sz="1100" b="0">
-                <a:solidFill>
-                  <a:srgbClr val="8C8C8C"/>
-                </a:solidFill>
-                <a:latin typeface="微软雅黑"/>
-                <a:ea typeface="微软雅黑"/>
-              </a:rPr>
-              <a:t>截图来自流程演示运行；最终尺寸见 2026_EDA_case1_best_params.txt（105 行）</a:t>
+              <a:t>• 所有自检都能在没有 license 的机器上跑，便于评审复现</a:t>
             </a:r>
           </a:p>
         </p:txBody>
@@ -7920,7 +7770,7 @@
 </file>
 
 <file path=ppt/slides/slide14.xml><?xml version="1.0" encoding="utf-8"?>
-<p:sld xmlns:a="http://schemas.openxmlformats.org/drawingml/2006/main" xmlns:p="http://schemas.openxmlformats.org/presentationml/2006/main" xmlns:r="http://schemas.openxmlformats.org/officeDocument/2006/relationships">
+<p:sld xmlns:a="http://schemas.openxmlformats.org/drawingml/2006/main" xmlns:r="http://schemas.openxmlformats.org/officeDocument/2006/relationships" xmlns:p="http://schemas.openxmlformats.org/presentationml/2006/main">
   <p:cSld>
     <p:spTree>
       <p:nvGrpSpPr>
@@ -7928,7 +7778,14 @@
         <p:cNvGrpSpPr/>
         <p:nvPr/>
       </p:nvGrpSpPr>
-      <p:grpSpPr/>
+      <p:grpSpPr>
+        <a:xfrm>
+          <a:off x="0" y="0"/>
+          <a:ext cx="0" cy="0"/>
+          <a:chOff x="0" y="0"/>
+          <a:chExt cx="0" cy="0"/>
+        </a:xfrm>
+      </p:grpSpPr>
       <p:sp>
         <p:nvSpPr>
           <p:cNvPr id="2" name="Rectangle 1"/>
@@ -7970,629 +7827,7 @@
           <a:lstStyle/>
           <a:p>
             <a:pPr algn="ctr"/>
-          </a:p>
-        </p:txBody>
-      </p:sp>
-      <p:sp>
-        <p:nvSpPr>
-          <p:cNvPr id="3" name="TextBox 2"/>
-          <p:cNvSpPr txBox="1"/>
-          <p:nvPr/>
-        </p:nvSpPr>
-        <p:spPr>
-          <a:xfrm>
-            <a:off x="502920" y="146304"/>
-            <a:ext cx="10607040" cy="603504"/>
-          </a:xfrm>
-          <a:prstGeom prst="rect">
-            <a:avLst/>
-          </a:prstGeom>
-          <a:noFill/>
-        </p:spPr>
-        <p:txBody>
-          <a:bodyPr wrap="square">
-            <a:spAutoFit/>
-          </a:bodyPr>
-          <a:lstStyle/>
-          <a:p>
-            <a:r>
-              <a:rPr sz="2600" b="1">
-                <a:solidFill>
-                  <a:srgbClr val="FFFFFF"/>
-                </a:solidFill>
-                <a:latin typeface="微软雅黑"/>
-                <a:ea typeface="微软雅黑"/>
-              </a:rPr>
-              <a:t>算法性能与代码质量</a:t>
-            </a:r>
-          </a:p>
-        </p:txBody>
-      </p:sp>
-      <p:sp>
-        <p:nvSpPr>
-          <p:cNvPr id="4" name="TextBox 3"/>
-          <p:cNvSpPr txBox="1"/>
-          <p:nvPr/>
-        </p:nvSpPr>
-        <p:spPr>
-          <a:xfrm>
-            <a:off x="8595360" y="274320"/>
-            <a:ext cx="3108960" cy="365760"/>
-          </a:xfrm>
-          <a:prstGeom prst="rect">
-            <a:avLst/>
-          </a:prstGeom>
-          <a:noFill/>
-        </p:spPr>
-        <p:txBody>
-          <a:bodyPr wrap="none">
-            <a:spAutoFit/>
-          </a:bodyPr>
-          <a:lstStyle/>
-          <a:p>
-            <a:pPr algn="r"/>
-            <a:r>
-              <a:rPr sz="1200" b="0">
-                <a:solidFill>
-                  <a:srgbClr val="BDD7EE"/>
-                </a:solidFill>
-                <a:latin typeface="微软雅黑"/>
-                <a:ea typeface="微软雅黑"/>
-              </a:rPr>
-              <a:t>09 工程</a:t>
-            </a:r>
-          </a:p>
-        </p:txBody>
-      </p:sp>
-      <p:sp>
-        <p:nvSpPr>
-          <p:cNvPr id="5" name="TextBox 4"/>
-          <p:cNvSpPr txBox="1"/>
-          <p:nvPr/>
-        </p:nvSpPr>
-        <p:spPr>
-          <a:xfrm>
-            <a:off x="502920" y="6419088"/>
-            <a:ext cx="7315200" cy="292608"/>
-          </a:xfrm>
-          <a:prstGeom prst="rect">
-            <a:avLst/>
-          </a:prstGeom>
-          <a:noFill/>
-        </p:spPr>
-        <p:txBody>
-          <a:bodyPr wrap="none">
-            <a:spAutoFit/>
-          </a:bodyPr>
-          <a:lstStyle/>
-          <a:p>
-            <a:r>
-              <a:rPr sz="900" b="0">
-                <a:solidFill>
-                  <a:srgbClr val="8C8C8C"/>
-                </a:solidFill>
-                <a:latin typeface="微软雅黑"/>
-                <a:ea typeface="微软雅黑"/>
-              </a:rPr>
-              <a:t>模拟电路 AI 智能化设计 · 赛题二</a:t>
-            </a:r>
-          </a:p>
-        </p:txBody>
-      </p:sp>
-      <p:sp>
-        <p:nvSpPr>
-          <p:cNvPr id="6" name="TextBox 5"/>
-          <p:cNvSpPr txBox="1"/>
-          <p:nvPr/>
-        </p:nvSpPr>
-        <p:spPr>
-          <a:xfrm>
-            <a:off x="10607040" y="6419088"/>
-            <a:ext cx="1097280" cy="292608"/>
-          </a:xfrm>
-          <a:prstGeom prst="rect">
-            <a:avLst/>
-          </a:prstGeom>
-          <a:noFill/>
-        </p:spPr>
-        <p:txBody>
-          <a:bodyPr wrap="none">
-            <a:spAutoFit/>
-          </a:bodyPr>
-          <a:lstStyle/>
-          <a:p>
-            <a:pPr algn="r"/>
-            <a:r>
-              <a:rPr sz="900" b="0">
-                <a:solidFill>
-                  <a:srgbClr val="8C8C8C"/>
-                </a:solidFill>
-                <a:latin typeface="微软雅黑"/>
-                <a:ea typeface="微软雅黑"/>
-              </a:rPr>
-              <a:t>14</a:t>
-            </a:r>
-          </a:p>
-        </p:txBody>
-      </p:sp>
-      <p:graphicFrame>
-        <p:nvGraphicFramePr>
-          <p:cNvPr id="7" name="Table 6"/>
-          <p:cNvGraphicFramePr>
-            <a:graphicFrameLocks noGrp="1"/>
-          </p:cNvGraphicFramePr>
-          <p:nvPr/>
-        </p:nvGraphicFramePr>
-        <p:xfrm>
-          <a:off x="594360" y="1188720"/>
-          <a:ext cx="10972800" cy="3200400"/>
-        </p:xfrm>
-        <a:graphic>
-          <a:graphicData uri="http://schemas.openxmlformats.org/drawingml/2006/table">
-            <a:tbl>
-              <a:tblPr firstRow="1" bandRow="1">
-                <a:tableStyleId>{5C22544A-7EE6-4342-B048-85BDC9FD1C3A}</a:tableStyleId>
-              </a:tblPr>
-              <a:tblGrid>
-                <a:gridCol w="4206240"/>
-                <a:gridCol w="6766560"/>
-              </a:tblGrid>
-              <a:tr h="457200">
-                <a:tc>
-                  <a:txBody>
-                    <a:bodyPr/>
-                    <a:lstStyle/>
-                    <a:p>
-                      <a:r>
-                        <a:rPr sz="1300" b="1">
-                          <a:solidFill>
-                            <a:srgbClr val="FFFFFF"/>
-                          </a:solidFill>
-                          <a:latin typeface="微软雅黑"/>
-                          <a:ea typeface="微软雅黑"/>
-                        </a:rPr>
-                        <a:t>指标</a:t>
-                      </a:r>
-                    </a:p>
-                  </a:txBody>
-                  <a:tcPr>
-                    <a:solidFill>
-                      <a:srgbClr val="1F3864"/>
-                    </a:solidFill>
-                  </a:tcPr>
-                </a:tc>
-                <a:tc>
-                  <a:txBody>
-                    <a:bodyPr/>
-                    <a:lstStyle/>
-                    <a:p>
-                      <a:r>
-                        <a:rPr sz="1300" b="1">
-                          <a:solidFill>
-                            <a:srgbClr val="FFFFFF"/>
-                          </a:solidFill>
-                          <a:latin typeface="微软雅黑"/>
-                          <a:ea typeface="微软雅黑"/>
-                        </a:rPr>
-                        <a:t>数值</a:t>
-                      </a:r>
-                    </a:p>
-                  </a:txBody>
-                  <a:tcPr>
-                    <a:solidFill>
-                      <a:srgbClr val="1F3864"/>
-                    </a:solidFill>
-                  </a:tcPr>
-                </a:tc>
-              </a:tr>
-              <a:tr h="457200">
-                <a:tc>
-                  <a:txBody>
-                    <a:bodyPr/>
-                    <a:lstStyle/>
-                    <a:p>
-                      <a:r>
-                        <a:rPr sz="1400" b="1">
-                          <a:solidFill>
-                            <a:srgbClr val="1F3864"/>
-                          </a:solidFill>
-                          <a:latin typeface="微软雅黑"/>
-                          <a:ea typeface="微软雅黑"/>
-                        </a:rPr>
-                        <a:t>总运行时间</a:t>
-                      </a:r>
-                    </a:p>
-                  </a:txBody>
-                  <a:tcPr>
-                    <a:solidFill>
-                      <a:srgbClr val="EEF2F8"/>
-                    </a:solidFill>
-                  </a:tcPr>
-                </a:tc>
-                <a:tc>
-                  <a:txBody>
-                    <a:bodyPr/>
-                    <a:lstStyle/>
-                    <a:p>
-                      <a:r>
-                        <a:rPr sz="1400" b="0">
-                          <a:solidFill>
-                            <a:srgbClr val="595959"/>
-                          </a:solidFill>
-                          <a:latin typeface="微软雅黑"/>
-                          <a:ea typeface="微软雅黑"/>
-                        </a:rPr>
-                        <a:t>6941.5 s（外壳计时 6951 s）</a:t>
-                      </a:r>
-                    </a:p>
-                  </a:txBody>
-                  <a:tcPr>
-                    <a:solidFill>
-                      <a:srgbClr val="EEF2F8"/>
-                    </a:solidFill>
-                  </a:tcPr>
-                </a:tc>
-              </a:tr>
-              <a:tr h="457200">
-                <a:tc>
-                  <a:txBody>
-                    <a:bodyPr/>
-                    <a:lstStyle/>
-                    <a:p>
-                      <a:r>
-                        <a:rPr sz="1400" b="1">
-                          <a:solidFill>
-                            <a:srgbClr val="1F3864"/>
-                          </a:solidFill>
-                          <a:latin typeface="微软雅黑"/>
-                          <a:ea typeface="微软雅黑"/>
-                        </a:rPr>
-                        <a:t>目标函数评估次数</a:t>
-                      </a:r>
-                    </a:p>
-                  </a:txBody>
-                  <a:tcPr>
-                    <a:solidFill>
-                      <a:srgbClr val="FFFFFF"/>
-                    </a:solidFill>
-                  </a:tcPr>
-                </a:tc>
-                <a:tc>
-                  <a:txBody>
-                    <a:bodyPr/>
-                    <a:lstStyle/>
-                    <a:p>
-                      <a:r>
-                        <a:rPr sz="1400" b="0">
-                          <a:solidFill>
-                            <a:srgbClr val="595959"/>
-                          </a:solidFill>
-                          <a:latin typeface="微软雅黑"/>
-                          <a:ea typeface="微软雅黑"/>
-                        </a:rPr>
-                        <a:t>204 次，单次约 34 s</a:t>
-                      </a:r>
-                    </a:p>
-                  </a:txBody>
-                  <a:tcPr>
-                    <a:solidFill>
-                      <a:srgbClr val="FFFFFF"/>
-                    </a:solidFill>
-                  </a:tcPr>
-                </a:tc>
-              </a:tr>
-              <a:tr h="457200">
-                <a:tc>
-                  <a:txBody>
-                    <a:bodyPr/>
-                    <a:lstStyle/>
-                    <a:p>
-                      <a:r>
-                        <a:rPr sz="1400" b="1">
-                          <a:solidFill>
-                            <a:srgbClr val="1F3864"/>
-                          </a:solidFill>
-                          <a:latin typeface="微软雅黑"/>
-                          <a:ea typeface="微软雅黑"/>
-                        </a:rPr>
-                        <a:t>达到增益门槛的点</a:t>
-                      </a:r>
-                    </a:p>
-                  </a:txBody>
-                  <a:tcPr>
-                    <a:solidFill>
-                      <a:srgbClr val="EEF2F8"/>
-                    </a:solidFill>
-                  </a:tcPr>
-                </a:tc>
-                <a:tc>
-                  <a:txBody>
-                    <a:bodyPr/>
-                    <a:lstStyle/>
-                    <a:p>
-                      <a:r>
-                        <a:rPr sz="1400" b="0">
-                          <a:solidFill>
-                            <a:srgbClr val="595959"/>
-                          </a:solidFill>
-                          <a:latin typeface="微软雅黑"/>
-                          <a:ea typeface="微软雅黑"/>
-                        </a:rPr>
-                        <a:t>39 个（Gain ≥ 41 dB）</a:t>
-                      </a:r>
-                    </a:p>
-                  </a:txBody>
-                  <a:tcPr>
-                    <a:solidFill>
-                      <a:srgbClr val="EEF2F8"/>
-                    </a:solidFill>
-                  </a:tcPr>
-                </a:tc>
-              </a:tr>
-              <a:tr h="457200">
-                <a:tc>
-                  <a:txBody>
-                    <a:bodyPr/>
-                    <a:lstStyle/>
-                    <a:p>
-                      <a:r>
-                        <a:rPr sz="1400" b="1">
-                          <a:solidFill>
-                            <a:srgbClr val="1F3864"/>
-                          </a:solidFill>
-                          <a:latin typeface="微软雅黑"/>
-                          <a:ea typeface="微软雅黑"/>
-                        </a:rPr>
-                        <a:t>仿真失败点</a:t>
-                      </a:r>
-                    </a:p>
-                  </a:txBody>
-                  <a:tcPr>
-                    <a:solidFill>
-                      <a:srgbClr val="FFFFFF"/>
-                    </a:solidFill>
-                  </a:tcPr>
-                </a:tc>
-                <a:tc>
-                  <a:txBody>
-                    <a:bodyPr/>
-                    <a:lstStyle/>
-                    <a:p>
-                      <a:r>
-                        <a:rPr sz="1400" b="0">
-                          <a:solidFill>
-                            <a:srgbClr val="595959"/>
-                          </a:solidFill>
-                          <a:latin typeface="微软雅黑"/>
-                          <a:ea typeface="微软雅黑"/>
-                        </a:rPr>
-                        <a:t>95 个（46.6%，激进扰动的代价）</a:t>
-                      </a:r>
-                    </a:p>
-                  </a:txBody>
-                  <a:tcPr>
-                    <a:solidFill>
-                      <a:srgbClr val="FFFFFF"/>
-                    </a:solidFill>
-                  </a:tcPr>
-                </a:tc>
-              </a:tr>
-              <a:tr h="457200">
-                <a:tc>
-                  <a:txBody>
-                    <a:bodyPr/>
-                    <a:lstStyle/>
-                    <a:p>
-                      <a:r>
-                        <a:rPr sz="1400" b="1">
-                          <a:solidFill>
-                            <a:srgbClr val="1F3864"/>
-                          </a:solidFill>
-                          <a:latin typeface="微软雅黑"/>
-                          <a:ea typeface="微软雅黑"/>
-                        </a:rPr>
-                        <a:t>内存峰值</a:t>
-                      </a:r>
-                    </a:p>
-                  </a:txBody>
-                  <a:tcPr>
-                    <a:solidFill>
-                      <a:srgbClr val="EEF2F8"/>
-                    </a:solidFill>
-                  </a:tcPr>
-                </a:tc>
-                <a:tc>
-                  <a:txBody>
-                    <a:bodyPr/>
-                    <a:lstStyle/>
-                    <a:p>
-                      <a:r>
-                        <a:rPr sz="1400" b="0">
-                          <a:solidFill>
-                            <a:srgbClr val="595959"/>
-                          </a:solidFill>
-                          <a:latin typeface="微软雅黑"/>
-                          <a:ea typeface="微软雅黑"/>
-                        </a:rPr>
-                        <a:t>556 MB</a:t>
-                      </a:r>
-                    </a:p>
-                  </a:txBody>
-                  <a:tcPr>
-                    <a:solidFill>
-                      <a:srgbClr val="EEF2F8"/>
-                    </a:solidFill>
-                  </a:tcPr>
-                </a:tc>
-              </a:tr>
-              <a:tr h="457200">
-                <a:tc>
-                  <a:txBody>
-                    <a:bodyPr/>
-                    <a:lstStyle/>
-                    <a:p>
-                      <a:r>
-                        <a:rPr sz="1400" b="1">
-                          <a:solidFill>
-                            <a:srgbClr val="1F3864"/>
-                          </a:solidFill>
-                          <a:latin typeface="微软雅黑"/>
-                          <a:ea typeface="微软雅黑"/>
-                        </a:rPr>
-                        <a:t>本地自检</a:t>
-                      </a:r>
-                    </a:p>
-                  </a:txBody>
-                  <a:tcPr>
-                    <a:solidFill>
-                      <a:srgbClr val="FFFFFF"/>
-                    </a:solidFill>
-                  </a:tcPr>
-                </a:tc>
-                <a:tc>
-                  <a:txBody>
-                    <a:bodyPr/>
-                    <a:lstStyle/>
-                    <a:p>
-                      <a:r>
-                        <a:rPr sz="1400" b="0">
-                          <a:solidFill>
-                            <a:srgbClr val="595959"/>
-                          </a:solidFill>
-                          <a:latin typeface="微软雅黑"/>
-                          <a:ea typeface="微软雅黑"/>
-                        </a:rPr>
-                        <a:t>模块三 8 项断言；模块四 60 项检查</a:t>
-                      </a:r>
-                    </a:p>
-                  </a:txBody>
-                  <a:tcPr>
-                    <a:solidFill>
-                      <a:srgbClr val="FFFFFF"/>
-                    </a:solidFill>
-                  </a:tcPr>
-                </a:tc>
-              </a:tr>
-            </a:tbl>
-          </a:graphicData>
-        </a:graphic>
-      </p:graphicFrame>
-      <p:sp>
-        <p:nvSpPr>
-          <p:cNvPr id="8" name="TextBox 7"/>
-          <p:cNvSpPr txBox="1"/>
-          <p:nvPr/>
-        </p:nvSpPr>
-        <p:spPr>
-          <a:xfrm>
-            <a:off x="594360" y="4663440"/>
-            <a:ext cx="10972800" cy="1280160"/>
-          </a:xfrm>
-          <a:prstGeom prst="rect">
-            <a:avLst/>
-          </a:prstGeom>
-          <a:noFill/>
-        </p:spPr>
-        <p:txBody>
-          <a:bodyPr wrap="square">
-            <a:spAutoFit/>
-          </a:bodyPr>
-          <a:lstStyle/>
-          <a:p>
-            <a:pPr>
-              <a:spcAft>
-                <a:spcPts val="1000"/>
-              </a:spcAft>
-            </a:pPr>
-            <a:r>
-              <a:rPr sz="1500" b="0">
-                <a:solidFill>
-                  <a:srgbClr val="595959"/>
-                </a:solidFill>
-                <a:latin typeface="微软雅黑"/>
-                <a:ea typeface="微软雅黑"/>
-              </a:rPr>
-              <a:t>• 46.6% 的失败率听起来高，但它换来的是搜索空间的真实覆盖；失败点按「最差解」处理，不中断优化</a:t>
-            </a:r>
-          </a:p>
-          <a:p>
-            <a:pPr>
-              <a:spcAft>
-                <a:spcPts val="1000"/>
-              </a:spcAft>
-            </a:pPr>
-            <a:r>
-              <a:rPr sz="1500" b="0">
-                <a:solidFill>
-                  <a:srgbClr val="595959"/>
-                </a:solidFill>
-                <a:latin typeface="微软雅黑"/>
-                <a:ea typeface="微软雅黑"/>
-              </a:rPr>
-              <a:t>• 所有自检都能在没有 license 的机器上跑，便于评审复现</a:t>
-            </a:r>
-          </a:p>
-        </p:txBody>
-      </p:sp>
-    </p:spTree>
-  </p:cSld>
-  <p:clrMapOvr>
-    <a:masterClrMapping/>
-  </p:clrMapOvr>
-</p:sld>
-</file>
-
-<file path=ppt/slides/slide15.xml><?xml version="1.0" encoding="utf-8"?>
-<p:sld xmlns:a="http://schemas.openxmlformats.org/drawingml/2006/main" xmlns:p="http://schemas.openxmlformats.org/presentationml/2006/main" xmlns:r="http://schemas.openxmlformats.org/officeDocument/2006/relationships">
-  <p:cSld>
-    <p:spTree>
-      <p:nvGrpSpPr>
-        <p:cNvPr id="1" name=""/>
-        <p:cNvGrpSpPr/>
-        <p:nvPr/>
-      </p:nvGrpSpPr>
-      <p:grpSpPr/>
-      <p:sp>
-        <p:nvSpPr>
-          <p:cNvPr id="2" name="Rectangle 1"/>
-          <p:cNvSpPr/>
-          <p:nvPr/>
-        </p:nvSpPr>
-        <p:spPr>
-          <a:xfrm>
-            <a:off x="0" y="0"/>
-            <a:ext cx="12191695" cy="868680"/>
-          </a:xfrm>
-          <a:prstGeom prst="rect">
-            <a:avLst/>
-          </a:prstGeom>
-          <a:solidFill>
-            <a:srgbClr val="1F3864"/>
-          </a:solidFill>
-          <a:ln>
-            <a:noFill/>
-          </a:ln>
-          <a:effectLst/>
-        </p:spPr>
-        <p:style>
-          <a:lnRef idx="1">
-            <a:schemeClr val="accent1"/>
-          </a:lnRef>
-          <a:fillRef idx="3">
-            <a:schemeClr val="accent1"/>
-          </a:fillRef>
-          <a:effectRef idx="2">
-            <a:schemeClr val="accent1"/>
-          </a:effectRef>
-          <a:fontRef idx="minor">
-            <a:schemeClr val="lt1"/>
-          </a:fontRef>
-        </p:style>
-        <p:txBody>
-          <a:bodyPr rtlCol="0" anchor="ctr"/>
-          <a:lstStyle/>
-          <a:p>
-            <a:pPr algn="ctr"/>
+            <a:endParaRPr/>
           </a:p>
         </p:txBody>
       </p:sp>
@@ -8885,7 +8120,7 @@
           </a:fontRef>
         </p:style>
         <p:txBody>
-          <a:bodyPr rtlCol="0" anchor="ctr" wrap="square"/>
+          <a:bodyPr wrap="square" rtlCol="0" anchor="ctr"/>
           <a:lstStyle/>
           <a:p>
             <a:pPr algn="ctr"/>
@@ -8910,8 +8145,8 @@
 </p:sld>
 </file>
 
-<file path=ppt/slides/slide16.xml><?xml version="1.0" encoding="utf-8"?>
-<p:sld xmlns:a="http://schemas.openxmlformats.org/drawingml/2006/main" xmlns:p="http://schemas.openxmlformats.org/presentationml/2006/main" xmlns:r="http://schemas.openxmlformats.org/officeDocument/2006/relationships">
+<file path=ppt/slides/slide15.xml><?xml version="1.0" encoding="utf-8"?>
+<p:sld xmlns:a="http://schemas.openxmlformats.org/drawingml/2006/main" xmlns:r="http://schemas.openxmlformats.org/officeDocument/2006/relationships" xmlns:p="http://schemas.openxmlformats.org/presentationml/2006/main">
   <p:cSld>
     <p:spTree>
       <p:nvGrpSpPr>
@@ -8919,7 +8154,14 @@
         <p:cNvGrpSpPr/>
         <p:nvPr/>
       </p:nvGrpSpPr>
-      <p:grpSpPr/>
+      <p:grpSpPr>
+        <a:xfrm>
+          <a:off x="0" y="0"/>
+          <a:ext cx="0" cy="0"/>
+          <a:chOff x="0" y="0"/>
+          <a:chExt cx="0" cy="0"/>
+        </a:xfrm>
+      </p:grpSpPr>
       <p:sp>
         <p:nvSpPr>
           <p:cNvPr id="2" name="Rectangle 1"/>
@@ -8961,6 +8203,7 @@
           <a:lstStyle/>
           <a:p>
             <a:pPr algn="ctr"/>
+            <a:endParaRPr/>
           </a:p>
         </p:txBody>
       </p:sp>
@@ -9112,11 +8355,17 @@
           <p:cNvGraphicFramePr>
             <a:graphicFrameLocks noGrp="1"/>
           </p:cNvGraphicFramePr>
-          <p:nvPr/>
+          <p:nvPr>
+            <p:extLst>
+              <p:ext uri="{D42A27DB-BD31-4B8C-83A1-F6EECF244321}">
+                <p14:modId xmlns:p14="http://schemas.microsoft.com/office/powerpoint/2010/main" val="2227687427"/>
+              </p:ext>
+            </p:extLst>
+          </p:nvPr>
         </p:nvGraphicFramePr>
         <p:xfrm>
           <a:off x="594360" y="1170432"/>
-          <a:ext cx="10972800" cy="2286000"/>
+          <a:ext cx="10972800" cy="1828800"/>
         </p:xfrm>
         <a:graphic>
           <a:graphicData uri="http://schemas.openxmlformats.org/drawingml/2006/table">
@@ -9125,8 +8374,20 @@
                 <a:tableStyleId>{5C22544A-7EE6-4342-B048-85BDC9FD1C3A}</a:tableStyleId>
               </a:tblPr>
               <a:tblGrid>
-                <a:gridCol w="2743200"/>
-                <a:gridCol w="8229600"/>
+                <a:gridCol w="2743200">
+                  <a:extLst>
+                    <a:ext uri="{9D8B030D-6E8A-4147-A177-3AD203B41FA5}">
+                      <a16:colId xmlns:a16="http://schemas.microsoft.com/office/drawing/2014/main" val="20000"/>
+                    </a:ext>
+                  </a:extLst>
+                </a:gridCol>
+                <a:gridCol w="8229600">
+                  <a:extLst>
+                    <a:ext uri="{9D8B030D-6E8A-4147-A177-3AD203B41FA5}">
+                      <a16:colId xmlns:a16="http://schemas.microsoft.com/office/drawing/2014/main" val="20001"/>
+                    </a:ext>
+                  </a:extLst>
+                </a:gridCol>
               </a:tblGrid>
               <a:tr h="457200">
                 <a:tc>
@@ -9135,6 +8396,29 @@
                     <a:lstStyle/>
                     <a:p>
                       <a:r>
+                        <a:rPr sz="1300" b="1" dirty="0">
+                          <a:solidFill>
+                            <a:srgbClr val="FFFFFF"/>
+                          </a:solidFill>
+                          <a:latin typeface="微软雅黑"/>
+                          <a:ea typeface="微软雅黑"/>
+                        </a:rPr>
+                        <a:t>项</a:t>
+                      </a:r>
+                    </a:p>
+                  </a:txBody>
+                  <a:tcPr>
+                    <a:solidFill>
+                      <a:srgbClr val="1F3864"/>
+                    </a:solidFill>
+                  </a:tcPr>
+                </a:tc>
+                <a:tc>
+                  <a:txBody>
+                    <a:bodyPr/>
+                    <a:lstStyle/>
+                    <a:p>
+                      <a:r>
                         <a:rPr sz="1300" b="1">
                           <a:solidFill>
                             <a:srgbClr val="FFFFFF"/>
@@ -9142,7 +8426,7 @@
                           <a:latin typeface="微软雅黑"/>
                           <a:ea typeface="微软雅黑"/>
                         </a:rPr>
-                        <a:t>项</a:t>
+                        <a:t>结果</a:t>
                       </a:r>
                     </a:p>
                   </a:txBody>
@@ -9152,29 +8436,11 @@
                     </a:solidFill>
                   </a:tcPr>
                 </a:tc>
-                <a:tc>
-                  <a:txBody>
-                    <a:bodyPr/>
-                    <a:lstStyle/>
-                    <a:p>
-                      <a:r>
-                        <a:rPr sz="1300" b="1">
-                          <a:solidFill>
-                            <a:srgbClr val="FFFFFF"/>
-                          </a:solidFill>
-                          <a:latin typeface="微软雅黑"/>
-                          <a:ea typeface="微软雅黑"/>
-                        </a:rPr>
-                        <a:t>结果</a:t>
-                      </a:r>
-                    </a:p>
-                  </a:txBody>
-                  <a:tcPr>
-                    <a:solidFill>
-                      <a:srgbClr val="1F3864"/>
-                    </a:solidFill>
-                  </a:tcPr>
-                </a:tc>
+                <a:extLst>
+                  <a:ext uri="{0D108BD9-81ED-4DB2-BD59-A6C34878D82A}">
+                    <a16:rowId xmlns:a16="http://schemas.microsoft.com/office/drawing/2014/main" val="10000"/>
+                  </a:ext>
+                </a:extLst>
               </a:tr>
               <a:tr h="457200">
                 <a:tc>
@@ -9183,46 +8449,68 @@
                     <a:lstStyle/>
                     <a:p>
                       <a:r>
-                        <a:rPr sz="1400" b="1">
+                        <a:rPr sz="1400" b="1" dirty="0">
                           <a:solidFill>
                             <a:srgbClr val="1F3864"/>
                           </a:solidFill>
                           <a:latin typeface="微软雅黑"/>
                           <a:ea typeface="微软雅黑"/>
                         </a:rPr>
-                        <a:t>平台自动分</a:t>
-                      </a:r>
-                    </a:p>
-                  </a:txBody>
-                  <a:tcPr>
-                    <a:solidFill>
-                      <a:srgbClr val="EEF2F8"/>
-                    </a:solidFill>
-                  </a:tcPr>
-                </a:tc>
-                <a:tc>
-                  <a:txBody>
-                    <a:bodyPr/>
-                    <a:lstStyle/>
-                    <a:p>
-                      <a:r>
-                        <a:rPr sz="1400" b="0">
+                        <a:t>全 PVT</a:t>
+                      </a:r>
+                    </a:p>
+                  </a:txBody>
+                  <a:tcPr>
+                    <a:solidFill>
+                      <a:srgbClr val="FFFFFF"/>
+                    </a:solidFill>
+                  </a:tcPr>
+                </a:tc>
+                <a:tc>
+                  <a:txBody>
+                    <a:bodyPr/>
+                    <a:lstStyle/>
+                    <a:p>
+                      <a:r>
+                        <a:rPr sz="1400" b="0" dirty="0">
                           <a:solidFill>
                             <a:srgbClr val="595959"/>
                           </a:solidFill>
                           <a:latin typeface="微软雅黑"/>
                           <a:ea typeface="微软雅黑"/>
                         </a:rPr>
-                        <a:t>84.9584 / 100（初始解 78.27）</a:t>
-                      </a:r>
-                    </a:p>
-                  </a:txBody>
-                  <a:tcPr>
-                    <a:solidFill>
-                      <a:srgbClr val="EEF2F8"/>
-                    </a:solidFill>
-                  </a:tcPr>
-                </a:tc>
+                        <a:t>9 </a:t>
+                      </a:r>
+                      <a:r>
+                        <a:rPr sz="1400" b="0" dirty="0" err="1">
+                          <a:solidFill>
+                            <a:srgbClr val="595959"/>
+                          </a:solidFill>
+                          <a:latin typeface="微软雅黑"/>
+                          <a:ea typeface="微软雅黑"/>
+                        </a:rPr>
+                        <a:t>角全部满足四项硬约束</a:t>
+                      </a:r>
+                      <a:endParaRPr sz="1400" b="0" dirty="0">
+                        <a:solidFill>
+                          <a:srgbClr val="595959"/>
+                        </a:solidFill>
+                        <a:latin typeface="微软雅黑"/>
+                        <a:ea typeface="微软雅黑"/>
+                      </a:endParaRPr>
+                    </a:p>
+                  </a:txBody>
+                  <a:tcPr>
+                    <a:solidFill>
+                      <a:srgbClr val="FFFFFF"/>
+                    </a:solidFill>
+                  </a:tcPr>
+                </a:tc>
+                <a:extLst>
+                  <a:ext uri="{0D108BD9-81ED-4DB2-BD59-A6C34878D82A}">
+                    <a16:rowId xmlns:a16="http://schemas.microsoft.com/office/drawing/2014/main" val="10002"/>
+                  </a:ext>
+                </a:extLst>
               </a:tr>
               <a:tr h="457200">
                 <a:tc>
@@ -9238,13 +8526,13 @@
                           <a:latin typeface="微软雅黑"/>
                           <a:ea typeface="微软雅黑"/>
                         </a:rPr>
-                        <a:t>全 PVT</a:t>
-                      </a:r>
-                    </a:p>
-                  </a:txBody>
-                  <a:tcPr>
-                    <a:solidFill>
-                      <a:srgbClr val="FFFFFF"/>
+                        <a:t>参数约减</a:t>
+                      </a:r>
+                    </a:p>
+                  </a:txBody>
+                  <a:tcPr>
+                    <a:solidFill>
+                      <a:srgbClr val="EEF2F8"/>
                     </a:solidFill>
                   </a:tcPr>
                 </a:tc>
@@ -9261,16 +8549,21 @@
                           <a:latin typeface="微软雅黑"/>
                           <a:ea typeface="微软雅黑"/>
                         </a:rPr>
-                        <a:t>9 角全部满足四项硬约束</a:t>
-                      </a:r>
-                    </a:p>
-                  </a:txBody>
-                  <a:tcPr>
-                    <a:solidFill>
-                      <a:srgbClr val="FFFFFF"/>
-                    </a:solidFill>
-                  </a:tcPr>
-                </a:tc>
+                        <a:t>105 → 47（55.2%），闭环校验通过</a:t>
+                      </a:r>
+                    </a:p>
+                  </a:txBody>
+                  <a:tcPr>
+                    <a:solidFill>
+                      <a:srgbClr val="EEF2F8"/>
+                    </a:solidFill>
+                  </a:tcPr>
+                </a:tc>
+                <a:extLst>
+                  <a:ext uri="{0D108BD9-81ED-4DB2-BD59-A6C34878D82A}">
+                    <a16:rowId xmlns:a16="http://schemas.microsoft.com/office/drawing/2014/main" val="10003"/>
+                  </a:ext>
+                </a:extLst>
               </a:tr>
               <a:tr h="457200">
                 <a:tc>
@@ -9286,13 +8579,13 @@
                           <a:latin typeface="微软雅黑"/>
                           <a:ea typeface="微软雅黑"/>
                         </a:rPr>
-                        <a:t>参数约减</a:t>
-                      </a:r>
-                    </a:p>
-                  </a:txBody>
-                  <a:tcPr>
-                    <a:solidFill>
-                      <a:srgbClr val="EEF2F8"/>
+                        <a:t>端到端</a:t>
+                      </a:r>
+                    </a:p>
+                  </a:txBody>
+                  <a:tcPr>
+                    <a:solidFill>
+                      <a:srgbClr val="FFFFFF"/>
                     </a:solidFill>
                   </a:tcPr>
                 </a:tc>
@@ -9309,32 +8602,7 @@
                           <a:latin typeface="微软雅黑"/>
                           <a:ea typeface="微软雅黑"/>
                         </a:rPr>
-                        <a:t>105 → 47（55.2%），闭环校验通过</a:t>
-                      </a:r>
-                    </a:p>
-                  </a:txBody>
-                  <a:tcPr>
-                    <a:solidFill>
-                      <a:srgbClr val="EEF2F8"/>
-                    </a:solidFill>
-                  </a:tcPr>
-                </a:tc>
-              </a:tr>
-              <a:tr h="457200">
-                <a:tc>
-                  <a:txBody>
-                    <a:bodyPr/>
-                    <a:lstStyle/>
-                    <a:p>
-                      <a:r>
-                        <a:rPr sz="1400" b="1">
-                          <a:solidFill>
-                            <a:srgbClr val="1F3864"/>
-                          </a:solidFill>
-                          <a:latin typeface="微软雅黑"/>
-                          <a:ea typeface="微软雅黑"/>
-                        </a:rPr>
-                        <a:t>端到端</a:t>
+                        <a:t>自然语言 → Spec → 识别 → 优化 → PVT → 反标，全程可复现</a:t>
                       </a:r>
                     </a:p>
                   </a:txBody>
@@ -9344,29 +8612,11 @@
                     </a:solidFill>
                   </a:tcPr>
                 </a:tc>
-                <a:tc>
-                  <a:txBody>
-                    <a:bodyPr/>
-                    <a:lstStyle/>
-                    <a:p>
-                      <a:r>
-                        <a:rPr sz="1400" b="0">
-                          <a:solidFill>
-                            <a:srgbClr val="595959"/>
-                          </a:solidFill>
-                          <a:latin typeface="微软雅黑"/>
-                          <a:ea typeface="微软雅黑"/>
-                        </a:rPr>
-                        <a:t>自然语言 → Spec → 识别 → 优化 → PVT → 反标，全程可复现</a:t>
-                      </a:r>
-                    </a:p>
-                  </a:txBody>
-                  <a:tcPr>
-                    <a:solidFill>
-                      <a:srgbClr val="FFFFFF"/>
-                    </a:solidFill>
-                  </a:tcPr>
-                </a:tc>
+                <a:extLst>
+                  <a:ext uri="{0D108BD9-81ED-4DB2-BD59-A6C34878D82A}">
+                    <a16:rowId xmlns:a16="http://schemas.microsoft.com/office/drawing/2014/main" val="10004"/>
+                  </a:ext>
+                </a:extLst>
               </a:tr>
             </a:tbl>
           </a:graphicData>
@@ -9455,7 +8705,7 @@
 </file>
 
 <file path=ppt/slides/slide2.xml><?xml version="1.0" encoding="utf-8"?>
-<p:sld xmlns:a="http://schemas.openxmlformats.org/drawingml/2006/main" xmlns:p="http://schemas.openxmlformats.org/presentationml/2006/main" xmlns:r="http://schemas.openxmlformats.org/officeDocument/2006/relationships">
+<p:sld xmlns:a="http://schemas.openxmlformats.org/drawingml/2006/main" xmlns:r="http://schemas.openxmlformats.org/officeDocument/2006/relationships" xmlns:p="http://schemas.openxmlformats.org/presentationml/2006/main">
   <p:cSld>
     <p:spTree>
       <p:nvGrpSpPr>
@@ -9463,7 +8713,14 @@
         <p:cNvGrpSpPr/>
         <p:nvPr/>
       </p:nvGrpSpPr>
-      <p:grpSpPr/>
+      <p:grpSpPr>
+        <a:xfrm>
+          <a:off x="0" y="0"/>
+          <a:ext cx="0" cy="0"/>
+          <a:chOff x="0" y="0"/>
+          <a:chExt cx="0" cy="0"/>
+        </a:xfrm>
+      </p:grpSpPr>
       <p:sp>
         <p:nvSpPr>
           <p:cNvPr id="2" name="Rectangle 1"/>
@@ -9505,6 +8762,7 @@
           <a:lstStyle/>
           <a:p>
             <a:pPr algn="ctr"/>
+            <a:endParaRPr/>
           </a:p>
         </p:txBody>
       </p:sp>
@@ -9669,10 +8927,34 @@
                 <a:tableStyleId>{5C22544A-7EE6-4342-B048-85BDC9FD1C3A}</a:tableStyleId>
               </a:tblPr>
               <a:tblGrid>
-                <a:gridCol w="2654709"/>
-                <a:gridCol w="2654709"/>
-                <a:gridCol w="3716593"/>
-                <a:gridCol w="1946787"/>
+                <a:gridCol w="2654709">
+                  <a:extLst>
+                    <a:ext uri="{9D8B030D-6E8A-4147-A177-3AD203B41FA5}">
+                      <a16:colId xmlns:a16="http://schemas.microsoft.com/office/drawing/2014/main" val="20000"/>
+                    </a:ext>
+                  </a:extLst>
+                </a:gridCol>
+                <a:gridCol w="2654709">
+                  <a:extLst>
+                    <a:ext uri="{9D8B030D-6E8A-4147-A177-3AD203B41FA5}">
+                      <a16:colId xmlns:a16="http://schemas.microsoft.com/office/drawing/2014/main" val="20001"/>
+                    </a:ext>
+                  </a:extLst>
+                </a:gridCol>
+                <a:gridCol w="3716593">
+                  <a:extLst>
+                    <a:ext uri="{9D8B030D-6E8A-4147-A177-3AD203B41FA5}">
+                      <a16:colId xmlns:a16="http://schemas.microsoft.com/office/drawing/2014/main" val="20002"/>
+                    </a:ext>
+                  </a:extLst>
+                </a:gridCol>
+                <a:gridCol w="1946787">
+                  <a:extLst>
+                    <a:ext uri="{9D8B030D-6E8A-4147-A177-3AD203B41FA5}">
+                      <a16:colId xmlns:a16="http://schemas.microsoft.com/office/drawing/2014/main" val="20003"/>
+                    </a:ext>
+                  </a:extLst>
+                </a:gridCol>
               </a:tblGrid>
               <a:tr h="475488">
                 <a:tc>
@@ -9767,6 +9049,11 @@
                     </a:solidFill>
                   </a:tcPr>
                 </a:tc>
+                <a:extLst>
+                  <a:ext uri="{0D108BD9-81ED-4DB2-BD59-A6C34878D82A}">
+                    <a16:rowId xmlns:a16="http://schemas.microsoft.com/office/drawing/2014/main" val="10000"/>
+                  </a:ext>
+                </a:extLst>
               </a:tr>
               <a:tr h="475488">
                 <a:tc>
@@ -9861,6 +9148,11 @@
                     </a:solidFill>
                   </a:tcPr>
                 </a:tc>
+                <a:extLst>
+                  <a:ext uri="{0D108BD9-81ED-4DB2-BD59-A6C34878D82A}">
+                    <a16:rowId xmlns:a16="http://schemas.microsoft.com/office/drawing/2014/main" val="10001"/>
+                  </a:ext>
+                </a:extLst>
               </a:tr>
               <a:tr h="475488">
                 <a:tc>
@@ -9955,6 +9247,11 @@
                     </a:solidFill>
                   </a:tcPr>
                 </a:tc>
+                <a:extLst>
+                  <a:ext uri="{0D108BD9-81ED-4DB2-BD59-A6C34878D82A}">
+                    <a16:rowId xmlns:a16="http://schemas.microsoft.com/office/drawing/2014/main" val="10002"/>
+                  </a:ext>
+                </a:extLst>
               </a:tr>
               <a:tr h="475488">
                 <a:tc>
@@ -10049,6 +9346,11 @@
                     </a:solidFill>
                   </a:tcPr>
                 </a:tc>
+                <a:extLst>
+                  <a:ext uri="{0D108BD9-81ED-4DB2-BD59-A6C34878D82A}">
+                    <a16:rowId xmlns:a16="http://schemas.microsoft.com/office/drawing/2014/main" val="10003"/>
+                  </a:ext>
+                </a:extLst>
               </a:tr>
               <a:tr h="475488">
                 <a:tc>
@@ -10143,6 +9445,11 @@
                     </a:solidFill>
                   </a:tcPr>
                 </a:tc>
+                <a:extLst>
+                  <a:ext uri="{0D108BD9-81ED-4DB2-BD59-A6C34878D82A}">
+                    <a16:rowId xmlns:a16="http://schemas.microsoft.com/office/drawing/2014/main" val="10004"/>
+                  </a:ext>
+                </a:extLst>
               </a:tr>
             </a:tbl>
           </a:graphicData>
@@ -10231,7 +9538,7 @@
 </file>
 
 <file path=ppt/slides/slide3.xml><?xml version="1.0" encoding="utf-8"?>
-<p:sld xmlns:a="http://schemas.openxmlformats.org/drawingml/2006/main" xmlns:p="http://schemas.openxmlformats.org/presentationml/2006/main" xmlns:r="http://schemas.openxmlformats.org/officeDocument/2006/relationships">
+<p:sld xmlns:a="http://schemas.openxmlformats.org/drawingml/2006/main" xmlns:r="http://schemas.openxmlformats.org/officeDocument/2006/relationships" xmlns:p="http://schemas.openxmlformats.org/presentationml/2006/main">
   <p:cSld>
     <p:spTree>
       <p:nvGrpSpPr>
@@ -10239,7 +9546,14 @@
         <p:cNvGrpSpPr/>
         <p:nvPr/>
       </p:nvGrpSpPr>
-      <p:grpSpPr/>
+      <p:grpSpPr>
+        <a:xfrm>
+          <a:off x="0" y="0"/>
+          <a:ext cx="0" cy="0"/>
+          <a:chOff x="0" y="0"/>
+          <a:chExt cx="0" cy="0"/>
+        </a:xfrm>
+      </p:grpSpPr>
       <p:sp>
         <p:nvSpPr>
           <p:cNvPr id="2" name="Rectangle 1"/>
@@ -10281,6 +9595,7 @@
           <a:lstStyle/>
           <a:p>
             <a:pPr algn="ctr"/>
+            <a:endParaRPr/>
           </a:p>
         </p:txBody>
       </p:sp>
@@ -10436,7 +9751,7 @@
         </p:nvGraphicFramePr>
         <p:xfrm>
           <a:off x="594360" y="1188720"/>
-          <a:ext cx="10972798" cy="1508760"/>
+          <a:ext cx="10972798" cy="1524000"/>
         </p:xfrm>
         <a:graphic>
           <a:graphicData uri="http://schemas.openxmlformats.org/drawingml/2006/table">
@@ -10445,10 +9760,34 @@
                 <a:tableStyleId>{5C22544A-7EE6-4342-B048-85BDC9FD1C3A}</a:tableStyleId>
               </a:tblPr>
               <a:tblGrid>
-                <a:gridCol w="1330036"/>
-                <a:gridCol w="2992581"/>
-                <a:gridCol w="4156363"/>
-                <a:gridCol w="2493818"/>
+                <a:gridCol w="1330036">
+                  <a:extLst>
+                    <a:ext uri="{9D8B030D-6E8A-4147-A177-3AD203B41FA5}">
+                      <a16:colId xmlns:a16="http://schemas.microsoft.com/office/drawing/2014/main" val="20000"/>
+                    </a:ext>
+                  </a:extLst>
+                </a:gridCol>
+                <a:gridCol w="2992581">
+                  <a:extLst>
+                    <a:ext uri="{9D8B030D-6E8A-4147-A177-3AD203B41FA5}">
+                      <a16:colId xmlns:a16="http://schemas.microsoft.com/office/drawing/2014/main" val="20001"/>
+                    </a:ext>
+                  </a:extLst>
+                </a:gridCol>
+                <a:gridCol w="4156363">
+                  <a:extLst>
+                    <a:ext uri="{9D8B030D-6E8A-4147-A177-3AD203B41FA5}">
+                      <a16:colId xmlns:a16="http://schemas.microsoft.com/office/drawing/2014/main" val="20002"/>
+                    </a:ext>
+                  </a:extLst>
+                </a:gridCol>
+                <a:gridCol w="2493818">
+                  <a:extLst>
+                    <a:ext uri="{9D8B030D-6E8A-4147-A177-3AD203B41FA5}">
+                      <a16:colId xmlns:a16="http://schemas.microsoft.com/office/drawing/2014/main" val="20003"/>
+                    </a:ext>
+                  </a:extLst>
+                </a:gridCol>
               </a:tblGrid>
               <a:tr h="502920">
                 <a:tc>
@@ -10543,6 +9882,11 @@
                     </a:solidFill>
                   </a:tcPr>
                 </a:tc>
+                <a:extLst>
+                  <a:ext uri="{0D108BD9-81ED-4DB2-BD59-A6C34878D82A}">
+                    <a16:rowId xmlns:a16="http://schemas.microsoft.com/office/drawing/2014/main" val="10000"/>
+                  </a:ext>
+                </a:extLst>
               </a:tr>
               <a:tr h="502920">
                 <a:tc>
@@ -10637,6 +9981,11 @@
                     </a:solidFill>
                   </a:tcPr>
                 </a:tc>
+                <a:extLst>
+                  <a:ext uri="{0D108BD9-81ED-4DB2-BD59-A6C34878D82A}">
+                    <a16:rowId xmlns:a16="http://schemas.microsoft.com/office/drawing/2014/main" val="10001"/>
+                  </a:ext>
+                </a:extLst>
               </a:tr>
               <a:tr h="502920">
                 <a:tc>
@@ -10731,6 +10080,11 @@
                     </a:solidFill>
                   </a:tcPr>
                 </a:tc>
+                <a:extLst>
+                  <a:ext uri="{0D108BD9-81ED-4DB2-BD59-A6C34878D82A}">
+                    <a16:rowId xmlns:a16="http://schemas.microsoft.com/office/drawing/2014/main" val="10002"/>
+                  </a:ext>
+                </a:extLst>
               </a:tr>
             </a:tbl>
           </a:graphicData>
@@ -10819,7 +10173,7 @@
 </file>
 
 <file path=ppt/slides/slide4.xml><?xml version="1.0" encoding="utf-8"?>
-<p:sld xmlns:a="http://schemas.openxmlformats.org/drawingml/2006/main" xmlns:p="http://schemas.openxmlformats.org/presentationml/2006/main" xmlns:r="http://schemas.openxmlformats.org/officeDocument/2006/relationships">
+<p:sld xmlns:a="http://schemas.openxmlformats.org/drawingml/2006/main" xmlns:r="http://schemas.openxmlformats.org/officeDocument/2006/relationships" xmlns:p="http://schemas.openxmlformats.org/presentationml/2006/main">
   <p:cSld>
     <p:spTree>
       <p:nvGrpSpPr>
@@ -10827,7 +10181,14 @@
         <p:cNvGrpSpPr/>
         <p:nvPr/>
       </p:nvGrpSpPr>
-      <p:grpSpPr/>
+      <p:grpSpPr>
+        <a:xfrm>
+          <a:off x="0" y="0"/>
+          <a:ext cx="0" cy="0"/>
+          <a:chOff x="0" y="0"/>
+          <a:chExt cx="0" cy="0"/>
+        </a:xfrm>
+      </p:grpSpPr>
       <p:sp>
         <p:nvSpPr>
           <p:cNvPr id="2" name="Rectangle 1"/>
@@ -10869,6 +10230,7 @@
           <a:lstStyle/>
           <a:p>
             <a:pPr algn="ctr"/>
+            <a:endParaRPr/>
           </a:p>
         </p:txBody>
       </p:sp>
@@ -11033,9 +10395,27 @@
                 <a:tableStyleId>{5C22544A-7EE6-4342-B048-85BDC9FD1C3A}</a:tableStyleId>
               </a:tblPr>
               <a:tblGrid>
-                <a:gridCol w="640079"/>
-                <a:gridCol w="3657600"/>
-                <a:gridCol w="6675120"/>
+                <a:gridCol w="640079">
+                  <a:extLst>
+                    <a:ext uri="{9D8B030D-6E8A-4147-A177-3AD203B41FA5}">
+                      <a16:colId xmlns:a16="http://schemas.microsoft.com/office/drawing/2014/main" val="20000"/>
+                    </a:ext>
+                  </a:extLst>
+                </a:gridCol>
+                <a:gridCol w="3657600">
+                  <a:extLst>
+                    <a:ext uri="{9D8B030D-6E8A-4147-A177-3AD203B41FA5}">
+                      <a16:colId xmlns:a16="http://schemas.microsoft.com/office/drawing/2014/main" val="20001"/>
+                    </a:ext>
+                  </a:extLst>
+                </a:gridCol>
+                <a:gridCol w="6675120">
+                  <a:extLst>
+                    <a:ext uri="{9D8B030D-6E8A-4147-A177-3AD203B41FA5}">
+                      <a16:colId xmlns:a16="http://schemas.microsoft.com/office/drawing/2014/main" val="20002"/>
+                    </a:ext>
+                  </a:extLst>
+                </a:gridCol>
               </a:tblGrid>
               <a:tr h="420624">
                 <a:tc>
@@ -11107,6 +10487,11 @@
                     </a:solidFill>
                   </a:tcPr>
                 </a:tc>
+                <a:extLst>
+                  <a:ext uri="{0D108BD9-81ED-4DB2-BD59-A6C34878D82A}">
+                    <a16:rowId xmlns:a16="http://schemas.microsoft.com/office/drawing/2014/main" val="10000"/>
+                  </a:ext>
+                </a:extLst>
               </a:tr>
               <a:tr h="420624">
                 <a:tc>
@@ -11178,6 +10563,11 @@
                     </a:solidFill>
                   </a:tcPr>
                 </a:tc>
+                <a:extLst>
+                  <a:ext uri="{0D108BD9-81ED-4DB2-BD59-A6C34878D82A}">
+                    <a16:rowId xmlns:a16="http://schemas.microsoft.com/office/drawing/2014/main" val="10001"/>
+                  </a:ext>
+                </a:extLst>
               </a:tr>
               <a:tr h="420624">
                 <a:tc>
@@ -11249,6 +10639,11 @@
                     </a:solidFill>
                   </a:tcPr>
                 </a:tc>
+                <a:extLst>
+                  <a:ext uri="{0D108BD9-81ED-4DB2-BD59-A6C34878D82A}">
+                    <a16:rowId xmlns:a16="http://schemas.microsoft.com/office/drawing/2014/main" val="10002"/>
+                  </a:ext>
+                </a:extLst>
               </a:tr>
               <a:tr h="420624">
                 <a:tc>
@@ -11320,6 +10715,11 @@
                     </a:solidFill>
                   </a:tcPr>
                 </a:tc>
+                <a:extLst>
+                  <a:ext uri="{0D108BD9-81ED-4DB2-BD59-A6C34878D82A}">
+                    <a16:rowId xmlns:a16="http://schemas.microsoft.com/office/drawing/2014/main" val="10003"/>
+                  </a:ext>
+                </a:extLst>
               </a:tr>
               <a:tr h="420624">
                 <a:tc>
@@ -11391,6 +10791,11 @@
                     </a:solidFill>
                   </a:tcPr>
                 </a:tc>
+                <a:extLst>
+                  <a:ext uri="{0D108BD9-81ED-4DB2-BD59-A6C34878D82A}">
+                    <a16:rowId xmlns:a16="http://schemas.microsoft.com/office/drawing/2014/main" val="10004"/>
+                  </a:ext>
+                </a:extLst>
               </a:tr>
               <a:tr h="420624">
                 <a:tc>
@@ -11462,6 +10867,11 @@
                     </a:solidFill>
                   </a:tcPr>
                 </a:tc>
+                <a:extLst>
+                  <a:ext uri="{0D108BD9-81ED-4DB2-BD59-A6C34878D82A}">
+                    <a16:rowId xmlns:a16="http://schemas.microsoft.com/office/drawing/2014/main" val="10005"/>
+                  </a:ext>
+                </a:extLst>
               </a:tr>
               <a:tr h="420624">
                 <a:tc>
@@ -11533,6 +10943,11 @@
                     </a:solidFill>
                   </a:tcPr>
                 </a:tc>
+                <a:extLst>
+                  <a:ext uri="{0D108BD9-81ED-4DB2-BD59-A6C34878D82A}">
+                    <a16:rowId xmlns:a16="http://schemas.microsoft.com/office/drawing/2014/main" val="10006"/>
+                  </a:ext>
+                </a:extLst>
               </a:tr>
             </a:tbl>
           </a:graphicData>
@@ -11604,7 +11019,7 @@
 </file>
 
 <file path=ppt/slides/slide5.xml><?xml version="1.0" encoding="utf-8"?>
-<p:sld xmlns:a="http://schemas.openxmlformats.org/drawingml/2006/main" xmlns:p="http://schemas.openxmlformats.org/presentationml/2006/main" xmlns:r="http://schemas.openxmlformats.org/officeDocument/2006/relationships">
+<p:sld xmlns:a="http://schemas.openxmlformats.org/drawingml/2006/main" xmlns:r="http://schemas.openxmlformats.org/officeDocument/2006/relationships" xmlns:p="http://schemas.openxmlformats.org/presentationml/2006/main">
   <p:cSld>
     <p:spTree>
       <p:nvGrpSpPr>
@@ -11612,7 +11027,14 @@
         <p:cNvGrpSpPr/>
         <p:nvPr/>
       </p:nvGrpSpPr>
-      <p:grpSpPr/>
+      <p:grpSpPr>
+        <a:xfrm>
+          <a:off x="0" y="0"/>
+          <a:ext cx="0" cy="0"/>
+          <a:chOff x="0" y="0"/>
+          <a:chExt cx="0" cy="0"/>
+        </a:xfrm>
+      </p:grpSpPr>
       <p:sp>
         <p:nvSpPr>
           <p:cNvPr id="2" name="Rectangle 1"/>
@@ -11654,6 +11076,7 @@
           <a:lstStyle/>
           <a:p>
             <a:pPr algn="ctr"/>
+            <a:endParaRPr/>
           </a:p>
         </p:txBody>
       </p:sp>
@@ -11818,9 +11241,27 @@
                 <a:tableStyleId>{5C22544A-7EE6-4342-B048-85BDC9FD1C3A}</a:tableStyleId>
               </a:tblPr>
               <a:tblGrid>
-                <a:gridCol w="2377440"/>
-                <a:gridCol w="5120639"/>
-                <a:gridCol w="3474719"/>
+                <a:gridCol w="2377440">
+                  <a:extLst>
+                    <a:ext uri="{9D8B030D-6E8A-4147-A177-3AD203B41FA5}">
+                      <a16:colId xmlns:a16="http://schemas.microsoft.com/office/drawing/2014/main" val="20000"/>
+                    </a:ext>
+                  </a:extLst>
+                </a:gridCol>
+                <a:gridCol w="5120639">
+                  <a:extLst>
+                    <a:ext uri="{9D8B030D-6E8A-4147-A177-3AD203B41FA5}">
+                      <a16:colId xmlns:a16="http://schemas.microsoft.com/office/drawing/2014/main" val="20001"/>
+                    </a:ext>
+                  </a:extLst>
+                </a:gridCol>
+                <a:gridCol w="3474719">
+                  <a:extLst>
+                    <a:ext uri="{9D8B030D-6E8A-4147-A177-3AD203B41FA5}">
+                      <a16:colId xmlns:a16="http://schemas.microsoft.com/office/drawing/2014/main" val="20002"/>
+                    </a:ext>
+                  </a:extLst>
+                </a:gridCol>
               </a:tblGrid>
               <a:tr h="566928">
                 <a:tc>
@@ -11892,6 +11333,11 @@
                     </a:solidFill>
                   </a:tcPr>
                 </a:tc>
+                <a:extLst>
+                  <a:ext uri="{0D108BD9-81ED-4DB2-BD59-A6C34878D82A}">
+                    <a16:rowId xmlns:a16="http://schemas.microsoft.com/office/drawing/2014/main" val="10000"/>
+                  </a:ext>
+                </a:extLst>
               </a:tr>
               <a:tr h="566928">
                 <a:tc>
@@ -11963,6 +11409,11 @@
                     </a:solidFill>
                   </a:tcPr>
                 </a:tc>
+                <a:extLst>
+                  <a:ext uri="{0D108BD9-81ED-4DB2-BD59-A6C34878D82A}">
+                    <a16:rowId xmlns:a16="http://schemas.microsoft.com/office/drawing/2014/main" val="10001"/>
+                  </a:ext>
+                </a:extLst>
               </a:tr>
               <a:tr h="566928">
                 <a:tc>
@@ -12034,6 +11485,11 @@
                     </a:solidFill>
                   </a:tcPr>
                 </a:tc>
+                <a:extLst>
+                  <a:ext uri="{0D108BD9-81ED-4DB2-BD59-A6C34878D82A}">
+                    <a16:rowId xmlns:a16="http://schemas.microsoft.com/office/drawing/2014/main" val="10002"/>
+                  </a:ext>
+                </a:extLst>
               </a:tr>
               <a:tr h="566928">
                 <a:tc>
@@ -12105,6 +11561,11 @@
                     </a:solidFill>
                   </a:tcPr>
                 </a:tc>
+                <a:extLst>
+                  <a:ext uri="{0D108BD9-81ED-4DB2-BD59-A6C34878D82A}">
+                    <a16:rowId xmlns:a16="http://schemas.microsoft.com/office/drawing/2014/main" val="10003"/>
+                  </a:ext>
+                </a:extLst>
               </a:tr>
               <a:tr h="566928">
                 <a:tc>
@@ -12176,6 +11637,11 @@
                     </a:solidFill>
                   </a:tcPr>
                 </a:tc>
+                <a:extLst>
+                  <a:ext uri="{0D108BD9-81ED-4DB2-BD59-A6C34878D82A}">
+                    <a16:rowId xmlns:a16="http://schemas.microsoft.com/office/drawing/2014/main" val="10004"/>
+                  </a:ext>
+                </a:extLst>
               </a:tr>
             </a:tbl>
           </a:graphicData>
@@ -12220,7 +11686,7 @@
           </a:fontRef>
         </p:style>
         <p:txBody>
-          <a:bodyPr rtlCol="0" anchor="ctr" wrap="square"/>
+          <a:bodyPr wrap="square" rtlCol="0" anchor="ctr"/>
           <a:lstStyle/>
           <a:p>
             <a:pPr algn="ctr"/>
@@ -12246,7 +11712,7 @@
 </file>
 
 <file path=ppt/slides/slide6.xml><?xml version="1.0" encoding="utf-8"?>
-<p:sld xmlns:a="http://schemas.openxmlformats.org/drawingml/2006/main" xmlns:p="http://schemas.openxmlformats.org/presentationml/2006/main" xmlns:r="http://schemas.openxmlformats.org/officeDocument/2006/relationships">
+<p:sld xmlns:a="http://schemas.openxmlformats.org/drawingml/2006/main" xmlns:r="http://schemas.openxmlformats.org/officeDocument/2006/relationships" xmlns:p="http://schemas.openxmlformats.org/presentationml/2006/main">
   <p:cSld>
     <p:spTree>
       <p:nvGrpSpPr>
@@ -12254,7 +11720,14 @@
         <p:cNvGrpSpPr/>
         <p:nvPr/>
       </p:nvGrpSpPr>
-      <p:grpSpPr/>
+      <p:grpSpPr>
+        <a:xfrm>
+          <a:off x="0" y="0"/>
+          <a:ext cx="0" cy="0"/>
+          <a:chOff x="0" y="0"/>
+          <a:chExt cx="0" cy="0"/>
+        </a:xfrm>
+      </p:grpSpPr>
       <p:sp>
         <p:nvSpPr>
           <p:cNvPr id="2" name="Rectangle 1"/>
@@ -12296,6 +11769,7 @@
           <a:lstStyle/>
           <a:p>
             <a:pPr algn="ctr"/>
+            <a:endParaRPr/>
           </a:p>
         </p:txBody>
       </p:sp>
@@ -12460,9 +11934,27 @@
                 <a:tableStyleId>{5C22544A-7EE6-4342-B048-85BDC9FD1C3A}</a:tableStyleId>
               </a:tblPr>
               <a:tblGrid>
-                <a:gridCol w="1828800"/>
-                <a:gridCol w="4754880"/>
-                <a:gridCol w="4389120"/>
+                <a:gridCol w="1828800">
+                  <a:extLst>
+                    <a:ext uri="{9D8B030D-6E8A-4147-A177-3AD203B41FA5}">
+                      <a16:colId xmlns:a16="http://schemas.microsoft.com/office/drawing/2014/main" val="20000"/>
+                    </a:ext>
+                  </a:extLst>
+                </a:gridCol>
+                <a:gridCol w="4754880">
+                  <a:extLst>
+                    <a:ext uri="{9D8B030D-6E8A-4147-A177-3AD203B41FA5}">
+                      <a16:colId xmlns:a16="http://schemas.microsoft.com/office/drawing/2014/main" val="20001"/>
+                    </a:ext>
+                  </a:extLst>
+                </a:gridCol>
+                <a:gridCol w="4389120">
+                  <a:extLst>
+                    <a:ext uri="{9D8B030D-6E8A-4147-A177-3AD203B41FA5}">
+                      <a16:colId xmlns:a16="http://schemas.microsoft.com/office/drawing/2014/main" val="20002"/>
+                    </a:ext>
+                  </a:extLst>
+                </a:gridCol>
               </a:tblGrid>
               <a:tr h="530352">
                 <a:tc>
@@ -12534,6 +12026,11 @@
                     </a:solidFill>
                   </a:tcPr>
                 </a:tc>
+                <a:extLst>
+                  <a:ext uri="{0D108BD9-81ED-4DB2-BD59-A6C34878D82A}">
+                    <a16:rowId xmlns:a16="http://schemas.microsoft.com/office/drawing/2014/main" val="10000"/>
+                  </a:ext>
+                </a:extLst>
               </a:tr>
               <a:tr h="530352">
                 <a:tc>
@@ -12605,6 +12102,11 @@
                     </a:solidFill>
                   </a:tcPr>
                 </a:tc>
+                <a:extLst>
+                  <a:ext uri="{0D108BD9-81ED-4DB2-BD59-A6C34878D82A}">
+                    <a16:rowId xmlns:a16="http://schemas.microsoft.com/office/drawing/2014/main" val="10001"/>
+                  </a:ext>
+                </a:extLst>
               </a:tr>
               <a:tr h="530352">
                 <a:tc>
@@ -12676,6 +12178,11 @@
                     </a:solidFill>
                   </a:tcPr>
                 </a:tc>
+                <a:extLst>
+                  <a:ext uri="{0D108BD9-81ED-4DB2-BD59-A6C34878D82A}">
+                    <a16:rowId xmlns:a16="http://schemas.microsoft.com/office/drawing/2014/main" val="10002"/>
+                  </a:ext>
+                </a:extLst>
               </a:tr>
               <a:tr h="530352">
                 <a:tc>
@@ -12747,6 +12254,11 @@
                     </a:solidFill>
                   </a:tcPr>
                 </a:tc>
+                <a:extLst>
+                  <a:ext uri="{0D108BD9-81ED-4DB2-BD59-A6C34878D82A}">
+                    <a16:rowId xmlns:a16="http://schemas.microsoft.com/office/drawing/2014/main" val="10003"/>
+                  </a:ext>
+                </a:extLst>
               </a:tr>
               <a:tr h="530352">
                 <a:tc>
@@ -12818,6 +12330,11 @@
                     </a:solidFill>
                   </a:tcPr>
                 </a:tc>
+                <a:extLst>
+                  <a:ext uri="{0D108BD9-81ED-4DB2-BD59-A6C34878D82A}">
+                    <a16:rowId xmlns:a16="http://schemas.microsoft.com/office/drawing/2014/main" val="10004"/>
+                  </a:ext>
+                </a:extLst>
               </a:tr>
             </a:tbl>
           </a:graphicData>
@@ -12862,7 +12379,7 @@
           </a:fontRef>
         </p:style>
         <p:txBody>
-          <a:bodyPr rtlCol="0" anchor="ctr" wrap="square"/>
+          <a:bodyPr wrap="square" rtlCol="0" anchor="ctr"/>
           <a:lstStyle/>
           <a:p>
             <a:pPr algn="ctr"/>
@@ -12928,7 +12445,7 @@
 </file>
 
 <file path=ppt/slides/slide7.xml><?xml version="1.0" encoding="utf-8"?>
-<p:sld xmlns:a="http://schemas.openxmlformats.org/drawingml/2006/main" xmlns:p="http://schemas.openxmlformats.org/presentationml/2006/main" xmlns:r="http://schemas.openxmlformats.org/officeDocument/2006/relationships">
+<p:sld xmlns:a="http://schemas.openxmlformats.org/drawingml/2006/main" xmlns:r="http://schemas.openxmlformats.org/officeDocument/2006/relationships" xmlns:p="http://schemas.openxmlformats.org/presentationml/2006/main">
   <p:cSld>
     <p:spTree>
       <p:nvGrpSpPr>
@@ -12936,7 +12453,14 @@
         <p:cNvGrpSpPr/>
         <p:nvPr/>
       </p:nvGrpSpPr>
-      <p:grpSpPr/>
+      <p:grpSpPr>
+        <a:xfrm>
+          <a:off x="0" y="0"/>
+          <a:ext cx="0" cy="0"/>
+          <a:chOff x="0" y="0"/>
+          <a:chExt cx="0" cy="0"/>
+        </a:xfrm>
+      </p:grpSpPr>
       <p:sp>
         <p:nvSpPr>
           <p:cNvPr id="2" name="Rectangle 1"/>
@@ -12978,6 +12502,7 @@
           <a:lstStyle/>
           <a:p>
             <a:pPr algn="ctr"/>
+            <a:endParaRPr/>
           </a:p>
         </p:txBody>
       </p:sp>
@@ -13142,8 +12667,20 @@
                 <a:tableStyleId>{5C22544A-7EE6-4342-B048-85BDC9FD1C3A}</a:tableStyleId>
               </a:tblPr>
               <a:tblGrid>
-                <a:gridCol w="3108960"/>
-                <a:gridCol w="7863840"/>
+                <a:gridCol w="3108960">
+                  <a:extLst>
+                    <a:ext uri="{9D8B030D-6E8A-4147-A177-3AD203B41FA5}">
+                      <a16:colId xmlns:a16="http://schemas.microsoft.com/office/drawing/2014/main" val="20000"/>
+                    </a:ext>
+                  </a:extLst>
+                </a:gridCol>
+                <a:gridCol w="7863840">
+                  <a:extLst>
+                    <a:ext uri="{9D8B030D-6E8A-4147-A177-3AD203B41FA5}">
+                      <a16:colId xmlns:a16="http://schemas.microsoft.com/office/drawing/2014/main" val="20001"/>
+                    </a:ext>
+                  </a:extLst>
+                </a:gridCol>
               </a:tblGrid>
               <a:tr h="475488">
                 <a:tc>
@@ -13192,6 +12729,11 @@
                     </a:solidFill>
                   </a:tcPr>
                 </a:tc>
+                <a:extLst>
+                  <a:ext uri="{0D108BD9-81ED-4DB2-BD59-A6C34878D82A}">
+                    <a16:rowId xmlns:a16="http://schemas.microsoft.com/office/drawing/2014/main" val="10000"/>
+                  </a:ext>
+                </a:extLst>
               </a:tr>
               <a:tr h="475488">
                 <a:tc>
@@ -13240,6 +12782,11 @@
                     </a:solidFill>
                   </a:tcPr>
                 </a:tc>
+                <a:extLst>
+                  <a:ext uri="{0D108BD9-81ED-4DB2-BD59-A6C34878D82A}">
+                    <a16:rowId xmlns:a16="http://schemas.microsoft.com/office/drawing/2014/main" val="10001"/>
+                  </a:ext>
+                </a:extLst>
               </a:tr>
               <a:tr h="475488">
                 <a:tc>
@@ -13288,6 +12835,11 @@
                     </a:solidFill>
                   </a:tcPr>
                 </a:tc>
+                <a:extLst>
+                  <a:ext uri="{0D108BD9-81ED-4DB2-BD59-A6C34878D82A}">
+                    <a16:rowId xmlns:a16="http://schemas.microsoft.com/office/drawing/2014/main" val="10002"/>
+                  </a:ext>
+                </a:extLst>
               </a:tr>
               <a:tr h="475488">
                 <a:tc>
@@ -13336,6 +12888,11 @@
                     </a:solidFill>
                   </a:tcPr>
                 </a:tc>
+                <a:extLst>
+                  <a:ext uri="{0D108BD9-81ED-4DB2-BD59-A6C34878D82A}">
+                    <a16:rowId xmlns:a16="http://schemas.microsoft.com/office/drawing/2014/main" val="10003"/>
+                  </a:ext>
+                </a:extLst>
               </a:tr>
               <a:tr h="475488">
                 <a:tc>
@@ -13384,6 +12941,11 @@
                     </a:solidFill>
                   </a:tcPr>
                 </a:tc>
+                <a:extLst>
+                  <a:ext uri="{0D108BD9-81ED-4DB2-BD59-A6C34878D82A}">
+                    <a16:rowId xmlns:a16="http://schemas.microsoft.com/office/drawing/2014/main" val="10004"/>
+                  </a:ext>
+                </a:extLst>
               </a:tr>
               <a:tr h="475488">
                 <a:tc>
@@ -13432,6 +12994,11 @@
                     </a:solidFill>
                   </a:tcPr>
                 </a:tc>
+                <a:extLst>
+                  <a:ext uri="{0D108BD9-81ED-4DB2-BD59-A6C34878D82A}">
+                    <a16:rowId xmlns:a16="http://schemas.microsoft.com/office/drawing/2014/main" val="10005"/>
+                  </a:ext>
+                </a:extLst>
               </a:tr>
               <a:tr h="475488">
                 <a:tc>
@@ -13480,6 +13047,11 @@
                     </a:solidFill>
                   </a:tcPr>
                 </a:tc>
+                <a:extLst>
+                  <a:ext uri="{0D108BD9-81ED-4DB2-BD59-A6C34878D82A}">
+                    <a16:rowId xmlns:a16="http://schemas.microsoft.com/office/drawing/2014/main" val="10006"/>
+                  </a:ext>
+                </a:extLst>
               </a:tr>
             </a:tbl>
           </a:graphicData>
@@ -13524,7 +13096,7 @@
           </a:fontRef>
         </p:style>
         <p:txBody>
-          <a:bodyPr rtlCol="0" anchor="ctr" wrap="square"/>
+          <a:bodyPr wrap="square" rtlCol="0" anchor="ctr"/>
           <a:lstStyle/>
           <a:p>
             <a:pPr algn="ctr"/>
@@ -13550,7 +13122,7 @@
 </file>
 
 <file path=ppt/slides/slide8.xml><?xml version="1.0" encoding="utf-8"?>
-<p:sld xmlns:a="http://schemas.openxmlformats.org/drawingml/2006/main" xmlns:p="http://schemas.openxmlformats.org/presentationml/2006/main" xmlns:r="http://schemas.openxmlformats.org/officeDocument/2006/relationships">
+<p:sld xmlns:a="http://schemas.openxmlformats.org/drawingml/2006/main" xmlns:r="http://schemas.openxmlformats.org/officeDocument/2006/relationships" xmlns:p="http://schemas.openxmlformats.org/presentationml/2006/main">
   <p:cSld>
     <p:spTree>
       <p:nvGrpSpPr>
@@ -13558,7 +13130,14 @@
         <p:cNvGrpSpPr/>
         <p:nvPr/>
       </p:nvGrpSpPr>
-      <p:grpSpPr/>
+      <p:grpSpPr>
+        <a:xfrm>
+          <a:off x="0" y="0"/>
+          <a:ext cx="0" cy="0"/>
+          <a:chOff x="0" y="0"/>
+          <a:chExt cx="0" cy="0"/>
+        </a:xfrm>
+      </p:grpSpPr>
       <p:sp>
         <p:nvSpPr>
           <p:cNvPr id="2" name="Rectangle 1"/>
@@ -13600,6 +13179,7 @@
           <a:lstStyle/>
           <a:p>
             <a:pPr algn="ctr"/>
+            <a:endParaRPr/>
           </a:p>
         </p:txBody>
       </p:sp>
@@ -13764,9 +13344,27 @@
                 <a:tableStyleId>{5C22544A-7EE6-4342-B048-85BDC9FD1C3A}</a:tableStyleId>
               </a:tblPr>
               <a:tblGrid>
-                <a:gridCol w="1828800"/>
-                <a:gridCol w="4572000"/>
-                <a:gridCol w="4572000"/>
+                <a:gridCol w="1828800">
+                  <a:extLst>
+                    <a:ext uri="{9D8B030D-6E8A-4147-A177-3AD203B41FA5}">
+                      <a16:colId xmlns:a16="http://schemas.microsoft.com/office/drawing/2014/main" val="20000"/>
+                    </a:ext>
+                  </a:extLst>
+                </a:gridCol>
+                <a:gridCol w="4572000">
+                  <a:extLst>
+                    <a:ext uri="{9D8B030D-6E8A-4147-A177-3AD203B41FA5}">
+                      <a16:colId xmlns:a16="http://schemas.microsoft.com/office/drawing/2014/main" val="20001"/>
+                    </a:ext>
+                  </a:extLst>
+                </a:gridCol>
+                <a:gridCol w="4572000">
+                  <a:extLst>
+                    <a:ext uri="{9D8B030D-6E8A-4147-A177-3AD203B41FA5}">
+                      <a16:colId xmlns:a16="http://schemas.microsoft.com/office/drawing/2014/main" val="20002"/>
+                    </a:ext>
+                  </a:extLst>
+                </a:gridCol>
               </a:tblGrid>
               <a:tr h="502920">
                 <a:tc>
@@ -13838,6 +13436,11 @@
                     </a:solidFill>
                   </a:tcPr>
                 </a:tc>
+                <a:extLst>
+                  <a:ext uri="{0D108BD9-81ED-4DB2-BD59-A6C34878D82A}">
+                    <a16:rowId xmlns:a16="http://schemas.microsoft.com/office/drawing/2014/main" val="10000"/>
+                  </a:ext>
+                </a:extLst>
               </a:tr>
               <a:tr h="502920">
                 <a:tc>
@@ -13909,6 +13512,11 @@
                     </a:solidFill>
                   </a:tcPr>
                 </a:tc>
+                <a:extLst>
+                  <a:ext uri="{0D108BD9-81ED-4DB2-BD59-A6C34878D82A}">
+                    <a16:rowId xmlns:a16="http://schemas.microsoft.com/office/drawing/2014/main" val="10001"/>
+                  </a:ext>
+                </a:extLst>
               </a:tr>
               <a:tr h="502920">
                 <a:tc>
@@ -13980,6 +13588,11 @@
                     </a:solidFill>
                   </a:tcPr>
                 </a:tc>
+                <a:extLst>
+                  <a:ext uri="{0D108BD9-81ED-4DB2-BD59-A6C34878D82A}">
+                    <a16:rowId xmlns:a16="http://schemas.microsoft.com/office/drawing/2014/main" val="10002"/>
+                  </a:ext>
+                </a:extLst>
               </a:tr>
               <a:tr h="502920">
                 <a:tc>
@@ -14051,6 +13664,11 @@
                     </a:solidFill>
                   </a:tcPr>
                 </a:tc>
+                <a:extLst>
+                  <a:ext uri="{0D108BD9-81ED-4DB2-BD59-A6C34878D82A}">
+                    <a16:rowId xmlns:a16="http://schemas.microsoft.com/office/drawing/2014/main" val="10003"/>
+                  </a:ext>
+                </a:extLst>
               </a:tr>
             </a:tbl>
           </a:graphicData>
@@ -14139,7 +13757,7 @@
 </file>
 
 <file path=ppt/slides/slide9.xml><?xml version="1.0" encoding="utf-8"?>
-<p:sld xmlns:a="http://schemas.openxmlformats.org/drawingml/2006/main" xmlns:p="http://schemas.openxmlformats.org/presentationml/2006/main" xmlns:r="http://schemas.openxmlformats.org/officeDocument/2006/relationships">
+<p:sld xmlns:a="http://schemas.openxmlformats.org/drawingml/2006/main" xmlns:r="http://schemas.openxmlformats.org/officeDocument/2006/relationships" xmlns:p="http://schemas.openxmlformats.org/presentationml/2006/main">
   <p:cSld>
     <p:spTree>
       <p:nvGrpSpPr>
@@ -14147,7 +13765,14 @@
         <p:cNvGrpSpPr/>
         <p:nvPr/>
       </p:nvGrpSpPr>
-      <p:grpSpPr/>
+      <p:grpSpPr>
+        <a:xfrm>
+          <a:off x="0" y="0"/>
+          <a:ext cx="0" cy="0"/>
+          <a:chOff x="0" y="0"/>
+          <a:chExt cx="0" cy="0"/>
+        </a:xfrm>
+      </p:grpSpPr>
       <p:sp>
         <p:nvSpPr>
           <p:cNvPr id="2" name="Rectangle 1"/>
@@ -14189,6 +13814,7 @@
           <a:lstStyle/>
           <a:p>
             <a:pPr algn="ctr"/>
+            <a:endParaRPr/>
           </a:p>
         </p:txBody>
       </p:sp>
@@ -14353,9 +13979,27 @@
                 <a:tableStyleId>{5C22544A-7EE6-4342-B048-85BDC9FD1C3A}</a:tableStyleId>
               </a:tblPr>
               <a:tblGrid>
-                <a:gridCol w="2194560"/>
-                <a:gridCol w="4754880"/>
-                <a:gridCol w="4023360"/>
+                <a:gridCol w="2194560">
+                  <a:extLst>
+                    <a:ext uri="{9D8B030D-6E8A-4147-A177-3AD203B41FA5}">
+                      <a16:colId xmlns:a16="http://schemas.microsoft.com/office/drawing/2014/main" val="20000"/>
+                    </a:ext>
+                  </a:extLst>
+                </a:gridCol>
+                <a:gridCol w="4754880">
+                  <a:extLst>
+                    <a:ext uri="{9D8B030D-6E8A-4147-A177-3AD203B41FA5}">
+                      <a16:colId xmlns:a16="http://schemas.microsoft.com/office/drawing/2014/main" val="20001"/>
+                    </a:ext>
+                  </a:extLst>
+                </a:gridCol>
+                <a:gridCol w="4023360">
+                  <a:extLst>
+                    <a:ext uri="{9D8B030D-6E8A-4147-A177-3AD203B41FA5}">
+                      <a16:colId xmlns:a16="http://schemas.microsoft.com/office/drawing/2014/main" val="20002"/>
+                    </a:ext>
+                  </a:extLst>
+                </a:gridCol>
               </a:tblGrid>
               <a:tr h="475488">
                 <a:tc>
@@ -14427,6 +14071,11 @@
                     </a:solidFill>
                   </a:tcPr>
                 </a:tc>
+                <a:extLst>
+                  <a:ext uri="{0D108BD9-81ED-4DB2-BD59-A6C34878D82A}">
+                    <a16:rowId xmlns:a16="http://schemas.microsoft.com/office/drawing/2014/main" val="10000"/>
+                  </a:ext>
+                </a:extLst>
               </a:tr>
               <a:tr h="475488">
                 <a:tc>
@@ -14498,6 +14147,11 @@
                     </a:solidFill>
                   </a:tcPr>
                 </a:tc>
+                <a:extLst>
+                  <a:ext uri="{0D108BD9-81ED-4DB2-BD59-A6C34878D82A}">
+                    <a16:rowId xmlns:a16="http://schemas.microsoft.com/office/drawing/2014/main" val="10001"/>
+                  </a:ext>
+                </a:extLst>
               </a:tr>
               <a:tr h="475488">
                 <a:tc>
@@ -14569,6 +14223,11 @@
                     </a:solidFill>
                   </a:tcPr>
                 </a:tc>
+                <a:extLst>
+                  <a:ext uri="{0D108BD9-81ED-4DB2-BD59-A6C34878D82A}">
+                    <a16:rowId xmlns:a16="http://schemas.microsoft.com/office/drawing/2014/main" val="10002"/>
+                  </a:ext>
+                </a:extLst>
               </a:tr>
               <a:tr h="475488">
                 <a:tc>
@@ -14640,6 +14299,11 @@
                     </a:solidFill>
                   </a:tcPr>
                 </a:tc>
+                <a:extLst>
+                  <a:ext uri="{0D108BD9-81ED-4DB2-BD59-A6C34878D82A}">
+                    <a16:rowId xmlns:a16="http://schemas.microsoft.com/office/drawing/2014/main" val="10003"/>
+                  </a:ext>
+                </a:extLst>
               </a:tr>
               <a:tr h="475488">
                 <a:tc>
@@ -14711,6 +14375,11 @@
                     </a:solidFill>
                   </a:tcPr>
                 </a:tc>
+                <a:extLst>
+                  <a:ext uri="{0D108BD9-81ED-4DB2-BD59-A6C34878D82A}">
+                    <a16:rowId xmlns:a16="http://schemas.microsoft.com/office/drawing/2014/main" val="10004"/>
+                  </a:ext>
+                </a:extLst>
               </a:tr>
             </a:tbl>
           </a:graphicData>
@@ -14755,7 +14424,7 @@
           </a:fontRef>
         </p:style>
         <p:txBody>
-          <a:bodyPr rtlCol="0" anchor="ctr" wrap="square"/>
+          <a:bodyPr wrap="square" rtlCol="0" anchor="ctr"/>
           <a:lstStyle/>
           <a:p>
             <a:pPr algn="ctr"/>
@@ -15158,7 +14827,7 @@
 </file>
 
 <file path=ppt/theme/theme2.xml><?xml version="1.0" encoding="utf-8"?>
-<a:theme xmlns:a="http://schemas.openxmlformats.org/drawingml/2006/main" name="Office Theme">
+<a:theme xmlns:a="http://schemas.openxmlformats.org/drawingml/2006/main" name="Office 主题​​">
   <a:themeElements>
     <a:clrScheme name="Office">
       <a:dk1>
@@ -15168,44 +14837,44 @@
         <a:sysClr val="window" lastClr="FFFFFF"/>
       </a:lt1>
       <a:dk2>
-        <a:srgbClr val="1F497D"/>
+        <a:srgbClr val="44546A"/>
       </a:dk2>
       <a:lt2>
-        <a:srgbClr val="EEECE1"/>
+        <a:srgbClr val="E7E6E6"/>
       </a:lt2>
       <a:accent1>
-        <a:srgbClr val="4F81BD"/>
+        <a:srgbClr val="4472C4"/>
       </a:accent1>
       <a:accent2>
-        <a:srgbClr val="C0504D"/>
+        <a:srgbClr val="ED7D31"/>
       </a:accent2>
       <a:accent3>
-        <a:srgbClr val="9BBB59"/>
+        <a:srgbClr val="A5A5A5"/>
       </a:accent3>
       <a:accent4>
-        <a:srgbClr val="8064A2"/>
+        <a:srgbClr val="FFC000"/>
       </a:accent4>
       <a:accent5>
-        <a:srgbClr val="4BACC6"/>
+        <a:srgbClr val="5B9BD5"/>
       </a:accent5>
       <a:accent6>
-        <a:srgbClr val="F79646"/>
+        <a:srgbClr val="70AD47"/>
       </a:accent6>
       <a:hlink>
-        <a:srgbClr val="0000FF"/>
+        <a:srgbClr val="0563C1"/>
       </a:hlink>
       <a:folHlink>
-        <a:srgbClr val="800080"/>
+        <a:srgbClr val="954F72"/>
       </a:folHlink>
     </a:clrScheme>
     <a:fontScheme name="Office">
       <a:majorFont>
-        <a:latin typeface="Calibri"/>
+        <a:latin typeface="等线 Light" panose="020F0302020204030204"/>
         <a:ea typeface=""/>
         <a:cs typeface=""/>
-        <a:font script="Jpan" typeface="ＭＳ Ｐゴシック"/>
+        <a:font script="Jpan" typeface="游ゴシック Light"/>
         <a:font script="Hang" typeface="맑은 고딕"/>
-        <a:font script="Hans" typeface="宋体"/>
+        <a:font script="Hans" typeface="等线 Light"/>
         <a:font script="Hant" typeface="新細明體"/>
         <a:font script="Arab" typeface="Times New Roman"/>
         <a:font script="Hebr" typeface="Times New Roman"/>
@@ -15233,14 +14902,31 @@
         <a:font script="Viet" typeface="Times New Roman"/>
         <a:font script="Uigh" typeface="Microsoft Uighur"/>
         <a:font script="Geor" typeface="Sylfaen"/>
+        <a:font script="Armn" typeface="Arial"/>
+        <a:font script="Bugi" typeface="Leelawadee UI"/>
+        <a:font script="Bopo" typeface="Microsoft JhengHei"/>
+        <a:font script="Java" typeface="Javanese Text"/>
+        <a:font script="Lisu" typeface="Segoe UI"/>
+        <a:font script="Mymr" typeface="Myanmar Text"/>
+        <a:font script="Nkoo" typeface="Ebrima"/>
+        <a:font script="Olck" typeface="Nirmala UI"/>
+        <a:font script="Osma" typeface="Ebrima"/>
+        <a:font script="Phag" typeface="Phagspa"/>
+        <a:font script="Syrn" typeface="Estrangelo Edessa"/>
+        <a:font script="Syrj" typeface="Estrangelo Edessa"/>
+        <a:font script="Syre" typeface="Estrangelo Edessa"/>
+        <a:font script="Sora" typeface="Nirmala UI"/>
+        <a:font script="Tale" typeface="Microsoft Tai Le"/>
+        <a:font script="Talu" typeface="Microsoft New Tai Lue"/>
+        <a:font script="Tfng" typeface="Ebrima"/>
       </a:majorFont>
       <a:minorFont>
-        <a:latin typeface="Calibri"/>
+        <a:latin typeface="等线" panose="020F0502020204030204"/>
         <a:ea typeface=""/>
         <a:cs typeface=""/>
-        <a:font script="Jpan" typeface="ＭＳ Ｐゴシック"/>
+        <a:font script="Jpan" typeface="游ゴシック"/>
         <a:font script="Hang" typeface="맑은 고딕"/>
-        <a:font script="Hans" typeface="宋体"/>
+        <a:font script="Hans" typeface="等线"/>
         <a:font script="Hant" typeface="新細明體"/>
         <a:font script="Arab" typeface="Arial"/>
         <a:font script="Hebr" typeface="Arial"/>
@@ -15268,6 +14954,23 @@
         <a:font script="Viet" typeface="Arial"/>
         <a:font script="Uigh" typeface="Microsoft Uighur"/>
         <a:font script="Geor" typeface="Sylfaen"/>
+        <a:font script="Armn" typeface="Arial"/>
+        <a:font script="Bugi" typeface="Leelawadee UI"/>
+        <a:font script="Bopo" typeface="Microsoft JhengHei"/>
+        <a:font script="Java" typeface="Javanese Text"/>
+        <a:font script="Lisu" typeface="Segoe UI"/>
+        <a:font script="Mymr" typeface="Myanmar Text"/>
+        <a:font script="Nkoo" typeface="Ebrima"/>
+        <a:font script="Olck" typeface="Nirmala UI"/>
+        <a:font script="Osma" typeface="Ebrima"/>
+        <a:font script="Phag" typeface="Phagspa"/>
+        <a:font script="Syrn" typeface="Estrangelo Edessa"/>
+        <a:font script="Syrj" typeface="Estrangelo Edessa"/>
+        <a:font script="Syre" typeface="Estrangelo Edessa"/>
+        <a:font script="Sora" typeface="Nirmala UI"/>
+        <a:font script="Tale" typeface="Microsoft Tai Le"/>
+        <a:font script="Talu" typeface="Microsoft New Tai Lue"/>
+        <a:font script="Tfng" typeface="Ebrima"/>
       </a:minorFont>
     </a:fontScheme>
     <a:fmtScheme name="Office">
@@ -15279,200 +14982,141 @@
           <a:gsLst>
             <a:gs pos="0">
               <a:schemeClr val="phClr">
-                <a:tint val="50000"/>
-                <a:satMod val="300000"/>
+                <a:lumMod val="110000"/>
+                <a:satMod val="105000"/>
+                <a:tint val="67000"/>
               </a:schemeClr>
             </a:gs>
-            <a:gs pos="35000">
+            <a:gs pos="50000">
               <a:schemeClr val="phClr">
-                <a:tint val="37000"/>
-                <a:satMod val="300000"/>
+                <a:lumMod val="105000"/>
+                <a:satMod val="103000"/>
+                <a:tint val="73000"/>
               </a:schemeClr>
             </a:gs>
             <a:gs pos="100000">
               <a:schemeClr val="phClr">
-                <a:tint val="15000"/>
-                <a:satMod val="350000"/>
+                <a:lumMod val="105000"/>
+                <a:satMod val="109000"/>
+                <a:tint val="81000"/>
               </a:schemeClr>
             </a:gs>
           </a:gsLst>
-          <a:lin ang="16200000" scaled="1"/>
+          <a:lin ang="5400000" scaled="0"/>
         </a:gradFill>
         <a:gradFill rotWithShape="1">
           <a:gsLst>
             <a:gs pos="0">
               <a:schemeClr val="phClr">
-                <a:tint val="100000"/>
+                <a:satMod val="103000"/>
+                <a:lumMod val="102000"/>
+                <a:tint val="94000"/>
+              </a:schemeClr>
+            </a:gs>
+            <a:gs pos="50000">
+              <a:schemeClr val="phClr">
+                <a:satMod val="110000"/>
+                <a:lumMod val="100000"/>
                 <a:shade val="100000"/>
-                <a:satMod val="130000"/>
               </a:schemeClr>
             </a:gs>
             <a:gs pos="100000">
               <a:schemeClr val="phClr">
-                <a:tint val="50000"/>
-                <a:shade val="100000"/>
-                <a:satMod val="350000"/>
+                <a:lumMod val="99000"/>
+                <a:satMod val="120000"/>
+                <a:shade val="78000"/>
               </a:schemeClr>
             </a:gs>
           </a:gsLst>
-          <a:lin ang="16200000" scaled="0"/>
+          <a:lin ang="5400000" scaled="0"/>
         </a:gradFill>
       </a:fillStyleLst>
       <a:lnStyleLst>
-        <a:ln w="9525" cap="flat" cmpd="sng" algn="ctr">
-          <a:solidFill>
-            <a:schemeClr val="phClr">
-              <a:shade val="95000"/>
-              <a:satMod val="105000"/>
-            </a:schemeClr>
-          </a:solidFill>
-          <a:prstDash val="solid"/>
-        </a:ln>
-        <a:ln w="25400" cap="flat" cmpd="sng" algn="ctr">
+        <a:ln w="6350" cap="flat" cmpd="sng" algn="ctr">
           <a:solidFill>
             <a:schemeClr val="phClr"/>
           </a:solidFill>
           <a:prstDash val="solid"/>
+          <a:miter lim="800000"/>
         </a:ln>
-        <a:ln w="38100" cap="flat" cmpd="sng" algn="ctr">
+        <a:ln w="12700" cap="flat" cmpd="sng" algn="ctr">
           <a:solidFill>
             <a:schemeClr val="phClr"/>
           </a:solidFill>
           <a:prstDash val="solid"/>
+          <a:miter lim="800000"/>
+        </a:ln>
+        <a:ln w="19050" cap="flat" cmpd="sng" algn="ctr">
+          <a:solidFill>
+            <a:schemeClr val="phClr"/>
+          </a:solidFill>
+          <a:prstDash val="solid"/>
+          <a:miter lim="800000"/>
         </a:ln>
       </a:lnStyleLst>
       <a:effectStyleLst>
         <a:effectStyle>
+          <a:effectLst/>
+        </a:effectStyle>
+        <a:effectStyle>
+          <a:effectLst/>
+        </a:effectStyle>
+        <a:effectStyle>
           <a:effectLst>
-            <a:outerShdw blurRad="40000" dist="20000" dir="5400000" rotWithShape="0">
+            <a:outerShdw blurRad="57150" dist="19050" dir="5400000" algn="ctr" rotWithShape="0">
               <a:srgbClr val="000000">
-                <a:alpha val="38000"/>
+                <a:alpha val="63000"/>
               </a:srgbClr>
             </a:outerShdw>
           </a:effectLst>
-        </a:effectStyle>
-        <a:effectStyle>
-          <a:effectLst>
-            <a:outerShdw blurRad="40000" dist="23000" dir="5400000" rotWithShape="0">
-              <a:srgbClr val="000000">
-                <a:alpha val="35000"/>
-              </a:srgbClr>
-            </a:outerShdw>
-          </a:effectLst>
-        </a:effectStyle>
-        <a:effectStyle>
-          <a:effectLst>
-            <a:outerShdw blurRad="40000" dist="23000" dir="5400000" rotWithShape="0">
-              <a:srgbClr val="000000">
-                <a:alpha val="35000"/>
-              </a:srgbClr>
-            </a:outerShdw>
-          </a:effectLst>
-          <a:scene3d>
-            <a:camera prst="orthographicFront">
-              <a:rot lat="0" lon="0" rev="0"/>
-            </a:camera>
-            <a:lightRig rig="threePt" dir="t">
-              <a:rot lat="0" lon="0" rev="1200000"/>
-            </a:lightRig>
-          </a:scene3d>
-          <a:sp3d>
-            <a:bevelT w="63500" h="25400"/>
-          </a:sp3d>
         </a:effectStyle>
       </a:effectStyleLst>
       <a:bgFillStyleLst>
         <a:solidFill>
           <a:schemeClr val="phClr"/>
         </a:solidFill>
+        <a:solidFill>
+          <a:schemeClr val="phClr">
+            <a:tint val="95000"/>
+            <a:satMod val="170000"/>
+          </a:schemeClr>
+        </a:solidFill>
         <a:gradFill rotWithShape="1">
           <a:gsLst>
             <a:gs pos="0">
               <a:schemeClr val="phClr">
-                <a:tint val="40000"/>
-                <a:satMod val="350000"/>
+                <a:tint val="93000"/>
+                <a:satMod val="150000"/>
+                <a:shade val="98000"/>
+                <a:lumMod val="102000"/>
               </a:schemeClr>
             </a:gs>
-            <a:gs pos="40000">
+            <a:gs pos="50000">
               <a:schemeClr val="phClr">
-                <a:tint val="45000"/>
-                <a:shade val="99000"/>
-                <a:satMod val="350000"/>
+                <a:tint val="98000"/>
+                <a:satMod val="130000"/>
+                <a:shade val="90000"/>
+                <a:lumMod val="103000"/>
               </a:schemeClr>
             </a:gs>
             <a:gs pos="100000">
               <a:schemeClr val="phClr">
-                <a:shade val="20000"/>
-                <a:satMod val="255000"/>
+                <a:shade val="63000"/>
+                <a:satMod val="120000"/>
               </a:schemeClr>
             </a:gs>
           </a:gsLst>
-          <a:path path="circle">
-            <a:fillToRect l="50000" t="-80000" r="50000" b="180000"/>
-          </a:path>
-        </a:gradFill>
-        <a:gradFill rotWithShape="1">
-          <a:gsLst>
-            <a:gs pos="0">
-              <a:schemeClr val="phClr">
-                <a:tint val="80000"/>
-                <a:satMod val="300000"/>
-              </a:schemeClr>
-            </a:gs>
-            <a:gs pos="100000">
-              <a:schemeClr val="phClr">
-                <a:shade val="30000"/>
-                <a:satMod val="200000"/>
-              </a:schemeClr>
-            </a:gs>
-          </a:gsLst>
-          <a:path path="circle">
-            <a:fillToRect l="50000" t="50000" r="50000" b="50000"/>
-          </a:path>
+          <a:lin ang="5400000" scaled="0"/>
         </a:gradFill>
       </a:bgFillStyleLst>
     </a:fmtScheme>
   </a:themeElements>
-  <a:objectDefaults>
-    <a:spDef>
-      <a:spPr/>
-      <a:bodyPr/>
-      <a:lstStyle/>
-      <a:style>
-        <a:lnRef idx="1">
-          <a:schemeClr val="accent1"/>
-        </a:lnRef>
-        <a:fillRef idx="3">
-          <a:schemeClr val="accent1"/>
-        </a:fillRef>
-        <a:effectRef idx="2">
-          <a:schemeClr val="accent1"/>
-        </a:effectRef>
-        <a:fontRef idx="minor">
-          <a:schemeClr val="lt1"/>
-        </a:fontRef>
-      </a:style>
-    </a:spDef>
-    <a:lnDef>
-      <a:spPr/>
-      <a:bodyPr/>
-      <a:lstStyle/>
-      <a:style>
-        <a:lnRef idx="2">
-          <a:schemeClr val="accent1"/>
-        </a:lnRef>
-        <a:fillRef idx="0">
-          <a:schemeClr val="accent1"/>
-        </a:fillRef>
-        <a:effectRef idx="1">
-          <a:schemeClr val="accent1"/>
-        </a:effectRef>
-        <a:fontRef idx="minor">
-          <a:schemeClr val="tx1"/>
-        </a:fontRef>
-      </a:style>
-    </a:lnDef>
-  </a:objectDefaults>
+  <a:objectDefaults/>
   <a:extraClrSchemeLst/>
+  <a:extLst>
+    <a:ext uri="{05A4C25C-085E-4340-85A3-A5531E510DB2}">
+      <thm15:themeFamily xmlns:thm15="http://schemas.microsoft.com/office/thememl/2012/main" name="Office Theme" id="{62F939B6-93AF-4DB8-9C6B-D6C7DFDC589F}" vid="{4A3C46E8-61CC-4603-A589-7422A47A8E4A}"/>
+    </a:ext>
+  </a:extLst>
 </a:theme>
 </file>
--- a/Submission/00_技术报告/汇报PPT_20261019.pptx
+++ b/Submission/00_技术报告/汇报PPT_20261019.pptx
@@ -1,28 +1,28 @@
 
 <file path=ppt/presentation.xml><?xml version="1.0" encoding="utf-8"?>
-<p:presentation xmlns:a="http://schemas.openxmlformats.org/drawingml/2006/main" xmlns:r="http://schemas.openxmlformats.org/officeDocument/2006/relationships" xmlns:p="http://schemas.openxmlformats.org/presentationml/2006/main" saveSubsetFonts="1" autoCompressPictures="0">
+<p:presentation xmlns:a="http://schemas.openxmlformats.org/drawingml/2006/main" xmlns:r="http://schemas.openxmlformats.org/officeDocument/2006/relationships" xmlns:p="http://schemas.openxmlformats.org/presentationml/2006/main" autoCompressPictures="0">
   <p:sldMasterIdLst>
     <p:sldMasterId id="2147483648" r:id="rId1"/>
   </p:sldMasterIdLst>
   <p:notesMasterIdLst>
-    <p:notesMasterId r:id="rId17"/>
+    <p:notesMasterId r:id="rId4"/>
   </p:notesMasterIdLst>
   <p:sldIdLst>
-    <p:sldId id="256" r:id="rId2"/>
-    <p:sldId id="257" r:id="rId3"/>
-    <p:sldId id="258" r:id="rId4"/>
-    <p:sldId id="259" r:id="rId5"/>
-    <p:sldId id="260" r:id="rId6"/>
-    <p:sldId id="261" r:id="rId7"/>
-    <p:sldId id="262" r:id="rId8"/>
-    <p:sldId id="263" r:id="rId9"/>
-    <p:sldId id="264" r:id="rId10"/>
-    <p:sldId id="266" r:id="rId11"/>
-    <p:sldId id="267" r:id="rId12"/>
-    <p:sldId id="268" r:id="rId13"/>
-    <p:sldId id="269" r:id="rId14"/>
-    <p:sldId id="270" r:id="rId15"/>
-    <p:sldId id="271" r:id="rId16"/>
+    <p:sldId id="256" r:id="rId3"/>
+    <p:sldId id="257" r:id="rId5"/>
+    <p:sldId id="258" r:id="rId6"/>
+    <p:sldId id="259" r:id="rId7"/>
+    <p:sldId id="260" r:id="rId8"/>
+    <p:sldId id="261" r:id="rId9"/>
+    <p:sldId id="262" r:id="rId10"/>
+    <p:sldId id="263" r:id="rId11"/>
+    <p:sldId id="264" r:id="rId12"/>
+    <p:sldId id="266" r:id="rId13"/>
+    <p:sldId id="267" r:id="rId14"/>
+    <p:sldId id="268" r:id="rId15"/>
+    <p:sldId id="269" r:id="rId16"/>
+    <p:sldId id="270" r:id="rId17"/>
+    <p:sldId id="271" r:id="rId18"/>
   </p:sldIdLst>
   <p:sldSz cx="12192000" cy="6858000"/>
   <p:notesSz cx="6858000" cy="9144000"/>
@@ -124,12 +124,12 @@
   <p:extLst>
     <p:ext uri="{EFAFB233-063F-42B5-8137-9DF3F51BA10A}">
       <p15:sldGuideLst xmlns:p15="http://schemas.microsoft.com/office/powerpoint/2012/main">
-        <p15:guide id="1" orient="horz" pos="2160">
+        <p15:guide id="1" orient="horz" pos="2160" userDrawn="1">
           <p15:clr>
             <a:srgbClr val="A4A3A4"/>
           </p15:clr>
         </p15:guide>
-        <p15:guide id="2" pos="2880">
+        <p15:guide id="2" pos="2880" userDrawn="1">
           <p15:clr>
             <a:srgbClr val="A4A3A4"/>
           </p15:clr>
@@ -163,11 +163,6 @@
         </a:xfrm>
       </p:grpSpPr>
     </p:spTree>
-    <p:extLst>
-      <p:ext uri="{BB962C8B-B14F-4D97-AF65-F5344CB8AC3E}">
-        <p14:creationId xmlns:p14="http://schemas.microsoft.com/office/powerpoint/2010/main" val="1462548496"/>
-      </p:ext>
-    </p:extLst>
   </p:cSld>
   <p:clrMap bg1="lt1" tx1="dk1" bg2="lt2" tx2="dk2" accent1="accent1" accent2="accent2" accent3="accent3" accent4="accent4" accent5="accent5" accent6="accent6" hlink="hlink" folHlink="folHlink"/>
   <p:notesStyle>
@@ -333,6 +328,7 @@
               <a:rPr dirty="0"/>
               <a:t> 84.96，四项硬约束在全部工艺角都满足。</a:t>
             </a:r>
+            <a:endParaRPr dirty="0"/>
           </a:p>
         </p:txBody>
       </p:sp>
@@ -490,6 +486,7 @@
               <a:rPr dirty="0"/>
               <a:t> 0.84 dB。</a:t>
             </a:r>
+            <a:endParaRPr dirty="0"/>
           </a:p>
         </p:txBody>
       </p:sp>
@@ -1394,6 +1391,7 @@
               <a:rPr lang="en-US"/>
               <a:t>Click to edit Master title style</a:t>
             </a:r>
+            <a:endParaRPr lang="en-US"/>
           </a:p>
         </p:txBody>
       </p:sp>
@@ -1512,6 +1510,7 @@
               <a:rPr lang="en-US"/>
               <a:t>Click to edit Master subtitle style</a:t>
             </a:r>
+            <a:endParaRPr lang="en-US"/>
           </a:p>
         </p:txBody>
       </p:sp>
@@ -1532,7 +1531,6 @@
           <a:p>
             <a:fld id="{5BCAD085-E8A6-8845-BD4E-CB4CCA059FC4}" type="datetimeFigureOut">
               <a:rPr lang="en-US" smtClean="0"/>
-              <a:t>10/19/2026</a:t>
             </a:fld>
             <a:endParaRPr lang="en-US"/>
           </a:p>
@@ -1574,18 +1572,12 @@
           <a:p>
             <a:fld id="{C1FF6DA9-008F-8B48-92A6-B652298478BF}" type="slidenum">
               <a:rPr lang="en-US" smtClean="0"/>
-              <a:t>‹#›</a:t>
             </a:fld>
             <a:endParaRPr lang="en-US"/>
           </a:p>
         </p:txBody>
       </p:sp>
     </p:spTree>
-    <p:extLst>
-      <p:ext uri="{BB962C8B-B14F-4D97-AF65-F5344CB8AC3E}">
-        <p14:creationId xmlns:p14="http://schemas.microsoft.com/office/powerpoint/2010/main" val="3168075583"/>
-      </p:ext>
-    </p:extLst>
   </p:cSld>
   <p:clrMapOvr>
     <a:masterClrMapping/>
@@ -1629,6 +1621,7 @@
               <a:rPr lang="en-US"/>
               <a:t>Click to edit Master title style</a:t>
             </a:r>
+            <a:endParaRPr lang="en-US"/>
           </a:p>
         </p:txBody>
       </p:sp>
@@ -1652,6 +1645,7 @@
               <a:rPr lang="en-US"/>
               <a:t>Click to edit Master text styles</a:t>
             </a:r>
+            <a:endParaRPr lang="en-US"/>
           </a:p>
           <a:p>
             <a:pPr lvl="1"/>
@@ -1659,6 +1653,7 @@
               <a:rPr lang="en-US"/>
               <a:t>Second level</a:t>
             </a:r>
+            <a:endParaRPr lang="en-US"/>
           </a:p>
           <a:p>
             <a:pPr lvl="2"/>
@@ -1666,6 +1661,7 @@
               <a:rPr lang="en-US"/>
               <a:t>Third level</a:t>
             </a:r>
+            <a:endParaRPr lang="en-US"/>
           </a:p>
           <a:p>
             <a:pPr lvl="3"/>
@@ -1673,6 +1669,7 @@
               <a:rPr lang="en-US"/>
               <a:t>Fourth level</a:t>
             </a:r>
+            <a:endParaRPr lang="en-US"/>
           </a:p>
           <a:p>
             <a:pPr lvl="4"/>
@@ -1680,6 +1677,7 @@
               <a:rPr lang="en-US"/>
               <a:t>Fifth level</a:t>
             </a:r>
+            <a:endParaRPr lang="en-US"/>
           </a:p>
         </p:txBody>
       </p:sp>
@@ -1700,7 +1698,6 @@
           <a:p>
             <a:fld id="{5BCAD085-E8A6-8845-BD4E-CB4CCA059FC4}" type="datetimeFigureOut">
               <a:rPr lang="en-US" smtClean="0"/>
-              <a:t>10/19/2026</a:t>
             </a:fld>
             <a:endParaRPr lang="en-US"/>
           </a:p>
@@ -1742,18 +1739,12 @@
           <a:p>
             <a:fld id="{C1FF6DA9-008F-8B48-92A6-B652298478BF}" type="slidenum">
               <a:rPr lang="en-US" smtClean="0"/>
-              <a:t>‹#›</a:t>
             </a:fld>
             <a:endParaRPr lang="en-US"/>
           </a:p>
         </p:txBody>
       </p:sp>
     </p:spTree>
-    <p:extLst>
-      <p:ext uri="{BB962C8B-B14F-4D97-AF65-F5344CB8AC3E}">
-        <p14:creationId xmlns:p14="http://schemas.microsoft.com/office/powerpoint/2010/main" val="2910927964"/>
-      </p:ext>
-    </p:extLst>
   </p:cSld>
   <p:clrMapOvr>
     <a:masterClrMapping/>
@@ -1802,6 +1793,7 @@
               <a:rPr lang="en-US"/>
               <a:t>Click to edit Master title style</a:t>
             </a:r>
+            <a:endParaRPr lang="en-US"/>
           </a:p>
         </p:txBody>
       </p:sp>
@@ -1830,6 +1822,7 @@
               <a:rPr lang="en-US"/>
               <a:t>Click to edit Master text styles</a:t>
             </a:r>
+            <a:endParaRPr lang="en-US"/>
           </a:p>
           <a:p>
             <a:pPr lvl="1"/>
@@ -1837,6 +1830,7 @@
               <a:rPr lang="en-US"/>
               <a:t>Second level</a:t>
             </a:r>
+            <a:endParaRPr lang="en-US"/>
           </a:p>
           <a:p>
             <a:pPr lvl="2"/>
@@ -1844,6 +1838,7 @@
               <a:rPr lang="en-US"/>
               <a:t>Third level</a:t>
             </a:r>
+            <a:endParaRPr lang="en-US"/>
           </a:p>
           <a:p>
             <a:pPr lvl="3"/>
@@ -1851,6 +1846,7 @@
               <a:rPr lang="en-US"/>
               <a:t>Fourth level</a:t>
             </a:r>
+            <a:endParaRPr lang="en-US"/>
           </a:p>
           <a:p>
             <a:pPr lvl="4"/>
@@ -1858,6 +1854,7 @@
               <a:rPr lang="en-US"/>
               <a:t>Fifth level</a:t>
             </a:r>
+            <a:endParaRPr lang="en-US"/>
           </a:p>
         </p:txBody>
       </p:sp>
@@ -1878,7 +1875,6 @@
           <a:p>
             <a:fld id="{5BCAD085-E8A6-8845-BD4E-CB4CCA059FC4}" type="datetimeFigureOut">
               <a:rPr lang="en-US" smtClean="0"/>
-              <a:t>10/19/2026</a:t>
             </a:fld>
             <a:endParaRPr lang="en-US"/>
           </a:p>
@@ -1920,18 +1916,12 @@
           <a:p>
             <a:fld id="{C1FF6DA9-008F-8B48-92A6-B652298478BF}" type="slidenum">
               <a:rPr lang="en-US" smtClean="0"/>
-              <a:t>‹#›</a:t>
             </a:fld>
             <a:endParaRPr lang="en-US"/>
           </a:p>
         </p:txBody>
       </p:sp>
     </p:spTree>
-    <p:extLst>
-      <p:ext uri="{BB962C8B-B14F-4D97-AF65-F5344CB8AC3E}">
-        <p14:creationId xmlns:p14="http://schemas.microsoft.com/office/powerpoint/2010/main" val="3612223792"/>
-      </p:ext>
-    </p:extLst>
   </p:cSld>
   <p:clrMapOvr>
     <a:masterClrMapping/>
@@ -1975,6 +1965,7 @@
               <a:rPr lang="en-US"/>
               <a:t>Click to edit Master title style</a:t>
             </a:r>
+            <a:endParaRPr lang="en-US"/>
           </a:p>
         </p:txBody>
       </p:sp>
@@ -1998,6 +1989,7 @@
               <a:rPr lang="en-US"/>
               <a:t>Click to edit Master text styles</a:t>
             </a:r>
+            <a:endParaRPr lang="en-US"/>
           </a:p>
           <a:p>
             <a:pPr lvl="1"/>
@@ -2005,6 +1997,7 @@
               <a:rPr lang="en-US"/>
               <a:t>Second level</a:t>
             </a:r>
+            <a:endParaRPr lang="en-US"/>
           </a:p>
           <a:p>
             <a:pPr lvl="2"/>
@@ -2012,6 +2005,7 @@
               <a:rPr lang="en-US"/>
               <a:t>Third level</a:t>
             </a:r>
+            <a:endParaRPr lang="en-US"/>
           </a:p>
           <a:p>
             <a:pPr lvl="3"/>
@@ -2019,6 +2013,7 @@
               <a:rPr lang="en-US"/>
               <a:t>Fourth level</a:t>
             </a:r>
+            <a:endParaRPr lang="en-US"/>
           </a:p>
           <a:p>
             <a:pPr lvl="4"/>
@@ -2026,6 +2021,7 @@
               <a:rPr lang="en-US"/>
               <a:t>Fifth level</a:t>
             </a:r>
+            <a:endParaRPr lang="en-US"/>
           </a:p>
         </p:txBody>
       </p:sp>
@@ -2046,7 +2042,6 @@
           <a:p>
             <a:fld id="{5BCAD085-E8A6-8845-BD4E-CB4CCA059FC4}" type="datetimeFigureOut">
               <a:rPr lang="en-US" smtClean="0"/>
-              <a:t>10/19/2026</a:t>
             </a:fld>
             <a:endParaRPr lang="en-US"/>
           </a:p>
@@ -2088,18 +2083,12 @@
           <a:p>
             <a:fld id="{C1FF6DA9-008F-8B48-92A6-B652298478BF}" type="slidenum">
               <a:rPr lang="en-US" smtClean="0"/>
-              <a:t>‹#›</a:t>
             </a:fld>
             <a:endParaRPr lang="en-US"/>
           </a:p>
         </p:txBody>
       </p:sp>
     </p:spTree>
-    <p:extLst>
-      <p:ext uri="{BB962C8B-B14F-4D97-AF65-F5344CB8AC3E}">
-        <p14:creationId xmlns:p14="http://schemas.microsoft.com/office/powerpoint/2010/main" val="2614314258"/>
-      </p:ext>
-    </p:extLst>
   </p:cSld>
   <p:clrMapOvr>
     <a:masterClrMapping/>
@@ -2152,6 +2141,7 @@
               <a:rPr lang="en-US"/>
               <a:t>Click to edit Master title style</a:t>
             </a:r>
+            <a:endParaRPr lang="en-US"/>
           </a:p>
         </p:txBody>
       </p:sp>
@@ -2271,6 +2261,7 @@
               <a:rPr lang="en-US"/>
               <a:t>Click to edit Master text styles</a:t>
             </a:r>
+            <a:endParaRPr lang="en-US"/>
           </a:p>
         </p:txBody>
       </p:sp>
@@ -2291,7 +2282,6 @@
           <a:p>
             <a:fld id="{5BCAD085-E8A6-8845-BD4E-CB4CCA059FC4}" type="datetimeFigureOut">
               <a:rPr lang="en-US" smtClean="0"/>
-              <a:t>10/19/2026</a:t>
             </a:fld>
             <a:endParaRPr lang="en-US"/>
           </a:p>
@@ -2333,18 +2323,12 @@
           <a:p>
             <a:fld id="{C1FF6DA9-008F-8B48-92A6-B652298478BF}" type="slidenum">
               <a:rPr lang="en-US" smtClean="0"/>
-              <a:t>‹#›</a:t>
             </a:fld>
             <a:endParaRPr lang="en-US"/>
           </a:p>
         </p:txBody>
       </p:sp>
     </p:spTree>
-    <p:extLst>
-      <p:ext uri="{BB962C8B-B14F-4D97-AF65-F5344CB8AC3E}">
-        <p14:creationId xmlns:p14="http://schemas.microsoft.com/office/powerpoint/2010/main" val="960648375"/>
-      </p:ext>
-    </p:extLst>
   </p:cSld>
   <p:clrMapOvr>
     <a:masterClrMapping/>
@@ -2388,6 +2372,7 @@
               <a:rPr lang="en-US"/>
               <a:t>Click to edit Master title style</a:t>
             </a:r>
+            <a:endParaRPr lang="en-US"/>
           </a:p>
         </p:txBody>
       </p:sp>
@@ -2444,6 +2429,7 @@
               <a:rPr lang="en-US"/>
               <a:t>Click to edit Master text styles</a:t>
             </a:r>
+            <a:endParaRPr lang="en-US"/>
           </a:p>
           <a:p>
             <a:pPr lvl="1"/>
@@ -2451,6 +2437,7 @@
               <a:rPr lang="en-US"/>
               <a:t>Second level</a:t>
             </a:r>
+            <a:endParaRPr lang="en-US"/>
           </a:p>
           <a:p>
             <a:pPr lvl="2"/>
@@ -2458,6 +2445,7 @@
               <a:rPr lang="en-US"/>
               <a:t>Third level</a:t>
             </a:r>
+            <a:endParaRPr lang="en-US"/>
           </a:p>
           <a:p>
             <a:pPr lvl="3"/>
@@ -2465,6 +2453,7 @@
               <a:rPr lang="en-US"/>
               <a:t>Fourth level</a:t>
             </a:r>
+            <a:endParaRPr lang="en-US"/>
           </a:p>
           <a:p>
             <a:pPr lvl="4"/>
@@ -2472,6 +2461,7 @@
               <a:rPr lang="en-US"/>
               <a:t>Fifth level</a:t>
             </a:r>
+            <a:endParaRPr lang="en-US"/>
           </a:p>
         </p:txBody>
       </p:sp>
@@ -2528,6 +2518,7 @@
               <a:rPr lang="en-US"/>
               <a:t>Click to edit Master text styles</a:t>
             </a:r>
+            <a:endParaRPr lang="en-US"/>
           </a:p>
           <a:p>
             <a:pPr lvl="1"/>
@@ -2535,6 +2526,7 @@
               <a:rPr lang="en-US"/>
               <a:t>Second level</a:t>
             </a:r>
+            <a:endParaRPr lang="en-US"/>
           </a:p>
           <a:p>
             <a:pPr lvl="2"/>
@@ -2542,6 +2534,7 @@
               <a:rPr lang="en-US"/>
               <a:t>Third level</a:t>
             </a:r>
+            <a:endParaRPr lang="en-US"/>
           </a:p>
           <a:p>
             <a:pPr lvl="3"/>
@@ -2549,6 +2542,7 @@
               <a:rPr lang="en-US"/>
               <a:t>Fourth level</a:t>
             </a:r>
+            <a:endParaRPr lang="en-US"/>
           </a:p>
           <a:p>
             <a:pPr lvl="4"/>
@@ -2556,6 +2550,7 @@
               <a:rPr lang="en-US"/>
               <a:t>Fifth level</a:t>
             </a:r>
+            <a:endParaRPr lang="en-US"/>
           </a:p>
         </p:txBody>
       </p:sp>
@@ -2576,7 +2571,6 @@
           <a:p>
             <a:fld id="{5BCAD085-E8A6-8845-BD4E-CB4CCA059FC4}" type="datetimeFigureOut">
               <a:rPr lang="en-US" smtClean="0"/>
-              <a:t>10/19/2026</a:t>
             </a:fld>
             <a:endParaRPr lang="en-US"/>
           </a:p>
@@ -2618,18 +2612,12 @@
           <a:p>
             <a:fld id="{C1FF6DA9-008F-8B48-92A6-B652298478BF}" type="slidenum">
               <a:rPr lang="en-US" smtClean="0"/>
-              <a:t>‹#›</a:t>
             </a:fld>
             <a:endParaRPr lang="en-US"/>
           </a:p>
         </p:txBody>
       </p:sp>
     </p:spTree>
-    <p:extLst>
-      <p:ext uri="{BB962C8B-B14F-4D97-AF65-F5344CB8AC3E}">
-        <p14:creationId xmlns:p14="http://schemas.microsoft.com/office/powerpoint/2010/main" val="2782244947"/>
-      </p:ext>
-    </p:extLst>
   </p:cSld>
   <p:clrMapOvr>
     <a:masterClrMapping/>
@@ -2677,6 +2665,7 @@
               <a:rPr lang="en-US"/>
               <a:t>Click to edit Master title style</a:t>
             </a:r>
+            <a:endParaRPr lang="en-US"/>
           </a:p>
         </p:txBody>
       </p:sp>
@@ -2742,6 +2731,7 @@
               <a:rPr lang="en-US"/>
               <a:t>Click to edit Master text styles</a:t>
             </a:r>
+            <a:endParaRPr lang="en-US"/>
           </a:p>
         </p:txBody>
       </p:sp>
@@ -2798,6 +2788,7 @@
               <a:rPr lang="en-US"/>
               <a:t>Click to edit Master text styles</a:t>
             </a:r>
+            <a:endParaRPr lang="en-US"/>
           </a:p>
           <a:p>
             <a:pPr lvl="1"/>
@@ -2805,6 +2796,7 @@
               <a:rPr lang="en-US"/>
               <a:t>Second level</a:t>
             </a:r>
+            <a:endParaRPr lang="en-US"/>
           </a:p>
           <a:p>
             <a:pPr lvl="2"/>
@@ -2812,6 +2804,7 @@
               <a:rPr lang="en-US"/>
               <a:t>Third level</a:t>
             </a:r>
+            <a:endParaRPr lang="en-US"/>
           </a:p>
           <a:p>
             <a:pPr lvl="3"/>
@@ -2819,6 +2812,7 @@
               <a:rPr lang="en-US"/>
               <a:t>Fourth level</a:t>
             </a:r>
+            <a:endParaRPr lang="en-US"/>
           </a:p>
           <a:p>
             <a:pPr lvl="4"/>
@@ -2826,6 +2820,7 @@
               <a:rPr lang="en-US"/>
               <a:t>Fifth level</a:t>
             </a:r>
+            <a:endParaRPr lang="en-US"/>
           </a:p>
         </p:txBody>
       </p:sp>
@@ -2891,6 +2886,7 @@
               <a:rPr lang="en-US"/>
               <a:t>Click to edit Master text styles</a:t>
             </a:r>
+            <a:endParaRPr lang="en-US"/>
           </a:p>
         </p:txBody>
       </p:sp>
@@ -2947,6 +2943,7 @@
               <a:rPr lang="en-US"/>
               <a:t>Click to edit Master text styles</a:t>
             </a:r>
+            <a:endParaRPr lang="en-US"/>
           </a:p>
           <a:p>
             <a:pPr lvl="1"/>
@@ -2954,6 +2951,7 @@
               <a:rPr lang="en-US"/>
               <a:t>Second level</a:t>
             </a:r>
+            <a:endParaRPr lang="en-US"/>
           </a:p>
           <a:p>
             <a:pPr lvl="2"/>
@@ -2961,6 +2959,7 @@
               <a:rPr lang="en-US"/>
               <a:t>Third level</a:t>
             </a:r>
+            <a:endParaRPr lang="en-US"/>
           </a:p>
           <a:p>
             <a:pPr lvl="3"/>
@@ -2968,6 +2967,7 @@
               <a:rPr lang="en-US"/>
               <a:t>Fourth level</a:t>
             </a:r>
+            <a:endParaRPr lang="en-US"/>
           </a:p>
           <a:p>
             <a:pPr lvl="4"/>
@@ -2975,6 +2975,7 @@
               <a:rPr lang="en-US"/>
               <a:t>Fifth level</a:t>
             </a:r>
+            <a:endParaRPr lang="en-US"/>
           </a:p>
         </p:txBody>
       </p:sp>
@@ -2995,7 +2996,6 @@
           <a:p>
             <a:fld id="{5BCAD085-E8A6-8845-BD4E-CB4CCA059FC4}" type="datetimeFigureOut">
               <a:rPr lang="en-US" smtClean="0"/>
-              <a:t>10/19/2026</a:t>
             </a:fld>
             <a:endParaRPr lang="en-US"/>
           </a:p>
@@ -3037,18 +3037,12 @@
           <a:p>
             <a:fld id="{C1FF6DA9-008F-8B48-92A6-B652298478BF}" type="slidenum">
               <a:rPr lang="en-US" smtClean="0"/>
-              <a:t>‹#›</a:t>
             </a:fld>
             <a:endParaRPr lang="en-US"/>
           </a:p>
         </p:txBody>
       </p:sp>
     </p:spTree>
-    <p:extLst>
-      <p:ext uri="{BB962C8B-B14F-4D97-AF65-F5344CB8AC3E}">
-        <p14:creationId xmlns:p14="http://schemas.microsoft.com/office/powerpoint/2010/main" val="990158736"/>
-      </p:ext>
-    </p:extLst>
   </p:cSld>
   <p:clrMapOvr>
     <a:masterClrMapping/>
@@ -3092,6 +3086,7 @@
               <a:rPr lang="en-US"/>
               <a:t>Click to edit Master title style</a:t>
             </a:r>
+            <a:endParaRPr lang="en-US"/>
           </a:p>
         </p:txBody>
       </p:sp>
@@ -3112,7 +3107,6 @@
           <a:p>
             <a:fld id="{5BCAD085-E8A6-8845-BD4E-CB4CCA059FC4}" type="datetimeFigureOut">
               <a:rPr lang="en-US" smtClean="0"/>
-              <a:t>10/19/2026</a:t>
             </a:fld>
             <a:endParaRPr lang="en-US"/>
           </a:p>
@@ -3154,18 +3148,12 @@
           <a:p>
             <a:fld id="{C1FF6DA9-008F-8B48-92A6-B652298478BF}" type="slidenum">
               <a:rPr lang="en-US" smtClean="0"/>
-              <a:t>‹#›</a:t>
             </a:fld>
             <a:endParaRPr lang="en-US"/>
           </a:p>
         </p:txBody>
       </p:sp>
     </p:spTree>
-    <p:extLst>
-      <p:ext uri="{BB962C8B-B14F-4D97-AF65-F5344CB8AC3E}">
-        <p14:creationId xmlns:p14="http://schemas.microsoft.com/office/powerpoint/2010/main" val="727027711"/>
-      </p:ext>
-    </p:extLst>
   </p:cSld>
   <p:clrMapOvr>
     <a:masterClrMapping/>
@@ -3207,7 +3195,6 @@
           <a:p>
             <a:fld id="{5BCAD085-E8A6-8845-BD4E-CB4CCA059FC4}" type="datetimeFigureOut">
               <a:rPr lang="en-US" smtClean="0"/>
-              <a:t>10/19/2026</a:t>
             </a:fld>
             <a:endParaRPr lang="en-US"/>
           </a:p>
@@ -3249,18 +3236,12 @@
           <a:p>
             <a:fld id="{C1FF6DA9-008F-8B48-92A6-B652298478BF}" type="slidenum">
               <a:rPr lang="en-US" smtClean="0"/>
-              <a:t>‹#›</a:t>
             </a:fld>
             <a:endParaRPr lang="en-US"/>
           </a:p>
         </p:txBody>
       </p:sp>
     </p:spTree>
-    <p:extLst>
-      <p:ext uri="{BB962C8B-B14F-4D97-AF65-F5344CB8AC3E}">
-        <p14:creationId xmlns:p14="http://schemas.microsoft.com/office/powerpoint/2010/main" val="1212999818"/>
-      </p:ext>
-    </p:extLst>
   </p:cSld>
   <p:clrMapOvr>
     <a:masterClrMapping/>
@@ -3313,6 +3294,7 @@
               <a:rPr lang="en-US"/>
               <a:t>Click to edit Master title style</a:t>
             </a:r>
+            <a:endParaRPr lang="en-US"/>
           </a:p>
         </p:txBody>
       </p:sp>
@@ -3369,6 +3351,7 @@
               <a:rPr lang="en-US"/>
               <a:t>Click to edit Master text styles</a:t>
             </a:r>
+            <a:endParaRPr lang="en-US"/>
           </a:p>
           <a:p>
             <a:pPr lvl="1"/>
@@ -3376,6 +3359,7 @@
               <a:rPr lang="en-US"/>
               <a:t>Second level</a:t>
             </a:r>
+            <a:endParaRPr lang="en-US"/>
           </a:p>
           <a:p>
             <a:pPr lvl="2"/>
@@ -3383,6 +3367,7 @@
               <a:rPr lang="en-US"/>
               <a:t>Third level</a:t>
             </a:r>
+            <a:endParaRPr lang="en-US"/>
           </a:p>
           <a:p>
             <a:pPr lvl="3"/>
@@ -3390,6 +3375,7 @@
               <a:rPr lang="en-US"/>
               <a:t>Fourth level</a:t>
             </a:r>
+            <a:endParaRPr lang="en-US"/>
           </a:p>
           <a:p>
             <a:pPr lvl="4"/>
@@ -3397,6 +3383,7 @@
               <a:rPr lang="en-US"/>
               <a:t>Fifth level</a:t>
             </a:r>
+            <a:endParaRPr lang="en-US"/>
           </a:p>
         </p:txBody>
       </p:sp>
@@ -3462,6 +3449,7 @@
               <a:rPr lang="en-US"/>
               <a:t>Click to edit Master text styles</a:t>
             </a:r>
+            <a:endParaRPr lang="en-US"/>
           </a:p>
         </p:txBody>
       </p:sp>
@@ -3482,7 +3470,6 @@
           <a:p>
             <a:fld id="{5BCAD085-E8A6-8845-BD4E-CB4CCA059FC4}" type="datetimeFigureOut">
               <a:rPr lang="en-US" smtClean="0"/>
-              <a:t>10/19/2026</a:t>
             </a:fld>
             <a:endParaRPr lang="en-US"/>
           </a:p>
@@ -3524,18 +3511,12 @@
           <a:p>
             <a:fld id="{C1FF6DA9-008F-8B48-92A6-B652298478BF}" type="slidenum">
               <a:rPr lang="en-US" smtClean="0"/>
-              <a:t>‹#›</a:t>
             </a:fld>
             <a:endParaRPr lang="en-US"/>
           </a:p>
         </p:txBody>
       </p:sp>
     </p:spTree>
-    <p:extLst>
-      <p:ext uri="{BB962C8B-B14F-4D97-AF65-F5344CB8AC3E}">
-        <p14:creationId xmlns:p14="http://schemas.microsoft.com/office/powerpoint/2010/main" val="1840726560"/>
-      </p:ext>
-    </p:extLst>
   </p:cSld>
   <p:clrMapOvr>
     <a:masterClrMapping/>
@@ -3588,6 +3569,7 @@
               <a:rPr lang="en-US"/>
               <a:t>Click to edit Master title style</a:t>
             </a:r>
+            <a:endParaRPr lang="en-US"/>
           </a:p>
         </p:txBody>
       </p:sp>
@@ -3714,6 +3696,7 @@
               <a:rPr lang="en-US"/>
               <a:t>Click to edit Master text styles</a:t>
             </a:r>
+            <a:endParaRPr lang="en-US"/>
           </a:p>
         </p:txBody>
       </p:sp>
@@ -3734,7 +3717,6 @@
           <a:p>
             <a:fld id="{5BCAD085-E8A6-8845-BD4E-CB4CCA059FC4}" type="datetimeFigureOut">
               <a:rPr lang="en-US" smtClean="0"/>
-              <a:t>10/19/2026</a:t>
             </a:fld>
             <a:endParaRPr lang="en-US"/>
           </a:p>
@@ -3776,18 +3758,12 @@
           <a:p>
             <a:fld id="{C1FF6DA9-008F-8B48-92A6-B652298478BF}" type="slidenum">
               <a:rPr lang="en-US" smtClean="0"/>
-              <a:t>‹#›</a:t>
             </a:fld>
             <a:endParaRPr lang="en-US"/>
           </a:p>
         </p:txBody>
       </p:sp>
     </p:spTree>
-    <p:extLst>
-      <p:ext uri="{BB962C8B-B14F-4D97-AF65-F5344CB8AC3E}">
-        <p14:creationId xmlns:p14="http://schemas.microsoft.com/office/powerpoint/2010/main" val="3889236939"/>
-      </p:ext>
-    </p:extLst>
   </p:cSld>
   <p:clrMapOvr>
     <a:masterClrMapping/>
@@ -3846,6 +3822,7 @@
               <a:rPr lang="en-US"/>
               <a:t>Click to edit Master title style</a:t>
             </a:r>
+            <a:endParaRPr lang="en-US"/>
           </a:p>
         </p:txBody>
       </p:sp>
@@ -3879,6 +3856,7 @@
               <a:rPr lang="en-US"/>
               <a:t>Click to edit Master text styles</a:t>
             </a:r>
+            <a:endParaRPr lang="en-US"/>
           </a:p>
           <a:p>
             <a:pPr lvl="1"/>
@@ -3886,6 +3864,7 @@
               <a:rPr lang="en-US"/>
               <a:t>Second level</a:t>
             </a:r>
+            <a:endParaRPr lang="en-US"/>
           </a:p>
           <a:p>
             <a:pPr lvl="2"/>
@@ -3893,6 +3872,7 @@
               <a:rPr lang="en-US"/>
               <a:t>Third level</a:t>
             </a:r>
+            <a:endParaRPr lang="en-US"/>
           </a:p>
           <a:p>
             <a:pPr lvl="3"/>
@@ -3900,6 +3880,7 @@
               <a:rPr lang="en-US"/>
               <a:t>Fourth level</a:t>
             </a:r>
+            <a:endParaRPr lang="en-US"/>
           </a:p>
           <a:p>
             <a:pPr lvl="4"/>
@@ -3907,6 +3888,7 @@
               <a:rPr lang="en-US"/>
               <a:t>Fifth level</a:t>
             </a:r>
+            <a:endParaRPr lang="en-US"/>
           </a:p>
         </p:txBody>
       </p:sp>
@@ -3945,7 +3927,6 @@
           <a:p>
             <a:fld id="{5BCAD085-E8A6-8845-BD4E-CB4CCA059FC4}" type="datetimeFigureOut">
               <a:rPr lang="en-US" smtClean="0"/>
-              <a:t>10/19/2026</a:t>
             </a:fld>
             <a:endParaRPr lang="en-US"/>
           </a:p>
@@ -4023,18 +4004,12 @@
           <a:p>
             <a:fld id="{C1FF6DA9-008F-8B48-92A6-B652298478BF}" type="slidenum">
               <a:rPr lang="en-US" smtClean="0"/>
-              <a:t>‹#›</a:t>
             </a:fld>
             <a:endParaRPr lang="en-US"/>
           </a:p>
         </p:txBody>
       </p:sp>
     </p:spTree>
-    <p:extLst>
-      <p:ext uri="{BB962C8B-B14F-4D97-AF65-F5344CB8AC3E}">
-        <p14:creationId xmlns:p14="http://schemas.microsoft.com/office/powerpoint/2010/main" val="2209977519"/>
-      </p:ext>
-    </p:extLst>
   </p:cSld>
   <p:clrMap bg1="lt1" tx1="dk1" bg2="lt2" tx2="dk2" accent1="accent1" accent2="accent2" accent3="accent3" accent4="accent4" accent5="accent5" accent6="accent6" hlink="hlink" folHlink="folHlink"/>
   <p:sldLayoutIdLst>
@@ -4072,7 +4047,7 @@
         <a:spcBef>
           <a:spcPct val="20000"/>
         </a:spcBef>
-        <a:buFont typeface="Arial"/>
+        <a:buFont typeface="Arial" panose="020B0604020202020204"/>
         <a:buChar char="•"/>
         <a:defRPr sz="3200" kern="1200">
           <a:solidFill>
@@ -4087,7 +4062,7 @@
         <a:spcBef>
           <a:spcPct val="20000"/>
         </a:spcBef>
-        <a:buFont typeface="Arial"/>
+        <a:buFont typeface="Arial" panose="020B0604020202020204"/>
         <a:buChar char="–"/>
         <a:defRPr sz="2800" kern="1200">
           <a:solidFill>
@@ -4102,7 +4077,7 @@
         <a:spcBef>
           <a:spcPct val="20000"/>
         </a:spcBef>
-        <a:buFont typeface="Arial"/>
+        <a:buFont typeface="Arial" panose="020B0604020202020204"/>
         <a:buChar char="•"/>
         <a:defRPr sz="2400" kern="1200">
           <a:solidFill>
@@ -4117,7 +4092,7 @@
         <a:spcBef>
           <a:spcPct val="20000"/>
         </a:spcBef>
-        <a:buFont typeface="Arial"/>
+        <a:buFont typeface="Arial" panose="020B0604020202020204"/>
         <a:buChar char="–"/>
         <a:defRPr sz="2000" kern="1200">
           <a:solidFill>
@@ -4132,7 +4107,7 @@
         <a:spcBef>
           <a:spcPct val="20000"/>
         </a:spcBef>
-        <a:buFont typeface="Arial"/>
+        <a:buFont typeface="Arial" panose="020B0604020202020204"/>
         <a:buChar char="»"/>
         <a:defRPr sz="2000" kern="1200">
           <a:solidFill>
@@ -4147,7 +4122,7 @@
         <a:spcBef>
           <a:spcPct val="20000"/>
         </a:spcBef>
-        <a:buFont typeface="Arial"/>
+        <a:buFont typeface="Arial" panose="020B0604020202020204"/>
         <a:buChar char="•"/>
         <a:defRPr sz="2000" kern="1200">
           <a:solidFill>
@@ -4162,7 +4137,7 @@
         <a:spcBef>
           <a:spcPct val="20000"/>
         </a:spcBef>
-        <a:buFont typeface="Arial"/>
+        <a:buFont typeface="Arial" panose="020B0604020202020204"/>
         <a:buChar char="•"/>
         <a:defRPr sz="2000" kern="1200">
           <a:solidFill>
@@ -4177,7 +4152,7 @@
         <a:spcBef>
           <a:spcPct val="20000"/>
         </a:spcBef>
-        <a:buFont typeface="Arial"/>
+        <a:buFont typeface="Arial" panose="020B0604020202020204"/>
         <a:buChar char="•"/>
         <a:defRPr sz="2000" kern="1200">
           <a:solidFill>
@@ -4192,7 +4167,7 @@
         <a:spcBef>
           <a:spcPct val="20000"/>
         </a:spcBef>
-        <a:buFont typeface="Arial"/>
+        <a:buFont typeface="Arial" panose="020B0604020202020204"/>
         <a:buChar char="•"/>
         <a:defRPr sz="2000" kern="1200">
           <a:solidFill>
@@ -4361,7 +4336,6 @@
           <a:lstStyle/>
           <a:p>
             <a:pPr algn="ctr"/>
-            <a:endParaRPr/>
           </a:p>
         </p:txBody>
       </p:sp>
@@ -4392,11 +4366,18 @@
                 <a:solidFill>
                   <a:srgbClr val="BDD7EE"/>
                 </a:solidFill>
-                <a:latin typeface="微软雅黑"/>
-                <a:ea typeface="微软雅黑"/>
+                <a:latin typeface="微软雅黑" panose="020B0503020204020204" charset="-122"/>
+                <a:ea typeface="微软雅黑" panose="020B0503020204020204" charset="-122"/>
               </a:rPr>
               <a:t>“中国电子杯”第三届高校 ICT 产教融合创新大赛 · 赛题二</a:t>
             </a:r>
+            <a:endParaRPr sz="1600" b="0">
+              <a:solidFill>
+                <a:srgbClr val="BDD7EE"/>
+              </a:solidFill>
+              <a:latin typeface="微软雅黑" panose="020B0503020204020204" charset="-122"/>
+              <a:ea typeface="微软雅黑" panose="020B0503020204020204" charset="-122"/>
+            </a:endParaRPr>
           </a:p>
         </p:txBody>
       </p:sp>
@@ -4427,11 +4408,18 @@
                 <a:solidFill>
                   <a:srgbClr val="FFFFFF"/>
                 </a:solidFill>
-                <a:latin typeface="微软雅黑"/>
-                <a:ea typeface="微软雅黑"/>
+                <a:latin typeface="微软雅黑" panose="020B0503020204020204" charset="-122"/>
+                <a:ea typeface="微软雅黑" panose="020B0503020204020204" charset="-122"/>
               </a:rPr>
               <a:t>模拟电路 AI 智能化设计</a:t>
             </a:r>
+            <a:endParaRPr sz="4600" b="1">
+              <a:solidFill>
+                <a:srgbClr val="FFFFFF"/>
+              </a:solidFill>
+              <a:latin typeface="微软雅黑" panose="020B0503020204020204" charset="-122"/>
+              <a:ea typeface="微软雅黑" panose="020B0503020204020204" charset="-122"/>
+            </a:endParaRPr>
           </a:p>
         </p:txBody>
       </p:sp>
@@ -4462,11 +4450,18 @@
                 <a:solidFill>
                   <a:srgbClr val="DDE6F2"/>
                 </a:solidFill>
-                <a:latin typeface="微软雅黑"/>
-                <a:ea typeface="微软雅黑"/>
+                <a:latin typeface="微软雅黑" panose="020B0503020204020204" charset="-122"/>
+                <a:ea typeface="微软雅黑" panose="020B0503020204020204" charset="-122"/>
               </a:rPr>
               <a:t>从自然语言 Spec 到全 PVT 验证的端到端智能设计系统</a:t>
             </a:r>
+            <a:endParaRPr sz="2100" b="0">
+              <a:solidFill>
+                <a:srgbClr val="DDE6F2"/>
+              </a:solidFill>
+              <a:latin typeface="微软雅黑" panose="020B0503020204020204" charset="-122"/>
+              <a:ea typeface="微软雅黑" panose="020B0503020204020204" charset="-122"/>
+            </a:endParaRPr>
           </a:p>
         </p:txBody>
       </p:sp>
@@ -4510,7 +4505,6 @@
           <a:lstStyle/>
           <a:p>
             <a:pPr algn="ctr"/>
-            <a:endParaRPr/>
           </a:p>
         </p:txBody>
       </p:sp>
@@ -4541,8 +4535,8 @@
                 <a:solidFill>
                   <a:srgbClr val="FFFFFF"/>
                 </a:solidFill>
-                <a:latin typeface="微软雅黑"/>
-                <a:ea typeface="微软雅黑"/>
+                <a:latin typeface="微软雅黑" panose="020B0503020204020204" charset="-122"/>
+                <a:ea typeface="微软雅黑" panose="020B0503020204020204" charset="-122"/>
               </a:rPr>
               <a:t>四项硬约束全</a:t>
             </a:r>
@@ -4551,8 +4545,8 @@
                 <a:solidFill>
                   <a:srgbClr val="FFFFFF"/>
                 </a:solidFill>
-                <a:latin typeface="微软雅黑"/>
-                <a:ea typeface="微软雅黑"/>
+                <a:latin typeface="微软雅黑" panose="020B0503020204020204" charset="-122"/>
+                <a:ea typeface="微软雅黑" panose="020B0503020204020204" charset="-122"/>
               </a:rPr>
               <a:t> PVT </a:t>
             </a:r>
@@ -4561,8 +4555,8 @@
                 <a:solidFill>
                   <a:srgbClr val="FFFFFF"/>
                 </a:solidFill>
-                <a:latin typeface="微软雅黑"/>
-                <a:ea typeface="微软雅黑"/>
+                <a:latin typeface="微软雅黑" panose="020B0503020204020204" charset="-122"/>
+                <a:ea typeface="微软雅黑" panose="020B0503020204020204" charset="-122"/>
               </a:rPr>
               <a:t>通过</a:t>
             </a:r>
@@ -4570,8 +4564,8 @@
               <a:solidFill>
                 <a:srgbClr val="FFFFFF"/>
               </a:solidFill>
-              <a:latin typeface="微软雅黑"/>
-              <a:ea typeface="微软雅黑"/>
+              <a:latin typeface="微软雅黑" panose="020B0503020204020204" charset="-122"/>
+              <a:ea typeface="微软雅黑" panose="020B0503020204020204" charset="-122"/>
             </a:endParaRPr>
           </a:p>
           <a:p>
@@ -4580,8 +4574,8 @@
                 <a:solidFill>
                   <a:srgbClr val="FFFFFF"/>
                 </a:solidFill>
-                <a:latin typeface="微软雅黑"/>
-                <a:ea typeface="微软雅黑"/>
+                <a:latin typeface="微软雅黑" panose="020B0503020204020204" charset="-122"/>
+                <a:ea typeface="微软雅黑" panose="020B0503020204020204" charset="-122"/>
               </a:rPr>
               <a:t>105 → 47 </a:t>
             </a:r>
@@ -4590,8 +4584,8 @@
                 <a:solidFill>
                   <a:srgbClr val="FFFFFF"/>
                 </a:solidFill>
-                <a:latin typeface="微软雅黑"/>
-                <a:ea typeface="微软雅黑"/>
+                <a:latin typeface="微软雅黑" panose="020B0503020204020204" charset="-122"/>
+                <a:ea typeface="微软雅黑" panose="020B0503020204020204" charset="-122"/>
               </a:rPr>
               <a:t>参数约减</a:t>
             </a:r>
@@ -4600,8 +4594,8 @@
                 <a:solidFill>
                   <a:srgbClr val="FFFFFF"/>
                 </a:solidFill>
-                <a:latin typeface="微软雅黑"/>
-                <a:ea typeface="微软雅黑"/>
+                <a:latin typeface="微软雅黑" panose="020B0503020204020204" charset="-122"/>
+                <a:ea typeface="微软雅黑" panose="020B0503020204020204" charset="-122"/>
               </a:rPr>
               <a:t> ｜ 9 </a:t>
             </a:r>
@@ -4610,8 +4604,8 @@
                 <a:solidFill>
                   <a:srgbClr val="FFFFFF"/>
                 </a:solidFill>
-                <a:latin typeface="微软雅黑"/>
-                <a:ea typeface="微软雅黑"/>
+                <a:latin typeface="微软雅黑" panose="020B0503020204020204" charset="-122"/>
+                <a:ea typeface="微软雅黑" panose="020B0503020204020204" charset="-122"/>
               </a:rPr>
               <a:t>个工艺角验证</a:t>
             </a:r>
@@ -4620,8 +4614,8 @@
                 <a:solidFill>
                   <a:srgbClr val="FFFFFF"/>
                 </a:solidFill>
-                <a:latin typeface="微软雅黑"/>
-                <a:ea typeface="微软雅黑"/>
+                <a:latin typeface="微软雅黑" panose="020B0503020204020204" charset="-122"/>
+                <a:ea typeface="微软雅黑" panose="020B0503020204020204" charset="-122"/>
               </a:rPr>
               <a:t> ｜ </a:t>
             </a:r>
@@ -4630,8 +4624,8 @@
                 <a:solidFill>
                   <a:srgbClr val="FFFFFF"/>
                 </a:solidFill>
-                <a:latin typeface="微软雅黑"/>
-                <a:ea typeface="微软雅黑"/>
+                <a:latin typeface="微软雅黑" panose="020B0503020204020204" charset="-122"/>
+                <a:ea typeface="微软雅黑" panose="020B0503020204020204" charset="-122"/>
               </a:rPr>
               <a:t>单人运行</a:t>
             </a:r>
@@ -4640,11 +4634,18 @@
                 <a:solidFill>
                   <a:srgbClr val="FFFFFF"/>
                 </a:solidFill>
-                <a:latin typeface="微软雅黑"/>
-                <a:ea typeface="微软雅黑"/>
+                <a:latin typeface="微软雅黑" panose="020B0503020204020204" charset="-122"/>
+                <a:ea typeface="微软雅黑" panose="020B0503020204020204" charset="-122"/>
               </a:rPr>
               <a:t> 6951 秒</a:t>
             </a:r>
+            <a:endParaRPr sz="1600" b="0" dirty="0">
+              <a:solidFill>
+                <a:srgbClr val="FFFFFF"/>
+              </a:solidFill>
+              <a:latin typeface="微软雅黑" panose="020B0503020204020204" charset="-122"/>
+              <a:ea typeface="微软雅黑" panose="020B0503020204020204" charset="-122"/>
+            </a:endParaRPr>
           </a:p>
         </p:txBody>
       </p:sp>
@@ -4675,11 +4676,18 @@
                 <a:solidFill>
                   <a:srgbClr val="9DB4D0"/>
                 </a:solidFill>
-                <a:latin typeface="微软雅黑"/>
-                <a:ea typeface="微软雅黑"/>
+                <a:latin typeface="微软雅黑" panose="020B0503020204020204" charset="-122"/>
+                <a:ea typeface="微软雅黑" panose="020B0503020204020204" charset="-122"/>
               </a:rPr>
               <a:t>2026-10-19</a:t>
             </a:r>
+            <a:endParaRPr sz="1300" b="0">
+              <a:solidFill>
+                <a:srgbClr val="9DB4D0"/>
+              </a:solidFill>
+              <a:latin typeface="微软雅黑" panose="020B0503020204020204" charset="-122"/>
+              <a:ea typeface="微软雅黑" panose="020B0503020204020204" charset="-122"/>
+            </a:endParaRPr>
           </a:p>
         </p:txBody>
       </p:sp>
@@ -4749,7 +4757,6 @@
           <a:lstStyle/>
           <a:p>
             <a:pPr algn="ctr"/>
-            <a:endParaRPr/>
           </a:p>
         </p:txBody>
       </p:sp>
@@ -4780,8 +4787,8 @@
                 <a:solidFill>
                   <a:srgbClr val="FFFFFF"/>
                 </a:solidFill>
-                <a:latin typeface="微软雅黑"/>
-                <a:ea typeface="微软雅黑"/>
+                <a:latin typeface="微软雅黑" panose="020B0503020204020204" charset="-122"/>
+                <a:ea typeface="微软雅黑" panose="020B0503020204020204" charset="-122"/>
               </a:rPr>
               <a:t>模块四：赛题</a:t>
             </a:r>
@@ -4790,8 +4797,8 @@
                 <a:solidFill>
                   <a:srgbClr val="FFFFFF"/>
                 </a:solidFill>
-                <a:latin typeface="微软雅黑"/>
-                <a:ea typeface="微软雅黑"/>
+                <a:latin typeface="微软雅黑" panose="020B0503020204020204" charset="-122"/>
+                <a:ea typeface="微软雅黑" panose="020B0503020204020204" charset="-122"/>
               </a:rPr>
               <a:t> 5 </a:t>
             </a:r>
@@ -4800,8 +4807,8 @@
                 <a:solidFill>
                   <a:srgbClr val="FFFFFF"/>
                 </a:solidFill>
-                <a:latin typeface="微软雅黑"/>
-                <a:ea typeface="微软雅黑"/>
+                <a:latin typeface="微软雅黑" panose="020B0503020204020204" charset="-122"/>
+                <a:ea typeface="微软雅黑" panose="020B0503020204020204" charset="-122"/>
               </a:rPr>
               <a:t>个子项，一一落位</a:t>
             </a:r>
@@ -4809,8 +4816,8 @@
               <a:solidFill>
                 <a:srgbClr val="FFFFFF"/>
               </a:solidFill>
-              <a:latin typeface="微软雅黑"/>
-              <a:ea typeface="微软雅黑"/>
+              <a:latin typeface="微软雅黑" panose="020B0503020204020204" charset="-122"/>
+              <a:ea typeface="微软雅黑" panose="020B0503020204020204" charset="-122"/>
             </a:endParaRPr>
           </a:p>
         </p:txBody>
@@ -4843,11 +4850,18 @@
                 <a:solidFill>
                   <a:srgbClr val="BDD7EE"/>
                 </a:solidFill>
-                <a:latin typeface="微软雅黑"/>
-                <a:ea typeface="微软雅黑"/>
+                <a:latin typeface="微软雅黑" panose="020B0503020204020204" charset="-122"/>
+                <a:ea typeface="微软雅黑" panose="020B0503020204020204" charset="-122"/>
               </a:rPr>
               <a:t>06 模块四</a:t>
             </a:r>
+            <a:endParaRPr sz="1200" b="0">
+              <a:solidFill>
+                <a:srgbClr val="BDD7EE"/>
+              </a:solidFill>
+              <a:latin typeface="微软雅黑" panose="020B0503020204020204" charset="-122"/>
+              <a:ea typeface="微软雅黑" panose="020B0503020204020204" charset="-122"/>
+            </a:endParaRPr>
           </a:p>
         </p:txBody>
       </p:sp>
@@ -4878,11 +4892,18 @@
                 <a:solidFill>
                   <a:srgbClr val="8C8C8C"/>
                 </a:solidFill>
-                <a:latin typeface="微软雅黑"/>
-                <a:ea typeface="微软雅黑"/>
+                <a:latin typeface="微软雅黑" panose="020B0503020204020204" charset="-122"/>
+                <a:ea typeface="微软雅黑" panose="020B0503020204020204" charset="-122"/>
               </a:rPr>
               <a:t>模拟电路 AI 智能化设计 · 赛题二</a:t>
             </a:r>
+            <a:endParaRPr sz="900" b="0">
+              <a:solidFill>
+                <a:srgbClr val="8C8C8C"/>
+              </a:solidFill>
+              <a:latin typeface="微软雅黑" panose="020B0503020204020204" charset="-122"/>
+              <a:ea typeface="微软雅黑" panose="020B0503020204020204" charset="-122"/>
+            </a:endParaRPr>
           </a:p>
         </p:txBody>
       </p:sp>
@@ -4914,11 +4935,18 @@
                 <a:solidFill>
                   <a:srgbClr val="8C8C8C"/>
                 </a:solidFill>
-                <a:latin typeface="微软雅黑"/>
-                <a:ea typeface="微软雅黑"/>
+                <a:latin typeface="微软雅黑" panose="020B0503020204020204" charset="-122"/>
+                <a:ea typeface="微软雅黑" panose="020B0503020204020204" charset="-122"/>
               </a:rPr>
               <a:t>11</a:t>
             </a:r>
+            <a:endParaRPr sz="900" b="0">
+              <a:solidFill>
+                <a:srgbClr val="8C8C8C"/>
+              </a:solidFill>
+              <a:latin typeface="微软雅黑" panose="020B0503020204020204" charset="-122"/>
+              <a:ea typeface="微软雅黑" panose="020B0503020204020204" charset="-122"/>
+            </a:endParaRPr>
           </a:p>
         </p:txBody>
       </p:sp>
@@ -4941,34 +4969,10 @@
                 <a:tableStyleId>{5C22544A-7EE6-4342-B048-85BDC9FD1C3A}</a:tableStyleId>
               </a:tblPr>
               <a:tblGrid>
-                <a:gridCol w="548639">
-                  <a:extLst>
-                    <a:ext uri="{9D8B030D-6E8A-4147-A177-3AD203B41FA5}">
-                      <a16:colId xmlns:a16="http://schemas.microsoft.com/office/drawing/2014/main" val="20000"/>
-                    </a:ext>
-                  </a:extLst>
-                </a:gridCol>
-                <a:gridCol w="4232365">
-                  <a:extLst>
-                    <a:ext uri="{9D8B030D-6E8A-4147-A177-3AD203B41FA5}">
-                      <a16:colId xmlns:a16="http://schemas.microsoft.com/office/drawing/2014/main" val="20001"/>
-                    </a:ext>
-                  </a:extLst>
-                </a:gridCol>
-                <a:gridCol w="2664822">
-                  <a:extLst>
-                    <a:ext uri="{9D8B030D-6E8A-4147-A177-3AD203B41FA5}">
-                      <a16:colId xmlns:a16="http://schemas.microsoft.com/office/drawing/2014/main" val="20002"/>
-                    </a:ext>
-                  </a:extLst>
-                </a:gridCol>
-                <a:gridCol w="3526971">
-                  <a:extLst>
-                    <a:ext uri="{9D8B030D-6E8A-4147-A177-3AD203B41FA5}">
-                      <a16:colId xmlns:a16="http://schemas.microsoft.com/office/drawing/2014/main" val="20003"/>
-                    </a:ext>
-                  </a:extLst>
-                </a:gridCol>
+                <a:gridCol w="548639"/>
+                <a:gridCol w="4232365"/>
+                <a:gridCol w="2664822"/>
+                <a:gridCol w="3526971"/>
               </a:tblGrid>
               <a:tr h="457200">
                 <a:tc>
@@ -4981,11 +4985,18 @@
                           <a:solidFill>
                             <a:srgbClr val="FFFFFF"/>
                           </a:solidFill>
-                          <a:latin typeface="微软雅黑"/>
-                          <a:ea typeface="微软雅黑"/>
+                          <a:latin typeface="微软雅黑" panose="020B0503020204020204" charset="-122"/>
+                          <a:ea typeface="微软雅黑" panose="020B0503020204020204" charset="-122"/>
                         </a:rPr>
                         <a:t>#</a:t>
                       </a:r>
+                      <a:endParaRPr sz="1300" b="1">
+                        <a:solidFill>
+                          <a:srgbClr val="FFFFFF"/>
+                        </a:solidFill>
+                        <a:latin typeface="微软雅黑" panose="020B0503020204020204" charset="-122"/>
+                        <a:ea typeface="微软雅黑" panose="020B0503020204020204" charset="-122"/>
+                      </a:endParaRPr>
                     </a:p>
                   </a:txBody>
                   <a:tcPr>
@@ -5004,11 +5015,18 @@
                           <a:solidFill>
                             <a:srgbClr val="FFFFFF"/>
                           </a:solidFill>
-                          <a:latin typeface="微软雅黑"/>
-                          <a:ea typeface="微软雅黑"/>
+                          <a:latin typeface="微软雅黑" panose="020B0503020204020204" charset="-122"/>
+                          <a:ea typeface="微软雅黑" panose="020B0503020204020204" charset="-122"/>
                         </a:rPr>
                         <a:t>赛题子项</a:t>
                       </a:r>
+                      <a:endParaRPr sz="1300" b="1">
+                        <a:solidFill>
+                          <a:srgbClr val="FFFFFF"/>
+                        </a:solidFill>
+                        <a:latin typeface="微软雅黑" panose="020B0503020204020204" charset="-122"/>
+                        <a:ea typeface="微软雅黑" panose="020B0503020204020204" charset="-122"/>
+                      </a:endParaRPr>
                     </a:p>
                   </a:txBody>
                   <a:tcPr>
@@ -5027,11 +5045,18 @@
                           <a:solidFill>
                             <a:srgbClr val="FFFFFF"/>
                           </a:solidFill>
-                          <a:latin typeface="微软雅黑"/>
-                          <a:ea typeface="微软雅黑"/>
+                          <a:latin typeface="微软雅黑" panose="020B0503020204020204" charset="-122"/>
+                          <a:ea typeface="微软雅黑" panose="020B0503020204020204" charset="-122"/>
                         </a:rPr>
                         <a:t>实现</a:t>
                       </a:r>
+                      <a:endParaRPr sz="1300" b="1">
+                        <a:solidFill>
+                          <a:srgbClr val="FFFFFF"/>
+                        </a:solidFill>
+                        <a:latin typeface="微软雅黑" panose="020B0503020204020204" charset="-122"/>
+                        <a:ea typeface="微软雅黑" panose="020B0503020204020204" charset="-122"/>
+                      </a:endParaRPr>
                     </a:p>
                   </a:txBody>
                   <a:tcPr>
@@ -5050,11 +5075,18 @@
                           <a:solidFill>
                             <a:srgbClr val="FFFFFF"/>
                           </a:solidFill>
-                          <a:latin typeface="微软雅黑"/>
-                          <a:ea typeface="微软雅黑"/>
+                          <a:latin typeface="微软雅黑" panose="020B0503020204020204" charset="-122"/>
+                          <a:ea typeface="微软雅黑" panose="020B0503020204020204" charset="-122"/>
                         </a:rPr>
                         <a:t>产物</a:t>
                       </a:r>
+                      <a:endParaRPr sz="1300" b="1">
+                        <a:solidFill>
+                          <a:srgbClr val="FFFFFF"/>
+                        </a:solidFill>
+                        <a:latin typeface="微软雅黑" panose="020B0503020204020204" charset="-122"/>
+                        <a:ea typeface="微软雅黑" panose="020B0503020204020204" charset="-122"/>
+                      </a:endParaRPr>
                     </a:p>
                   </a:txBody>
                   <a:tcPr>
@@ -5063,11 +5095,6 @@
                     </a:solidFill>
                   </a:tcPr>
                 </a:tc>
-                <a:extLst>
-                  <a:ext uri="{0D108BD9-81ED-4DB2-BD59-A6C34878D82A}">
-                    <a16:rowId xmlns:a16="http://schemas.microsoft.com/office/drawing/2014/main" val="10000"/>
-                  </a:ext>
-                </a:extLst>
               </a:tr>
               <a:tr h="457200">
                 <a:tc>
@@ -5080,11 +5107,18 @@
                           <a:solidFill>
                             <a:srgbClr val="1F3864"/>
                           </a:solidFill>
-                          <a:latin typeface="微软雅黑"/>
-                          <a:ea typeface="微软雅黑"/>
+                          <a:latin typeface="微软雅黑" panose="020B0503020204020204" charset="-122"/>
+                          <a:ea typeface="微软雅黑" panose="020B0503020204020204" charset="-122"/>
                         </a:rPr>
                         <a:t>1</a:t>
                       </a:r>
+                      <a:endParaRPr sz="1300" b="1">
+                        <a:solidFill>
+                          <a:srgbClr val="1F3864"/>
+                        </a:solidFill>
+                        <a:latin typeface="微软雅黑" panose="020B0503020204020204" charset="-122"/>
+                        <a:ea typeface="微软雅黑" panose="020B0503020204020204" charset="-122"/>
+                      </a:endParaRPr>
                     </a:p>
                   </a:txBody>
                   <a:tcPr>
@@ -5103,11 +5137,18 @@
                           <a:solidFill>
                             <a:srgbClr val="595959"/>
                           </a:solidFill>
-                          <a:latin typeface="微软雅黑"/>
-                          <a:ea typeface="微软雅黑"/>
+                          <a:latin typeface="微软雅黑" panose="020B0503020204020204" charset="-122"/>
+                          <a:ea typeface="微软雅黑" panose="020B0503020204020204" charset="-122"/>
                         </a:rPr>
                         <a:t>器件尺寸转为待优化变量</a:t>
                       </a:r>
+                      <a:endParaRPr sz="1300" b="0">
+                        <a:solidFill>
+                          <a:srgbClr val="595959"/>
+                        </a:solidFill>
+                        <a:latin typeface="微软雅黑" panose="020B0503020204020204" charset="-122"/>
+                        <a:ea typeface="微软雅黑" panose="020B0503020204020204" charset="-122"/>
+                      </a:endParaRPr>
                     </a:p>
                   </a:txBody>
                   <a:tcPr>
@@ -5126,11 +5167,18 @@
                           <a:solidFill>
                             <a:srgbClr val="595959"/>
                           </a:solidFill>
-                          <a:latin typeface="微软雅黑"/>
-                          <a:ea typeface="微软雅黑"/>
+                          <a:latin typeface="微软雅黑" panose="020B0503020204020204" charset="-122"/>
+                          <a:ea typeface="微软雅黑" panose="020B0503020204020204" charset="-122"/>
                         </a:rPr>
                         <a:t>param_extract.py</a:t>
                       </a:r>
+                      <a:endParaRPr sz="1300" b="0">
+                        <a:solidFill>
+                          <a:srgbClr val="595959"/>
+                        </a:solidFill>
+                        <a:latin typeface="微软雅黑" panose="020B0503020204020204" charset="-122"/>
+                        <a:ea typeface="微软雅黑" panose="020B0503020204020204" charset="-122"/>
+                      </a:endParaRPr>
                     </a:p>
                   </a:txBody>
                   <a:tcPr>
@@ -5149,11 +5197,18 @@
                           <a:solidFill>
                             <a:srgbClr val="595959"/>
                           </a:solidFill>
-                          <a:latin typeface="微软雅黑"/>
-                          <a:ea typeface="微软雅黑"/>
+                          <a:latin typeface="微软雅黑" panose="020B0503020204020204" charset="-122"/>
+                          <a:ea typeface="微软雅黑" panose="020B0503020204020204" charset="-122"/>
                         </a:rPr>
                         <a:t>105 变量 + 元数据</a:t>
                       </a:r>
+                      <a:endParaRPr sz="1300" b="0">
+                        <a:solidFill>
+                          <a:srgbClr val="595959"/>
+                        </a:solidFill>
+                        <a:latin typeface="微软雅黑" panose="020B0503020204020204" charset="-122"/>
+                        <a:ea typeface="微软雅黑" panose="020B0503020204020204" charset="-122"/>
+                      </a:endParaRPr>
                     </a:p>
                   </a:txBody>
                   <a:tcPr>
@@ -5162,11 +5217,6 @@
                     </a:solidFill>
                   </a:tcPr>
                 </a:tc>
-                <a:extLst>
-                  <a:ext uri="{0D108BD9-81ED-4DB2-BD59-A6C34878D82A}">
-                    <a16:rowId xmlns:a16="http://schemas.microsoft.com/office/drawing/2014/main" val="10001"/>
-                  </a:ext>
-                </a:extLst>
               </a:tr>
               <a:tr h="457200">
                 <a:tc>
@@ -5179,11 +5229,18 @@
                           <a:solidFill>
                             <a:srgbClr val="1F3864"/>
                           </a:solidFill>
-                          <a:latin typeface="微软雅黑"/>
-                          <a:ea typeface="微软雅黑"/>
+                          <a:latin typeface="微软雅黑" panose="020B0503020204020204" charset="-122"/>
+                          <a:ea typeface="微软雅黑" panose="020B0503020204020204" charset="-122"/>
                         </a:rPr>
                         <a:t>2</a:t>
                       </a:r>
+                      <a:endParaRPr sz="1300" b="1">
+                        <a:solidFill>
+                          <a:srgbClr val="1F3864"/>
+                        </a:solidFill>
+                        <a:latin typeface="微软雅黑" panose="020B0503020204020204" charset="-122"/>
+                        <a:ea typeface="微软雅黑" panose="020B0503020204020204" charset="-122"/>
+                      </a:endParaRPr>
                     </a:p>
                   </a:txBody>
                   <a:tcPr>
@@ -5202,11 +5259,18 @@
                           <a:solidFill>
                             <a:srgbClr val="595959"/>
                           </a:solidFill>
-                          <a:latin typeface="微软雅黑"/>
-                          <a:ea typeface="微软雅黑"/>
+                          <a:latin typeface="微软雅黑" panose="020B0503020204020204" charset="-122"/>
+                          <a:ea typeface="微软雅黑" panose="020B0503020204020204" charset="-122"/>
                         </a:rPr>
                         <a:t>读取器件连接关系</a:t>
                       </a:r>
+                      <a:endParaRPr sz="1300" b="0">
+                        <a:solidFill>
+                          <a:srgbClr val="595959"/>
+                        </a:solidFill>
+                        <a:latin typeface="微软雅黑" panose="020B0503020204020204" charset="-122"/>
+                        <a:ea typeface="微软雅黑" panose="020B0503020204020204" charset="-122"/>
+                      </a:endParaRPr>
                     </a:p>
                   </a:txBody>
                   <a:tcPr>
@@ -5225,11 +5289,18 @@
                           <a:solidFill>
                             <a:srgbClr val="595959"/>
                           </a:solidFill>
-                          <a:latin typeface="微软雅黑"/>
-                          <a:ea typeface="微软雅黑"/>
+                          <a:latin typeface="微软雅黑" panose="020B0503020204020204" charset="-122"/>
+                          <a:ea typeface="微软雅黑" panose="020B0503020204020204" charset="-122"/>
                         </a:rPr>
                         <a:t>netlist_export.py</a:t>
                       </a:r>
+                      <a:endParaRPr sz="1300" b="0">
+                        <a:solidFill>
+                          <a:srgbClr val="595959"/>
+                        </a:solidFill>
+                        <a:latin typeface="微软雅黑" panose="020B0503020204020204" charset="-122"/>
+                        <a:ea typeface="微软雅黑" panose="020B0503020204020204" charset="-122"/>
+                      </a:endParaRPr>
                     </a:p>
                   </a:txBody>
                   <a:tcPr>
@@ -5248,11 +5319,18 @@
                           <a:solidFill>
                             <a:srgbClr val="595959"/>
                           </a:solidFill>
-                          <a:latin typeface="微软雅黑"/>
-                          <a:ea typeface="微软雅黑"/>
+                          <a:latin typeface="微软雅黑" panose="020B0503020204020204" charset="-122"/>
+                          <a:ea typeface="微软雅黑" panose="020B0503020204020204" charset="-122"/>
                         </a:rPr>
                         <a:t>网表 + 连接表</a:t>
                       </a:r>
+                      <a:endParaRPr sz="1300" b="0">
+                        <a:solidFill>
+                          <a:srgbClr val="595959"/>
+                        </a:solidFill>
+                        <a:latin typeface="微软雅黑" panose="020B0503020204020204" charset="-122"/>
+                        <a:ea typeface="微软雅黑" panose="020B0503020204020204" charset="-122"/>
+                      </a:endParaRPr>
                     </a:p>
                   </a:txBody>
                   <a:tcPr>
@@ -5261,11 +5339,6 @@
                     </a:solidFill>
                   </a:tcPr>
                 </a:tc>
-                <a:extLst>
-                  <a:ext uri="{0D108BD9-81ED-4DB2-BD59-A6C34878D82A}">
-                    <a16:rowId xmlns:a16="http://schemas.microsoft.com/office/drawing/2014/main" val="10002"/>
-                  </a:ext>
-                </a:extLst>
               </a:tr>
               <a:tr h="457200">
                 <a:tc>
@@ -5278,11 +5351,18 @@
                           <a:solidFill>
                             <a:srgbClr val="1F3864"/>
                           </a:solidFill>
-                          <a:latin typeface="微软雅黑"/>
-                          <a:ea typeface="微软雅黑"/>
+                          <a:latin typeface="微软雅黑" panose="020B0503020204020204" charset="-122"/>
+                          <a:ea typeface="微软雅黑" panose="020B0503020204020204" charset="-122"/>
                         </a:rPr>
                         <a:t>3</a:t>
                       </a:r>
+                      <a:endParaRPr sz="1300" b="1">
+                        <a:solidFill>
+                          <a:srgbClr val="1F3864"/>
+                        </a:solidFill>
+                        <a:latin typeface="微软雅黑" panose="020B0503020204020204" charset="-122"/>
+                        <a:ea typeface="微软雅黑" panose="020B0503020204020204" charset="-122"/>
+                      </a:endParaRPr>
                     </a:p>
                   </a:txBody>
                   <a:tcPr>
@@ -5301,11 +5381,18 @@
                           <a:solidFill>
                             <a:srgbClr val="595959"/>
                           </a:solidFill>
-                          <a:latin typeface="微软雅黑"/>
-                          <a:ea typeface="微软雅黑"/>
+                          <a:latin typeface="微软雅黑" panose="020B0503020204020204" charset="-122"/>
+                          <a:ea typeface="微软雅黑" panose="020B0503020204020204" charset="-122"/>
                         </a:rPr>
                         <a:t>调用 MDE 仿真并提取指标</a:t>
                       </a:r>
+                      <a:endParaRPr sz="1300" b="0">
+                        <a:solidFill>
+                          <a:srgbClr val="595959"/>
+                        </a:solidFill>
+                        <a:latin typeface="微软雅黑" panose="020B0503020204020204" charset="-122"/>
+                        <a:ea typeface="微软雅黑" panose="020B0503020204020204" charset="-122"/>
+                      </a:endParaRPr>
                     </a:p>
                   </a:txBody>
                   <a:tcPr>
@@ -5324,11 +5411,18 @@
                           <a:solidFill>
                             <a:srgbClr val="595959"/>
                           </a:solidFill>
-                          <a:latin typeface="微软雅黑"/>
-                          <a:ea typeface="微软雅黑"/>
+                          <a:latin typeface="微软雅黑" panose="020B0503020204020204" charset="-122"/>
+                          <a:ea typeface="微软雅黑" panose="020B0503020204020204" charset="-122"/>
                         </a:rPr>
                         <a:t>sim_engine.py</a:t>
                       </a:r>
+                      <a:endParaRPr sz="1300" b="0">
+                        <a:solidFill>
+                          <a:srgbClr val="595959"/>
+                        </a:solidFill>
+                        <a:latin typeface="微软雅黑" panose="020B0503020204020204" charset="-122"/>
+                        <a:ea typeface="微软雅黑" panose="020B0503020204020204" charset="-122"/>
+                      </a:endParaRPr>
                     </a:p>
                   </a:txBody>
                   <a:tcPr>
@@ -5347,11 +5441,18 @@
                           <a:solidFill>
                             <a:srgbClr val="595959"/>
                           </a:solidFill>
-                          <a:latin typeface="微软雅黑"/>
-                          <a:ea typeface="微软雅黑"/>
+                          <a:latin typeface="微软雅黑" panose="020B0503020204020204" charset="-122"/>
+                          <a:ea typeface="微软雅黑" panose="020B0503020204020204" charset="-122"/>
                         </a:rPr>
                         <a:t>六项指标 + 波形</a:t>
                       </a:r>
+                      <a:endParaRPr sz="1300" b="0">
+                        <a:solidFill>
+                          <a:srgbClr val="595959"/>
+                        </a:solidFill>
+                        <a:latin typeface="微软雅黑" panose="020B0503020204020204" charset="-122"/>
+                        <a:ea typeface="微软雅黑" panose="020B0503020204020204" charset="-122"/>
+                      </a:endParaRPr>
                     </a:p>
                   </a:txBody>
                   <a:tcPr>
@@ -5360,11 +5461,6 @@
                     </a:solidFill>
                   </a:tcPr>
                 </a:tc>
-                <a:extLst>
-                  <a:ext uri="{0D108BD9-81ED-4DB2-BD59-A6C34878D82A}">
-                    <a16:rowId xmlns:a16="http://schemas.microsoft.com/office/drawing/2014/main" val="10003"/>
-                  </a:ext>
-                </a:extLst>
               </a:tr>
               <a:tr h="457200">
                 <a:tc>
@@ -5377,11 +5473,18 @@
                           <a:solidFill>
                             <a:srgbClr val="1F3864"/>
                           </a:solidFill>
-                          <a:latin typeface="微软雅黑"/>
-                          <a:ea typeface="微软雅黑"/>
+                          <a:latin typeface="微软雅黑" panose="020B0503020204020204" charset="-122"/>
+                          <a:ea typeface="微软雅黑" panose="020B0503020204020204" charset="-122"/>
                         </a:rPr>
                         <a:t>4</a:t>
                       </a:r>
+                      <a:endParaRPr sz="1300" b="1">
+                        <a:solidFill>
+                          <a:srgbClr val="1F3864"/>
+                        </a:solidFill>
+                        <a:latin typeface="微软雅黑" panose="020B0503020204020204" charset="-122"/>
+                        <a:ea typeface="微软雅黑" panose="020B0503020204020204" charset="-122"/>
+                      </a:endParaRPr>
                     </a:p>
                   </a:txBody>
                   <a:tcPr>
@@ -5400,11 +5503,18 @@
                           <a:solidFill>
                             <a:srgbClr val="595959"/>
                           </a:solidFill>
-                          <a:latin typeface="微软雅黑"/>
-                          <a:ea typeface="微软雅黑"/>
+                          <a:latin typeface="微软雅黑" panose="020B0503020204020204" charset="-122"/>
+                          <a:ea typeface="微软雅黑" panose="020B0503020204020204" charset="-122"/>
                         </a:rPr>
                         <a:t>最优尺寸回写电路图</a:t>
                       </a:r>
+                      <a:endParaRPr sz="1300" b="0">
+                        <a:solidFill>
+                          <a:srgbClr val="595959"/>
+                        </a:solidFill>
+                        <a:latin typeface="微软雅黑" panose="020B0503020204020204" charset="-122"/>
+                        <a:ea typeface="微软雅黑" panose="020B0503020204020204" charset="-122"/>
+                      </a:endParaRPr>
                     </a:p>
                   </a:txBody>
                   <a:tcPr>
@@ -5423,11 +5533,18 @@
                           <a:solidFill>
                             <a:srgbClr val="595959"/>
                           </a:solidFill>
-                          <a:latin typeface="微软雅黑"/>
-                          <a:ea typeface="微软雅黑"/>
+                          <a:latin typeface="微软雅黑" panose="020B0503020204020204" charset="-122"/>
+                          <a:ea typeface="微软雅黑" panose="020B0503020204020204" charset="-122"/>
                         </a:rPr>
                         <a:t>writeback.py</a:t>
                       </a:r>
+                      <a:endParaRPr sz="1300" b="0">
+                        <a:solidFill>
+                          <a:srgbClr val="595959"/>
+                        </a:solidFill>
+                        <a:latin typeface="微软雅黑" panose="020B0503020204020204" charset="-122"/>
+                        <a:ea typeface="微软雅黑" panose="020B0503020204020204" charset="-122"/>
+                      </a:endParaRPr>
                     </a:p>
                   </a:txBody>
                   <a:tcPr>
@@ -5446,11 +5563,18 @@
                           <a:solidFill>
                             <a:srgbClr val="595959"/>
                           </a:solidFill>
-                          <a:latin typeface="微软雅黑"/>
-                          <a:ea typeface="微软雅黑"/>
+                          <a:latin typeface="微软雅黑" panose="020B0503020204020204" charset="-122"/>
+                          <a:ea typeface="微软雅黑" panose="020B0503020204020204" charset="-122"/>
                         </a:rPr>
                         <a:t>schematic_var_best + 读回校验</a:t>
                       </a:r>
+                      <a:endParaRPr sz="1300" b="0">
+                        <a:solidFill>
+                          <a:srgbClr val="595959"/>
+                        </a:solidFill>
+                        <a:latin typeface="微软雅黑" panose="020B0503020204020204" charset="-122"/>
+                        <a:ea typeface="微软雅黑" panose="020B0503020204020204" charset="-122"/>
+                      </a:endParaRPr>
                     </a:p>
                   </a:txBody>
                   <a:tcPr>
@@ -5459,11 +5583,6 @@
                     </a:solidFill>
                   </a:tcPr>
                 </a:tc>
-                <a:extLst>
-                  <a:ext uri="{0D108BD9-81ED-4DB2-BD59-A6C34878D82A}">
-                    <a16:rowId xmlns:a16="http://schemas.microsoft.com/office/drawing/2014/main" val="10004"/>
-                  </a:ext>
-                </a:extLst>
               </a:tr>
               <a:tr h="457200">
                 <a:tc>
@@ -5476,11 +5595,18 @@
                           <a:solidFill>
                             <a:srgbClr val="1F3864"/>
                           </a:solidFill>
-                          <a:latin typeface="微软雅黑"/>
-                          <a:ea typeface="微软雅黑"/>
+                          <a:latin typeface="微软雅黑" panose="020B0503020204020204" charset="-122"/>
+                          <a:ea typeface="微软雅黑" panose="020B0503020204020204" charset="-122"/>
                         </a:rPr>
                         <a:t>5</a:t>
                       </a:r>
+                      <a:endParaRPr sz="1300" b="1">
+                        <a:solidFill>
+                          <a:srgbClr val="1F3864"/>
+                        </a:solidFill>
+                        <a:latin typeface="微软雅黑" panose="020B0503020204020204" charset="-122"/>
+                        <a:ea typeface="微软雅黑" panose="020B0503020204020204" charset="-122"/>
+                      </a:endParaRPr>
                     </a:p>
                   </a:txBody>
                   <a:tcPr>
@@ -5499,11 +5625,18 @@
                           <a:solidFill>
                             <a:srgbClr val="595959"/>
                           </a:solidFill>
-                          <a:latin typeface="微软雅黑"/>
-                          <a:ea typeface="微软雅黑"/>
+                          <a:latin typeface="微软雅黑" panose="020B0503020204020204" charset="-122"/>
+                          <a:ea typeface="微软雅黑" panose="020B0503020204020204" charset="-122"/>
                         </a:rPr>
                         <a:t>高集成自动优化接口</a:t>
                       </a:r>
+                      <a:endParaRPr sz="1300" b="0">
+                        <a:solidFill>
+                          <a:srgbClr val="595959"/>
+                        </a:solidFill>
+                        <a:latin typeface="微软雅黑" panose="020B0503020204020204" charset="-122"/>
+                        <a:ea typeface="微软雅黑" panose="020B0503020204020204" charset="-122"/>
+                      </a:endParaRPr>
                     </a:p>
                   </a:txBody>
                   <a:tcPr>
@@ -5522,11 +5655,18 @@
                           <a:solidFill>
                             <a:srgbClr val="595959"/>
                           </a:solidFill>
-                          <a:latin typeface="微软雅黑"/>
-                          <a:ea typeface="微软雅黑"/>
+                          <a:latin typeface="微软雅黑" panose="020B0503020204020204" charset="-122"/>
+                          <a:ea typeface="微软雅黑" panose="020B0503020204020204" charset="-122"/>
                         </a:rPr>
                         <a:t>run_auto.sh</a:t>
                       </a:r>
+                      <a:endParaRPr sz="1300" b="0">
+                        <a:solidFill>
+                          <a:srgbClr val="595959"/>
+                        </a:solidFill>
+                        <a:latin typeface="微软雅黑" panose="020B0503020204020204" charset="-122"/>
+                        <a:ea typeface="微软雅黑" panose="020B0503020204020204" charset="-122"/>
+                      </a:endParaRPr>
                     </a:p>
                   </a:txBody>
                   <a:tcPr>
@@ -5545,11 +5685,18 @@
                           <a:solidFill>
                             <a:srgbClr val="595959"/>
                           </a:solidFill>
-                          <a:latin typeface="微软雅黑"/>
-                          <a:ea typeface="微软雅黑"/>
+                          <a:latin typeface="微软雅黑" panose="020B0503020204020204" charset="-122"/>
+                          <a:ea typeface="微软雅黑" panose="020B0503020204020204" charset="-122"/>
                         </a:rPr>
                         <a:t>输入尺寸 → 输出性能</a:t>
                       </a:r>
+                      <a:endParaRPr sz="1300" b="0">
+                        <a:solidFill>
+                          <a:srgbClr val="595959"/>
+                        </a:solidFill>
+                        <a:latin typeface="微软雅黑" panose="020B0503020204020204" charset="-122"/>
+                        <a:ea typeface="微软雅黑" panose="020B0503020204020204" charset="-122"/>
+                      </a:endParaRPr>
                     </a:p>
                   </a:txBody>
                   <a:tcPr>
@@ -5558,11 +5705,6 @@
                     </a:solidFill>
                   </a:tcPr>
                 </a:tc>
-                <a:extLst>
-                  <a:ext uri="{0D108BD9-81ED-4DB2-BD59-A6C34878D82A}">
-                    <a16:rowId xmlns:a16="http://schemas.microsoft.com/office/drawing/2014/main" val="10005"/>
-                  </a:ext>
-                </a:extLst>
               </a:tr>
             </a:tbl>
           </a:graphicData>
@@ -5600,11 +5742,18 @@
                 <a:solidFill>
                   <a:srgbClr val="595959"/>
                 </a:solidFill>
-                <a:latin typeface="微软雅黑"/>
-                <a:ea typeface="微软雅黑"/>
+                <a:latin typeface="微软雅黑" panose="020B0503020204020204" charset="-122"/>
+                <a:ea typeface="微软雅黑" panose="020B0503020204020204" charset="-122"/>
               </a:rPr>
               <a:t>• 五个脚本共用 m4_common.py 一套口径（边界/单位/schema/旧路径修复），避免各写一份而走样</a:t>
             </a:r>
+            <a:endParaRPr sz="1500" b="0">
+              <a:solidFill>
+                <a:srgbClr val="595959"/>
+              </a:solidFill>
+              <a:latin typeface="微软雅黑" panose="020B0503020204020204" charset="-122"/>
+              <a:ea typeface="微软雅黑" panose="020B0503020204020204" charset="-122"/>
+            </a:endParaRPr>
           </a:p>
           <a:p>
             <a:pPr>
@@ -5617,11 +5766,18 @@
                 <a:solidFill>
                   <a:srgbClr val="595959"/>
                 </a:solidFill>
-                <a:latin typeface="微软雅黑"/>
-                <a:ea typeface="微软雅黑"/>
+                <a:latin typeface="微软雅黑" panose="020B0503020204020204" charset="-122"/>
+                <a:ea typeface="微软雅黑" panose="020B0503020204020204" charset="-122"/>
               </a:rPr>
               <a:t>• 反标默认不动原图：目标视图不存在先尝试拷贝，无拷贝接口就中止，只有 --in_place 才改原图</a:t>
             </a:r>
+            <a:endParaRPr sz="1500" b="0">
+              <a:solidFill>
+                <a:srgbClr val="595959"/>
+              </a:solidFill>
+              <a:latin typeface="微软雅黑" panose="020B0503020204020204" charset="-122"/>
+              <a:ea typeface="微软雅黑" panose="020B0503020204020204" charset="-122"/>
+            </a:endParaRPr>
           </a:p>
           <a:p>
             <a:pPr>
@@ -5634,11 +5790,18 @@
                 <a:solidFill>
                   <a:srgbClr val="595959"/>
                 </a:solidFill>
-                <a:latin typeface="微软雅黑"/>
-                <a:ea typeface="微软雅黑"/>
+                <a:latin typeface="微软雅黑" panose="020B0503020204020204" charset="-122"/>
+                <a:ea typeface="微软雅黑" panose="020B0503020204020204" charset="-122"/>
               </a:rPr>
               <a:t>• 所有脚本支持 --mock，评审在没有 license 的机器上也能复核</a:t>
             </a:r>
+            <a:endParaRPr sz="1500" b="0">
+              <a:solidFill>
+                <a:srgbClr val="595959"/>
+              </a:solidFill>
+              <a:latin typeface="微软雅黑" panose="020B0503020204020204" charset="-122"/>
+              <a:ea typeface="微软雅黑" panose="020B0503020204020204" charset="-122"/>
+            </a:endParaRPr>
           </a:p>
         </p:txBody>
       </p:sp>
@@ -5708,7 +5871,6 @@
           <a:lstStyle/>
           <a:p>
             <a:pPr algn="ctr"/>
-            <a:endParaRPr/>
           </a:p>
         </p:txBody>
       </p:sp>
@@ -5739,11 +5901,18 @@
                 <a:solidFill>
                   <a:srgbClr val="FFFFFF"/>
                 </a:solidFill>
-                <a:latin typeface="微软雅黑"/>
-                <a:ea typeface="微软雅黑"/>
+                <a:latin typeface="微软雅黑" panose="020B0503020204020204" charset="-122"/>
+                <a:ea typeface="微软雅黑" panose="020B0503020204020204" charset="-122"/>
               </a:rPr>
               <a:t>全 PVT 验证：9 个工艺角全部达标</a:t>
             </a:r>
+            <a:endParaRPr sz="2600" b="1">
+              <a:solidFill>
+                <a:srgbClr val="FFFFFF"/>
+              </a:solidFill>
+              <a:latin typeface="微软雅黑" panose="020B0503020204020204" charset="-122"/>
+              <a:ea typeface="微软雅黑" panose="020B0503020204020204" charset="-122"/>
+            </a:endParaRPr>
           </a:p>
         </p:txBody>
       </p:sp>
@@ -5775,11 +5944,18 @@
                 <a:solidFill>
                   <a:srgbClr val="BDD7EE"/>
                 </a:solidFill>
-                <a:latin typeface="微软雅黑"/>
-                <a:ea typeface="微软雅黑"/>
+                <a:latin typeface="微软雅黑" panose="020B0503020204020204" charset="-122"/>
+                <a:ea typeface="微软雅黑" panose="020B0503020204020204" charset="-122"/>
               </a:rPr>
               <a:t>07 验证</a:t>
             </a:r>
+            <a:endParaRPr sz="1200" b="0">
+              <a:solidFill>
+                <a:srgbClr val="BDD7EE"/>
+              </a:solidFill>
+              <a:latin typeface="微软雅黑" panose="020B0503020204020204" charset="-122"/>
+              <a:ea typeface="微软雅黑" panose="020B0503020204020204" charset="-122"/>
+            </a:endParaRPr>
           </a:p>
         </p:txBody>
       </p:sp>
@@ -5810,11 +5986,18 @@
                 <a:solidFill>
                   <a:srgbClr val="8C8C8C"/>
                 </a:solidFill>
-                <a:latin typeface="微软雅黑"/>
-                <a:ea typeface="微软雅黑"/>
+                <a:latin typeface="微软雅黑" panose="020B0503020204020204" charset="-122"/>
+                <a:ea typeface="微软雅黑" panose="020B0503020204020204" charset="-122"/>
               </a:rPr>
               <a:t>模拟电路 AI 智能化设计 · 赛题二</a:t>
             </a:r>
+            <a:endParaRPr sz="900" b="0">
+              <a:solidFill>
+                <a:srgbClr val="8C8C8C"/>
+              </a:solidFill>
+              <a:latin typeface="微软雅黑" panose="020B0503020204020204" charset="-122"/>
+              <a:ea typeface="微软雅黑" panose="020B0503020204020204" charset="-122"/>
+            </a:endParaRPr>
           </a:p>
         </p:txBody>
       </p:sp>
@@ -5846,11 +6029,18 @@
                 <a:solidFill>
                   <a:srgbClr val="8C8C8C"/>
                 </a:solidFill>
-                <a:latin typeface="微软雅黑"/>
-                <a:ea typeface="微软雅黑"/>
+                <a:latin typeface="微软雅黑" panose="020B0503020204020204" charset="-122"/>
+                <a:ea typeface="微软雅黑" panose="020B0503020204020204" charset="-122"/>
               </a:rPr>
               <a:t>12</a:t>
             </a:r>
+            <a:endParaRPr sz="900" b="0">
+              <a:solidFill>
+                <a:srgbClr val="8C8C8C"/>
+              </a:solidFill>
+              <a:latin typeface="微软雅黑" panose="020B0503020204020204" charset="-122"/>
+              <a:ea typeface="微软雅黑" panose="020B0503020204020204" charset="-122"/>
+            </a:endParaRPr>
           </a:p>
         </p:txBody>
       </p:sp>
@@ -5873,34 +6063,10 @@
                 <a:tableStyleId>{5C22544A-7EE6-4342-B048-85BDC9FD1C3A}</a:tableStyleId>
               </a:tblPr>
               <a:tblGrid>
-                <a:gridCol w="2698229">
-                  <a:extLst>
-                    <a:ext uri="{9D8B030D-6E8A-4147-A177-3AD203B41FA5}">
-                      <a16:colId xmlns:a16="http://schemas.microsoft.com/office/drawing/2014/main" val="20000"/>
-                    </a:ext>
-                  </a:extLst>
-                </a:gridCol>
-                <a:gridCol w="3957403">
-                  <a:extLst>
-                    <a:ext uri="{9D8B030D-6E8A-4147-A177-3AD203B41FA5}">
-                      <a16:colId xmlns:a16="http://schemas.microsoft.com/office/drawing/2014/main" val="20001"/>
-                    </a:ext>
-                  </a:extLst>
-                </a:gridCol>
-                <a:gridCol w="2878111">
-                  <a:extLst>
-                    <a:ext uri="{9D8B030D-6E8A-4147-A177-3AD203B41FA5}">
-                      <a16:colId xmlns:a16="http://schemas.microsoft.com/office/drawing/2014/main" val="20002"/>
-                    </a:ext>
-                  </a:extLst>
-                </a:gridCol>
-                <a:gridCol w="1439055">
-                  <a:extLst>
-                    <a:ext uri="{9D8B030D-6E8A-4147-A177-3AD203B41FA5}">
-                      <a16:colId xmlns:a16="http://schemas.microsoft.com/office/drawing/2014/main" val="20003"/>
-                    </a:ext>
-                  </a:extLst>
-                </a:gridCol>
+                <a:gridCol w="2698229"/>
+                <a:gridCol w="3957403"/>
+                <a:gridCol w="2878111"/>
+                <a:gridCol w="1439055"/>
               </a:tblGrid>
               <a:tr h="457200">
                 <a:tc>
@@ -5913,8 +6079,8 @@
                           <a:solidFill>
                             <a:srgbClr val="FFFFFF"/>
                           </a:solidFill>
-                          <a:latin typeface="微软雅黑"/>
-                          <a:ea typeface="微软雅黑"/>
+                          <a:latin typeface="微软雅黑" panose="020B0503020204020204" charset="-122"/>
+                          <a:ea typeface="微软雅黑" panose="020B0503020204020204" charset="-122"/>
                         </a:rPr>
                         <a:t>指标</a:t>
                       </a:r>
@@ -5922,8 +6088,8 @@
                         <a:solidFill>
                           <a:srgbClr val="FFFFFF"/>
                         </a:solidFill>
-                        <a:latin typeface="微软雅黑"/>
-                        <a:ea typeface="微软雅黑"/>
+                        <a:latin typeface="微软雅黑" panose="020B0503020204020204" charset="-122"/>
+                        <a:ea typeface="微软雅黑" panose="020B0503020204020204" charset="-122"/>
                       </a:endParaRPr>
                     </a:p>
                   </a:txBody>
@@ -5943,11 +6109,18 @@
                           <a:solidFill>
                             <a:srgbClr val="FFFFFF"/>
                           </a:solidFill>
-                          <a:latin typeface="微软雅黑"/>
-                          <a:ea typeface="微软雅黑"/>
+                          <a:latin typeface="微软雅黑" panose="020B0503020204020204" charset="-122"/>
+                          <a:ea typeface="微软雅黑" panose="020B0503020204020204" charset="-122"/>
                         </a:rPr>
                         <a:t>最坏值</a:t>
                       </a:r>
+                      <a:endParaRPr sz="1300" b="1">
+                        <a:solidFill>
+                          <a:srgbClr val="FFFFFF"/>
+                        </a:solidFill>
+                        <a:latin typeface="微软雅黑" panose="020B0503020204020204" charset="-122"/>
+                        <a:ea typeface="微软雅黑" panose="020B0503020204020204" charset="-122"/>
+                      </a:endParaRPr>
                     </a:p>
                   </a:txBody>
                   <a:tcPr>
@@ -5966,11 +6139,18 @@
                           <a:solidFill>
                             <a:srgbClr val="FFFFFF"/>
                           </a:solidFill>
-                          <a:latin typeface="微软雅黑"/>
-                          <a:ea typeface="微软雅黑"/>
+                          <a:latin typeface="微软雅黑" panose="020B0503020204020204" charset="-122"/>
+                          <a:ea typeface="微软雅黑" panose="020B0503020204020204" charset="-122"/>
                         </a:rPr>
                         <a:t>门限</a:t>
                       </a:r>
+                      <a:endParaRPr sz="1300" b="1">
+                        <a:solidFill>
+                          <a:srgbClr val="FFFFFF"/>
+                        </a:solidFill>
+                        <a:latin typeface="微软雅黑" panose="020B0503020204020204" charset="-122"/>
+                        <a:ea typeface="微软雅黑" panose="020B0503020204020204" charset="-122"/>
+                      </a:endParaRPr>
                     </a:p>
                   </a:txBody>
                   <a:tcPr>
@@ -5989,11 +6169,18 @@
                           <a:solidFill>
                             <a:srgbClr val="FFFFFF"/>
                           </a:solidFill>
-                          <a:latin typeface="微软雅黑"/>
-                          <a:ea typeface="微软雅黑"/>
+                          <a:latin typeface="微软雅黑" panose="020B0503020204020204" charset="-122"/>
+                          <a:ea typeface="微软雅黑" panose="020B0503020204020204" charset="-122"/>
                         </a:rPr>
                         <a:t>判定</a:t>
                       </a:r>
+                      <a:endParaRPr sz="1300" b="1">
+                        <a:solidFill>
+                          <a:srgbClr val="FFFFFF"/>
+                        </a:solidFill>
+                        <a:latin typeface="微软雅黑" panose="020B0503020204020204" charset="-122"/>
+                        <a:ea typeface="微软雅黑" panose="020B0503020204020204" charset="-122"/>
+                      </a:endParaRPr>
                     </a:p>
                   </a:txBody>
                   <a:tcPr>
@@ -6002,11 +6189,6 @@
                     </a:solidFill>
                   </a:tcPr>
                 </a:tc>
-                <a:extLst>
-                  <a:ext uri="{0D108BD9-81ED-4DB2-BD59-A6C34878D82A}">
-                    <a16:rowId xmlns:a16="http://schemas.microsoft.com/office/drawing/2014/main" val="10000"/>
-                  </a:ext>
-                </a:extLst>
               </a:tr>
               <a:tr h="457200">
                 <a:tc>
@@ -6019,11 +6201,18 @@
                           <a:solidFill>
                             <a:srgbClr val="1F3864"/>
                           </a:solidFill>
-                          <a:latin typeface="微软雅黑"/>
-                          <a:ea typeface="微软雅黑"/>
+                          <a:latin typeface="微软雅黑" panose="020B0503020204020204" charset="-122"/>
+                          <a:ea typeface="微软雅黑" panose="020B0503020204020204" charset="-122"/>
                         </a:rPr>
                         <a:t>DC Gain</a:t>
                       </a:r>
+                      <a:endParaRPr sz="1400" b="1">
+                        <a:solidFill>
+                          <a:srgbClr val="1F3864"/>
+                        </a:solidFill>
+                        <a:latin typeface="微软雅黑" panose="020B0503020204020204" charset="-122"/>
+                        <a:ea typeface="微软雅黑" panose="020B0503020204020204" charset="-122"/>
+                      </a:endParaRPr>
                     </a:p>
                   </a:txBody>
                   <a:tcPr>
@@ -6042,11 +6231,18 @@
                           <a:solidFill>
                             <a:srgbClr val="595959"/>
                           </a:solidFill>
-                          <a:latin typeface="微软雅黑"/>
-                          <a:ea typeface="微软雅黑"/>
+                          <a:latin typeface="微软雅黑" panose="020B0503020204020204" charset="-122"/>
+                          <a:ea typeface="微软雅黑" panose="020B0503020204020204" charset="-122"/>
                         </a:rPr>
                         <a:t>45.85 dB（Min）</a:t>
                       </a:r>
+                      <a:endParaRPr sz="1400" b="0">
+                        <a:solidFill>
+                          <a:srgbClr val="595959"/>
+                        </a:solidFill>
+                        <a:latin typeface="微软雅黑" panose="020B0503020204020204" charset="-122"/>
+                        <a:ea typeface="微软雅黑" panose="020B0503020204020204" charset="-122"/>
+                      </a:endParaRPr>
                     </a:p>
                   </a:txBody>
                   <a:tcPr>
@@ -6065,11 +6261,18 @@
                           <a:solidFill>
                             <a:srgbClr val="595959"/>
                           </a:solidFill>
-                          <a:latin typeface="微软雅黑"/>
-                          <a:ea typeface="微软雅黑"/>
+                          <a:latin typeface="微软雅黑" panose="020B0503020204020204" charset="-122"/>
+                          <a:ea typeface="微软雅黑" panose="020B0503020204020204" charset="-122"/>
                         </a:rPr>
                         <a:t>≥ 40 dB</a:t>
                       </a:r>
+                      <a:endParaRPr sz="1400" b="0">
+                        <a:solidFill>
+                          <a:srgbClr val="595959"/>
+                        </a:solidFill>
+                        <a:latin typeface="微软雅黑" panose="020B0503020204020204" charset="-122"/>
+                        <a:ea typeface="微软雅黑" panose="020B0503020204020204" charset="-122"/>
+                      </a:endParaRPr>
                     </a:p>
                   </a:txBody>
                   <a:tcPr>
@@ -6088,11 +6291,18 @@
                           <a:solidFill>
                             <a:srgbClr val="595959"/>
                           </a:solidFill>
-                          <a:latin typeface="微软雅黑"/>
-                          <a:ea typeface="微软雅黑"/>
+                          <a:latin typeface="微软雅黑" panose="020B0503020204020204" charset="-122"/>
+                          <a:ea typeface="微软雅黑" panose="020B0503020204020204" charset="-122"/>
                         </a:rPr>
                         <a:t>✅</a:t>
                       </a:r>
+                      <a:endParaRPr sz="1400" b="0">
+                        <a:solidFill>
+                          <a:srgbClr val="595959"/>
+                        </a:solidFill>
+                        <a:latin typeface="微软雅黑" panose="020B0503020204020204" charset="-122"/>
+                        <a:ea typeface="微软雅黑" panose="020B0503020204020204" charset="-122"/>
+                      </a:endParaRPr>
                     </a:p>
                   </a:txBody>
                   <a:tcPr>
@@ -6101,11 +6311,6 @@
                     </a:solidFill>
                   </a:tcPr>
                 </a:tc>
-                <a:extLst>
-                  <a:ext uri="{0D108BD9-81ED-4DB2-BD59-A6C34878D82A}">
-                    <a16:rowId xmlns:a16="http://schemas.microsoft.com/office/drawing/2014/main" val="10001"/>
-                  </a:ext>
-                </a:extLst>
               </a:tr>
               <a:tr h="457200">
                 <a:tc>
@@ -6118,11 +6323,18 @@
                           <a:solidFill>
                             <a:srgbClr val="1F3864"/>
                           </a:solidFill>
-                          <a:latin typeface="微软雅黑"/>
-                          <a:ea typeface="微软雅黑"/>
+                          <a:latin typeface="微软雅黑" panose="020B0503020204020204" charset="-122"/>
+                          <a:ea typeface="微软雅黑" panose="020B0503020204020204" charset="-122"/>
                         </a:rPr>
                         <a:t>Phase Margin</a:t>
                       </a:r>
+                      <a:endParaRPr sz="1400" b="1">
+                        <a:solidFill>
+                          <a:srgbClr val="1F3864"/>
+                        </a:solidFill>
+                        <a:latin typeface="微软雅黑" panose="020B0503020204020204" charset="-122"/>
+                        <a:ea typeface="微软雅黑" panose="020B0503020204020204" charset="-122"/>
+                      </a:endParaRPr>
                     </a:p>
                   </a:txBody>
                   <a:tcPr>
@@ -6141,11 +6353,18 @@
                           <a:solidFill>
                             <a:srgbClr val="595959"/>
                           </a:solidFill>
-                          <a:latin typeface="微软雅黑"/>
-                          <a:ea typeface="微软雅黑"/>
+                          <a:latin typeface="微软雅黑" panose="020B0503020204020204" charset="-122"/>
+                          <a:ea typeface="微软雅黑" panose="020B0503020204020204" charset="-122"/>
                         </a:rPr>
                         <a:t>61.20°（Min）</a:t>
                       </a:r>
+                      <a:endParaRPr sz="1400" b="0">
+                        <a:solidFill>
+                          <a:srgbClr val="595959"/>
+                        </a:solidFill>
+                        <a:latin typeface="微软雅黑" panose="020B0503020204020204" charset="-122"/>
+                        <a:ea typeface="微软雅黑" panose="020B0503020204020204" charset="-122"/>
+                      </a:endParaRPr>
                     </a:p>
                   </a:txBody>
                   <a:tcPr>
@@ -6164,11 +6383,18 @@
                           <a:solidFill>
                             <a:srgbClr val="595959"/>
                           </a:solidFill>
-                          <a:latin typeface="微软雅黑"/>
-                          <a:ea typeface="微软雅黑"/>
+                          <a:latin typeface="微软雅黑" panose="020B0503020204020204" charset="-122"/>
+                          <a:ea typeface="微软雅黑" panose="020B0503020204020204" charset="-122"/>
                         </a:rPr>
                         <a:t>≥ 50°</a:t>
                       </a:r>
+                      <a:endParaRPr sz="1400" b="0">
+                        <a:solidFill>
+                          <a:srgbClr val="595959"/>
+                        </a:solidFill>
+                        <a:latin typeface="微软雅黑" panose="020B0503020204020204" charset="-122"/>
+                        <a:ea typeface="微软雅黑" panose="020B0503020204020204" charset="-122"/>
+                      </a:endParaRPr>
                     </a:p>
                   </a:txBody>
                   <a:tcPr>
@@ -6187,11 +6413,18 @@
                           <a:solidFill>
                             <a:srgbClr val="595959"/>
                           </a:solidFill>
-                          <a:latin typeface="微软雅黑"/>
-                          <a:ea typeface="微软雅黑"/>
+                          <a:latin typeface="微软雅黑" panose="020B0503020204020204" charset="-122"/>
+                          <a:ea typeface="微软雅黑" panose="020B0503020204020204" charset="-122"/>
                         </a:rPr>
                         <a:t>✅</a:t>
                       </a:r>
+                      <a:endParaRPr sz="1400" b="0">
+                        <a:solidFill>
+                          <a:srgbClr val="595959"/>
+                        </a:solidFill>
+                        <a:latin typeface="微软雅黑" panose="020B0503020204020204" charset="-122"/>
+                        <a:ea typeface="微软雅黑" panose="020B0503020204020204" charset="-122"/>
+                      </a:endParaRPr>
                     </a:p>
                   </a:txBody>
                   <a:tcPr>
@@ -6200,11 +6433,6 @@
                     </a:solidFill>
                   </a:tcPr>
                 </a:tc>
-                <a:extLst>
-                  <a:ext uri="{0D108BD9-81ED-4DB2-BD59-A6C34878D82A}">
-                    <a16:rowId xmlns:a16="http://schemas.microsoft.com/office/drawing/2014/main" val="10002"/>
-                  </a:ext>
-                </a:extLst>
               </a:tr>
               <a:tr h="457200">
                 <a:tc>
@@ -6217,11 +6445,18 @@
                           <a:solidFill>
                             <a:srgbClr val="1F3864"/>
                           </a:solidFill>
-                          <a:latin typeface="微软雅黑"/>
-                          <a:ea typeface="微软雅黑"/>
+                          <a:latin typeface="微软雅黑" panose="020B0503020204020204" charset="-122"/>
+                          <a:ea typeface="微软雅黑" panose="020B0503020204020204" charset="-122"/>
                         </a:rPr>
                         <a:t>Gain Margin</a:t>
                       </a:r>
+                      <a:endParaRPr sz="1400" b="1">
+                        <a:solidFill>
+                          <a:srgbClr val="1F3864"/>
+                        </a:solidFill>
+                        <a:latin typeface="微软雅黑" panose="020B0503020204020204" charset="-122"/>
+                        <a:ea typeface="微软雅黑" panose="020B0503020204020204" charset="-122"/>
+                      </a:endParaRPr>
                     </a:p>
                   </a:txBody>
                   <a:tcPr>
@@ -6240,8 +6475,8 @@
                           <a:solidFill>
                             <a:srgbClr val="595959"/>
                           </a:solidFill>
-                          <a:latin typeface="微软雅黑"/>
-                          <a:ea typeface="微软雅黑"/>
+                          <a:latin typeface="微软雅黑" panose="020B0503020204020204" charset="-122"/>
+                          <a:ea typeface="微软雅黑" panose="020B0503020204020204" charset="-122"/>
                         </a:rPr>
                         <a:t>−10.84 </a:t>
                       </a:r>
@@ -6250,8 +6485,8 @@
                           <a:solidFill>
                             <a:srgbClr val="595959"/>
                           </a:solidFill>
-                          <a:latin typeface="微软雅黑"/>
-                          <a:ea typeface="微软雅黑"/>
+                          <a:latin typeface="微软雅黑" panose="020B0503020204020204" charset="-122"/>
+                          <a:ea typeface="微软雅黑" panose="020B0503020204020204" charset="-122"/>
                         </a:rPr>
                         <a:t>dB（Max</a:t>
                       </a:r>
@@ -6260,11 +6495,18 @@
                           <a:solidFill>
                             <a:srgbClr val="595959"/>
                           </a:solidFill>
-                          <a:latin typeface="微软雅黑"/>
-                          <a:ea typeface="微软雅黑"/>
+                          <a:latin typeface="微软雅黑" panose="020B0503020204020204" charset="-122"/>
+                          <a:ea typeface="微软雅黑" panose="020B0503020204020204" charset="-122"/>
                         </a:rPr>
                         <a:t>）</a:t>
                       </a:r>
+                      <a:endParaRPr sz="1400" b="0" dirty="0">
+                        <a:solidFill>
+                          <a:srgbClr val="595959"/>
+                        </a:solidFill>
+                        <a:latin typeface="微软雅黑" panose="020B0503020204020204" charset="-122"/>
+                        <a:ea typeface="微软雅黑" panose="020B0503020204020204" charset="-122"/>
+                      </a:endParaRPr>
                     </a:p>
                   </a:txBody>
                   <a:tcPr>
@@ -6283,11 +6525,18 @@
                           <a:solidFill>
                             <a:srgbClr val="595959"/>
                           </a:solidFill>
-                          <a:latin typeface="微软雅黑"/>
-                          <a:ea typeface="微软雅黑"/>
+                          <a:latin typeface="微软雅黑" panose="020B0503020204020204" charset="-122"/>
+                          <a:ea typeface="微软雅黑" panose="020B0503020204020204" charset="-122"/>
                         </a:rPr>
                         <a:t>≤ −10 dB</a:t>
                       </a:r>
+                      <a:endParaRPr sz="1400" b="0">
+                        <a:solidFill>
+                          <a:srgbClr val="595959"/>
+                        </a:solidFill>
+                        <a:latin typeface="微软雅黑" panose="020B0503020204020204" charset="-122"/>
+                        <a:ea typeface="微软雅黑" panose="020B0503020204020204" charset="-122"/>
+                      </a:endParaRPr>
                     </a:p>
                   </a:txBody>
                   <a:tcPr>
@@ -6306,11 +6555,18 @@
                           <a:solidFill>
                             <a:srgbClr val="595959"/>
                           </a:solidFill>
-                          <a:latin typeface="微软雅黑"/>
-                          <a:ea typeface="微软雅黑"/>
+                          <a:latin typeface="微软雅黑" panose="020B0503020204020204" charset="-122"/>
+                          <a:ea typeface="微软雅黑" panose="020B0503020204020204" charset="-122"/>
                         </a:rPr>
                         <a:t>✅</a:t>
                       </a:r>
+                      <a:endParaRPr sz="1400" b="0">
+                        <a:solidFill>
+                          <a:srgbClr val="595959"/>
+                        </a:solidFill>
+                        <a:latin typeface="微软雅黑" panose="020B0503020204020204" charset="-122"/>
+                        <a:ea typeface="微软雅黑" panose="020B0503020204020204" charset="-122"/>
+                      </a:endParaRPr>
                     </a:p>
                   </a:txBody>
                   <a:tcPr>
@@ -6319,11 +6575,6 @@
                     </a:solidFill>
                   </a:tcPr>
                 </a:tc>
-                <a:extLst>
-                  <a:ext uri="{0D108BD9-81ED-4DB2-BD59-A6C34878D82A}">
-                    <a16:rowId xmlns:a16="http://schemas.microsoft.com/office/drawing/2014/main" val="10003"/>
-                  </a:ext>
-                </a:extLst>
               </a:tr>
               <a:tr h="457200">
                 <a:tc>
@@ -6336,11 +6587,18 @@
                           <a:solidFill>
                             <a:srgbClr val="1F3864"/>
                           </a:solidFill>
-                          <a:latin typeface="微软雅黑"/>
-                          <a:ea typeface="微软雅黑"/>
+                          <a:latin typeface="微软雅黑" panose="020B0503020204020204" charset="-122"/>
+                          <a:ea typeface="微软雅黑" panose="020B0503020204020204" charset="-122"/>
                         </a:rPr>
                         <a:t>I_OPA</a:t>
                       </a:r>
+                      <a:endParaRPr sz="1400" b="1">
+                        <a:solidFill>
+                          <a:srgbClr val="1F3864"/>
+                        </a:solidFill>
+                        <a:latin typeface="微软雅黑" panose="020B0503020204020204" charset="-122"/>
+                        <a:ea typeface="微软雅黑" panose="020B0503020204020204" charset="-122"/>
+                      </a:endParaRPr>
                     </a:p>
                   </a:txBody>
                   <a:tcPr>
@@ -6359,11 +6617,18 @@
                           <a:solidFill>
                             <a:srgbClr val="595959"/>
                           </a:solidFill>
-                          <a:latin typeface="微软雅黑"/>
-                          <a:ea typeface="微软雅黑"/>
+                          <a:latin typeface="微软雅黑" panose="020B0503020204020204" charset="-122"/>
+                          <a:ea typeface="微软雅黑" panose="020B0503020204020204" charset="-122"/>
                         </a:rPr>
                         <a:t>0.839 mA（Max）</a:t>
                       </a:r>
+                      <a:endParaRPr sz="1400" b="0">
+                        <a:solidFill>
+                          <a:srgbClr val="595959"/>
+                        </a:solidFill>
+                        <a:latin typeface="微软雅黑" panose="020B0503020204020204" charset="-122"/>
+                        <a:ea typeface="微软雅黑" panose="020B0503020204020204" charset="-122"/>
+                      </a:endParaRPr>
                     </a:p>
                   </a:txBody>
                   <a:tcPr>
@@ -6382,11 +6647,18 @@
                           <a:solidFill>
                             <a:srgbClr val="595959"/>
                           </a:solidFill>
-                          <a:latin typeface="微软雅黑"/>
-                          <a:ea typeface="微软雅黑"/>
+                          <a:latin typeface="微软雅黑" panose="020B0503020204020204" charset="-122"/>
+                          <a:ea typeface="微软雅黑" panose="020B0503020204020204" charset="-122"/>
                         </a:rPr>
                         <a:t>≤ 3 mA</a:t>
                       </a:r>
+                      <a:endParaRPr sz="1400" b="0">
+                        <a:solidFill>
+                          <a:srgbClr val="595959"/>
+                        </a:solidFill>
+                        <a:latin typeface="微软雅黑" panose="020B0503020204020204" charset="-122"/>
+                        <a:ea typeface="微软雅黑" panose="020B0503020204020204" charset="-122"/>
+                      </a:endParaRPr>
                     </a:p>
                   </a:txBody>
                   <a:tcPr>
@@ -6405,11 +6677,18 @@
                           <a:solidFill>
                             <a:srgbClr val="595959"/>
                           </a:solidFill>
-                          <a:latin typeface="微软雅黑"/>
-                          <a:ea typeface="微软雅黑"/>
+                          <a:latin typeface="微软雅黑" panose="020B0503020204020204" charset="-122"/>
+                          <a:ea typeface="微软雅黑" panose="020B0503020204020204" charset="-122"/>
                         </a:rPr>
                         <a:t>✅</a:t>
                       </a:r>
+                      <a:endParaRPr sz="1400" b="0">
+                        <a:solidFill>
+                          <a:srgbClr val="595959"/>
+                        </a:solidFill>
+                        <a:latin typeface="微软雅黑" panose="020B0503020204020204" charset="-122"/>
+                        <a:ea typeface="微软雅黑" panose="020B0503020204020204" charset="-122"/>
+                      </a:endParaRPr>
                     </a:p>
                   </a:txBody>
                   <a:tcPr>
@@ -6418,11 +6697,6 @@
                     </a:solidFill>
                   </a:tcPr>
                 </a:tc>
-                <a:extLst>
-                  <a:ext uri="{0D108BD9-81ED-4DB2-BD59-A6C34878D82A}">
-                    <a16:rowId xmlns:a16="http://schemas.microsoft.com/office/drawing/2014/main" val="10004"/>
-                  </a:ext>
-                </a:extLst>
               </a:tr>
               <a:tr h="457200">
                 <a:tc>
@@ -6435,11 +6709,18 @@
                           <a:solidFill>
                             <a:srgbClr val="1F3864"/>
                           </a:solidFill>
-                          <a:latin typeface="微软雅黑"/>
-                          <a:ea typeface="微软雅黑"/>
+                          <a:latin typeface="微软雅黑" panose="020B0503020204020204" charset="-122"/>
+                          <a:ea typeface="微软雅黑" panose="020B0503020204020204" charset="-122"/>
                         </a:rPr>
                         <a:t>UGB / Area</a:t>
                       </a:r>
+                      <a:endParaRPr sz="1400" b="1">
+                        <a:solidFill>
+                          <a:srgbClr val="1F3864"/>
+                        </a:solidFill>
+                        <a:latin typeface="微软雅黑" panose="020B0503020204020204" charset="-122"/>
+                        <a:ea typeface="微软雅黑" panose="020B0503020204020204" charset="-122"/>
+                      </a:endParaRPr>
                     </a:p>
                   </a:txBody>
                   <a:tcPr>
@@ -6458,11 +6739,18 @@
                           <a:solidFill>
                             <a:srgbClr val="595959"/>
                           </a:solidFill>
-                          <a:latin typeface="微软雅黑"/>
-                          <a:ea typeface="微软雅黑"/>
+                          <a:latin typeface="微软雅黑" panose="020B0503020204020204" charset="-122"/>
+                          <a:ea typeface="微软雅黑" panose="020B0503020204020204" charset="-122"/>
                         </a:rPr>
                         <a:t>13.84 MHz / 8361 µm²</a:t>
                       </a:r>
+                      <a:endParaRPr sz="1400" b="0" dirty="0">
+                        <a:solidFill>
+                          <a:srgbClr val="595959"/>
+                        </a:solidFill>
+                        <a:latin typeface="微软雅黑" panose="020B0503020204020204" charset="-122"/>
+                        <a:ea typeface="微软雅黑" panose="020B0503020204020204" charset="-122"/>
+                      </a:endParaRPr>
                     </a:p>
                   </a:txBody>
                   <a:tcPr>
@@ -6481,11 +6769,18 @@
                           <a:solidFill>
                             <a:srgbClr val="595959"/>
                           </a:solidFill>
-                          <a:latin typeface="微软雅黑"/>
-                          <a:ea typeface="微软雅黑"/>
+                          <a:latin typeface="微软雅黑" panose="020B0503020204020204" charset="-122"/>
+                          <a:ea typeface="微软雅黑" panose="020B0503020204020204" charset="-122"/>
                         </a:rPr>
                         <a:t>排名项</a:t>
                       </a:r>
+                      <a:endParaRPr sz="1400" b="0">
+                        <a:solidFill>
+                          <a:srgbClr val="595959"/>
+                        </a:solidFill>
+                        <a:latin typeface="微软雅黑" panose="020B0503020204020204" charset="-122"/>
+                        <a:ea typeface="微软雅黑" panose="020B0503020204020204" charset="-122"/>
+                      </a:endParaRPr>
                     </a:p>
                   </a:txBody>
                   <a:tcPr>
@@ -6504,11 +6799,18 @@
                           <a:solidFill>
                             <a:srgbClr val="595959"/>
                           </a:solidFill>
-                          <a:latin typeface="微软雅黑"/>
-                          <a:ea typeface="微软雅黑"/>
+                          <a:latin typeface="微软雅黑" panose="020B0503020204020204" charset="-122"/>
+                          <a:ea typeface="微软雅黑" panose="020B0503020204020204" charset="-122"/>
                         </a:rPr>
                         <a:t>—</a:t>
                       </a:r>
+                      <a:endParaRPr sz="1400" b="0">
+                        <a:solidFill>
+                          <a:srgbClr val="595959"/>
+                        </a:solidFill>
+                        <a:latin typeface="微软雅黑" panose="020B0503020204020204" charset="-122"/>
+                        <a:ea typeface="微软雅黑" panose="020B0503020204020204" charset="-122"/>
+                      </a:endParaRPr>
                     </a:p>
                   </a:txBody>
                   <a:tcPr>
@@ -6517,11 +6819,6 @@
                     </a:solidFill>
                   </a:tcPr>
                 </a:tc>
-                <a:extLst>
-                  <a:ext uri="{0D108BD9-81ED-4DB2-BD59-A6C34878D82A}">
-                    <a16:rowId xmlns:a16="http://schemas.microsoft.com/office/drawing/2014/main" val="10005"/>
-                  </a:ext>
-                </a:extLst>
               </a:tr>
             </a:tbl>
           </a:graphicData>
@@ -6559,8 +6856,8 @@
                 <a:solidFill>
                   <a:srgbClr val="595959"/>
                 </a:solidFill>
-                <a:latin typeface="微软雅黑"/>
-                <a:ea typeface="微软雅黑"/>
+                <a:latin typeface="微软雅黑" panose="020B0503020204020204" charset="-122"/>
+                <a:ea typeface="微软雅黑" panose="020B0503020204020204" charset="-122"/>
               </a:rPr>
               <a:t>• </a:t>
             </a:r>
@@ -6569,8 +6866,8 @@
                 <a:solidFill>
                   <a:srgbClr val="595959"/>
                 </a:solidFill>
-                <a:latin typeface="微软雅黑"/>
-                <a:ea typeface="微软雅黑"/>
+                <a:latin typeface="微软雅黑" panose="020B0503020204020204" charset="-122"/>
+                <a:ea typeface="微软雅黑" panose="020B0503020204020204" charset="-122"/>
               </a:rPr>
               <a:t>覆盖：TT</a:t>
             </a:r>
@@ -6579,11 +6876,18 @@
                 <a:solidFill>
                   <a:srgbClr val="595959"/>
                 </a:solidFill>
-                <a:latin typeface="微软雅黑"/>
-                <a:ea typeface="微软雅黑"/>
+                <a:latin typeface="微软雅黑" panose="020B0503020204020204" charset="-122"/>
+                <a:ea typeface="微软雅黑" panose="020B0503020204020204" charset="-122"/>
               </a:rPr>
               <a:t>/FF/SS × 1.62/1.8/1.98 V × −40/27/125 ℃，共 9 角</a:t>
             </a:r>
+            <a:endParaRPr sz="1500" b="0" dirty="0">
+              <a:solidFill>
+                <a:srgbClr val="595959"/>
+              </a:solidFill>
+              <a:latin typeface="微软雅黑" panose="020B0503020204020204" charset="-122"/>
+              <a:ea typeface="微软雅黑" panose="020B0503020204020204" charset="-122"/>
+            </a:endParaRPr>
           </a:p>
           <a:p>
             <a:pPr>
@@ -6596,8 +6900,8 @@
                 <a:solidFill>
                   <a:srgbClr val="595959"/>
                 </a:solidFill>
-                <a:latin typeface="微软雅黑"/>
-                <a:ea typeface="微软雅黑"/>
+                <a:latin typeface="微软雅黑" panose="020B0503020204020204" charset="-122"/>
+                <a:ea typeface="微软雅黑" panose="020B0503020204020204" charset="-122"/>
               </a:rPr>
               <a:t>• </a:t>
             </a:r>
@@ -6606,8 +6910,8 @@
                 <a:solidFill>
                   <a:srgbClr val="595959"/>
                 </a:solidFill>
-                <a:latin typeface="微软雅黑"/>
-                <a:ea typeface="微软雅黑"/>
+                <a:latin typeface="微软雅黑" panose="020B0503020204020204" charset="-122"/>
+                <a:ea typeface="微软雅黑" panose="020B0503020204020204" charset="-122"/>
               </a:rPr>
               <a:t>口径与</a:t>
             </a:r>
@@ -6616,8 +6920,8 @@
                 <a:solidFill>
                   <a:srgbClr val="595959"/>
                 </a:solidFill>
-                <a:latin typeface="微软雅黑"/>
-                <a:ea typeface="微软雅黑"/>
+                <a:latin typeface="微软雅黑" panose="020B0503020204020204" charset="-122"/>
+                <a:ea typeface="微软雅黑" panose="020B0503020204020204" charset="-122"/>
               </a:rPr>
               <a:t> score.py </a:t>
             </a:r>
@@ -6626,8 +6930,8 @@
                 <a:solidFill>
                   <a:srgbClr val="595959"/>
                 </a:solidFill>
-                <a:latin typeface="微软雅黑"/>
-                <a:ea typeface="微软雅黑"/>
+                <a:latin typeface="微软雅黑" panose="020B0503020204020204" charset="-122"/>
+                <a:ea typeface="微软雅黑" panose="020B0503020204020204" charset="-122"/>
               </a:rPr>
               <a:t>一致：PM</a:t>
             </a:r>
@@ -6636,8 +6940,8 @@
                 <a:solidFill>
                   <a:srgbClr val="595959"/>
                 </a:solidFill>
-                <a:latin typeface="微软雅黑"/>
-                <a:ea typeface="微软雅黑"/>
+                <a:latin typeface="微软雅黑" panose="020B0503020204020204" charset="-122"/>
+                <a:ea typeface="微软雅黑" panose="020B0503020204020204" charset="-122"/>
               </a:rPr>
               <a:t>/Gain/UGB 取 </a:t>
             </a:r>
@@ -6646,8 +6950,8 @@
                 <a:solidFill>
                   <a:srgbClr val="595959"/>
                 </a:solidFill>
-                <a:latin typeface="微软雅黑"/>
-                <a:ea typeface="微软雅黑"/>
+                <a:latin typeface="微软雅黑" panose="020B0503020204020204" charset="-122"/>
+                <a:ea typeface="微软雅黑" panose="020B0503020204020204" charset="-122"/>
               </a:rPr>
               <a:t>Min，GM</a:t>
             </a:r>
@@ -6656,11 +6960,18 @@
                 <a:solidFill>
                   <a:srgbClr val="595959"/>
                 </a:solidFill>
-                <a:latin typeface="微软雅黑"/>
-                <a:ea typeface="微软雅黑"/>
+                <a:latin typeface="微软雅黑" panose="020B0503020204020204" charset="-122"/>
+                <a:ea typeface="微软雅黑" panose="020B0503020204020204" charset="-122"/>
               </a:rPr>
               <a:t>/I_OPA 取 Max</a:t>
             </a:r>
+            <a:endParaRPr sz="1500" b="0" dirty="0">
+              <a:solidFill>
+                <a:srgbClr val="595959"/>
+              </a:solidFill>
+              <a:latin typeface="微软雅黑" panose="020B0503020204020204" charset="-122"/>
+              <a:ea typeface="微软雅黑" panose="020B0503020204020204" charset="-122"/>
+            </a:endParaRPr>
           </a:p>
           <a:p>
             <a:pPr>
@@ -6673,8 +6984,8 @@
                 <a:solidFill>
                   <a:srgbClr val="595959"/>
                 </a:solidFill>
-                <a:latin typeface="微软雅黑"/>
-                <a:ea typeface="微软雅黑"/>
+                <a:latin typeface="微软雅黑" panose="020B0503020204020204" charset="-122"/>
+                <a:ea typeface="微软雅黑" panose="020B0503020204020204" charset="-122"/>
               </a:rPr>
               <a:t>• </a:t>
             </a:r>
@@ -6683,8 +6994,8 @@
                 <a:solidFill>
                   <a:srgbClr val="595959"/>
                 </a:solidFill>
-                <a:latin typeface="微软雅黑"/>
-                <a:ea typeface="微软雅黑"/>
+                <a:latin typeface="微软雅黑" panose="020B0503020204020204" charset="-122"/>
+                <a:ea typeface="微软雅黑" panose="020B0503020204020204" charset="-122"/>
               </a:rPr>
               <a:t>裕度最小的是</a:t>
             </a:r>
@@ -6693,8 +7004,8 @@
                 <a:solidFill>
                   <a:srgbClr val="595959"/>
                 </a:solidFill>
-                <a:latin typeface="微软雅黑"/>
-                <a:ea typeface="微软雅黑"/>
+                <a:latin typeface="微软雅黑" panose="020B0503020204020204" charset="-122"/>
+                <a:ea typeface="微软雅黑" panose="020B0503020204020204" charset="-122"/>
               </a:rPr>
               <a:t> GM（0.84 dB），</a:t>
             </a:r>
@@ -6703,8 +7014,8 @@
                 <a:solidFill>
                   <a:srgbClr val="595959"/>
                 </a:solidFill>
-                <a:latin typeface="微软雅黑"/>
-                <a:ea typeface="微软雅黑"/>
+                <a:latin typeface="微软雅黑" panose="020B0503020204020204" charset="-122"/>
+                <a:ea typeface="微软雅黑" panose="020B0503020204020204" charset="-122"/>
               </a:rPr>
               <a:t>是最需要关注的指标</a:t>
             </a:r>
@@ -6712,8 +7023,8 @@
               <a:solidFill>
                 <a:srgbClr val="595959"/>
               </a:solidFill>
-              <a:latin typeface="微软雅黑"/>
-              <a:ea typeface="微软雅黑"/>
+              <a:latin typeface="微软雅黑" panose="020B0503020204020204" charset="-122"/>
+              <a:ea typeface="微软雅黑" panose="020B0503020204020204" charset="-122"/>
             </a:endParaRPr>
           </a:p>
         </p:txBody>
@@ -6784,7 +7095,6 @@
           <a:lstStyle/>
           <a:p>
             <a:pPr algn="ctr"/>
-            <a:endParaRPr/>
           </a:p>
         </p:txBody>
       </p:sp>
@@ -6815,11 +7125,18 @@
                 <a:solidFill>
                   <a:srgbClr val="FFFFFF"/>
                 </a:solidFill>
-                <a:latin typeface="微软雅黑"/>
-                <a:ea typeface="微软雅黑"/>
+                <a:latin typeface="微软雅黑" panose="020B0503020204020204" charset="-122"/>
+                <a:ea typeface="微软雅黑" panose="020B0503020204020204" charset="-122"/>
               </a:rPr>
               <a:t>电路图：参数化视图与反标视图</a:t>
             </a:r>
+            <a:endParaRPr sz="2600" b="1">
+              <a:solidFill>
+                <a:srgbClr val="FFFFFF"/>
+              </a:solidFill>
+              <a:latin typeface="微软雅黑" panose="020B0503020204020204" charset="-122"/>
+              <a:ea typeface="微软雅黑" panose="020B0503020204020204" charset="-122"/>
+            </a:endParaRPr>
           </a:p>
         </p:txBody>
       </p:sp>
@@ -6851,11 +7168,18 @@
                 <a:solidFill>
                   <a:srgbClr val="BDD7EE"/>
                 </a:solidFill>
-                <a:latin typeface="微软雅黑"/>
-                <a:ea typeface="微软雅黑"/>
+                <a:latin typeface="微软雅黑" panose="020B0503020204020204" charset="-122"/>
+                <a:ea typeface="微软雅黑" panose="020B0503020204020204" charset="-122"/>
               </a:rPr>
               <a:t>08 结果</a:t>
             </a:r>
+            <a:endParaRPr sz="1200" b="0">
+              <a:solidFill>
+                <a:srgbClr val="BDD7EE"/>
+              </a:solidFill>
+              <a:latin typeface="微软雅黑" panose="020B0503020204020204" charset="-122"/>
+              <a:ea typeface="微软雅黑" panose="020B0503020204020204" charset="-122"/>
+            </a:endParaRPr>
           </a:p>
         </p:txBody>
       </p:sp>
@@ -6886,11 +7210,18 @@
                 <a:solidFill>
                   <a:srgbClr val="8C8C8C"/>
                 </a:solidFill>
-                <a:latin typeface="微软雅黑"/>
-                <a:ea typeface="微软雅黑"/>
+                <a:latin typeface="微软雅黑" panose="020B0503020204020204" charset="-122"/>
+                <a:ea typeface="微软雅黑" panose="020B0503020204020204" charset="-122"/>
               </a:rPr>
               <a:t>模拟电路 AI 智能化设计 · 赛题二</a:t>
             </a:r>
+            <a:endParaRPr sz="900" b="0">
+              <a:solidFill>
+                <a:srgbClr val="8C8C8C"/>
+              </a:solidFill>
+              <a:latin typeface="微软雅黑" panose="020B0503020204020204" charset="-122"/>
+              <a:ea typeface="微软雅黑" panose="020B0503020204020204" charset="-122"/>
+            </a:endParaRPr>
           </a:p>
         </p:txBody>
       </p:sp>
@@ -6922,11 +7253,18 @@
                 <a:solidFill>
                   <a:srgbClr val="8C8C8C"/>
                 </a:solidFill>
-                <a:latin typeface="微软雅黑"/>
-                <a:ea typeface="微软雅黑"/>
+                <a:latin typeface="微软雅黑" panose="020B0503020204020204" charset="-122"/>
+                <a:ea typeface="微软雅黑" panose="020B0503020204020204" charset="-122"/>
               </a:rPr>
               <a:t>13</a:t>
             </a:r>
+            <a:endParaRPr sz="900" b="0">
+              <a:solidFill>
+                <a:srgbClr val="8C8C8C"/>
+              </a:solidFill>
+              <a:latin typeface="微软雅黑" panose="020B0503020204020204" charset="-122"/>
+              <a:ea typeface="微软雅黑" panose="020B0503020204020204" charset="-122"/>
+            </a:endParaRPr>
           </a:p>
         </p:txBody>
       </p:sp>
@@ -6939,7 +7277,7 @@
           <p:nvPr/>
         </p:nvPicPr>
         <p:blipFill>
-          <a:blip r:embed="rId3"/>
+          <a:blip r:embed="rId1"/>
           <a:stretch>
             <a:fillRect/>
           </a:stretch>
@@ -6981,11 +7319,18 @@
                 <a:solidFill>
                   <a:srgbClr val="595959"/>
                 </a:solidFill>
-                <a:latin typeface="微软雅黑"/>
-                <a:ea typeface="微软雅黑"/>
+                <a:latin typeface="微软雅黑" panose="020B0503020204020204" charset="-122"/>
+                <a:ea typeface="微软雅黑" panose="020B0503020204020204" charset="-122"/>
               </a:rPr>
               <a:t>参数化视图（尺寸为变量）</a:t>
             </a:r>
+            <a:endParaRPr sz="1200" b="0">
+              <a:solidFill>
+                <a:srgbClr val="595959"/>
+              </a:solidFill>
+              <a:latin typeface="微软雅黑" panose="020B0503020204020204" charset="-122"/>
+              <a:ea typeface="微软雅黑" panose="020B0503020204020204" charset="-122"/>
+            </a:endParaRPr>
           </a:p>
         </p:txBody>
       </p:sp>
@@ -6998,7 +7343,7 @@
           <p:nvPr/>
         </p:nvPicPr>
         <p:blipFill>
-          <a:blip r:embed="rId4"/>
+          <a:blip r:embed="rId2"/>
           <a:stretch>
             <a:fillRect/>
           </a:stretch>
@@ -7040,11 +7385,18 @@
                 <a:solidFill>
                   <a:srgbClr val="595959"/>
                 </a:solidFill>
-                <a:latin typeface="微软雅黑"/>
-                <a:ea typeface="微软雅黑"/>
+                <a:latin typeface="微软雅黑" panose="020B0503020204020204" charset="-122"/>
+                <a:ea typeface="微软雅黑" panose="020B0503020204020204" charset="-122"/>
               </a:rPr>
               <a:t>反标视图（尺寸已写回数值）</a:t>
             </a:r>
+            <a:endParaRPr sz="1200" b="0">
+              <a:solidFill>
+                <a:srgbClr val="595959"/>
+              </a:solidFill>
+              <a:latin typeface="微软雅黑" panose="020B0503020204020204" charset="-122"/>
+              <a:ea typeface="微软雅黑" panose="020B0503020204020204" charset="-122"/>
+            </a:endParaRPr>
           </a:p>
         </p:txBody>
       </p:sp>
@@ -7075,11 +7427,18 @@
                 <a:solidFill>
                   <a:srgbClr val="8C8C8C"/>
                 </a:solidFill>
-                <a:latin typeface="微软雅黑"/>
-                <a:ea typeface="微软雅黑"/>
+                <a:latin typeface="微软雅黑" panose="020B0503020204020204" charset="-122"/>
+                <a:ea typeface="微软雅黑" panose="020B0503020204020204" charset="-122"/>
               </a:rPr>
               <a:t>截图来自流程演示运行；最终尺寸见 2026_EDA_case1_best_params.txt（105 行）</a:t>
             </a:r>
+            <a:endParaRPr sz="1100" b="0">
+              <a:solidFill>
+                <a:srgbClr val="8C8C8C"/>
+              </a:solidFill>
+              <a:latin typeface="微软雅黑" panose="020B0503020204020204" charset="-122"/>
+              <a:ea typeface="微软雅黑" panose="020B0503020204020204" charset="-122"/>
+            </a:endParaRPr>
           </a:p>
         </p:txBody>
       </p:sp>
@@ -7149,7 +7508,6 @@
           <a:lstStyle/>
           <a:p>
             <a:pPr algn="ctr"/>
-            <a:endParaRPr/>
           </a:p>
         </p:txBody>
       </p:sp>
@@ -7180,11 +7538,18 @@
                 <a:solidFill>
                   <a:srgbClr val="FFFFFF"/>
                 </a:solidFill>
-                <a:latin typeface="微软雅黑"/>
-                <a:ea typeface="微软雅黑"/>
+                <a:latin typeface="微软雅黑" panose="020B0503020204020204" charset="-122"/>
+                <a:ea typeface="微软雅黑" panose="020B0503020204020204" charset="-122"/>
               </a:rPr>
               <a:t>算法性能与代码质量</a:t>
             </a:r>
+            <a:endParaRPr sz="2600" b="1">
+              <a:solidFill>
+                <a:srgbClr val="FFFFFF"/>
+              </a:solidFill>
+              <a:latin typeface="微软雅黑" panose="020B0503020204020204" charset="-122"/>
+              <a:ea typeface="微软雅黑" panose="020B0503020204020204" charset="-122"/>
+            </a:endParaRPr>
           </a:p>
         </p:txBody>
       </p:sp>
@@ -7216,11 +7581,18 @@
                 <a:solidFill>
                   <a:srgbClr val="BDD7EE"/>
                 </a:solidFill>
-                <a:latin typeface="微软雅黑"/>
-                <a:ea typeface="微软雅黑"/>
+                <a:latin typeface="微软雅黑" panose="020B0503020204020204" charset="-122"/>
+                <a:ea typeface="微软雅黑" panose="020B0503020204020204" charset="-122"/>
               </a:rPr>
               <a:t>09 工程</a:t>
             </a:r>
+            <a:endParaRPr sz="1200" b="0">
+              <a:solidFill>
+                <a:srgbClr val="BDD7EE"/>
+              </a:solidFill>
+              <a:latin typeface="微软雅黑" panose="020B0503020204020204" charset="-122"/>
+              <a:ea typeface="微软雅黑" panose="020B0503020204020204" charset="-122"/>
+            </a:endParaRPr>
           </a:p>
         </p:txBody>
       </p:sp>
@@ -7251,11 +7623,18 @@
                 <a:solidFill>
                   <a:srgbClr val="8C8C8C"/>
                 </a:solidFill>
-                <a:latin typeface="微软雅黑"/>
-                <a:ea typeface="微软雅黑"/>
+                <a:latin typeface="微软雅黑" panose="020B0503020204020204" charset="-122"/>
+                <a:ea typeface="微软雅黑" panose="020B0503020204020204" charset="-122"/>
               </a:rPr>
               <a:t>模拟电路 AI 智能化设计 · 赛题二</a:t>
             </a:r>
+            <a:endParaRPr sz="900" b="0">
+              <a:solidFill>
+                <a:srgbClr val="8C8C8C"/>
+              </a:solidFill>
+              <a:latin typeface="微软雅黑" panose="020B0503020204020204" charset="-122"/>
+              <a:ea typeface="微软雅黑" panose="020B0503020204020204" charset="-122"/>
+            </a:endParaRPr>
           </a:p>
         </p:txBody>
       </p:sp>
@@ -7287,11 +7666,18 @@
                 <a:solidFill>
                   <a:srgbClr val="8C8C8C"/>
                 </a:solidFill>
-                <a:latin typeface="微软雅黑"/>
-                <a:ea typeface="微软雅黑"/>
+                <a:latin typeface="微软雅黑" panose="020B0503020204020204" charset="-122"/>
+                <a:ea typeface="微软雅黑" panose="020B0503020204020204" charset="-122"/>
               </a:rPr>
               <a:t>14</a:t>
             </a:r>
+            <a:endParaRPr sz="900" b="0">
+              <a:solidFill>
+                <a:srgbClr val="8C8C8C"/>
+              </a:solidFill>
+              <a:latin typeface="微软雅黑" panose="020B0503020204020204" charset="-122"/>
+              <a:ea typeface="微软雅黑" panose="020B0503020204020204" charset="-122"/>
+            </a:endParaRPr>
           </a:p>
         </p:txBody>
       </p:sp>
@@ -7314,20 +7700,8 @@
                 <a:tableStyleId>{5C22544A-7EE6-4342-B048-85BDC9FD1C3A}</a:tableStyleId>
               </a:tblPr>
               <a:tblGrid>
-                <a:gridCol w="4206240">
-                  <a:extLst>
-                    <a:ext uri="{9D8B030D-6E8A-4147-A177-3AD203B41FA5}">
-                      <a16:colId xmlns:a16="http://schemas.microsoft.com/office/drawing/2014/main" val="20000"/>
-                    </a:ext>
-                  </a:extLst>
-                </a:gridCol>
-                <a:gridCol w="6766560">
-                  <a:extLst>
-                    <a:ext uri="{9D8B030D-6E8A-4147-A177-3AD203B41FA5}">
-                      <a16:colId xmlns:a16="http://schemas.microsoft.com/office/drawing/2014/main" val="20001"/>
-                    </a:ext>
-                  </a:extLst>
-                </a:gridCol>
+                <a:gridCol w="4206240"/>
+                <a:gridCol w="6766560"/>
               </a:tblGrid>
               <a:tr h="457200">
                 <a:tc>
@@ -7340,11 +7714,18 @@
                           <a:solidFill>
                             <a:srgbClr val="FFFFFF"/>
                           </a:solidFill>
-                          <a:latin typeface="微软雅黑"/>
-                          <a:ea typeface="微软雅黑"/>
+                          <a:latin typeface="微软雅黑" panose="020B0503020204020204" charset="-122"/>
+                          <a:ea typeface="微软雅黑" panose="020B0503020204020204" charset="-122"/>
                         </a:rPr>
                         <a:t>指标</a:t>
                       </a:r>
+                      <a:endParaRPr sz="1300" b="1">
+                        <a:solidFill>
+                          <a:srgbClr val="FFFFFF"/>
+                        </a:solidFill>
+                        <a:latin typeface="微软雅黑" panose="020B0503020204020204" charset="-122"/>
+                        <a:ea typeface="微软雅黑" panose="020B0503020204020204" charset="-122"/>
+                      </a:endParaRPr>
                     </a:p>
                   </a:txBody>
                   <a:tcPr>
@@ -7363,11 +7744,18 @@
                           <a:solidFill>
                             <a:srgbClr val="FFFFFF"/>
                           </a:solidFill>
-                          <a:latin typeface="微软雅黑"/>
-                          <a:ea typeface="微软雅黑"/>
+                          <a:latin typeface="微软雅黑" panose="020B0503020204020204" charset="-122"/>
+                          <a:ea typeface="微软雅黑" panose="020B0503020204020204" charset="-122"/>
                         </a:rPr>
                         <a:t>数值</a:t>
                       </a:r>
+                      <a:endParaRPr sz="1300" b="1">
+                        <a:solidFill>
+                          <a:srgbClr val="FFFFFF"/>
+                        </a:solidFill>
+                        <a:latin typeface="微软雅黑" panose="020B0503020204020204" charset="-122"/>
+                        <a:ea typeface="微软雅黑" panose="020B0503020204020204" charset="-122"/>
+                      </a:endParaRPr>
                     </a:p>
                   </a:txBody>
                   <a:tcPr>
@@ -7376,11 +7764,6 @@
                     </a:solidFill>
                   </a:tcPr>
                 </a:tc>
-                <a:extLst>
-                  <a:ext uri="{0D108BD9-81ED-4DB2-BD59-A6C34878D82A}">
-                    <a16:rowId xmlns:a16="http://schemas.microsoft.com/office/drawing/2014/main" val="10000"/>
-                  </a:ext>
-                </a:extLst>
               </a:tr>
               <a:tr h="457200">
                 <a:tc>
@@ -7393,11 +7776,18 @@
                           <a:solidFill>
                             <a:srgbClr val="1F3864"/>
                           </a:solidFill>
-                          <a:latin typeface="微软雅黑"/>
-                          <a:ea typeface="微软雅黑"/>
+                          <a:latin typeface="微软雅黑" panose="020B0503020204020204" charset="-122"/>
+                          <a:ea typeface="微软雅黑" panose="020B0503020204020204" charset="-122"/>
                         </a:rPr>
                         <a:t>总运行时间</a:t>
                       </a:r>
+                      <a:endParaRPr sz="1400" b="1">
+                        <a:solidFill>
+                          <a:srgbClr val="1F3864"/>
+                        </a:solidFill>
+                        <a:latin typeface="微软雅黑" panose="020B0503020204020204" charset="-122"/>
+                        <a:ea typeface="微软雅黑" panose="020B0503020204020204" charset="-122"/>
+                      </a:endParaRPr>
                     </a:p>
                   </a:txBody>
                   <a:tcPr>
@@ -7416,11 +7806,18 @@
                           <a:solidFill>
                             <a:srgbClr val="595959"/>
                           </a:solidFill>
-                          <a:latin typeface="微软雅黑"/>
-                          <a:ea typeface="微软雅黑"/>
+                          <a:latin typeface="微软雅黑" panose="020B0503020204020204" charset="-122"/>
+                          <a:ea typeface="微软雅黑" panose="020B0503020204020204" charset="-122"/>
                         </a:rPr>
                         <a:t>6941.5 s（外壳计时 6951 s）</a:t>
                       </a:r>
+                      <a:endParaRPr sz="1400" b="0">
+                        <a:solidFill>
+                          <a:srgbClr val="595959"/>
+                        </a:solidFill>
+                        <a:latin typeface="微软雅黑" panose="020B0503020204020204" charset="-122"/>
+                        <a:ea typeface="微软雅黑" panose="020B0503020204020204" charset="-122"/>
+                      </a:endParaRPr>
                     </a:p>
                   </a:txBody>
                   <a:tcPr>
@@ -7429,11 +7826,6 @@
                     </a:solidFill>
                   </a:tcPr>
                 </a:tc>
-                <a:extLst>
-                  <a:ext uri="{0D108BD9-81ED-4DB2-BD59-A6C34878D82A}">
-                    <a16:rowId xmlns:a16="http://schemas.microsoft.com/office/drawing/2014/main" val="10001"/>
-                  </a:ext>
-                </a:extLst>
               </a:tr>
               <a:tr h="457200">
                 <a:tc>
@@ -7446,11 +7838,18 @@
                           <a:solidFill>
                             <a:srgbClr val="1F3864"/>
                           </a:solidFill>
-                          <a:latin typeface="微软雅黑"/>
-                          <a:ea typeface="微软雅黑"/>
+                          <a:latin typeface="微软雅黑" panose="020B0503020204020204" charset="-122"/>
+                          <a:ea typeface="微软雅黑" panose="020B0503020204020204" charset="-122"/>
                         </a:rPr>
                         <a:t>目标函数评估次数</a:t>
                       </a:r>
+                      <a:endParaRPr sz="1400" b="1">
+                        <a:solidFill>
+                          <a:srgbClr val="1F3864"/>
+                        </a:solidFill>
+                        <a:latin typeface="微软雅黑" panose="020B0503020204020204" charset="-122"/>
+                        <a:ea typeface="微软雅黑" panose="020B0503020204020204" charset="-122"/>
+                      </a:endParaRPr>
                     </a:p>
                   </a:txBody>
                   <a:tcPr>
@@ -7469,11 +7868,18 @@
                           <a:solidFill>
                             <a:srgbClr val="595959"/>
                           </a:solidFill>
-                          <a:latin typeface="微软雅黑"/>
-                          <a:ea typeface="微软雅黑"/>
+                          <a:latin typeface="微软雅黑" panose="020B0503020204020204" charset="-122"/>
+                          <a:ea typeface="微软雅黑" panose="020B0503020204020204" charset="-122"/>
                         </a:rPr>
                         <a:t>204 次，单次约 34 s</a:t>
                       </a:r>
+                      <a:endParaRPr sz="1400" b="0">
+                        <a:solidFill>
+                          <a:srgbClr val="595959"/>
+                        </a:solidFill>
+                        <a:latin typeface="微软雅黑" panose="020B0503020204020204" charset="-122"/>
+                        <a:ea typeface="微软雅黑" panose="020B0503020204020204" charset="-122"/>
+                      </a:endParaRPr>
                     </a:p>
                   </a:txBody>
                   <a:tcPr>
@@ -7482,11 +7888,6 @@
                     </a:solidFill>
                   </a:tcPr>
                 </a:tc>
-                <a:extLst>
-                  <a:ext uri="{0D108BD9-81ED-4DB2-BD59-A6C34878D82A}">
-                    <a16:rowId xmlns:a16="http://schemas.microsoft.com/office/drawing/2014/main" val="10002"/>
-                  </a:ext>
-                </a:extLst>
               </a:tr>
               <a:tr h="457200">
                 <a:tc>
@@ -7499,11 +7900,18 @@
                           <a:solidFill>
                             <a:srgbClr val="1F3864"/>
                           </a:solidFill>
-                          <a:latin typeface="微软雅黑"/>
-                          <a:ea typeface="微软雅黑"/>
+                          <a:latin typeface="微软雅黑" panose="020B0503020204020204" charset="-122"/>
+                          <a:ea typeface="微软雅黑" panose="020B0503020204020204" charset="-122"/>
                         </a:rPr>
                         <a:t>达到增益门槛的点</a:t>
                       </a:r>
+                      <a:endParaRPr sz="1400" b="1">
+                        <a:solidFill>
+                          <a:srgbClr val="1F3864"/>
+                        </a:solidFill>
+                        <a:latin typeface="微软雅黑" panose="020B0503020204020204" charset="-122"/>
+                        <a:ea typeface="微软雅黑" panose="020B0503020204020204" charset="-122"/>
+                      </a:endParaRPr>
                     </a:p>
                   </a:txBody>
                   <a:tcPr>
@@ -7522,11 +7930,18 @@
                           <a:solidFill>
                             <a:srgbClr val="595959"/>
                           </a:solidFill>
-                          <a:latin typeface="微软雅黑"/>
-                          <a:ea typeface="微软雅黑"/>
+                          <a:latin typeface="微软雅黑" panose="020B0503020204020204" charset="-122"/>
+                          <a:ea typeface="微软雅黑" panose="020B0503020204020204" charset="-122"/>
                         </a:rPr>
                         <a:t>39 个（Gain ≥ 41 dB）</a:t>
                       </a:r>
+                      <a:endParaRPr sz="1400" b="0">
+                        <a:solidFill>
+                          <a:srgbClr val="595959"/>
+                        </a:solidFill>
+                        <a:latin typeface="微软雅黑" panose="020B0503020204020204" charset="-122"/>
+                        <a:ea typeface="微软雅黑" panose="020B0503020204020204" charset="-122"/>
+                      </a:endParaRPr>
                     </a:p>
                   </a:txBody>
                   <a:tcPr>
@@ -7535,11 +7950,6 @@
                     </a:solidFill>
                   </a:tcPr>
                 </a:tc>
-                <a:extLst>
-                  <a:ext uri="{0D108BD9-81ED-4DB2-BD59-A6C34878D82A}">
-                    <a16:rowId xmlns:a16="http://schemas.microsoft.com/office/drawing/2014/main" val="10003"/>
-                  </a:ext>
-                </a:extLst>
               </a:tr>
               <a:tr h="457200">
                 <a:tc>
@@ -7552,11 +7962,18 @@
                           <a:solidFill>
                             <a:srgbClr val="1F3864"/>
                           </a:solidFill>
-                          <a:latin typeface="微软雅黑"/>
-                          <a:ea typeface="微软雅黑"/>
+                          <a:latin typeface="微软雅黑" panose="020B0503020204020204" charset="-122"/>
+                          <a:ea typeface="微软雅黑" panose="020B0503020204020204" charset="-122"/>
                         </a:rPr>
                         <a:t>仿真失败点</a:t>
                       </a:r>
+                      <a:endParaRPr sz="1400" b="1">
+                        <a:solidFill>
+                          <a:srgbClr val="1F3864"/>
+                        </a:solidFill>
+                        <a:latin typeface="微软雅黑" panose="020B0503020204020204" charset="-122"/>
+                        <a:ea typeface="微软雅黑" panose="020B0503020204020204" charset="-122"/>
+                      </a:endParaRPr>
                     </a:p>
                   </a:txBody>
                   <a:tcPr>
@@ -7575,11 +7992,18 @@
                           <a:solidFill>
                             <a:srgbClr val="595959"/>
                           </a:solidFill>
-                          <a:latin typeface="微软雅黑"/>
-                          <a:ea typeface="微软雅黑"/>
+                          <a:latin typeface="微软雅黑" panose="020B0503020204020204" charset="-122"/>
+                          <a:ea typeface="微软雅黑" panose="020B0503020204020204" charset="-122"/>
                         </a:rPr>
                         <a:t>95 个（46.6%，激进扰动的代价）</a:t>
                       </a:r>
+                      <a:endParaRPr sz="1400" b="0">
+                        <a:solidFill>
+                          <a:srgbClr val="595959"/>
+                        </a:solidFill>
+                        <a:latin typeface="微软雅黑" panose="020B0503020204020204" charset="-122"/>
+                        <a:ea typeface="微软雅黑" panose="020B0503020204020204" charset="-122"/>
+                      </a:endParaRPr>
                     </a:p>
                   </a:txBody>
                   <a:tcPr>
@@ -7588,11 +8012,6 @@
                     </a:solidFill>
                   </a:tcPr>
                 </a:tc>
-                <a:extLst>
-                  <a:ext uri="{0D108BD9-81ED-4DB2-BD59-A6C34878D82A}">
-                    <a16:rowId xmlns:a16="http://schemas.microsoft.com/office/drawing/2014/main" val="10004"/>
-                  </a:ext>
-                </a:extLst>
               </a:tr>
               <a:tr h="457200">
                 <a:tc>
@@ -7605,11 +8024,18 @@
                           <a:solidFill>
                             <a:srgbClr val="1F3864"/>
                           </a:solidFill>
-                          <a:latin typeface="微软雅黑"/>
-                          <a:ea typeface="微软雅黑"/>
+                          <a:latin typeface="微软雅黑" panose="020B0503020204020204" charset="-122"/>
+                          <a:ea typeface="微软雅黑" panose="020B0503020204020204" charset="-122"/>
                         </a:rPr>
                         <a:t>内存峰值</a:t>
                       </a:r>
+                      <a:endParaRPr sz="1400" b="1">
+                        <a:solidFill>
+                          <a:srgbClr val="1F3864"/>
+                        </a:solidFill>
+                        <a:latin typeface="微软雅黑" panose="020B0503020204020204" charset="-122"/>
+                        <a:ea typeface="微软雅黑" panose="020B0503020204020204" charset="-122"/>
+                      </a:endParaRPr>
                     </a:p>
                   </a:txBody>
                   <a:tcPr>
@@ -7628,11 +8054,18 @@
                           <a:solidFill>
                             <a:srgbClr val="595959"/>
                           </a:solidFill>
-                          <a:latin typeface="微软雅黑"/>
-                          <a:ea typeface="微软雅黑"/>
+                          <a:latin typeface="微软雅黑" panose="020B0503020204020204" charset="-122"/>
+                          <a:ea typeface="微软雅黑" panose="020B0503020204020204" charset="-122"/>
                         </a:rPr>
                         <a:t>556 MB</a:t>
                       </a:r>
+                      <a:endParaRPr sz="1400" b="0">
+                        <a:solidFill>
+                          <a:srgbClr val="595959"/>
+                        </a:solidFill>
+                        <a:latin typeface="微软雅黑" panose="020B0503020204020204" charset="-122"/>
+                        <a:ea typeface="微软雅黑" panose="020B0503020204020204" charset="-122"/>
+                      </a:endParaRPr>
                     </a:p>
                   </a:txBody>
                   <a:tcPr>
@@ -7641,11 +8074,6 @@
                     </a:solidFill>
                   </a:tcPr>
                 </a:tc>
-                <a:extLst>
-                  <a:ext uri="{0D108BD9-81ED-4DB2-BD59-A6C34878D82A}">
-                    <a16:rowId xmlns:a16="http://schemas.microsoft.com/office/drawing/2014/main" val="10005"/>
-                  </a:ext>
-                </a:extLst>
               </a:tr>
               <a:tr h="457200">
                 <a:tc>
@@ -7658,11 +8086,18 @@
                           <a:solidFill>
                             <a:srgbClr val="1F3864"/>
                           </a:solidFill>
-                          <a:latin typeface="微软雅黑"/>
-                          <a:ea typeface="微软雅黑"/>
+                          <a:latin typeface="微软雅黑" panose="020B0503020204020204" charset="-122"/>
+                          <a:ea typeface="微软雅黑" panose="020B0503020204020204" charset="-122"/>
                         </a:rPr>
                         <a:t>本地自检</a:t>
                       </a:r>
+                      <a:endParaRPr sz="1400" b="1">
+                        <a:solidFill>
+                          <a:srgbClr val="1F3864"/>
+                        </a:solidFill>
+                        <a:latin typeface="微软雅黑" panose="020B0503020204020204" charset="-122"/>
+                        <a:ea typeface="微软雅黑" panose="020B0503020204020204" charset="-122"/>
+                      </a:endParaRPr>
                     </a:p>
                   </a:txBody>
                   <a:tcPr>
@@ -7681,11 +8116,18 @@
                           <a:solidFill>
                             <a:srgbClr val="595959"/>
                           </a:solidFill>
-                          <a:latin typeface="微软雅黑"/>
-                          <a:ea typeface="微软雅黑"/>
+                          <a:latin typeface="微软雅黑" panose="020B0503020204020204" charset="-122"/>
+                          <a:ea typeface="微软雅黑" panose="020B0503020204020204" charset="-122"/>
                         </a:rPr>
                         <a:t>模块三 8 项断言；模块四 60 项检查</a:t>
                       </a:r>
+                      <a:endParaRPr sz="1400" b="0">
+                        <a:solidFill>
+                          <a:srgbClr val="595959"/>
+                        </a:solidFill>
+                        <a:latin typeface="微软雅黑" panose="020B0503020204020204" charset="-122"/>
+                        <a:ea typeface="微软雅黑" panose="020B0503020204020204" charset="-122"/>
+                      </a:endParaRPr>
                     </a:p>
                   </a:txBody>
                   <a:tcPr>
@@ -7694,11 +8136,6 @@
                     </a:solidFill>
                   </a:tcPr>
                 </a:tc>
-                <a:extLst>
-                  <a:ext uri="{0D108BD9-81ED-4DB2-BD59-A6C34878D82A}">
-                    <a16:rowId xmlns:a16="http://schemas.microsoft.com/office/drawing/2014/main" val="10006"/>
-                  </a:ext>
-                </a:extLst>
               </a:tr>
             </a:tbl>
           </a:graphicData>
@@ -7736,11 +8173,18 @@
                 <a:solidFill>
                   <a:srgbClr val="595959"/>
                 </a:solidFill>
-                <a:latin typeface="微软雅黑"/>
-                <a:ea typeface="微软雅黑"/>
+                <a:latin typeface="微软雅黑" panose="020B0503020204020204" charset="-122"/>
+                <a:ea typeface="微软雅黑" panose="020B0503020204020204" charset="-122"/>
               </a:rPr>
               <a:t>• 46.6% 的失败率听起来高，但它换来的是搜索空间的真实覆盖；失败点按「最差解」处理，不中断优化</a:t>
             </a:r>
+            <a:endParaRPr sz="1500" b="0">
+              <a:solidFill>
+                <a:srgbClr val="595959"/>
+              </a:solidFill>
+              <a:latin typeface="微软雅黑" panose="020B0503020204020204" charset="-122"/>
+              <a:ea typeface="微软雅黑" panose="020B0503020204020204" charset="-122"/>
+            </a:endParaRPr>
           </a:p>
           <a:p>
             <a:pPr>
@@ -7753,11 +8197,18 @@
                 <a:solidFill>
                   <a:srgbClr val="595959"/>
                 </a:solidFill>
-                <a:latin typeface="微软雅黑"/>
-                <a:ea typeface="微软雅黑"/>
+                <a:latin typeface="微软雅黑" panose="020B0503020204020204" charset="-122"/>
+                <a:ea typeface="微软雅黑" panose="020B0503020204020204" charset="-122"/>
               </a:rPr>
               <a:t>• 所有自检都能在没有 license 的机器上跑，便于评审复现</a:t>
             </a:r>
+            <a:endParaRPr sz="1500" b="0">
+              <a:solidFill>
+                <a:srgbClr val="595959"/>
+              </a:solidFill>
+              <a:latin typeface="微软雅黑" panose="020B0503020204020204" charset="-122"/>
+              <a:ea typeface="微软雅黑" panose="020B0503020204020204" charset="-122"/>
+            </a:endParaRPr>
           </a:p>
         </p:txBody>
       </p:sp>
@@ -7827,7 +8278,6 @@
           <a:lstStyle/>
           <a:p>
             <a:pPr algn="ctr"/>
-            <a:endParaRPr/>
           </a:p>
         </p:txBody>
       </p:sp>
@@ -7858,11 +8308,18 @@
                 <a:solidFill>
                   <a:srgbClr val="FFFFFF"/>
                 </a:solidFill>
-                <a:latin typeface="微软雅黑"/>
-                <a:ea typeface="微软雅黑"/>
+                <a:latin typeface="微软雅黑" panose="020B0503020204020204" charset="-122"/>
+                <a:ea typeface="微软雅黑" panose="020B0503020204020204" charset="-122"/>
               </a:rPr>
               <a:t>为什么这套方案能拿分</a:t>
             </a:r>
+            <a:endParaRPr sz="2600" b="1">
+              <a:solidFill>
+                <a:srgbClr val="FFFFFF"/>
+              </a:solidFill>
+              <a:latin typeface="微软雅黑" panose="020B0503020204020204" charset="-122"/>
+              <a:ea typeface="微软雅黑" panose="020B0503020204020204" charset="-122"/>
+            </a:endParaRPr>
           </a:p>
         </p:txBody>
       </p:sp>
@@ -7894,11 +8351,18 @@
                 <a:solidFill>
                   <a:srgbClr val="BDD7EE"/>
                 </a:solidFill>
-                <a:latin typeface="微软雅黑"/>
-                <a:ea typeface="微软雅黑"/>
+                <a:latin typeface="微软雅黑" panose="020B0503020204020204" charset="-122"/>
+                <a:ea typeface="微软雅黑" panose="020B0503020204020204" charset="-122"/>
               </a:rPr>
               <a:t>10 总结</a:t>
             </a:r>
+            <a:endParaRPr sz="1200" b="0">
+              <a:solidFill>
+                <a:srgbClr val="BDD7EE"/>
+              </a:solidFill>
+              <a:latin typeface="微软雅黑" panose="020B0503020204020204" charset="-122"/>
+              <a:ea typeface="微软雅黑" panose="020B0503020204020204" charset="-122"/>
+            </a:endParaRPr>
           </a:p>
         </p:txBody>
       </p:sp>
@@ -7929,11 +8393,18 @@
                 <a:solidFill>
                   <a:srgbClr val="8C8C8C"/>
                 </a:solidFill>
-                <a:latin typeface="微软雅黑"/>
-                <a:ea typeface="微软雅黑"/>
+                <a:latin typeface="微软雅黑" panose="020B0503020204020204" charset="-122"/>
+                <a:ea typeface="微软雅黑" panose="020B0503020204020204" charset="-122"/>
               </a:rPr>
               <a:t>模拟电路 AI 智能化设计 · 赛题二</a:t>
             </a:r>
+            <a:endParaRPr sz="900" b="0">
+              <a:solidFill>
+                <a:srgbClr val="8C8C8C"/>
+              </a:solidFill>
+              <a:latin typeface="微软雅黑" panose="020B0503020204020204" charset="-122"/>
+              <a:ea typeface="微软雅黑" panose="020B0503020204020204" charset="-122"/>
+            </a:endParaRPr>
           </a:p>
         </p:txBody>
       </p:sp>
@@ -7965,11 +8436,18 @@
                 <a:solidFill>
                   <a:srgbClr val="8C8C8C"/>
                 </a:solidFill>
-                <a:latin typeface="微软雅黑"/>
-                <a:ea typeface="微软雅黑"/>
+                <a:latin typeface="微软雅黑" panose="020B0503020204020204" charset="-122"/>
+                <a:ea typeface="微软雅黑" panose="020B0503020204020204" charset="-122"/>
               </a:rPr>
               <a:t>15</a:t>
             </a:r>
+            <a:endParaRPr sz="900" b="0">
+              <a:solidFill>
+                <a:srgbClr val="8C8C8C"/>
+              </a:solidFill>
+              <a:latin typeface="微软雅黑" panose="020B0503020204020204" charset="-122"/>
+              <a:ea typeface="微软雅黑" panose="020B0503020204020204" charset="-122"/>
+            </a:endParaRPr>
           </a:p>
         </p:txBody>
       </p:sp>
@@ -8005,11 +8483,18 @@
                 <a:solidFill>
                   <a:srgbClr val="595959"/>
                 </a:solidFill>
-                <a:latin typeface="微软雅黑"/>
-                <a:ea typeface="微软雅黑"/>
+                <a:latin typeface="微软雅黑" panose="020B0503020204020204" charset="-122"/>
+                <a:ea typeface="微软雅黑" panose="020B0503020204020204" charset="-122"/>
               </a:rPr>
               <a:t>• 工具优先的智能体：数值交给确定性代码，判断交给模型，并用 source 字段区分 llm 与规则兜底</a:t>
             </a:r>
+            <a:endParaRPr sz="1800" b="0">
+              <a:solidFill>
+                <a:srgbClr val="595959"/>
+              </a:solidFill>
+              <a:latin typeface="微软雅黑" panose="020B0503020204020204" charset="-122"/>
+              <a:ea typeface="微软雅黑" panose="020B0503020204020204" charset="-122"/>
+            </a:endParaRPr>
           </a:p>
           <a:p>
             <a:pPr>
@@ -8022,11 +8507,18 @@
                 <a:solidFill>
                   <a:srgbClr val="595959"/>
                 </a:solidFill>
-                <a:latin typeface="微软雅黑"/>
-                <a:ea typeface="微软雅黑"/>
+                <a:latin typeface="微软雅黑" panose="020B0503020204020204" charset="-122"/>
+                <a:ea typeface="微软雅黑" panose="020B0503020204020204" charset="-122"/>
               </a:rPr>
               <a:t>• 把评分器当规格书：以 score.py 为唯一真相来源，反推预算、边界、回写 schema</a:t>
             </a:r>
+            <a:endParaRPr sz="1800" b="0">
+              <a:solidFill>
+                <a:srgbClr val="595959"/>
+              </a:solidFill>
+              <a:latin typeface="微软雅黑" panose="020B0503020204020204" charset="-122"/>
+              <a:ea typeface="微软雅黑" panose="020B0503020204020204" charset="-122"/>
+            </a:endParaRPr>
           </a:p>
           <a:p>
             <a:pPr>
@@ -8039,11 +8531,18 @@
                 <a:solidFill>
                   <a:srgbClr val="595959"/>
                 </a:solidFill>
-                <a:latin typeface="微软雅黑"/>
-                <a:ea typeface="微软雅黑"/>
+                <a:latin typeface="微软雅黑" panose="020B0503020204020204" charset="-122"/>
+                <a:ea typeface="微软雅黑" panose="020B0503020204020204" charset="-122"/>
               </a:rPr>
               <a:t>• 对称与匹配分离：图论性质与工艺性质分开建模，避免错误合并导致的性能悬崖</a:t>
             </a:r>
+            <a:endParaRPr sz="1800" b="0">
+              <a:solidFill>
+                <a:srgbClr val="595959"/>
+              </a:solidFill>
+              <a:latin typeface="微软雅黑" panose="020B0503020204020204" charset="-122"/>
+              <a:ea typeface="微软雅黑" panose="020B0503020204020204" charset="-122"/>
+            </a:endParaRPr>
           </a:p>
           <a:p>
             <a:pPr>
@@ -8056,11 +8555,18 @@
                 <a:solidFill>
                   <a:srgbClr val="595959"/>
                 </a:solidFill>
-                <a:latin typeface="微软雅黑"/>
-                <a:ea typeface="微软雅黑"/>
+                <a:latin typeface="微软雅黑" panose="020B0503020204020204" charset="-122"/>
+                <a:ea typeface="微软雅黑" panose="020B0503020204020204" charset="-122"/>
               </a:rPr>
               <a:t>• 面向隐藏电路的可降级设计：分组可过滤、可关闭，最坏是「变慢」而不是「跑废」</a:t>
             </a:r>
+            <a:endParaRPr sz="1800" b="0">
+              <a:solidFill>
+                <a:srgbClr val="595959"/>
+              </a:solidFill>
+              <a:latin typeface="微软雅黑" panose="020B0503020204020204" charset="-122"/>
+              <a:ea typeface="微软雅黑" panose="020B0503020204020204" charset="-122"/>
+            </a:endParaRPr>
           </a:p>
           <a:p>
             <a:pPr>
@@ -8073,11 +8579,18 @@
                 <a:solidFill>
                   <a:srgbClr val="595959"/>
                 </a:solidFill>
-                <a:latin typeface="微软雅黑"/>
-                <a:ea typeface="微软雅黑"/>
+                <a:latin typeface="微软雅黑" panose="020B0503020204020204" charset="-122"/>
+                <a:ea typeface="微软雅黑" panose="020B0503020204020204" charset="-122"/>
               </a:rPr>
               <a:t>• 闭环校验 + 三条回写断言：把「静默失效」变成「跑不起来」</a:t>
             </a:r>
+            <a:endParaRPr sz="1800" b="0">
+              <a:solidFill>
+                <a:srgbClr val="595959"/>
+              </a:solidFill>
+              <a:latin typeface="微软雅黑" panose="020B0503020204020204" charset="-122"/>
+              <a:ea typeface="微软雅黑" panose="020B0503020204020204" charset="-122"/>
+            </a:endParaRPr>
           </a:p>
         </p:txBody>
       </p:sp>
@@ -8129,11 +8642,18 @@
                 <a:solidFill>
                   <a:srgbClr val="C55A11"/>
                 </a:solidFill>
-                <a:latin typeface="微软雅黑"/>
-                <a:ea typeface="微软雅黑"/>
+                <a:latin typeface="微软雅黑" panose="020B0503020204020204" charset="-122"/>
+                <a:ea typeface="微软雅黑" panose="020B0503020204020204" charset="-122"/>
               </a:rPr>
               <a:t>一句话：真正拉开差距的不是算法，而是「把不体面的事做对」——边界、写出、不崩</a:t>
             </a:r>
+            <a:endParaRPr sz="1300" b="1">
+              <a:solidFill>
+                <a:srgbClr val="C55A11"/>
+              </a:solidFill>
+              <a:latin typeface="微软雅黑" panose="020B0503020204020204" charset="-122"/>
+              <a:ea typeface="微软雅黑" panose="020B0503020204020204" charset="-122"/>
+            </a:endParaRPr>
           </a:p>
         </p:txBody>
       </p:sp>
@@ -8203,7 +8723,6 @@
           <a:lstStyle/>
           <a:p>
             <a:pPr algn="ctr"/>
-            <a:endParaRPr/>
           </a:p>
         </p:txBody>
       </p:sp>
@@ -8234,11 +8753,18 @@
                 <a:solidFill>
                   <a:srgbClr val="FFFFFF"/>
                 </a:solidFill>
-                <a:latin typeface="微软雅黑"/>
-                <a:ea typeface="微软雅黑"/>
+                <a:latin typeface="微软雅黑" panose="020B0503020204020204" charset="-122"/>
+                <a:ea typeface="微软雅黑" panose="020B0503020204020204" charset="-122"/>
               </a:rPr>
               <a:t>结论与后续工作</a:t>
             </a:r>
+            <a:endParaRPr sz="2600" b="1">
+              <a:solidFill>
+                <a:srgbClr val="FFFFFF"/>
+              </a:solidFill>
+              <a:latin typeface="微软雅黑" panose="020B0503020204020204" charset="-122"/>
+              <a:ea typeface="微软雅黑" panose="020B0503020204020204" charset="-122"/>
+            </a:endParaRPr>
           </a:p>
         </p:txBody>
       </p:sp>
@@ -8270,11 +8796,18 @@
                 <a:solidFill>
                   <a:srgbClr val="BDD7EE"/>
                 </a:solidFill>
-                <a:latin typeface="微软雅黑"/>
-                <a:ea typeface="微软雅黑"/>
+                <a:latin typeface="微软雅黑" panose="020B0503020204020204" charset="-122"/>
+                <a:ea typeface="微软雅黑" panose="020B0503020204020204" charset="-122"/>
               </a:rPr>
               <a:t>11 结论</a:t>
             </a:r>
+            <a:endParaRPr sz="1200" b="0">
+              <a:solidFill>
+                <a:srgbClr val="BDD7EE"/>
+              </a:solidFill>
+              <a:latin typeface="微软雅黑" panose="020B0503020204020204" charset="-122"/>
+              <a:ea typeface="微软雅黑" panose="020B0503020204020204" charset="-122"/>
+            </a:endParaRPr>
           </a:p>
         </p:txBody>
       </p:sp>
@@ -8305,11 +8838,18 @@
                 <a:solidFill>
                   <a:srgbClr val="8C8C8C"/>
                 </a:solidFill>
-                <a:latin typeface="微软雅黑"/>
-                <a:ea typeface="微软雅黑"/>
+                <a:latin typeface="微软雅黑" panose="020B0503020204020204" charset="-122"/>
+                <a:ea typeface="微软雅黑" panose="020B0503020204020204" charset="-122"/>
               </a:rPr>
               <a:t>模拟电路 AI 智能化设计 · 赛题二</a:t>
             </a:r>
+            <a:endParaRPr sz="900" b="0">
+              <a:solidFill>
+                <a:srgbClr val="8C8C8C"/>
+              </a:solidFill>
+              <a:latin typeface="微软雅黑" panose="020B0503020204020204" charset="-122"/>
+              <a:ea typeface="微软雅黑" panose="020B0503020204020204" charset="-122"/>
+            </a:endParaRPr>
           </a:p>
         </p:txBody>
       </p:sp>
@@ -8341,11 +8881,18 @@
                 <a:solidFill>
                   <a:srgbClr val="8C8C8C"/>
                 </a:solidFill>
-                <a:latin typeface="微软雅黑"/>
-                <a:ea typeface="微软雅黑"/>
+                <a:latin typeface="微软雅黑" panose="020B0503020204020204" charset="-122"/>
+                <a:ea typeface="微软雅黑" panose="020B0503020204020204" charset="-122"/>
               </a:rPr>
               <a:t>16</a:t>
             </a:r>
+            <a:endParaRPr sz="900" b="0">
+              <a:solidFill>
+                <a:srgbClr val="8C8C8C"/>
+              </a:solidFill>
+              <a:latin typeface="微软雅黑" panose="020B0503020204020204" charset="-122"/>
+              <a:ea typeface="微软雅黑" panose="020B0503020204020204" charset="-122"/>
+            </a:endParaRPr>
           </a:p>
         </p:txBody>
       </p:sp>
@@ -8355,13 +8902,7 @@
           <p:cNvGraphicFramePr>
             <a:graphicFrameLocks noGrp="1"/>
           </p:cNvGraphicFramePr>
-          <p:nvPr>
-            <p:extLst>
-              <p:ext uri="{D42A27DB-BD31-4B8C-83A1-F6EECF244321}">
-                <p14:modId xmlns:p14="http://schemas.microsoft.com/office/powerpoint/2010/main" val="2227687427"/>
-              </p:ext>
-            </p:extLst>
-          </p:nvPr>
+          <p:nvPr/>
         </p:nvGraphicFramePr>
         <p:xfrm>
           <a:off x="594360" y="1170432"/>
@@ -8374,20 +8915,8 @@
                 <a:tableStyleId>{5C22544A-7EE6-4342-B048-85BDC9FD1C3A}</a:tableStyleId>
               </a:tblPr>
               <a:tblGrid>
-                <a:gridCol w="2743200">
-                  <a:extLst>
-                    <a:ext uri="{9D8B030D-6E8A-4147-A177-3AD203B41FA5}">
-                      <a16:colId xmlns:a16="http://schemas.microsoft.com/office/drawing/2014/main" val="20000"/>
-                    </a:ext>
-                  </a:extLst>
-                </a:gridCol>
-                <a:gridCol w="8229600">
-                  <a:extLst>
-                    <a:ext uri="{9D8B030D-6E8A-4147-A177-3AD203B41FA5}">
-                      <a16:colId xmlns:a16="http://schemas.microsoft.com/office/drawing/2014/main" val="20001"/>
-                    </a:ext>
-                  </a:extLst>
-                </a:gridCol>
+                <a:gridCol w="2743200"/>
+                <a:gridCol w="8229600"/>
               </a:tblGrid>
               <a:tr h="457200">
                 <a:tc>
@@ -8400,11 +8929,18 @@
                           <a:solidFill>
                             <a:srgbClr val="FFFFFF"/>
                           </a:solidFill>
-                          <a:latin typeface="微软雅黑"/>
-                          <a:ea typeface="微软雅黑"/>
+                          <a:latin typeface="微软雅黑" panose="020B0503020204020204" charset="-122"/>
+                          <a:ea typeface="微软雅黑" panose="020B0503020204020204" charset="-122"/>
                         </a:rPr>
                         <a:t>项</a:t>
                       </a:r>
+                      <a:endParaRPr sz="1300" b="1" dirty="0">
+                        <a:solidFill>
+                          <a:srgbClr val="FFFFFF"/>
+                        </a:solidFill>
+                        <a:latin typeface="微软雅黑" panose="020B0503020204020204" charset="-122"/>
+                        <a:ea typeface="微软雅黑" panose="020B0503020204020204" charset="-122"/>
+                      </a:endParaRPr>
                     </a:p>
                   </a:txBody>
                   <a:tcPr>
@@ -8423,11 +8959,18 @@
                           <a:solidFill>
                             <a:srgbClr val="FFFFFF"/>
                           </a:solidFill>
-                          <a:latin typeface="微软雅黑"/>
-                          <a:ea typeface="微软雅黑"/>
+                          <a:latin typeface="微软雅黑" panose="020B0503020204020204" charset="-122"/>
+                          <a:ea typeface="微软雅黑" panose="020B0503020204020204" charset="-122"/>
                         </a:rPr>
                         <a:t>结果</a:t>
                       </a:r>
+                      <a:endParaRPr sz="1300" b="1">
+                        <a:solidFill>
+                          <a:srgbClr val="FFFFFF"/>
+                        </a:solidFill>
+                        <a:latin typeface="微软雅黑" panose="020B0503020204020204" charset="-122"/>
+                        <a:ea typeface="微软雅黑" panose="020B0503020204020204" charset="-122"/>
+                      </a:endParaRPr>
                     </a:p>
                   </a:txBody>
                   <a:tcPr>
@@ -8436,11 +8979,6 @@
                     </a:solidFill>
                   </a:tcPr>
                 </a:tc>
-                <a:extLst>
-                  <a:ext uri="{0D108BD9-81ED-4DB2-BD59-A6C34878D82A}">
-                    <a16:rowId xmlns:a16="http://schemas.microsoft.com/office/drawing/2014/main" val="10000"/>
-                  </a:ext>
-                </a:extLst>
               </a:tr>
               <a:tr h="457200">
                 <a:tc>
@@ -8453,11 +8991,18 @@
                           <a:solidFill>
                             <a:srgbClr val="1F3864"/>
                           </a:solidFill>
-                          <a:latin typeface="微软雅黑"/>
-                          <a:ea typeface="微软雅黑"/>
+                          <a:latin typeface="微软雅黑" panose="020B0503020204020204" charset="-122"/>
+                          <a:ea typeface="微软雅黑" panose="020B0503020204020204" charset="-122"/>
                         </a:rPr>
                         <a:t>全 PVT</a:t>
                       </a:r>
+                      <a:endParaRPr sz="1400" b="1" dirty="0">
+                        <a:solidFill>
+                          <a:srgbClr val="1F3864"/>
+                        </a:solidFill>
+                        <a:latin typeface="微软雅黑" panose="020B0503020204020204" charset="-122"/>
+                        <a:ea typeface="微软雅黑" panose="020B0503020204020204" charset="-122"/>
+                      </a:endParaRPr>
                     </a:p>
                   </a:txBody>
                   <a:tcPr>
@@ -8476,8 +9021,8 @@
                           <a:solidFill>
                             <a:srgbClr val="595959"/>
                           </a:solidFill>
-                          <a:latin typeface="微软雅黑"/>
-                          <a:ea typeface="微软雅黑"/>
+                          <a:latin typeface="微软雅黑" panose="020B0503020204020204" charset="-122"/>
+                          <a:ea typeface="微软雅黑" panose="020B0503020204020204" charset="-122"/>
                         </a:rPr>
                         <a:t>9 </a:t>
                       </a:r>
@@ -8486,8 +9031,8 @@
                           <a:solidFill>
                             <a:srgbClr val="595959"/>
                           </a:solidFill>
-                          <a:latin typeface="微软雅黑"/>
-                          <a:ea typeface="微软雅黑"/>
+                          <a:latin typeface="微软雅黑" panose="020B0503020204020204" charset="-122"/>
+                          <a:ea typeface="微软雅黑" panose="020B0503020204020204" charset="-122"/>
                         </a:rPr>
                         <a:t>角全部满足四项硬约束</a:t>
                       </a:r>
@@ -8495,8 +9040,8 @@
                         <a:solidFill>
                           <a:srgbClr val="595959"/>
                         </a:solidFill>
-                        <a:latin typeface="微软雅黑"/>
-                        <a:ea typeface="微软雅黑"/>
+                        <a:latin typeface="微软雅黑" panose="020B0503020204020204" charset="-122"/>
+                        <a:ea typeface="微软雅黑" panose="020B0503020204020204" charset="-122"/>
                       </a:endParaRPr>
                     </a:p>
                   </a:txBody>
@@ -8506,11 +9051,6 @@
                     </a:solidFill>
                   </a:tcPr>
                 </a:tc>
-                <a:extLst>
-                  <a:ext uri="{0D108BD9-81ED-4DB2-BD59-A6C34878D82A}">
-                    <a16:rowId xmlns:a16="http://schemas.microsoft.com/office/drawing/2014/main" val="10002"/>
-                  </a:ext>
-                </a:extLst>
               </a:tr>
               <a:tr h="457200">
                 <a:tc>
@@ -8523,11 +9063,18 @@
                           <a:solidFill>
                             <a:srgbClr val="1F3864"/>
                           </a:solidFill>
-                          <a:latin typeface="微软雅黑"/>
-                          <a:ea typeface="微软雅黑"/>
+                          <a:latin typeface="微软雅黑" panose="020B0503020204020204" charset="-122"/>
+                          <a:ea typeface="微软雅黑" panose="020B0503020204020204" charset="-122"/>
                         </a:rPr>
                         <a:t>参数约减</a:t>
                       </a:r>
+                      <a:endParaRPr sz="1400" b="1">
+                        <a:solidFill>
+                          <a:srgbClr val="1F3864"/>
+                        </a:solidFill>
+                        <a:latin typeface="微软雅黑" panose="020B0503020204020204" charset="-122"/>
+                        <a:ea typeface="微软雅黑" panose="020B0503020204020204" charset="-122"/>
+                      </a:endParaRPr>
                     </a:p>
                   </a:txBody>
                   <a:tcPr>
@@ -8546,11 +9093,18 @@
                           <a:solidFill>
                             <a:srgbClr val="595959"/>
                           </a:solidFill>
-                          <a:latin typeface="微软雅黑"/>
-                          <a:ea typeface="微软雅黑"/>
+                          <a:latin typeface="微软雅黑" panose="020B0503020204020204" charset="-122"/>
+                          <a:ea typeface="微软雅黑" panose="020B0503020204020204" charset="-122"/>
                         </a:rPr>
                         <a:t>105 → 47（55.2%），闭环校验通过</a:t>
                       </a:r>
+                      <a:endParaRPr sz="1400" b="0">
+                        <a:solidFill>
+                          <a:srgbClr val="595959"/>
+                        </a:solidFill>
+                        <a:latin typeface="微软雅黑" panose="020B0503020204020204" charset="-122"/>
+                        <a:ea typeface="微软雅黑" panose="020B0503020204020204" charset="-122"/>
+                      </a:endParaRPr>
                     </a:p>
                   </a:txBody>
                   <a:tcPr>
@@ -8559,11 +9113,6 @@
                     </a:solidFill>
                   </a:tcPr>
                 </a:tc>
-                <a:extLst>
-                  <a:ext uri="{0D108BD9-81ED-4DB2-BD59-A6C34878D82A}">
-                    <a16:rowId xmlns:a16="http://schemas.microsoft.com/office/drawing/2014/main" val="10003"/>
-                  </a:ext>
-                </a:extLst>
               </a:tr>
               <a:tr h="457200">
                 <a:tc>
@@ -8576,11 +9125,18 @@
                           <a:solidFill>
                             <a:srgbClr val="1F3864"/>
                           </a:solidFill>
-                          <a:latin typeface="微软雅黑"/>
-                          <a:ea typeface="微软雅黑"/>
+                          <a:latin typeface="微软雅黑" panose="020B0503020204020204" charset="-122"/>
+                          <a:ea typeface="微软雅黑" panose="020B0503020204020204" charset="-122"/>
                         </a:rPr>
                         <a:t>端到端</a:t>
                       </a:r>
+                      <a:endParaRPr sz="1400" b="1">
+                        <a:solidFill>
+                          <a:srgbClr val="1F3864"/>
+                        </a:solidFill>
+                        <a:latin typeface="微软雅黑" panose="020B0503020204020204" charset="-122"/>
+                        <a:ea typeface="微软雅黑" panose="020B0503020204020204" charset="-122"/>
+                      </a:endParaRPr>
                     </a:p>
                   </a:txBody>
                   <a:tcPr>
@@ -8599,11 +9155,18 @@
                           <a:solidFill>
                             <a:srgbClr val="595959"/>
                           </a:solidFill>
-                          <a:latin typeface="微软雅黑"/>
-                          <a:ea typeface="微软雅黑"/>
+                          <a:latin typeface="微软雅黑" panose="020B0503020204020204" charset="-122"/>
+                          <a:ea typeface="微软雅黑" panose="020B0503020204020204" charset="-122"/>
                         </a:rPr>
                         <a:t>自然语言 → Spec → 识别 → 优化 → PVT → 反标，全程可复现</a:t>
                       </a:r>
+                      <a:endParaRPr sz="1400" b="0">
+                        <a:solidFill>
+                          <a:srgbClr val="595959"/>
+                        </a:solidFill>
+                        <a:latin typeface="微软雅黑" panose="020B0503020204020204" charset="-122"/>
+                        <a:ea typeface="微软雅黑" panose="020B0503020204020204" charset="-122"/>
+                      </a:endParaRPr>
                     </a:p>
                   </a:txBody>
                   <a:tcPr>
@@ -8612,11 +9175,6 @@
                     </a:solidFill>
                   </a:tcPr>
                 </a:tc>
-                <a:extLst>
-                  <a:ext uri="{0D108BD9-81ED-4DB2-BD59-A6C34878D82A}">
-                    <a16:rowId xmlns:a16="http://schemas.microsoft.com/office/drawing/2014/main" val="10004"/>
-                  </a:ext>
-                </a:extLst>
               </a:tr>
             </a:tbl>
           </a:graphicData>
@@ -8654,11 +9212,18 @@
                 <a:solidFill>
                   <a:srgbClr val="595959"/>
                 </a:solidFill>
-                <a:latin typeface="微软雅黑"/>
-                <a:ea typeface="微软雅黑"/>
+                <a:latin typeface="微软雅黑" panose="020B0503020204020204" charset="-122"/>
+                <a:ea typeface="微软雅黑" panose="020B0503020204020204" charset="-122"/>
               </a:rPr>
               <a:t>• 后续一：统一模块二 47 维与模块三 63 维的分组口径</a:t>
             </a:r>
+            <a:endParaRPr sz="1500" b="0">
+              <a:solidFill>
+                <a:srgbClr val="595959"/>
+              </a:solidFill>
+              <a:latin typeface="微软雅黑" panose="020B0503020204020204" charset="-122"/>
+              <a:ea typeface="微软雅黑" panose="020B0503020204020204" charset="-122"/>
+            </a:endParaRPr>
           </a:p>
           <a:p>
             <a:pPr>
@@ -8671,11 +9236,18 @@
                 <a:solidFill>
                   <a:srgbClr val="595959"/>
                 </a:solidFill>
-                <a:latin typeface="微软雅黑"/>
-                <a:ea typeface="微软雅黑"/>
+                <a:latin typeface="微软雅黑" panose="020B0503020204020204" charset="-122"/>
+                <a:ea typeface="微软雅黑" panose="020B0503020204020204" charset="-122"/>
               </a:rPr>
               <a:t>• 后续二：以最优尺寸重采波形与反标截图</a:t>
             </a:r>
+            <a:endParaRPr sz="1500" b="0">
+              <a:solidFill>
+                <a:srgbClr val="595959"/>
+              </a:solidFill>
+              <a:latin typeface="微软雅黑" panose="020B0503020204020204" charset="-122"/>
+              <a:ea typeface="微软雅黑" panose="020B0503020204020204" charset="-122"/>
+            </a:endParaRPr>
           </a:p>
           <a:p>
             <a:pPr>
@@ -8688,11 +9260,18 @@
                 <a:solidFill>
                   <a:srgbClr val="595959"/>
                 </a:solidFill>
-                <a:latin typeface="微软雅黑"/>
-                <a:ea typeface="微软雅黑"/>
+                <a:latin typeface="微软雅黑" panose="020B0503020204020204" charset="-122"/>
+                <a:ea typeface="微软雅黑" panose="020B0503020204020204" charset="-122"/>
               </a:rPr>
               <a:t>• 后续三：补「尺寸 → 变量」的写入能力，并做隐藏电路端到端回归</a:t>
             </a:r>
+            <a:endParaRPr sz="1500" b="0">
+              <a:solidFill>
+                <a:srgbClr val="595959"/>
+              </a:solidFill>
+              <a:latin typeface="微软雅黑" panose="020B0503020204020204" charset="-122"/>
+              <a:ea typeface="微软雅黑" panose="020B0503020204020204" charset="-122"/>
+            </a:endParaRPr>
           </a:p>
         </p:txBody>
       </p:sp>
@@ -8762,7 +9341,6 @@
           <a:lstStyle/>
           <a:p>
             <a:pPr algn="ctr"/>
-            <a:endParaRPr/>
           </a:p>
         </p:txBody>
       </p:sp>
@@ -8793,11 +9371,18 @@
                 <a:solidFill>
                   <a:srgbClr val="FFFFFF"/>
                 </a:solidFill>
-                <a:latin typeface="微软雅黑"/>
-                <a:ea typeface="微软雅黑"/>
+                <a:latin typeface="微软雅黑" panose="020B0503020204020204" charset="-122"/>
+                <a:ea typeface="微软雅黑" panose="020B0503020204020204" charset="-122"/>
               </a:rPr>
               <a:t>赛题要求与我们的拆解</a:t>
             </a:r>
+            <a:endParaRPr sz="2600" b="1">
+              <a:solidFill>
+                <a:srgbClr val="FFFFFF"/>
+              </a:solidFill>
+              <a:latin typeface="微软雅黑" panose="020B0503020204020204" charset="-122"/>
+              <a:ea typeface="微软雅黑" panose="020B0503020204020204" charset="-122"/>
+            </a:endParaRPr>
           </a:p>
         </p:txBody>
       </p:sp>
@@ -8829,11 +9414,18 @@
                 <a:solidFill>
                   <a:srgbClr val="BDD7EE"/>
                 </a:solidFill>
-                <a:latin typeface="微软雅黑"/>
-                <a:ea typeface="微软雅黑"/>
+                <a:latin typeface="微软雅黑" panose="020B0503020204020204" charset="-122"/>
+                <a:ea typeface="微软雅黑" panose="020B0503020204020204" charset="-122"/>
               </a:rPr>
               <a:t>01 背景</a:t>
             </a:r>
+            <a:endParaRPr sz="1200" b="0">
+              <a:solidFill>
+                <a:srgbClr val="BDD7EE"/>
+              </a:solidFill>
+              <a:latin typeface="微软雅黑" panose="020B0503020204020204" charset="-122"/>
+              <a:ea typeface="微软雅黑" panose="020B0503020204020204" charset="-122"/>
+            </a:endParaRPr>
           </a:p>
         </p:txBody>
       </p:sp>
@@ -8864,11 +9456,18 @@
                 <a:solidFill>
                   <a:srgbClr val="8C8C8C"/>
                 </a:solidFill>
-                <a:latin typeface="微软雅黑"/>
-                <a:ea typeface="微软雅黑"/>
+                <a:latin typeface="微软雅黑" panose="020B0503020204020204" charset="-122"/>
+                <a:ea typeface="微软雅黑" panose="020B0503020204020204" charset="-122"/>
               </a:rPr>
               <a:t>模拟电路 AI 智能化设计 · 赛题二</a:t>
             </a:r>
+            <a:endParaRPr sz="900" b="0">
+              <a:solidFill>
+                <a:srgbClr val="8C8C8C"/>
+              </a:solidFill>
+              <a:latin typeface="微软雅黑" panose="020B0503020204020204" charset="-122"/>
+              <a:ea typeface="微软雅黑" panose="020B0503020204020204" charset="-122"/>
+            </a:endParaRPr>
           </a:p>
         </p:txBody>
       </p:sp>
@@ -8900,11 +9499,18 @@
                 <a:solidFill>
                   <a:srgbClr val="8C8C8C"/>
                 </a:solidFill>
-                <a:latin typeface="微软雅黑"/>
-                <a:ea typeface="微软雅黑"/>
+                <a:latin typeface="微软雅黑" panose="020B0503020204020204" charset="-122"/>
+                <a:ea typeface="微软雅黑" panose="020B0503020204020204" charset="-122"/>
               </a:rPr>
               <a:t>2</a:t>
             </a:r>
+            <a:endParaRPr sz="900" b="0">
+              <a:solidFill>
+                <a:srgbClr val="8C8C8C"/>
+              </a:solidFill>
+              <a:latin typeface="微软雅黑" panose="020B0503020204020204" charset="-122"/>
+              <a:ea typeface="微软雅黑" panose="020B0503020204020204" charset="-122"/>
+            </a:endParaRPr>
           </a:p>
         </p:txBody>
       </p:sp>
@@ -8927,34 +9533,10 @@
                 <a:tableStyleId>{5C22544A-7EE6-4342-B048-85BDC9FD1C3A}</a:tableStyleId>
               </a:tblPr>
               <a:tblGrid>
-                <a:gridCol w="2654709">
-                  <a:extLst>
-                    <a:ext uri="{9D8B030D-6E8A-4147-A177-3AD203B41FA5}">
-                      <a16:colId xmlns:a16="http://schemas.microsoft.com/office/drawing/2014/main" val="20000"/>
-                    </a:ext>
-                  </a:extLst>
-                </a:gridCol>
-                <a:gridCol w="2654709">
-                  <a:extLst>
-                    <a:ext uri="{9D8B030D-6E8A-4147-A177-3AD203B41FA5}">
-                      <a16:colId xmlns:a16="http://schemas.microsoft.com/office/drawing/2014/main" val="20001"/>
-                    </a:ext>
-                  </a:extLst>
-                </a:gridCol>
-                <a:gridCol w="3716593">
-                  <a:extLst>
-                    <a:ext uri="{9D8B030D-6E8A-4147-A177-3AD203B41FA5}">
-                      <a16:colId xmlns:a16="http://schemas.microsoft.com/office/drawing/2014/main" val="20002"/>
-                    </a:ext>
-                  </a:extLst>
-                </a:gridCol>
-                <a:gridCol w="1946787">
-                  <a:extLst>
-                    <a:ext uri="{9D8B030D-6E8A-4147-A177-3AD203B41FA5}">
-                      <a16:colId xmlns:a16="http://schemas.microsoft.com/office/drawing/2014/main" val="20003"/>
-                    </a:ext>
-                  </a:extLst>
-                </a:gridCol>
+                <a:gridCol w="2654709"/>
+                <a:gridCol w="2654709"/>
+                <a:gridCol w="3716593"/>
+                <a:gridCol w="1946787"/>
               </a:tblGrid>
               <a:tr h="475488">
                 <a:tc>
@@ -8967,11 +9549,18 @@
                           <a:solidFill>
                             <a:srgbClr val="FFFFFF"/>
                           </a:solidFill>
-                          <a:latin typeface="微软雅黑"/>
-                          <a:ea typeface="微软雅黑"/>
+                          <a:latin typeface="微软雅黑" panose="020B0503020204020204" charset="-122"/>
+                          <a:ea typeface="微软雅黑" panose="020B0503020204020204" charset="-122"/>
                         </a:rPr>
                         <a:t>模块</a:t>
                       </a:r>
+                      <a:endParaRPr sz="1300" b="1">
+                        <a:solidFill>
+                          <a:srgbClr val="FFFFFF"/>
+                        </a:solidFill>
+                        <a:latin typeface="微软雅黑" panose="020B0503020204020204" charset="-122"/>
+                        <a:ea typeface="微软雅黑" panose="020B0503020204020204" charset="-122"/>
+                      </a:endParaRPr>
                     </a:p>
                   </a:txBody>
                   <a:tcPr>
@@ -8990,11 +9579,18 @@
                           <a:solidFill>
                             <a:srgbClr val="FFFFFF"/>
                           </a:solidFill>
-                          <a:latin typeface="微软雅黑"/>
-                          <a:ea typeface="微软雅黑"/>
+                          <a:latin typeface="微软雅黑" panose="020B0503020204020204" charset="-122"/>
+                          <a:ea typeface="微软雅黑" panose="020B0503020204020204" charset="-122"/>
                         </a:rPr>
                         <a:t>输入</a:t>
                       </a:r>
+                      <a:endParaRPr sz="1300" b="1">
+                        <a:solidFill>
+                          <a:srgbClr val="FFFFFF"/>
+                        </a:solidFill>
+                        <a:latin typeface="微软雅黑" panose="020B0503020204020204" charset="-122"/>
+                        <a:ea typeface="微软雅黑" panose="020B0503020204020204" charset="-122"/>
+                      </a:endParaRPr>
                     </a:p>
                   </a:txBody>
                   <a:tcPr>
@@ -9013,11 +9609,18 @@
                           <a:solidFill>
                             <a:srgbClr val="FFFFFF"/>
                           </a:solidFill>
-                          <a:latin typeface="微软雅黑"/>
-                          <a:ea typeface="微软雅黑"/>
+                          <a:latin typeface="微软雅黑" panose="020B0503020204020204" charset="-122"/>
+                          <a:ea typeface="微软雅黑" panose="020B0503020204020204" charset="-122"/>
                         </a:rPr>
                         <a:t>输出</a:t>
                       </a:r>
+                      <a:endParaRPr sz="1300" b="1">
+                        <a:solidFill>
+                          <a:srgbClr val="FFFFFF"/>
+                        </a:solidFill>
+                        <a:latin typeface="微软雅黑" panose="020B0503020204020204" charset="-122"/>
+                        <a:ea typeface="微软雅黑" panose="020B0503020204020204" charset="-122"/>
+                      </a:endParaRPr>
                     </a:p>
                   </a:txBody>
                   <a:tcPr>
@@ -9036,11 +9639,18 @@
                           <a:solidFill>
                             <a:srgbClr val="FFFFFF"/>
                           </a:solidFill>
-                          <a:latin typeface="微软雅黑"/>
-                          <a:ea typeface="微软雅黑"/>
+                          <a:latin typeface="微软雅黑" panose="020B0503020204020204" charset="-122"/>
+                          <a:ea typeface="微软雅黑" panose="020B0503020204020204" charset="-122"/>
                         </a:rPr>
                         <a:t>运行位置</a:t>
                       </a:r>
+                      <a:endParaRPr sz="1300" b="1">
+                        <a:solidFill>
+                          <a:srgbClr val="FFFFFF"/>
+                        </a:solidFill>
+                        <a:latin typeface="微软雅黑" panose="020B0503020204020204" charset="-122"/>
+                        <a:ea typeface="微软雅黑" panose="020B0503020204020204" charset="-122"/>
+                      </a:endParaRPr>
                     </a:p>
                   </a:txBody>
                   <a:tcPr>
@@ -9049,11 +9659,6 @@
                     </a:solidFill>
                   </a:tcPr>
                 </a:tc>
-                <a:extLst>
-                  <a:ext uri="{0D108BD9-81ED-4DB2-BD59-A6C34878D82A}">
-                    <a16:rowId xmlns:a16="http://schemas.microsoft.com/office/drawing/2014/main" val="10000"/>
-                  </a:ext>
-                </a:extLst>
               </a:tr>
               <a:tr h="475488">
                 <a:tc>
@@ -9066,11 +9671,18 @@
                           <a:solidFill>
                             <a:srgbClr val="1F3864"/>
                           </a:solidFill>
-                          <a:latin typeface="微软雅黑"/>
-                          <a:ea typeface="微软雅黑"/>
+                          <a:latin typeface="微软雅黑" panose="020B0503020204020204" charset="-122"/>
+                          <a:ea typeface="微软雅黑" panose="020B0503020204020204" charset="-122"/>
                         </a:rPr>
                         <a:t>一　Spec 解析</a:t>
                       </a:r>
+                      <a:endParaRPr sz="1400" b="1">
+                        <a:solidFill>
+                          <a:srgbClr val="1F3864"/>
+                        </a:solidFill>
+                        <a:latin typeface="微软雅黑" panose="020B0503020204020204" charset="-122"/>
+                        <a:ea typeface="微软雅黑" panose="020B0503020204020204" charset="-122"/>
+                      </a:endParaRPr>
                     </a:p>
                   </a:txBody>
                   <a:tcPr>
@@ -9089,11 +9701,18 @@
                           <a:solidFill>
                             <a:srgbClr val="595959"/>
                           </a:solidFill>
-                          <a:latin typeface="微软雅黑"/>
-                          <a:ea typeface="微软雅黑"/>
+                          <a:latin typeface="微软雅黑" panose="020B0503020204020204" charset="-122"/>
+                          <a:ea typeface="微软雅黑" panose="020B0503020204020204" charset="-122"/>
                         </a:rPr>
                         <a:t>自然语言需求</a:t>
                       </a:r>
+                      <a:endParaRPr sz="1400" b="0">
+                        <a:solidFill>
+                          <a:srgbClr val="595959"/>
+                        </a:solidFill>
+                        <a:latin typeface="微软雅黑" panose="020B0503020204020204" charset="-122"/>
+                        <a:ea typeface="微软雅黑" panose="020B0503020204020204" charset="-122"/>
+                      </a:endParaRPr>
                     </a:p>
                   </a:txBody>
                   <a:tcPr>
@@ -9112,11 +9731,18 @@
                           <a:solidFill>
                             <a:srgbClr val="595959"/>
                           </a:solidFill>
-                          <a:latin typeface="微软雅黑"/>
-                          <a:ea typeface="微软雅黑"/>
+                          <a:latin typeface="微软雅黑" panose="020B0503020204020204" charset="-122"/>
+                          <a:ea typeface="微软雅黑" panose="020B0503020204020204" charset="-122"/>
                         </a:rPr>
                         <a:t>结构化 JSON Spec</a:t>
                       </a:r>
+                      <a:endParaRPr sz="1400" b="0">
+                        <a:solidFill>
+                          <a:srgbClr val="595959"/>
+                        </a:solidFill>
+                        <a:latin typeface="微软雅黑" panose="020B0503020204020204" charset="-122"/>
+                        <a:ea typeface="微软雅黑" panose="020B0503020204020204" charset="-122"/>
+                      </a:endParaRPr>
                     </a:p>
                   </a:txBody>
                   <a:tcPr>
@@ -9135,11 +9761,18 @@
                           <a:solidFill>
                             <a:srgbClr val="595959"/>
                           </a:solidFill>
-                          <a:latin typeface="微软雅黑"/>
-                          <a:ea typeface="微软雅黑"/>
+                          <a:latin typeface="微软雅黑" panose="020B0503020204020204" charset="-122"/>
+                          <a:ea typeface="微软雅黑" panose="020B0503020204020204" charset="-122"/>
                         </a:rPr>
                         <a:t>本地</a:t>
                       </a:r>
+                      <a:endParaRPr sz="1400" b="0">
+                        <a:solidFill>
+                          <a:srgbClr val="595959"/>
+                        </a:solidFill>
+                        <a:latin typeface="微软雅黑" panose="020B0503020204020204" charset="-122"/>
+                        <a:ea typeface="微软雅黑" panose="020B0503020204020204" charset="-122"/>
+                      </a:endParaRPr>
                     </a:p>
                   </a:txBody>
                   <a:tcPr>
@@ -9148,11 +9781,6 @@
                     </a:solidFill>
                   </a:tcPr>
                 </a:tc>
-                <a:extLst>
-                  <a:ext uri="{0D108BD9-81ED-4DB2-BD59-A6C34878D82A}">
-                    <a16:rowId xmlns:a16="http://schemas.microsoft.com/office/drawing/2014/main" val="10001"/>
-                  </a:ext>
-                </a:extLst>
               </a:tr>
               <a:tr h="475488">
                 <a:tc>
@@ -9165,11 +9793,18 @@
                           <a:solidFill>
                             <a:srgbClr val="1F3864"/>
                           </a:solidFill>
-                          <a:latin typeface="微软雅黑"/>
-                          <a:ea typeface="微软雅黑"/>
+                          <a:latin typeface="微软雅黑" panose="020B0503020204020204" charset="-122"/>
+                          <a:ea typeface="微软雅黑" panose="020B0503020204020204" charset="-122"/>
                         </a:rPr>
                         <a:t>二　拓扑识别与约减</a:t>
                       </a:r>
+                      <a:endParaRPr sz="1400" b="1">
+                        <a:solidFill>
+                          <a:srgbClr val="1F3864"/>
+                        </a:solidFill>
+                        <a:latin typeface="微软雅黑" panose="020B0503020204020204" charset="-122"/>
+                        <a:ea typeface="微软雅黑" panose="020B0503020204020204" charset="-122"/>
+                      </a:endParaRPr>
                     </a:p>
                   </a:txBody>
                   <a:tcPr>
@@ -9188,11 +9823,18 @@
                           <a:solidFill>
                             <a:srgbClr val="595959"/>
                           </a:solidFill>
-                          <a:latin typeface="微软雅黑"/>
-                          <a:ea typeface="微软雅黑"/>
+                          <a:latin typeface="微软雅黑" panose="020B0503020204020204" charset="-122"/>
+                          <a:ea typeface="微软雅黑" panose="020B0503020204020204" charset="-122"/>
                         </a:rPr>
                         <a:t>电路网表</a:t>
                       </a:r>
+                      <a:endParaRPr sz="1400" b="0">
+                        <a:solidFill>
+                          <a:srgbClr val="595959"/>
+                        </a:solidFill>
+                        <a:latin typeface="微软雅黑" panose="020B0503020204020204" charset="-122"/>
+                        <a:ea typeface="微软雅黑" panose="020B0503020204020204" charset="-122"/>
+                      </a:endParaRPr>
                     </a:p>
                   </a:txBody>
                   <a:tcPr>
@@ -9211,11 +9853,18 @@
                           <a:solidFill>
                             <a:srgbClr val="595959"/>
                           </a:solidFill>
-                          <a:latin typeface="微软雅黑"/>
-                          <a:ea typeface="微软雅黑"/>
+                          <a:latin typeface="微软雅黑" panose="020B0503020204020204" charset="-122"/>
+                          <a:ea typeface="微软雅黑" panose="020B0503020204020204" charset="-122"/>
                         </a:rPr>
                         <a:t>变量清单 + 约减后网表</a:t>
                       </a:r>
+                      <a:endParaRPr sz="1400" b="0">
+                        <a:solidFill>
+                          <a:srgbClr val="595959"/>
+                        </a:solidFill>
+                        <a:latin typeface="微软雅黑" panose="020B0503020204020204" charset="-122"/>
+                        <a:ea typeface="微软雅黑" panose="020B0503020204020204" charset="-122"/>
+                      </a:endParaRPr>
                     </a:p>
                   </a:txBody>
                   <a:tcPr>
@@ -9234,11 +9883,18 @@
                           <a:solidFill>
                             <a:srgbClr val="595959"/>
                           </a:solidFill>
-                          <a:latin typeface="微软雅黑"/>
-                          <a:ea typeface="微软雅黑"/>
+                          <a:latin typeface="微软雅黑" panose="020B0503020204020204" charset="-122"/>
+                          <a:ea typeface="微软雅黑" panose="020B0503020204020204" charset="-122"/>
                         </a:rPr>
                         <a:t>本地</a:t>
                       </a:r>
+                      <a:endParaRPr sz="1400" b="0">
+                        <a:solidFill>
+                          <a:srgbClr val="595959"/>
+                        </a:solidFill>
+                        <a:latin typeface="微软雅黑" panose="020B0503020204020204" charset="-122"/>
+                        <a:ea typeface="微软雅黑" panose="020B0503020204020204" charset="-122"/>
+                      </a:endParaRPr>
                     </a:p>
                   </a:txBody>
                   <a:tcPr>
@@ -9247,11 +9903,6 @@
                     </a:solidFill>
                   </a:tcPr>
                 </a:tc>
-                <a:extLst>
-                  <a:ext uri="{0D108BD9-81ED-4DB2-BD59-A6C34878D82A}">
-                    <a16:rowId xmlns:a16="http://schemas.microsoft.com/office/drawing/2014/main" val="10002"/>
-                  </a:ext>
-                </a:extLst>
               </a:tr>
               <a:tr h="475488">
                 <a:tc>
@@ -9264,11 +9915,18 @@
                           <a:solidFill>
                             <a:srgbClr val="1F3864"/>
                           </a:solidFill>
-                          <a:latin typeface="微软雅黑"/>
-                          <a:ea typeface="微软雅黑"/>
+                          <a:latin typeface="微软雅黑" panose="020B0503020204020204" charset="-122"/>
+                          <a:ea typeface="微软雅黑" panose="020B0503020204020204" charset="-122"/>
                         </a:rPr>
                         <a:t>三　多目标尺寸优化</a:t>
                       </a:r>
+                      <a:endParaRPr sz="1400" b="1">
+                        <a:solidFill>
+                          <a:srgbClr val="1F3864"/>
+                        </a:solidFill>
+                        <a:latin typeface="微软雅黑" panose="020B0503020204020204" charset="-122"/>
+                        <a:ea typeface="微软雅黑" panose="020B0503020204020204" charset="-122"/>
+                      </a:endParaRPr>
                     </a:p>
                   </a:txBody>
                   <a:tcPr>
@@ -9287,11 +9945,18 @@
                           <a:solidFill>
                             <a:srgbClr val="595959"/>
                           </a:solidFill>
-                          <a:latin typeface="微软雅黑"/>
-                          <a:ea typeface="微软雅黑"/>
+                          <a:latin typeface="微软雅黑" panose="020B0503020204020204" charset="-122"/>
+                          <a:ea typeface="微软雅黑" panose="020B0503020204020204" charset="-122"/>
                         </a:rPr>
                         <a:t>变量清单 + MDE</a:t>
                       </a:r>
+                      <a:endParaRPr sz="1400" b="0">
+                        <a:solidFill>
+                          <a:srgbClr val="595959"/>
+                        </a:solidFill>
+                        <a:latin typeface="微软雅黑" panose="020B0503020204020204" charset="-122"/>
+                        <a:ea typeface="微软雅黑" panose="020B0503020204020204" charset="-122"/>
+                      </a:endParaRPr>
                     </a:p>
                   </a:txBody>
                   <a:tcPr>
@@ -9310,11 +9975,18 @@
                           <a:solidFill>
                             <a:srgbClr val="595959"/>
                           </a:solidFill>
-                          <a:latin typeface="微软雅黑"/>
-                          <a:ea typeface="微软雅黑"/>
+                          <a:latin typeface="微软雅黑" panose="020B0503020204020204" charset="-122"/>
+                          <a:ea typeface="微软雅黑" panose="020B0503020204020204" charset="-122"/>
                         </a:rPr>
                         <a:t>最优尺寸 + 优化日志</a:t>
                       </a:r>
+                      <a:endParaRPr sz="1400" b="0">
+                        <a:solidFill>
+                          <a:srgbClr val="595959"/>
+                        </a:solidFill>
+                        <a:latin typeface="微软雅黑" panose="020B0503020204020204" charset="-122"/>
+                        <a:ea typeface="微软雅黑" panose="020B0503020204020204" charset="-122"/>
+                      </a:endParaRPr>
                     </a:p>
                   </a:txBody>
                   <a:tcPr>
@@ -9333,11 +10005,18 @@
                           <a:solidFill>
                             <a:srgbClr val="595959"/>
                           </a:solidFill>
-                          <a:latin typeface="微软雅黑"/>
-                          <a:ea typeface="微软雅黑"/>
+                          <a:latin typeface="微软雅黑" panose="020B0503020204020204" charset="-122"/>
+                          <a:ea typeface="微软雅黑" panose="020B0503020204020204" charset="-122"/>
                         </a:rPr>
                         <a:t>九天服务器</a:t>
                       </a:r>
+                      <a:endParaRPr sz="1400" b="0">
+                        <a:solidFill>
+                          <a:srgbClr val="595959"/>
+                        </a:solidFill>
+                        <a:latin typeface="微软雅黑" panose="020B0503020204020204" charset="-122"/>
+                        <a:ea typeface="微软雅黑" panose="020B0503020204020204" charset="-122"/>
+                      </a:endParaRPr>
                     </a:p>
                   </a:txBody>
                   <a:tcPr>
@@ -9346,11 +10025,6 @@
                     </a:solidFill>
                   </a:tcPr>
                 </a:tc>
-                <a:extLst>
-                  <a:ext uri="{0D108BD9-81ED-4DB2-BD59-A6C34878D82A}">
-                    <a16:rowId xmlns:a16="http://schemas.microsoft.com/office/drawing/2014/main" val="10003"/>
-                  </a:ext>
-                </a:extLst>
               </a:tr>
               <a:tr h="475488">
                 <a:tc>
@@ -9363,11 +10037,18 @@
                           <a:solidFill>
                             <a:srgbClr val="1F3864"/>
                           </a:solidFill>
-                          <a:latin typeface="微软雅黑"/>
-                          <a:ea typeface="微软雅黑"/>
+                          <a:latin typeface="微软雅黑" panose="020B0503020204020204" charset="-122"/>
+                          <a:ea typeface="微软雅黑" panose="020B0503020204020204" charset="-122"/>
                         </a:rPr>
                         <a:t>四　PyAether 自动化</a:t>
                       </a:r>
+                      <a:endParaRPr sz="1400" b="1">
+                        <a:solidFill>
+                          <a:srgbClr val="1F3864"/>
+                        </a:solidFill>
+                        <a:latin typeface="微软雅黑" panose="020B0503020204020204" charset="-122"/>
+                        <a:ea typeface="微软雅黑" panose="020B0503020204020204" charset="-122"/>
+                      </a:endParaRPr>
                     </a:p>
                   </a:txBody>
                   <a:tcPr>
@@ -9386,11 +10067,18 @@
                           <a:solidFill>
                             <a:srgbClr val="595959"/>
                           </a:solidFill>
-                          <a:latin typeface="微软雅黑"/>
-                          <a:ea typeface="微软雅黑"/>
+                          <a:latin typeface="微软雅黑" panose="020B0503020204020204" charset="-122"/>
+                          <a:ea typeface="微软雅黑" panose="020B0503020204020204" charset="-122"/>
                         </a:rPr>
                         <a:t>电路图 + MDE</a:t>
                       </a:r>
+                      <a:endParaRPr sz="1400" b="0">
+                        <a:solidFill>
+                          <a:srgbClr val="595959"/>
+                        </a:solidFill>
+                        <a:latin typeface="微软雅黑" panose="020B0503020204020204" charset="-122"/>
+                        <a:ea typeface="微软雅黑" panose="020B0503020204020204" charset="-122"/>
+                      </a:endParaRPr>
                     </a:p>
                   </a:txBody>
                   <a:tcPr>
@@ -9409,11 +10097,18 @@
                           <a:solidFill>
                             <a:srgbClr val="595959"/>
                           </a:solidFill>
-                          <a:latin typeface="微软雅黑"/>
-                          <a:ea typeface="微软雅黑"/>
+                          <a:latin typeface="微软雅黑" panose="020B0503020204020204" charset="-122"/>
+                          <a:ea typeface="微软雅黑" panose="020B0503020204020204" charset="-122"/>
                         </a:rPr>
                         <a:t>参数化/仿真/反标/PVT 报告</a:t>
                       </a:r>
+                      <a:endParaRPr sz="1400" b="0">
+                        <a:solidFill>
+                          <a:srgbClr val="595959"/>
+                        </a:solidFill>
+                        <a:latin typeface="微软雅黑" panose="020B0503020204020204" charset="-122"/>
+                        <a:ea typeface="微软雅黑" panose="020B0503020204020204" charset="-122"/>
+                      </a:endParaRPr>
                     </a:p>
                   </a:txBody>
                   <a:tcPr>
@@ -9432,11 +10127,18 @@
                           <a:solidFill>
                             <a:srgbClr val="595959"/>
                           </a:solidFill>
-                          <a:latin typeface="微软雅黑"/>
-                          <a:ea typeface="微软雅黑"/>
+                          <a:latin typeface="微软雅黑" panose="020B0503020204020204" charset="-122"/>
+                          <a:ea typeface="微软雅黑" panose="020B0503020204020204" charset="-122"/>
                         </a:rPr>
                         <a:t>九天服务器</a:t>
                       </a:r>
+                      <a:endParaRPr sz="1400" b="0">
+                        <a:solidFill>
+                          <a:srgbClr val="595959"/>
+                        </a:solidFill>
+                        <a:latin typeface="微软雅黑" panose="020B0503020204020204" charset="-122"/>
+                        <a:ea typeface="微软雅黑" panose="020B0503020204020204" charset="-122"/>
+                      </a:endParaRPr>
                     </a:p>
                   </a:txBody>
                   <a:tcPr>
@@ -9445,11 +10147,6 @@
                     </a:solidFill>
                   </a:tcPr>
                 </a:tc>
-                <a:extLst>
-                  <a:ext uri="{0D108BD9-81ED-4DB2-BD59-A6C34878D82A}">
-                    <a16:rowId xmlns:a16="http://schemas.microsoft.com/office/drawing/2014/main" val="10004"/>
-                  </a:ext>
-                </a:extLst>
               </a:tr>
             </a:tbl>
           </a:graphicData>
@@ -9487,11 +10184,18 @@
                 <a:solidFill>
                   <a:srgbClr val="595959"/>
                 </a:solidFill>
-                <a:latin typeface="微软雅黑"/>
-                <a:ea typeface="微软雅黑"/>
+                <a:latin typeface="微软雅黑" panose="020B0503020204020204" charset="-122"/>
+                <a:ea typeface="微软雅黑" panose="020B0503020204020204" charset="-122"/>
               </a:rPr>
               <a:t>• 评分构成：通用提交报告 20 分 + 客观性能 70 分 + PyAether 问卷 10 分</a:t>
             </a:r>
+            <a:endParaRPr sz="1500" b="0">
+              <a:solidFill>
+                <a:srgbClr val="595959"/>
+              </a:solidFill>
+              <a:latin typeface="微软雅黑" panose="020B0503020204020204" charset="-122"/>
+              <a:ea typeface="微软雅黑" panose="020B0503020204020204" charset="-122"/>
+            </a:endParaRPr>
           </a:p>
           <a:p>
             <a:pPr>
@@ -9504,11 +10208,18 @@
                 <a:solidFill>
                   <a:srgbClr val="595959"/>
                 </a:solidFill>
-                <a:latin typeface="微软雅黑"/>
-                <a:ea typeface="微软雅黑"/>
+                <a:latin typeface="微软雅黑" panose="020B0503020204020204" charset="-122"/>
+                <a:ea typeface="微软雅黑" panose="020B0503020204020204" charset="-122"/>
               </a:rPr>
               <a:t>• 客观性能里：Spec 解析与约减 20 分、约束满足 30 分、多目标优化 40 分、总运行时间 10 分</a:t>
             </a:r>
+            <a:endParaRPr sz="1500" b="0">
+              <a:solidFill>
+                <a:srgbClr val="595959"/>
+              </a:solidFill>
+              <a:latin typeface="微软雅黑" panose="020B0503020204020204" charset="-122"/>
+              <a:ea typeface="微软雅黑" panose="020B0503020204020204" charset="-122"/>
+            </a:endParaRPr>
           </a:p>
           <a:p>
             <a:pPr>
@@ -9521,11 +10232,18 @@
                 <a:solidFill>
                   <a:srgbClr val="595959"/>
                 </a:solidFill>
-                <a:latin typeface="微软雅黑"/>
-                <a:ea typeface="微软雅黑"/>
+                <a:latin typeface="微软雅黑" panose="020B0503020204020204" charset="-122"/>
+                <a:ea typeface="微软雅黑" panose="020B0503020204020204" charset="-122"/>
               </a:rPr>
               <a:t>• 我们读到的关键事实：评分器 score.py 才是唯一真相来源，赛题 PDF 只是意图说明</a:t>
             </a:r>
+            <a:endParaRPr sz="1500" b="0">
+              <a:solidFill>
+                <a:srgbClr val="595959"/>
+              </a:solidFill>
+              <a:latin typeface="微软雅黑" panose="020B0503020204020204" charset="-122"/>
+              <a:ea typeface="微软雅黑" panose="020B0503020204020204" charset="-122"/>
+            </a:endParaRPr>
           </a:p>
         </p:txBody>
       </p:sp>
@@ -9595,7 +10313,6 @@
           <a:lstStyle/>
           <a:p>
             <a:pPr algn="ctr"/>
-            <a:endParaRPr/>
           </a:p>
         </p:txBody>
       </p:sp>
@@ -9626,11 +10343,18 @@
                 <a:solidFill>
                   <a:srgbClr val="FFFFFF"/>
                 </a:solidFill>
-                <a:latin typeface="微软雅黑"/>
-                <a:ea typeface="微软雅黑"/>
+                <a:latin typeface="微软雅黑" panose="020B0503020204020204" charset="-122"/>
+                <a:ea typeface="微软雅黑" panose="020B0503020204020204" charset="-122"/>
               </a:rPr>
               <a:t>总体架构：两层，靠纯文本文件交接</a:t>
             </a:r>
+            <a:endParaRPr sz="2600" b="1">
+              <a:solidFill>
+                <a:srgbClr val="FFFFFF"/>
+              </a:solidFill>
+              <a:latin typeface="微软雅黑" panose="020B0503020204020204" charset="-122"/>
+              <a:ea typeface="微软雅黑" panose="020B0503020204020204" charset="-122"/>
+            </a:endParaRPr>
           </a:p>
         </p:txBody>
       </p:sp>
@@ -9662,11 +10386,18 @@
                 <a:solidFill>
                   <a:srgbClr val="BDD7EE"/>
                 </a:solidFill>
-                <a:latin typeface="微软雅黑"/>
-                <a:ea typeface="微软雅黑"/>
+                <a:latin typeface="微软雅黑" panose="020B0503020204020204" charset="-122"/>
+                <a:ea typeface="微软雅黑" panose="020B0503020204020204" charset="-122"/>
               </a:rPr>
               <a:t>02 架构</a:t>
             </a:r>
+            <a:endParaRPr sz="1200" b="0">
+              <a:solidFill>
+                <a:srgbClr val="BDD7EE"/>
+              </a:solidFill>
+              <a:latin typeface="微软雅黑" panose="020B0503020204020204" charset="-122"/>
+              <a:ea typeface="微软雅黑" panose="020B0503020204020204" charset="-122"/>
+            </a:endParaRPr>
           </a:p>
         </p:txBody>
       </p:sp>
@@ -9697,11 +10428,18 @@
                 <a:solidFill>
                   <a:srgbClr val="8C8C8C"/>
                 </a:solidFill>
-                <a:latin typeface="微软雅黑"/>
-                <a:ea typeface="微软雅黑"/>
+                <a:latin typeface="微软雅黑" panose="020B0503020204020204" charset="-122"/>
+                <a:ea typeface="微软雅黑" panose="020B0503020204020204" charset="-122"/>
               </a:rPr>
               <a:t>模拟电路 AI 智能化设计 · 赛题二</a:t>
             </a:r>
+            <a:endParaRPr sz="900" b="0">
+              <a:solidFill>
+                <a:srgbClr val="8C8C8C"/>
+              </a:solidFill>
+              <a:latin typeface="微软雅黑" panose="020B0503020204020204" charset="-122"/>
+              <a:ea typeface="微软雅黑" panose="020B0503020204020204" charset="-122"/>
+            </a:endParaRPr>
           </a:p>
         </p:txBody>
       </p:sp>
@@ -9733,11 +10471,18 @@
                 <a:solidFill>
                   <a:srgbClr val="8C8C8C"/>
                 </a:solidFill>
-                <a:latin typeface="微软雅黑"/>
-                <a:ea typeface="微软雅黑"/>
+                <a:latin typeface="微软雅黑" panose="020B0503020204020204" charset="-122"/>
+                <a:ea typeface="微软雅黑" panose="020B0503020204020204" charset="-122"/>
               </a:rPr>
               <a:t>3</a:t>
             </a:r>
+            <a:endParaRPr sz="900" b="0">
+              <a:solidFill>
+                <a:srgbClr val="8C8C8C"/>
+              </a:solidFill>
+              <a:latin typeface="微软雅黑" panose="020B0503020204020204" charset="-122"/>
+              <a:ea typeface="微软雅黑" panose="020B0503020204020204" charset="-122"/>
+            </a:endParaRPr>
           </a:p>
         </p:txBody>
       </p:sp>
@@ -9760,34 +10505,10 @@
                 <a:tableStyleId>{5C22544A-7EE6-4342-B048-85BDC9FD1C3A}</a:tableStyleId>
               </a:tblPr>
               <a:tblGrid>
-                <a:gridCol w="1330036">
-                  <a:extLst>
-                    <a:ext uri="{9D8B030D-6E8A-4147-A177-3AD203B41FA5}">
-                      <a16:colId xmlns:a16="http://schemas.microsoft.com/office/drawing/2014/main" val="20000"/>
-                    </a:ext>
-                  </a:extLst>
-                </a:gridCol>
-                <a:gridCol w="2992581">
-                  <a:extLst>
-                    <a:ext uri="{9D8B030D-6E8A-4147-A177-3AD203B41FA5}">
-                      <a16:colId xmlns:a16="http://schemas.microsoft.com/office/drawing/2014/main" val="20001"/>
-                    </a:ext>
-                  </a:extLst>
-                </a:gridCol>
-                <a:gridCol w="4156363">
-                  <a:extLst>
-                    <a:ext uri="{9D8B030D-6E8A-4147-A177-3AD203B41FA5}">
-                      <a16:colId xmlns:a16="http://schemas.microsoft.com/office/drawing/2014/main" val="20002"/>
-                    </a:ext>
-                  </a:extLst>
-                </a:gridCol>
-                <a:gridCol w="2493818">
-                  <a:extLst>
-                    <a:ext uri="{9D8B030D-6E8A-4147-A177-3AD203B41FA5}">
-                      <a16:colId xmlns:a16="http://schemas.microsoft.com/office/drawing/2014/main" val="20003"/>
-                    </a:ext>
-                  </a:extLst>
-                </a:gridCol>
+                <a:gridCol w="1330036"/>
+                <a:gridCol w="2992581"/>
+                <a:gridCol w="4156363"/>
+                <a:gridCol w="2493818"/>
               </a:tblGrid>
               <a:tr h="502920">
                 <a:tc>
@@ -9800,11 +10521,18 @@
                           <a:solidFill>
                             <a:srgbClr val="FFFFFF"/>
                           </a:solidFill>
-                          <a:latin typeface="微软雅黑"/>
-                          <a:ea typeface="微软雅黑"/>
+                          <a:latin typeface="微软雅黑" panose="020B0503020204020204" charset="-122"/>
+                          <a:ea typeface="微软雅黑" panose="020B0503020204020204" charset="-122"/>
                         </a:rPr>
                         <a:t>层</a:t>
                       </a:r>
+                      <a:endParaRPr sz="1300" b="1">
+                        <a:solidFill>
+                          <a:srgbClr val="FFFFFF"/>
+                        </a:solidFill>
+                        <a:latin typeface="微软雅黑" panose="020B0503020204020204" charset="-122"/>
+                        <a:ea typeface="微软雅黑" panose="020B0503020204020204" charset="-122"/>
+                      </a:endParaRPr>
                     </a:p>
                   </a:txBody>
                   <a:tcPr>
@@ -9823,11 +10551,18 @@
                           <a:solidFill>
                             <a:srgbClr val="FFFFFF"/>
                           </a:solidFill>
-                          <a:latin typeface="微软雅黑"/>
-                          <a:ea typeface="微软雅黑"/>
+                          <a:latin typeface="微软雅黑" panose="020B0503020204020204" charset="-122"/>
+                          <a:ea typeface="微软雅黑" panose="020B0503020204020204" charset="-122"/>
                         </a:rPr>
                         <a:t>依赖</a:t>
                       </a:r>
+                      <a:endParaRPr sz="1300" b="1">
+                        <a:solidFill>
+                          <a:srgbClr val="FFFFFF"/>
+                        </a:solidFill>
+                        <a:latin typeface="微软雅黑" panose="020B0503020204020204" charset="-122"/>
+                        <a:ea typeface="微软雅黑" panose="020B0503020204020204" charset="-122"/>
+                      </a:endParaRPr>
                     </a:p>
                   </a:txBody>
                   <a:tcPr>
@@ -9846,11 +10581,18 @@
                           <a:solidFill>
                             <a:srgbClr val="FFFFFF"/>
                           </a:solidFill>
-                          <a:latin typeface="微软雅黑"/>
-                          <a:ea typeface="微软雅黑"/>
+                          <a:latin typeface="微软雅黑" panose="020B0503020204020204" charset="-122"/>
+                          <a:ea typeface="微软雅黑" panose="020B0503020204020204" charset="-122"/>
                         </a:rPr>
                         <a:t>职责</a:t>
                       </a:r>
+                      <a:endParaRPr sz="1300" b="1">
+                        <a:solidFill>
+                          <a:srgbClr val="FFFFFF"/>
+                        </a:solidFill>
+                        <a:latin typeface="微软雅黑" panose="020B0503020204020204" charset="-122"/>
+                        <a:ea typeface="微软雅黑" panose="020B0503020204020204" charset="-122"/>
+                      </a:endParaRPr>
                     </a:p>
                   </a:txBody>
                   <a:tcPr>
@@ -9869,11 +10611,18 @@
                           <a:solidFill>
                             <a:srgbClr val="FFFFFF"/>
                           </a:solidFill>
-                          <a:latin typeface="微软雅黑"/>
-                          <a:ea typeface="微软雅黑"/>
+                          <a:latin typeface="微软雅黑" panose="020B0503020204020204" charset="-122"/>
+                          <a:ea typeface="微软雅黑" panose="020B0503020204020204" charset="-122"/>
                         </a:rPr>
                         <a:t>产物</a:t>
                       </a:r>
+                      <a:endParaRPr sz="1300" b="1">
+                        <a:solidFill>
+                          <a:srgbClr val="FFFFFF"/>
+                        </a:solidFill>
+                        <a:latin typeface="微软雅黑" panose="020B0503020204020204" charset="-122"/>
+                        <a:ea typeface="微软雅黑" panose="020B0503020204020204" charset="-122"/>
+                      </a:endParaRPr>
                     </a:p>
                   </a:txBody>
                   <a:tcPr>
@@ -9882,11 +10631,6 @@
                     </a:solidFill>
                   </a:tcPr>
                 </a:tc>
-                <a:extLst>
-                  <a:ext uri="{0D108BD9-81ED-4DB2-BD59-A6C34878D82A}">
-                    <a16:rowId xmlns:a16="http://schemas.microsoft.com/office/drawing/2014/main" val="10000"/>
-                  </a:ext>
-                </a:extLst>
               </a:tr>
               <a:tr h="502920">
                 <a:tc>
@@ -9899,11 +10643,18 @@
                           <a:solidFill>
                             <a:srgbClr val="1F3864"/>
                           </a:solidFill>
-                          <a:latin typeface="微软雅黑"/>
-                          <a:ea typeface="微软雅黑"/>
+                          <a:latin typeface="微软雅黑" panose="020B0503020204020204" charset="-122"/>
+                          <a:ea typeface="微软雅黑" panose="020B0503020204020204" charset="-122"/>
                         </a:rPr>
                         <a:t>本地层</a:t>
                       </a:r>
+                      <a:endParaRPr sz="1400" b="1">
+                        <a:solidFill>
+                          <a:srgbClr val="1F3864"/>
+                        </a:solidFill>
+                        <a:latin typeface="微软雅黑" panose="020B0503020204020204" charset="-122"/>
+                        <a:ea typeface="微软雅黑" panose="020B0503020204020204" charset="-122"/>
+                      </a:endParaRPr>
                     </a:p>
                   </a:txBody>
                   <a:tcPr>
@@ -9922,11 +10673,18 @@
                           <a:solidFill>
                             <a:srgbClr val="595959"/>
                           </a:solidFill>
-                          <a:latin typeface="微软雅黑"/>
-                          <a:ea typeface="微软雅黑"/>
+                          <a:latin typeface="微软雅黑" panose="020B0503020204020204" charset="-122"/>
+                          <a:ea typeface="微软雅黑" panose="020B0503020204020204" charset="-122"/>
                         </a:rPr>
                         <a:t>Python + 大模型 API</a:t>
                       </a:r>
+                      <a:endParaRPr sz="1400" b="0">
+                        <a:solidFill>
+                          <a:srgbClr val="595959"/>
+                        </a:solidFill>
+                        <a:latin typeface="微软雅黑" panose="020B0503020204020204" charset="-122"/>
+                        <a:ea typeface="微软雅黑" panose="020B0503020204020204" charset="-122"/>
+                      </a:endParaRPr>
                     </a:p>
                   </a:txBody>
                   <a:tcPr>
@@ -9945,11 +10703,18 @@
                           <a:solidFill>
                             <a:srgbClr val="595959"/>
                           </a:solidFill>
-                          <a:latin typeface="微软雅黑"/>
-                          <a:ea typeface="微软雅黑"/>
+                          <a:latin typeface="微软雅黑" panose="020B0503020204020204" charset="-122"/>
+                          <a:ea typeface="微软雅黑" panose="020B0503020204020204" charset="-122"/>
                         </a:rPr>
                         <a:t>自然语言理解、网表静态分析、参数约减</a:t>
                       </a:r>
+                      <a:endParaRPr sz="1400" b="0">
+                        <a:solidFill>
+                          <a:srgbClr val="595959"/>
+                        </a:solidFill>
+                        <a:latin typeface="微软雅黑" panose="020B0503020204020204" charset="-122"/>
+                        <a:ea typeface="微软雅黑" panose="020B0503020204020204" charset="-122"/>
+                      </a:endParaRPr>
                     </a:p>
                   </a:txBody>
                   <a:tcPr>
@@ -9968,11 +10733,18 @@
                           <a:solidFill>
                             <a:srgbClr val="595959"/>
                           </a:solidFill>
-                          <a:latin typeface="微软雅黑"/>
-                          <a:ea typeface="微软雅黑"/>
+                          <a:latin typeface="微软雅黑" panose="020B0503020204020204" charset="-122"/>
+                          <a:ea typeface="微软雅黑" panose="020B0503020204020204" charset="-122"/>
                         </a:rPr>
                         <a:t>JSON / CSV / netlist</a:t>
                       </a:r>
+                      <a:endParaRPr sz="1400" b="0">
+                        <a:solidFill>
+                          <a:srgbClr val="595959"/>
+                        </a:solidFill>
+                        <a:latin typeface="微软雅黑" panose="020B0503020204020204" charset="-122"/>
+                        <a:ea typeface="微软雅黑" panose="020B0503020204020204" charset="-122"/>
+                      </a:endParaRPr>
                     </a:p>
                   </a:txBody>
                   <a:tcPr>
@@ -9981,11 +10753,6 @@
                     </a:solidFill>
                   </a:tcPr>
                 </a:tc>
-                <a:extLst>
-                  <a:ext uri="{0D108BD9-81ED-4DB2-BD59-A6C34878D82A}">
-                    <a16:rowId xmlns:a16="http://schemas.microsoft.com/office/drawing/2014/main" val="10001"/>
-                  </a:ext>
-                </a:extLst>
               </a:tr>
               <a:tr h="502920">
                 <a:tc>
@@ -9998,11 +10765,18 @@
                           <a:solidFill>
                             <a:srgbClr val="1F3864"/>
                           </a:solidFill>
-                          <a:latin typeface="微软雅黑"/>
-                          <a:ea typeface="微软雅黑"/>
+                          <a:latin typeface="微软雅黑" panose="020B0503020204020204" charset="-122"/>
+                          <a:ea typeface="微软雅黑" panose="020B0503020204020204" charset="-122"/>
                         </a:rPr>
                         <a:t>服务器层</a:t>
                       </a:r>
+                      <a:endParaRPr sz="1400" b="1">
+                        <a:solidFill>
+                          <a:srgbClr val="1F3864"/>
+                        </a:solidFill>
+                        <a:latin typeface="微软雅黑" panose="020B0503020204020204" charset="-122"/>
+                        <a:ea typeface="微软雅黑" panose="020B0503020204020204" charset="-122"/>
+                      </a:endParaRPr>
                     </a:p>
                   </a:txBody>
                   <a:tcPr>
@@ -10021,11 +10795,18 @@
                           <a:solidFill>
                             <a:srgbClr val="595959"/>
                           </a:solidFill>
-                          <a:latin typeface="微软雅黑"/>
-                          <a:ea typeface="微软雅黑"/>
+                          <a:latin typeface="微软雅黑" panose="020B0503020204020204" charset="-122"/>
+                          <a:ea typeface="微软雅黑" panose="020B0503020204020204" charset="-122"/>
                         </a:rPr>
                         <a:t>PyAether + Aether + MDE + ALPS</a:t>
                       </a:r>
+                      <a:endParaRPr sz="1400" b="0">
+                        <a:solidFill>
+                          <a:srgbClr val="595959"/>
+                        </a:solidFill>
+                        <a:latin typeface="微软雅黑" panose="020B0503020204020204" charset="-122"/>
+                        <a:ea typeface="微软雅黑" panose="020B0503020204020204" charset="-122"/>
+                      </a:endParaRPr>
                     </a:p>
                   </a:txBody>
                   <a:tcPr>
@@ -10044,11 +10825,18 @@
                           <a:solidFill>
                             <a:srgbClr val="595959"/>
                           </a:solidFill>
-                          <a:latin typeface="微软雅黑"/>
-                          <a:ea typeface="微软雅黑"/>
+                          <a:latin typeface="微软雅黑" panose="020B0503020204020204" charset="-122"/>
+                          <a:ea typeface="微软雅黑" panose="020B0503020204020204" charset="-122"/>
                         </a:rPr>
                         <a:t>真实电路操作、SPICE 仿真、反标</a:t>
                       </a:r>
+                      <a:endParaRPr sz="1400" b="0">
+                        <a:solidFill>
+                          <a:srgbClr val="595959"/>
+                        </a:solidFill>
+                        <a:latin typeface="微软雅黑" panose="020B0503020204020204" charset="-122"/>
+                        <a:ea typeface="微软雅黑" panose="020B0503020204020204" charset="-122"/>
+                      </a:endParaRPr>
                     </a:p>
                   </a:txBody>
                   <a:tcPr>
@@ -10067,11 +10855,18 @@
                           <a:solidFill>
                             <a:srgbClr val="595959"/>
                           </a:solidFill>
-                          <a:latin typeface="微软雅黑"/>
-                          <a:ea typeface="微软雅黑"/>
+                          <a:latin typeface="微软雅黑" panose="020B0503020204020204" charset="-122"/>
+                          <a:ea typeface="微软雅黑" panose="020B0503020204020204" charset="-122"/>
                         </a:rPr>
                         <a:t>最优尺寸 / PVT 指标</a:t>
                       </a:r>
+                      <a:endParaRPr sz="1400" b="0">
+                        <a:solidFill>
+                          <a:srgbClr val="595959"/>
+                        </a:solidFill>
+                        <a:latin typeface="微软雅黑" panose="020B0503020204020204" charset="-122"/>
+                        <a:ea typeface="微软雅黑" panose="020B0503020204020204" charset="-122"/>
+                      </a:endParaRPr>
                     </a:p>
                   </a:txBody>
                   <a:tcPr>
@@ -10080,11 +10875,6 @@
                     </a:solidFill>
                   </a:tcPr>
                 </a:tc>
-                <a:extLst>
-                  <a:ext uri="{0D108BD9-81ED-4DB2-BD59-A6C34878D82A}">
-                    <a16:rowId xmlns:a16="http://schemas.microsoft.com/office/drawing/2014/main" val="10002"/>
-                  </a:ext>
-                </a:extLst>
               </a:tr>
             </a:tbl>
           </a:graphicData>
@@ -10122,11 +10912,18 @@
                 <a:solidFill>
                   <a:srgbClr val="595959"/>
                 </a:solidFill>
-                <a:latin typeface="微软雅黑"/>
-                <a:ea typeface="微软雅黑"/>
+                <a:latin typeface="微软雅黑" panose="020B0503020204020204" charset="-122"/>
+                <a:ea typeface="微软雅黑" panose="020B0503020204020204" charset="-122"/>
               </a:rPr>
               <a:t>• 两层之间只传文本（JSON / CSV / netlist / txt），不传二进制、不共享内存——任一层都能单独复现</a:t>
             </a:r>
+            <a:endParaRPr sz="1600" b="0">
+              <a:solidFill>
+                <a:srgbClr val="595959"/>
+              </a:solidFill>
+              <a:latin typeface="微软雅黑" panose="020B0503020204020204" charset="-122"/>
+              <a:ea typeface="微软雅黑" panose="020B0503020204020204" charset="-122"/>
+            </a:endParaRPr>
           </a:p>
           <a:p>
             <a:pPr>
@@ -10139,11 +10936,18 @@
                 <a:solidFill>
                   <a:srgbClr val="595959"/>
                 </a:solidFill>
-                <a:latin typeface="微软雅黑"/>
-                <a:ea typeface="微软雅黑"/>
+                <a:latin typeface="微软雅黑" panose="020B0503020204020204" charset="-122"/>
+                <a:ea typeface="微软雅黑" panose="020B0503020204020204" charset="-122"/>
               </a:rPr>
               <a:t>• 本地层没有服务器也能跑完模块一、二；服务器层只负责「真的在跑电路」的那部分</a:t>
             </a:r>
+            <a:endParaRPr sz="1600" b="0">
+              <a:solidFill>
+                <a:srgbClr val="595959"/>
+              </a:solidFill>
+              <a:latin typeface="微软雅黑" panose="020B0503020204020204" charset="-122"/>
+              <a:ea typeface="微软雅黑" panose="020B0503020204020204" charset="-122"/>
+            </a:endParaRPr>
           </a:p>
           <a:p>
             <a:pPr>
@@ -10156,11 +10960,18 @@
                 <a:solidFill>
                   <a:srgbClr val="595959"/>
                 </a:solidFill>
-                <a:latin typeface="微软雅黑"/>
-                <a:ea typeface="微软雅黑"/>
+                <a:latin typeface="微软雅黑" panose="020B0503020204020204" charset="-122"/>
+                <a:ea typeface="微软雅黑" panose="020B0503020204020204" charset="-122"/>
               </a:rPr>
               <a:t>• 好处：调试时不必反复上服务器，且失败能定位到具体一层</a:t>
             </a:r>
+            <a:endParaRPr sz="1600" b="0">
+              <a:solidFill>
+                <a:srgbClr val="595959"/>
+              </a:solidFill>
+              <a:latin typeface="微软雅黑" panose="020B0503020204020204" charset="-122"/>
+              <a:ea typeface="微软雅黑" panose="020B0503020204020204" charset="-122"/>
+            </a:endParaRPr>
           </a:p>
         </p:txBody>
       </p:sp>
@@ -10230,7 +11041,6 @@
           <a:lstStyle/>
           <a:p>
             <a:pPr algn="ctr"/>
-            <a:endParaRPr/>
           </a:p>
         </p:txBody>
       </p:sp>
@@ -10261,11 +11071,18 @@
                 <a:solidFill>
                   <a:srgbClr val="FFFFFF"/>
                 </a:solidFill>
-                <a:latin typeface="微软雅黑"/>
-                <a:ea typeface="微软雅黑"/>
+                <a:latin typeface="微软雅黑" panose="020B0503020204020204" charset="-122"/>
+                <a:ea typeface="微软雅黑" panose="020B0503020204020204" charset="-122"/>
               </a:rPr>
               <a:t>模块一：会调工具的智能体，而不是「调一次模型」</a:t>
             </a:r>
+            <a:endParaRPr sz="2600" b="1">
+              <a:solidFill>
+                <a:srgbClr val="FFFFFF"/>
+              </a:solidFill>
+              <a:latin typeface="微软雅黑" panose="020B0503020204020204" charset="-122"/>
+              <a:ea typeface="微软雅黑" panose="020B0503020204020204" charset="-122"/>
+            </a:endParaRPr>
           </a:p>
         </p:txBody>
       </p:sp>
@@ -10297,11 +11114,18 @@
                 <a:solidFill>
                   <a:srgbClr val="BDD7EE"/>
                 </a:solidFill>
-                <a:latin typeface="微软雅黑"/>
-                <a:ea typeface="微软雅黑"/>
+                <a:latin typeface="微软雅黑" panose="020B0503020204020204" charset="-122"/>
+                <a:ea typeface="微软雅黑" panose="020B0503020204020204" charset="-122"/>
               </a:rPr>
               <a:t>03 模块一</a:t>
             </a:r>
+            <a:endParaRPr sz="1200" b="0">
+              <a:solidFill>
+                <a:srgbClr val="BDD7EE"/>
+              </a:solidFill>
+              <a:latin typeface="微软雅黑" panose="020B0503020204020204" charset="-122"/>
+              <a:ea typeface="微软雅黑" panose="020B0503020204020204" charset="-122"/>
+            </a:endParaRPr>
           </a:p>
         </p:txBody>
       </p:sp>
@@ -10332,11 +11156,18 @@
                 <a:solidFill>
                   <a:srgbClr val="8C8C8C"/>
                 </a:solidFill>
-                <a:latin typeface="微软雅黑"/>
-                <a:ea typeface="微软雅黑"/>
+                <a:latin typeface="微软雅黑" panose="020B0503020204020204" charset="-122"/>
+                <a:ea typeface="微软雅黑" panose="020B0503020204020204" charset="-122"/>
               </a:rPr>
               <a:t>模拟电路 AI 智能化设计 · 赛题二</a:t>
             </a:r>
+            <a:endParaRPr sz="900" b="0">
+              <a:solidFill>
+                <a:srgbClr val="8C8C8C"/>
+              </a:solidFill>
+              <a:latin typeface="微软雅黑" panose="020B0503020204020204" charset="-122"/>
+              <a:ea typeface="微软雅黑" panose="020B0503020204020204" charset="-122"/>
+            </a:endParaRPr>
           </a:p>
         </p:txBody>
       </p:sp>
@@ -10368,11 +11199,18 @@
                 <a:solidFill>
                   <a:srgbClr val="8C8C8C"/>
                 </a:solidFill>
-                <a:latin typeface="微软雅黑"/>
-                <a:ea typeface="微软雅黑"/>
+                <a:latin typeface="微软雅黑" panose="020B0503020204020204" charset="-122"/>
+                <a:ea typeface="微软雅黑" panose="020B0503020204020204" charset="-122"/>
               </a:rPr>
               <a:t>4</a:t>
             </a:r>
+            <a:endParaRPr sz="900" b="0">
+              <a:solidFill>
+                <a:srgbClr val="8C8C8C"/>
+              </a:solidFill>
+              <a:latin typeface="微软雅黑" panose="020B0503020204020204" charset="-122"/>
+              <a:ea typeface="微软雅黑" panose="020B0503020204020204" charset="-122"/>
+            </a:endParaRPr>
           </a:p>
         </p:txBody>
       </p:sp>
@@ -10395,27 +11233,9 @@
                 <a:tableStyleId>{5C22544A-7EE6-4342-B048-85BDC9FD1C3A}</a:tableStyleId>
               </a:tblPr>
               <a:tblGrid>
-                <a:gridCol w="640079">
-                  <a:extLst>
-                    <a:ext uri="{9D8B030D-6E8A-4147-A177-3AD203B41FA5}">
-                      <a16:colId xmlns:a16="http://schemas.microsoft.com/office/drawing/2014/main" val="20000"/>
-                    </a:ext>
-                  </a:extLst>
-                </a:gridCol>
-                <a:gridCol w="3657600">
-                  <a:extLst>
-                    <a:ext uri="{9D8B030D-6E8A-4147-A177-3AD203B41FA5}">
-                      <a16:colId xmlns:a16="http://schemas.microsoft.com/office/drawing/2014/main" val="20001"/>
-                    </a:ext>
-                  </a:extLst>
-                </a:gridCol>
-                <a:gridCol w="6675120">
-                  <a:extLst>
-                    <a:ext uri="{9D8B030D-6E8A-4147-A177-3AD203B41FA5}">
-                      <a16:colId xmlns:a16="http://schemas.microsoft.com/office/drawing/2014/main" val="20002"/>
-                    </a:ext>
-                  </a:extLst>
-                </a:gridCol>
+                <a:gridCol w="640079"/>
+                <a:gridCol w="3657600"/>
+                <a:gridCol w="6675120"/>
               </a:tblGrid>
               <a:tr h="420624">
                 <a:tc>
@@ -10428,11 +11248,18 @@
                           <a:solidFill>
                             <a:srgbClr val="FFFFFF"/>
                           </a:solidFill>
-                          <a:latin typeface="微软雅黑"/>
-                          <a:ea typeface="微软雅黑"/>
+                          <a:latin typeface="微软雅黑" panose="020B0503020204020204" charset="-122"/>
+                          <a:ea typeface="微软雅黑" panose="020B0503020204020204" charset="-122"/>
                         </a:rPr>
                         <a:t>#</a:t>
                       </a:r>
+                      <a:endParaRPr sz="1300" b="1">
+                        <a:solidFill>
+                          <a:srgbClr val="FFFFFF"/>
+                        </a:solidFill>
+                        <a:latin typeface="微软雅黑" panose="020B0503020204020204" charset="-122"/>
+                        <a:ea typeface="微软雅黑" panose="020B0503020204020204" charset="-122"/>
+                      </a:endParaRPr>
                     </a:p>
                   </a:txBody>
                   <a:tcPr>
@@ -10451,11 +11278,18 @@
                           <a:solidFill>
                             <a:srgbClr val="FFFFFF"/>
                           </a:solidFill>
-                          <a:latin typeface="微软雅黑"/>
-                          <a:ea typeface="微软雅黑"/>
+                          <a:latin typeface="微软雅黑" panose="020B0503020204020204" charset="-122"/>
+                          <a:ea typeface="微软雅黑" panose="020B0503020204020204" charset="-122"/>
                         </a:rPr>
                         <a:t>工具</a:t>
                       </a:r>
+                      <a:endParaRPr sz="1300" b="1">
+                        <a:solidFill>
+                          <a:srgbClr val="FFFFFF"/>
+                        </a:solidFill>
+                        <a:latin typeface="微软雅黑" panose="020B0503020204020204" charset="-122"/>
+                        <a:ea typeface="微软雅黑" panose="020B0503020204020204" charset="-122"/>
+                      </a:endParaRPr>
                     </a:p>
                   </a:txBody>
                   <a:tcPr>
@@ -10474,11 +11308,18 @@
                           <a:solidFill>
                             <a:srgbClr val="FFFFFF"/>
                           </a:solidFill>
-                          <a:latin typeface="微软雅黑"/>
-                          <a:ea typeface="微软雅黑"/>
+                          <a:latin typeface="微软雅黑" panose="020B0503020204020204" charset="-122"/>
+                          <a:ea typeface="微软雅黑" panose="020B0503020204020204" charset="-122"/>
                         </a:rPr>
                         <a:t>职责</a:t>
                       </a:r>
+                      <a:endParaRPr sz="1300" b="1">
+                        <a:solidFill>
+                          <a:srgbClr val="FFFFFF"/>
+                        </a:solidFill>
+                        <a:latin typeface="微软雅黑" panose="020B0503020204020204" charset="-122"/>
+                        <a:ea typeface="微软雅黑" panose="020B0503020204020204" charset="-122"/>
+                      </a:endParaRPr>
                     </a:p>
                   </a:txBody>
                   <a:tcPr>
@@ -10487,11 +11328,6 @@
                     </a:solidFill>
                   </a:tcPr>
                 </a:tc>
-                <a:extLst>
-                  <a:ext uri="{0D108BD9-81ED-4DB2-BD59-A6C34878D82A}">
-                    <a16:rowId xmlns:a16="http://schemas.microsoft.com/office/drawing/2014/main" val="10000"/>
-                  </a:ext>
-                </a:extLst>
               </a:tr>
               <a:tr h="420624">
                 <a:tc>
@@ -10504,11 +11340,18 @@
                           <a:solidFill>
                             <a:srgbClr val="1F3864"/>
                           </a:solidFill>
-                          <a:latin typeface="微软雅黑"/>
-                          <a:ea typeface="微软雅黑"/>
+                          <a:latin typeface="微软雅黑" panose="020B0503020204020204" charset="-122"/>
+                          <a:ea typeface="微软雅黑" panose="020B0503020204020204" charset="-122"/>
                         </a:rPr>
                         <a:t>1</a:t>
                       </a:r>
+                      <a:endParaRPr sz="1300" b="1">
+                        <a:solidFill>
+                          <a:srgbClr val="1F3864"/>
+                        </a:solidFill>
+                        <a:latin typeface="微软雅黑" panose="020B0503020204020204" charset="-122"/>
+                        <a:ea typeface="微软雅黑" panose="020B0503020204020204" charset="-122"/>
+                      </a:endParaRPr>
                     </a:p>
                   </a:txBody>
                   <a:tcPr>
@@ -10527,11 +11370,18 @@
                           <a:solidFill>
                             <a:srgbClr val="595959"/>
                           </a:solidFill>
-                          <a:latin typeface="微软雅黑"/>
-                          <a:ea typeface="微软雅黑"/>
+                          <a:latin typeface="微软雅黑" panose="020B0503020204020204" charset="-122"/>
+                          <a:ea typeface="微软雅黑" panose="020B0503020204020204" charset="-122"/>
                         </a:rPr>
                         <a:t>parse_requirement</a:t>
                       </a:r>
+                      <a:endParaRPr sz="1300" b="0">
+                        <a:solidFill>
+                          <a:srgbClr val="595959"/>
+                        </a:solidFill>
+                        <a:latin typeface="微软雅黑" panose="020B0503020204020204" charset="-122"/>
+                        <a:ea typeface="微软雅黑" panose="020B0503020204020204" charset="-122"/>
+                      </a:endParaRPr>
                     </a:p>
                   </a:txBody>
                   <a:tcPr>
@@ -10550,11 +11400,18 @@
                           <a:solidFill>
                             <a:srgbClr val="595959"/>
                           </a:solidFill>
-                          <a:latin typeface="微软雅黑"/>
-                          <a:ea typeface="微软雅黑"/>
+                          <a:latin typeface="微软雅黑" panose="020B0503020204020204" charset="-122"/>
+                          <a:ea typeface="微软雅黑" panose="020B0503020204020204" charset="-122"/>
                         </a:rPr>
                         <a:t>确定性解析需求文本，给基线指标（不让模型编数字）</a:t>
                       </a:r>
+                      <a:endParaRPr sz="1300" b="0">
+                        <a:solidFill>
+                          <a:srgbClr val="595959"/>
+                        </a:solidFill>
+                        <a:latin typeface="微软雅黑" panose="020B0503020204020204" charset="-122"/>
+                        <a:ea typeface="微软雅黑" panose="020B0503020204020204" charset="-122"/>
+                      </a:endParaRPr>
                     </a:p>
                   </a:txBody>
                   <a:tcPr>
@@ -10563,11 +11420,6 @@
                     </a:solidFill>
                   </a:tcPr>
                 </a:tc>
-                <a:extLst>
-                  <a:ext uri="{0D108BD9-81ED-4DB2-BD59-A6C34878D82A}">
-                    <a16:rowId xmlns:a16="http://schemas.microsoft.com/office/drawing/2014/main" val="10001"/>
-                  </a:ext>
-                </a:extLst>
               </a:tr>
               <a:tr h="420624">
                 <a:tc>
@@ -10580,11 +11432,18 @@
                           <a:solidFill>
                             <a:srgbClr val="1F3864"/>
                           </a:solidFill>
-                          <a:latin typeface="微软雅黑"/>
-                          <a:ea typeface="微软雅黑"/>
+                          <a:latin typeface="微软雅黑" panose="020B0503020204020204" charset="-122"/>
+                          <a:ea typeface="微软雅黑" panose="020B0503020204020204" charset="-122"/>
                         </a:rPr>
                         <a:t>2</a:t>
                       </a:r>
+                      <a:endParaRPr sz="1300" b="1">
+                        <a:solidFill>
+                          <a:srgbClr val="1F3864"/>
+                        </a:solidFill>
+                        <a:latin typeface="微软雅黑" panose="020B0503020204020204" charset="-122"/>
+                        <a:ea typeface="微软雅黑" panose="020B0503020204020204" charset="-122"/>
+                      </a:endParaRPr>
                     </a:p>
                   </a:txBody>
                   <a:tcPr>
@@ -10603,11 +11462,18 @@
                           <a:solidFill>
                             <a:srgbClr val="595959"/>
                           </a:solidFill>
-                          <a:latin typeface="微软雅黑"/>
-                          <a:ea typeface="微软雅黑"/>
+                          <a:latin typeface="微软雅黑" panose="020B0503020204020204" charset="-122"/>
+                          <a:ea typeface="微软雅黑" panose="020B0503020204020204" charset="-122"/>
                         </a:rPr>
                         <a:t>normalize_metric_unit</a:t>
                       </a:r>
+                      <a:endParaRPr sz="1300" b="0">
+                        <a:solidFill>
+                          <a:srgbClr val="595959"/>
+                        </a:solidFill>
+                        <a:latin typeface="微软雅黑" panose="020B0503020204020204" charset="-122"/>
+                        <a:ea typeface="微软雅黑" panose="020B0503020204020204" charset="-122"/>
+                      </a:endParaRPr>
                     </a:p>
                   </a:txBody>
                   <a:tcPr>
@@ -10626,11 +11492,18 @@
                           <a:solidFill>
                             <a:srgbClr val="595959"/>
                           </a:solidFill>
-                          <a:latin typeface="微软雅黑"/>
-                          <a:ea typeface="微软雅黑"/>
+                          <a:latin typeface="微软雅黑" panose="020B0503020204020204" charset="-122"/>
+                          <a:ea typeface="微软雅黑" panose="020B0503020204020204" charset="-122"/>
                         </a:rPr>
                         <a:t>口语化指标名与单位归一化</a:t>
                       </a:r>
+                      <a:endParaRPr sz="1300" b="0">
+                        <a:solidFill>
+                          <a:srgbClr val="595959"/>
+                        </a:solidFill>
+                        <a:latin typeface="微软雅黑" panose="020B0503020204020204" charset="-122"/>
+                        <a:ea typeface="微软雅黑" panose="020B0503020204020204" charset="-122"/>
+                      </a:endParaRPr>
                     </a:p>
                   </a:txBody>
                   <a:tcPr>
@@ -10639,11 +11512,6 @@
                     </a:solidFill>
                   </a:tcPr>
                 </a:tc>
-                <a:extLst>
-                  <a:ext uri="{0D108BD9-81ED-4DB2-BD59-A6C34878D82A}">
-                    <a16:rowId xmlns:a16="http://schemas.microsoft.com/office/drawing/2014/main" val="10002"/>
-                  </a:ext>
-                </a:extLst>
               </a:tr>
               <a:tr h="420624">
                 <a:tc>
@@ -10656,11 +11524,18 @@
                           <a:solidFill>
                             <a:srgbClr val="1F3864"/>
                           </a:solidFill>
-                          <a:latin typeface="微软雅黑"/>
-                          <a:ea typeface="微软雅黑"/>
+                          <a:latin typeface="微软雅黑" panose="020B0503020204020204" charset="-122"/>
+                          <a:ea typeface="微软雅黑" panose="020B0503020204020204" charset="-122"/>
                         </a:rPr>
                         <a:t>3</a:t>
                       </a:r>
+                      <a:endParaRPr sz="1300" b="1">
+                        <a:solidFill>
+                          <a:srgbClr val="1F3864"/>
+                        </a:solidFill>
+                        <a:latin typeface="微软雅黑" panose="020B0503020204020204" charset="-122"/>
+                        <a:ea typeface="微软雅黑" panose="020B0503020204020204" charset="-122"/>
+                      </a:endParaRPr>
                     </a:p>
                   </a:txBody>
                   <a:tcPr>
@@ -10679,11 +11554,18 @@
                           <a:solidFill>
                             <a:srgbClr val="595959"/>
                           </a:solidFill>
-                          <a:latin typeface="微软雅黑"/>
-                          <a:ea typeface="微软雅黑"/>
+                          <a:latin typeface="微软雅黑" panose="020B0503020204020204" charset="-122"/>
+                          <a:ea typeface="微软雅黑" panose="020B0503020204020204" charset="-122"/>
                         </a:rPr>
                         <a:t>validate_spec_schema</a:t>
                       </a:r>
+                      <a:endParaRPr sz="1300" b="0">
+                        <a:solidFill>
+                          <a:srgbClr val="595959"/>
+                        </a:solidFill>
+                        <a:latin typeface="微软雅黑" panose="020B0503020204020204" charset="-122"/>
+                        <a:ea typeface="微软雅黑" panose="020B0503020204020204" charset="-122"/>
+                      </a:endParaRPr>
                     </a:p>
                   </a:txBody>
                   <a:tcPr>
@@ -10702,11 +11584,18 @@
                           <a:solidFill>
                             <a:srgbClr val="595959"/>
                           </a:solidFill>
-                          <a:latin typeface="微软雅黑"/>
-                          <a:ea typeface="微软雅黑"/>
+                          <a:latin typeface="微软雅黑" panose="020B0503020204020204" charset="-122"/>
+                          <a:ea typeface="微软雅黑" panose="020B0503020204020204" charset="-122"/>
                         </a:rPr>
                         <a:t>校验硬约束/优化目标/单位/优先级四要素</a:t>
                       </a:r>
+                      <a:endParaRPr sz="1300" b="0">
+                        <a:solidFill>
+                          <a:srgbClr val="595959"/>
+                        </a:solidFill>
+                        <a:latin typeface="微软雅黑" panose="020B0503020204020204" charset="-122"/>
+                        <a:ea typeface="微软雅黑" panose="020B0503020204020204" charset="-122"/>
+                      </a:endParaRPr>
                     </a:p>
                   </a:txBody>
                   <a:tcPr>
@@ -10715,11 +11604,6 @@
                     </a:solidFill>
                   </a:tcPr>
                 </a:tc>
-                <a:extLst>
-                  <a:ext uri="{0D108BD9-81ED-4DB2-BD59-A6C34878D82A}">
-                    <a16:rowId xmlns:a16="http://schemas.microsoft.com/office/drawing/2014/main" val="10003"/>
-                  </a:ext>
-                </a:extLst>
               </a:tr>
               <a:tr h="420624">
                 <a:tc>
@@ -10732,11 +11616,18 @@
                           <a:solidFill>
                             <a:srgbClr val="1F3864"/>
                           </a:solidFill>
-                          <a:latin typeface="微软雅黑"/>
-                          <a:ea typeface="微软雅黑"/>
+                          <a:latin typeface="微软雅黑" panose="020B0503020204020204" charset="-122"/>
+                          <a:ea typeface="微软雅黑" panose="020B0503020204020204" charset="-122"/>
                         </a:rPr>
                         <a:t>4</a:t>
                       </a:r>
+                      <a:endParaRPr sz="1300" b="1">
+                        <a:solidFill>
+                          <a:srgbClr val="1F3864"/>
+                        </a:solidFill>
+                        <a:latin typeface="微软雅黑" panose="020B0503020204020204" charset="-122"/>
+                        <a:ea typeface="微软雅黑" panose="020B0503020204020204" charset="-122"/>
+                      </a:endParaRPr>
                     </a:p>
                   </a:txBody>
                   <a:tcPr>
@@ -10755,11 +11646,18 @@
                           <a:solidFill>
                             <a:srgbClr val="595959"/>
                           </a:solidFill>
-                          <a:latin typeface="微软雅黑"/>
-                          <a:ea typeface="微软雅黑"/>
+                          <a:latin typeface="微软雅黑" panose="020B0503020204020204" charset="-122"/>
+                          <a:ea typeface="微软雅黑" panose="020B0503020204020204" charset="-122"/>
                         </a:rPr>
                         <a:t>check_grading_gates</a:t>
                       </a:r>
+                      <a:endParaRPr sz="1300" b="0">
+                        <a:solidFill>
+                          <a:srgbClr val="595959"/>
+                        </a:solidFill>
+                        <a:latin typeface="微软雅黑" panose="020B0503020204020204" charset="-122"/>
+                        <a:ea typeface="微软雅黑" panose="020B0503020204020204" charset="-122"/>
+                      </a:endParaRPr>
                     </a:p>
                   </a:txBody>
                   <a:tcPr>
@@ -10778,11 +11676,18 @@
                           <a:solidFill>
                             <a:srgbClr val="595959"/>
                           </a:solidFill>
-                          <a:latin typeface="微软雅黑"/>
-                          <a:ea typeface="微软雅黑"/>
+                          <a:latin typeface="微软雅黑" panose="020B0503020204020204" charset="-122"/>
+                          <a:ea typeface="微软雅黑" panose="020B0503020204020204" charset="-122"/>
                         </a:rPr>
                         <a:t>核对 PM≥50°、GM≤−10 dB、I_OPA≤3 mA、Gain≥40 dB</a:t>
                       </a:r>
+                      <a:endParaRPr sz="1300" b="0">
+                        <a:solidFill>
+                          <a:srgbClr val="595959"/>
+                        </a:solidFill>
+                        <a:latin typeface="微软雅黑" panose="020B0503020204020204" charset="-122"/>
+                        <a:ea typeface="微软雅黑" panose="020B0503020204020204" charset="-122"/>
+                      </a:endParaRPr>
                     </a:p>
                   </a:txBody>
                   <a:tcPr>
@@ -10791,11 +11696,6 @@
                     </a:solidFill>
                   </a:tcPr>
                 </a:tc>
-                <a:extLst>
-                  <a:ext uri="{0D108BD9-81ED-4DB2-BD59-A6C34878D82A}">
-                    <a16:rowId xmlns:a16="http://schemas.microsoft.com/office/drawing/2014/main" val="10004"/>
-                  </a:ext>
-                </a:extLst>
               </a:tr>
               <a:tr h="420624">
                 <a:tc>
@@ -10808,11 +11708,18 @@
                           <a:solidFill>
                             <a:srgbClr val="1F3864"/>
                           </a:solidFill>
-                          <a:latin typeface="微软雅黑"/>
-                          <a:ea typeface="微软雅黑"/>
+                          <a:latin typeface="微软雅黑" panose="020B0503020204020204" charset="-122"/>
+                          <a:ea typeface="微软雅黑" panose="020B0503020204020204" charset="-122"/>
                         </a:rPr>
                         <a:t>5</a:t>
                       </a:r>
+                      <a:endParaRPr sz="1300" b="1">
+                        <a:solidFill>
+                          <a:srgbClr val="1F3864"/>
+                        </a:solidFill>
+                        <a:latin typeface="微软雅黑" panose="020B0503020204020204" charset="-122"/>
+                        <a:ea typeface="微软雅黑" panose="020B0503020204020204" charset="-122"/>
+                      </a:endParaRPr>
                     </a:p>
                   </a:txBody>
                   <a:tcPr>
@@ -10831,11 +11738,18 @@
                           <a:solidFill>
                             <a:srgbClr val="595959"/>
                           </a:solidFill>
-                          <a:latin typeface="微软雅黑"/>
-                          <a:ea typeface="微软雅黑"/>
+                          <a:latin typeface="微软雅黑" panose="020B0503020204020204" charset="-122"/>
+                          <a:ea typeface="微软雅黑" panose="020B0503020204020204" charset="-122"/>
                         </a:rPr>
                         <a:t>lookup_device_bounds</a:t>
                       </a:r>
+                      <a:endParaRPr sz="1300" b="0">
+                        <a:solidFill>
+                          <a:srgbClr val="595959"/>
+                        </a:solidFill>
+                        <a:latin typeface="微软雅黑" panose="020B0503020204020204" charset="-122"/>
+                        <a:ea typeface="微软雅黑" panose="020B0503020204020204" charset="-122"/>
+                      </a:endParaRPr>
                     </a:p>
                   </a:txBody>
                   <a:tcPr>
@@ -10854,11 +11768,18 @@
                           <a:solidFill>
                             <a:srgbClr val="595959"/>
                           </a:solidFill>
-                          <a:latin typeface="微软雅黑"/>
-                          <a:ea typeface="微软雅黑"/>
+                          <a:latin typeface="微软雅黑" panose="020B0503020204020204" charset="-122"/>
+                          <a:ea typeface="微软雅黑" panose="020B0503020204020204" charset="-122"/>
                         </a:rPr>
                         <a:t>给出器件取值范围，传给模块三</a:t>
                       </a:r>
+                      <a:endParaRPr sz="1300" b="0">
+                        <a:solidFill>
+                          <a:srgbClr val="595959"/>
+                        </a:solidFill>
+                        <a:latin typeface="微软雅黑" panose="020B0503020204020204" charset="-122"/>
+                        <a:ea typeface="微软雅黑" panose="020B0503020204020204" charset="-122"/>
+                      </a:endParaRPr>
                     </a:p>
                   </a:txBody>
                   <a:tcPr>
@@ -10867,11 +11788,6 @@
                     </a:solidFill>
                   </a:tcPr>
                 </a:tc>
-                <a:extLst>
-                  <a:ext uri="{0D108BD9-81ED-4DB2-BD59-A6C34878D82A}">
-                    <a16:rowId xmlns:a16="http://schemas.microsoft.com/office/drawing/2014/main" val="10005"/>
-                  </a:ext>
-                </a:extLst>
               </a:tr>
               <a:tr h="420624">
                 <a:tc>
@@ -10884,11 +11800,18 @@
                           <a:solidFill>
                             <a:srgbClr val="1F3864"/>
                           </a:solidFill>
-                          <a:latin typeface="微软雅黑"/>
-                          <a:ea typeface="微软雅黑"/>
+                          <a:latin typeface="微软雅黑" panose="020B0503020204020204" charset="-122"/>
+                          <a:ea typeface="微软雅黑" panose="020B0503020204020204" charset="-122"/>
                         </a:rPr>
                         <a:t>6</a:t>
                       </a:r>
+                      <a:endParaRPr sz="1300" b="1">
+                        <a:solidFill>
+                          <a:srgbClr val="1F3864"/>
+                        </a:solidFill>
+                        <a:latin typeface="微软雅黑" panose="020B0503020204020204" charset="-122"/>
+                        <a:ea typeface="微软雅黑" panose="020B0503020204020204" charset="-122"/>
+                      </a:endParaRPr>
                     </a:p>
                   </a:txBody>
                   <a:tcPr>
@@ -10907,11 +11830,18 @@
                           <a:solidFill>
                             <a:srgbClr val="595959"/>
                           </a:solidFill>
-                          <a:latin typeface="微软雅黑"/>
-                          <a:ea typeface="微软雅黑"/>
+                          <a:latin typeface="微软雅黑" panose="020B0503020204020204" charset="-122"/>
+                          <a:ea typeface="微软雅黑" panose="020B0503020204020204" charset="-122"/>
                         </a:rPr>
                         <a:t>emit_structured_spec</a:t>
                       </a:r>
+                      <a:endParaRPr sz="1300" b="0">
+                        <a:solidFill>
+                          <a:srgbClr val="595959"/>
+                        </a:solidFill>
+                        <a:latin typeface="微软雅黑" panose="020B0503020204020204" charset="-122"/>
+                        <a:ea typeface="微软雅黑" panose="020B0503020204020204" charset="-122"/>
+                      </a:endParaRPr>
                     </a:p>
                   </a:txBody>
                   <a:tcPr>
@@ -10930,11 +11860,18 @@
                           <a:solidFill>
                             <a:srgbClr val="595959"/>
                           </a:solidFill>
-                          <a:latin typeface="微软雅黑"/>
-                          <a:ea typeface="微软雅黑"/>
+                          <a:latin typeface="微软雅黑" panose="020B0503020204020204" charset="-122"/>
+                          <a:ea typeface="微软雅黑" panose="020B0503020204020204" charset="-122"/>
                         </a:rPr>
                         <a:t>产出最终 Spec 并结束</a:t>
                       </a:r>
+                      <a:endParaRPr sz="1300" b="0">
+                        <a:solidFill>
+                          <a:srgbClr val="595959"/>
+                        </a:solidFill>
+                        <a:latin typeface="微软雅黑" panose="020B0503020204020204" charset="-122"/>
+                        <a:ea typeface="微软雅黑" panose="020B0503020204020204" charset="-122"/>
+                      </a:endParaRPr>
                     </a:p>
                   </a:txBody>
                   <a:tcPr>
@@ -10943,11 +11880,6 @@
                     </a:solidFill>
                   </a:tcPr>
                 </a:tc>
-                <a:extLst>
-                  <a:ext uri="{0D108BD9-81ED-4DB2-BD59-A6C34878D82A}">
-                    <a16:rowId xmlns:a16="http://schemas.microsoft.com/office/drawing/2014/main" val="10006"/>
-                  </a:ext>
-                </a:extLst>
               </a:tr>
             </a:tbl>
           </a:graphicData>
@@ -10985,11 +11917,18 @@
                 <a:solidFill>
                   <a:srgbClr val="595959"/>
                 </a:solidFill>
-                <a:latin typeface="微软雅黑"/>
-                <a:ea typeface="微软雅黑"/>
+                <a:latin typeface="微软雅黑" panose="020B0503020204020204" charset="-122"/>
+                <a:ea typeface="微软雅黑" panose="020B0503020204020204" charset="-122"/>
               </a:rPr>
               <a:t>• 模型只做「选择与判断」，数值一律由确定性代码给出——避免单位换算类幻觉</a:t>
             </a:r>
+            <a:endParaRPr sz="1500" b="0">
+              <a:solidFill>
+                <a:srgbClr val="595959"/>
+              </a:solidFill>
+              <a:latin typeface="微软雅黑" panose="020B0503020204020204" charset="-122"/>
+              <a:ea typeface="微软雅黑" panose="020B0503020204020204" charset="-122"/>
+            </a:endParaRPr>
           </a:p>
           <a:p>
             <a:pPr>
@@ -11002,11 +11941,18 @@
                 <a:solidFill>
                   <a:srgbClr val="595959"/>
                 </a:solidFill>
-                <a:latin typeface="微软雅黑"/>
-                <a:ea typeface="微软雅黑"/>
+                <a:latin typeface="微软雅黑" panose="020B0503020204020204" charset="-122"/>
+                <a:ea typeface="微软雅黑" panose="020B0503020204020204" charset="-122"/>
               </a:rPr>
               <a:t>• 模型不可用时退化为规则解析器，仍输出同结构 JSON，并在日志标为 rule_fallback</a:t>
             </a:r>
+            <a:endParaRPr sz="1500" b="0">
+              <a:solidFill>
+                <a:srgbClr val="595959"/>
+              </a:solidFill>
+              <a:latin typeface="微软雅黑" panose="020B0503020204020204" charset="-122"/>
+              <a:ea typeface="微软雅黑" panose="020B0503020204020204" charset="-122"/>
+            </a:endParaRPr>
           </a:p>
         </p:txBody>
       </p:sp>
@@ -11076,7 +12022,6 @@
           <a:lstStyle/>
           <a:p>
             <a:pPr algn="ctr"/>
-            <a:endParaRPr/>
           </a:p>
         </p:txBody>
       </p:sp>
@@ -11107,11 +12052,18 @@
                 <a:solidFill>
                   <a:srgbClr val="FFFFFF"/>
                 </a:solidFill>
-                <a:latin typeface="微软雅黑"/>
-                <a:ea typeface="微软雅黑"/>
+                <a:latin typeface="微软雅黑" panose="020B0503020204020204" charset="-122"/>
+                <a:ea typeface="微软雅黑" panose="020B0503020204020204" charset="-122"/>
               </a:rPr>
               <a:t>模块一：输出四要素齐全，直接对应那 10 分</a:t>
             </a:r>
+            <a:endParaRPr sz="2600" b="1">
+              <a:solidFill>
+                <a:srgbClr val="FFFFFF"/>
+              </a:solidFill>
+              <a:latin typeface="微软雅黑" panose="020B0503020204020204" charset="-122"/>
+              <a:ea typeface="微软雅黑" panose="020B0503020204020204" charset="-122"/>
+            </a:endParaRPr>
           </a:p>
         </p:txBody>
       </p:sp>
@@ -11143,11 +12095,18 @@
                 <a:solidFill>
                   <a:srgbClr val="BDD7EE"/>
                 </a:solidFill>
-                <a:latin typeface="微软雅黑"/>
-                <a:ea typeface="微软雅黑"/>
+                <a:latin typeface="微软雅黑" panose="020B0503020204020204" charset="-122"/>
+                <a:ea typeface="微软雅黑" panose="020B0503020204020204" charset="-122"/>
               </a:rPr>
               <a:t>03 模块一</a:t>
             </a:r>
+            <a:endParaRPr sz="1200" b="0">
+              <a:solidFill>
+                <a:srgbClr val="BDD7EE"/>
+              </a:solidFill>
+              <a:latin typeface="微软雅黑" panose="020B0503020204020204" charset="-122"/>
+              <a:ea typeface="微软雅黑" panose="020B0503020204020204" charset="-122"/>
+            </a:endParaRPr>
           </a:p>
         </p:txBody>
       </p:sp>
@@ -11178,11 +12137,18 @@
                 <a:solidFill>
                   <a:srgbClr val="8C8C8C"/>
                 </a:solidFill>
-                <a:latin typeface="微软雅黑"/>
-                <a:ea typeface="微软雅黑"/>
+                <a:latin typeface="微软雅黑" panose="020B0503020204020204" charset="-122"/>
+                <a:ea typeface="微软雅黑" panose="020B0503020204020204" charset="-122"/>
               </a:rPr>
               <a:t>模拟电路 AI 智能化设计 · 赛题二</a:t>
             </a:r>
+            <a:endParaRPr sz="900" b="0">
+              <a:solidFill>
+                <a:srgbClr val="8C8C8C"/>
+              </a:solidFill>
+              <a:latin typeface="微软雅黑" panose="020B0503020204020204" charset="-122"/>
+              <a:ea typeface="微软雅黑" panose="020B0503020204020204" charset="-122"/>
+            </a:endParaRPr>
           </a:p>
         </p:txBody>
       </p:sp>
@@ -11214,11 +12180,18 @@
                 <a:solidFill>
                   <a:srgbClr val="8C8C8C"/>
                 </a:solidFill>
-                <a:latin typeface="微软雅黑"/>
-                <a:ea typeface="微软雅黑"/>
+                <a:latin typeface="微软雅黑" panose="020B0503020204020204" charset="-122"/>
+                <a:ea typeface="微软雅黑" panose="020B0503020204020204" charset="-122"/>
               </a:rPr>
               <a:t>5</a:t>
             </a:r>
+            <a:endParaRPr sz="900" b="0">
+              <a:solidFill>
+                <a:srgbClr val="8C8C8C"/>
+              </a:solidFill>
+              <a:latin typeface="微软雅黑" panose="020B0503020204020204" charset="-122"/>
+              <a:ea typeface="微软雅黑" panose="020B0503020204020204" charset="-122"/>
+            </a:endParaRPr>
           </a:p>
         </p:txBody>
       </p:sp>
@@ -11241,27 +12214,9 @@
                 <a:tableStyleId>{5C22544A-7EE6-4342-B048-85BDC9FD1C3A}</a:tableStyleId>
               </a:tblPr>
               <a:tblGrid>
-                <a:gridCol w="2377440">
-                  <a:extLst>
-                    <a:ext uri="{9D8B030D-6E8A-4147-A177-3AD203B41FA5}">
-                      <a16:colId xmlns:a16="http://schemas.microsoft.com/office/drawing/2014/main" val="20000"/>
-                    </a:ext>
-                  </a:extLst>
-                </a:gridCol>
-                <a:gridCol w="5120639">
-                  <a:extLst>
-                    <a:ext uri="{9D8B030D-6E8A-4147-A177-3AD203B41FA5}">
-                      <a16:colId xmlns:a16="http://schemas.microsoft.com/office/drawing/2014/main" val="20001"/>
-                    </a:ext>
-                  </a:extLst>
-                </a:gridCol>
-                <a:gridCol w="3474719">
-                  <a:extLst>
-                    <a:ext uri="{9D8B030D-6E8A-4147-A177-3AD203B41FA5}">
-                      <a16:colId xmlns:a16="http://schemas.microsoft.com/office/drawing/2014/main" val="20002"/>
-                    </a:ext>
-                  </a:extLst>
-                </a:gridCol>
+                <a:gridCol w="2377440"/>
+                <a:gridCol w="5120639"/>
+                <a:gridCol w="3474719"/>
               </a:tblGrid>
               <a:tr h="566928">
                 <a:tc>
@@ -11274,11 +12229,18 @@
                           <a:solidFill>
                             <a:srgbClr val="FFFFFF"/>
                           </a:solidFill>
-                          <a:latin typeface="微软雅黑"/>
-                          <a:ea typeface="微软雅黑"/>
+                          <a:latin typeface="微软雅黑" panose="020B0503020204020204" charset="-122"/>
+                          <a:ea typeface="微软雅黑" panose="020B0503020204020204" charset="-122"/>
                         </a:rPr>
                         <a:t>字段</a:t>
                       </a:r>
+                      <a:endParaRPr sz="1300" b="1">
+                        <a:solidFill>
+                          <a:srgbClr val="FFFFFF"/>
+                        </a:solidFill>
+                        <a:latin typeface="微软雅黑" panose="020B0503020204020204" charset="-122"/>
+                        <a:ea typeface="微软雅黑" panose="020B0503020204020204" charset="-122"/>
+                      </a:endParaRPr>
                     </a:p>
                   </a:txBody>
                   <a:tcPr>
@@ -11297,11 +12259,18 @@
                           <a:solidFill>
                             <a:srgbClr val="FFFFFF"/>
                           </a:solidFill>
-                          <a:latin typeface="微软雅黑"/>
-                          <a:ea typeface="微软雅黑"/>
+                          <a:latin typeface="微软雅黑" panose="020B0503020204020204" charset="-122"/>
+                          <a:ea typeface="微软雅黑" panose="020B0503020204020204" charset="-122"/>
                         </a:rPr>
                         <a:t>内容</a:t>
                       </a:r>
+                      <a:endParaRPr sz="1300" b="1">
+                        <a:solidFill>
+                          <a:srgbClr val="FFFFFF"/>
+                        </a:solidFill>
+                        <a:latin typeface="微软雅黑" panose="020B0503020204020204" charset="-122"/>
+                        <a:ea typeface="微软雅黑" panose="020B0503020204020204" charset="-122"/>
+                      </a:endParaRPr>
                     </a:p>
                   </a:txBody>
                   <a:tcPr>
@@ -11320,11 +12289,18 @@
                           <a:solidFill>
                             <a:srgbClr val="FFFFFF"/>
                           </a:solidFill>
-                          <a:latin typeface="微软雅黑"/>
-                          <a:ea typeface="微软雅黑"/>
+                          <a:latin typeface="微软雅黑" panose="020B0503020204020204" charset="-122"/>
+                          <a:ea typeface="微软雅黑" panose="020B0503020204020204" charset="-122"/>
                         </a:rPr>
                         <a:t>满足评分</a:t>
                       </a:r>
+                      <a:endParaRPr sz="1300" b="1">
+                        <a:solidFill>
+                          <a:srgbClr val="FFFFFF"/>
+                        </a:solidFill>
+                        <a:latin typeface="微软雅黑" panose="020B0503020204020204" charset="-122"/>
+                        <a:ea typeface="微软雅黑" panose="020B0503020204020204" charset="-122"/>
+                      </a:endParaRPr>
                     </a:p>
                   </a:txBody>
                   <a:tcPr>
@@ -11333,11 +12309,6 @@
                     </a:solidFill>
                   </a:tcPr>
                 </a:tc>
-                <a:extLst>
-                  <a:ext uri="{0D108BD9-81ED-4DB2-BD59-A6C34878D82A}">
-                    <a16:rowId xmlns:a16="http://schemas.microsoft.com/office/drawing/2014/main" val="10000"/>
-                  </a:ext>
-                </a:extLst>
               </a:tr>
               <a:tr h="566928">
                 <a:tc>
@@ -11350,11 +12321,18 @@
                           <a:solidFill>
                             <a:srgbClr val="1F3864"/>
                           </a:solidFill>
-                          <a:latin typeface="微软雅黑"/>
-                          <a:ea typeface="微软雅黑"/>
+                          <a:latin typeface="微软雅黑" panose="020B0503020204020204" charset="-122"/>
+                          <a:ea typeface="微软雅黑" panose="020B0503020204020204" charset="-122"/>
                         </a:rPr>
                         <a:t>design_type</a:t>
                       </a:r>
+                      <a:endParaRPr sz="1300" b="1">
+                        <a:solidFill>
+                          <a:srgbClr val="1F3864"/>
+                        </a:solidFill>
+                        <a:latin typeface="微软雅黑" panose="020B0503020204020204" charset="-122"/>
+                        <a:ea typeface="微软雅黑" panose="020B0503020204020204" charset="-122"/>
+                      </a:endParaRPr>
                     </a:p>
                   </a:txBody>
                   <a:tcPr>
@@ -11373,11 +12351,18 @@
                           <a:solidFill>
                             <a:srgbClr val="595959"/>
                           </a:solidFill>
-                          <a:latin typeface="微软雅黑"/>
-                          <a:ea typeface="微软雅黑"/>
+                          <a:latin typeface="微软雅黑" panose="020B0503020204020204" charset="-122"/>
+                          <a:ea typeface="微软雅黑" panose="020B0503020204020204" charset="-122"/>
                         </a:rPr>
                         <a:t>fully_differential_opamp_with_cmfb</a:t>
                       </a:r>
+                      <a:endParaRPr sz="1300" b="0">
+                        <a:solidFill>
+                          <a:srgbClr val="595959"/>
+                        </a:solidFill>
+                        <a:latin typeface="微软雅黑" panose="020B0503020204020204" charset="-122"/>
+                        <a:ea typeface="微软雅黑" panose="020B0503020204020204" charset="-122"/>
+                      </a:endParaRPr>
                     </a:p>
                   </a:txBody>
                   <a:tcPr>
@@ -11396,11 +12381,18 @@
                           <a:solidFill>
                             <a:srgbClr val="595959"/>
                           </a:solidFill>
-                          <a:latin typeface="微软雅黑"/>
-                          <a:ea typeface="微软雅黑"/>
+                          <a:latin typeface="微软雅黑" panose="020B0503020204020204" charset="-122"/>
+                          <a:ea typeface="微软雅黑" panose="020B0503020204020204" charset="-122"/>
                         </a:rPr>
                         <a:t>✅</a:t>
                       </a:r>
+                      <a:endParaRPr sz="1300" b="0">
+                        <a:solidFill>
+                          <a:srgbClr val="595959"/>
+                        </a:solidFill>
+                        <a:latin typeface="微软雅黑" panose="020B0503020204020204" charset="-122"/>
+                        <a:ea typeface="微软雅黑" panose="020B0503020204020204" charset="-122"/>
+                      </a:endParaRPr>
                     </a:p>
                   </a:txBody>
                   <a:tcPr>
@@ -11409,11 +12401,6 @@
                     </a:solidFill>
                   </a:tcPr>
                 </a:tc>
-                <a:extLst>
-                  <a:ext uri="{0D108BD9-81ED-4DB2-BD59-A6C34878D82A}">
-                    <a16:rowId xmlns:a16="http://schemas.microsoft.com/office/drawing/2014/main" val="10001"/>
-                  </a:ext>
-                </a:extLst>
               </a:tr>
               <a:tr h="566928">
                 <a:tc>
@@ -11426,11 +12413,18 @@
                           <a:solidFill>
                             <a:srgbClr val="1F3864"/>
                           </a:solidFill>
-                          <a:latin typeface="微软雅黑"/>
-                          <a:ea typeface="微软雅黑"/>
+                          <a:latin typeface="微软雅黑" panose="020B0503020204020204" charset="-122"/>
+                          <a:ea typeface="微软雅黑" panose="020B0503020204020204" charset="-122"/>
                         </a:rPr>
                         <a:t>constraints</a:t>
                       </a:r>
+                      <a:endParaRPr sz="1300" b="1">
+                        <a:solidFill>
+                          <a:srgbClr val="1F3864"/>
+                        </a:solidFill>
+                        <a:latin typeface="微软雅黑" panose="020B0503020204020204" charset="-122"/>
+                        <a:ea typeface="微软雅黑" panose="020B0503020204020204" charset="-122"/>
+                      </a:endParaRPr>
                     </a:p>
                   </a:txBody>
                   <a:tcPr>
@@ -11449,11 +12443,18 @@
                           <a:solidFill>
                             <a:srgbClr val="595959"/>
                           </a:solidFill>
-                          <a:latin typeface="微软雅黑"/>
-                          <a:ea typeface="微软雅黑"/>
+                          <a:latin typeface="微软雅黑" panose="020B0503020204020204" charset="-122"/>
+                          <a:ea typeface="微软雅黑" panose="020B0503020204020204" charset="-122"/>
                         </a:rPr>
                         <a:t>DC_Gain≥40dB；PM≥50°；GM≤−10dB；I_OPA≤3mA</a:t>
                       </a:r>
+                      <a:endParaRPr sz="1300" b="0">
+                        <a:solidFill>
+                          <a:srgbClr val="595959"/>
+                        </a:solidFill>
+                        <a:latin typeface="微软雅黑" panose="020B0503020204020204" charset="-122"/>
+                        <a:ea typeface="微软雅黑" panose="020B0503020204020204" charset="-122"/>
+                      </a:endParaRPr>
                     </a:p>
                   </a:txBody>
                   <a:tcPr>
@@ -11472,11 +12473,18 @@
                           <a:solidFill>
                             <a:srgbClr val="595959"/>
                           </a:solidFill>
-                          <a:latin typeface="微软雅黑"/>
-                          <a:ea typeface="微软雅黑"/>
+                          <a:latin typeface="微软雅黑" panose="020B0503020204020204" charset="-122"/>
+                          <a:ea typeface="微软雅黑" panose="020B0503020204020204" charset="-122"/>
                         </a:rPr>
                         <a:t>✅ 每项含 name/op/value/unit/type/priority</a:t>
                       </a:r>
+                      <a:endParaRPr sz="1300" b="0">
+                        <a:solidFill>
+                          <a:srgbClr val="595959"/>
+                        </a:solidFill>
+                        <a:latin typeface="微软雅黑" panose="020B0503020204020204" charset="-122"/>
+                        <a:ea typeface="微软雅黑" panose="020B0503020204020204" charset="-122"/>
+                      </a:endParaRPr>
                     </a:p>
                   </a:txBody>
                   <a:tcPr>
@@ -11485,11 +12493,6 @@
                     </a:solidFill>
                   </a:tcPr>
                 </a:tc>
-                <a:extLst>
-                  <a:ext uri="{0D108BD9-81ED-4DB2-BD59-A6C34878D82A}">
-                    <a16:rowId xmlns:a16="http://schemas.microsoft.com/office/drawing/2014/main" val="10002"/>
-                  </a:ext>
-                </a:extLst>
               </a:tr>
               <a:tr h="566928">
                 <a:tc>
@@ -11502,11 +12505,18 @@
                           <a:solidFill>
                             <a:srgbClr val="1F3864"/>
                           </a:solidFill>
-                          <a:latin typeface="微软雅黑"/>
-                          <a:ea typeface="微软雅黑"/>
+                          <a:latin typeface="微软雅黑" panose="020B0503020204020204" charset="-122"/>
+                          <a:ea typeface="微软雅黑" panose="020B0503020204020204" charset="-122"/>
                         </a:rPr>
                         <a:t>objectives</a:t>
                       </a:r>
+                      <a:endParaRPr sz="1300" b="1">
+                        <a:solidFill>
+                          <a:srgbClr val="1F3864"/>
+                        </a:solidFill>
+                        <a:latin typeface="微软雅黑" panose="020B0503020204020204" charset="-122"/>
+                        <a:ea typeface="微软雅黑" panose="020B0503020204020204" charset="-122"/>
+                      </a:endParaRPr>
                     </a:p>
                   </a:txBody>
                   <a:tcPr>
@@ -11525,11 +12535,18 @@
                           <a:solidFill>
                             <a:srgbClr val="595959"/>
                           </a:solidFill>
-                          <a:latin typeface="微软雅黑"/>
-                          <a:ea typeface="微软雅黑"/>
+                          <a:latin typeface="微软雅黑" panose="020B0503020204020204" charset="-122"/>
+                          <a:ea typeface="微软雅黑" panose="020B0503020204020204" charset="-122"/>
                         </a:rPr>
                         <a:t>Power↓；DC_Gain↑；UGB↑；Area↓</a:t>
                       </a:r>
+                      <a:endParaRPr sz="1300" b="0">
+                        <a:solidFill>
+                          <a:srgbClr val="595959"/>
+                        </a:solidFill>
+                        <a:latin typeface="微软雅黑" panose="020B0503020204020204" charset="-122"/>
+                        <a:ea typeface="微软雅黑" panose="020B0503020204020204" charset="-122"/>
+                      </a:endParaRPr>
                     </a:p>
                   </a:txBody>
                   <a:tcPr>
@@ -11548,11 +12565,18 @@
                           <a:solidFill>
                             <a:srgbClr val="595959"/>
                           </a:solidFill>
-                          <a:latin typeface="微软雅黑"/>
-                          <a:ea typeface="微软雅黑"/>
+                          <a:latin typeface="微软雅黑" panose="020B0503020204020204" charset="-122"/>
+                          <a:ea typeface="微软雅黑" panose="020B0503020204020204" charset="-122"/>
                         </a:rPr>
                         <a:t>✅ 每项含 name/direction/unit/priority</a:t>
                       </a:r>
+                      <a:endParaRPr sz="1300" b="0">
+                        <a:solidFill>
+                          <a:srgbClr val="595959"/>
+                        </a:solidFill>
+                        <a:latin typeface="微软雅黑" panose="020B0503020204020204" charset="-122"/>
+                        <a:ea typeface="微软雅黑" panose="020B0503020204020204" charset="-122"/>
+                      </a:endParaRPr>
                     </a:p>
                   </a:txBody>
                   <a:tcPr>
@@ -11561,11 +12585,6 @@
                     </a:solidFill>
                   </a:tcPr>
                 </a:tc>
-                <a:extLst>
-                  <a:ext uri="{0D108BD9-81ED-4DB2-BD59-A6C34878D82A}">
-                    <a16:rowId xmlns:a16="http://schemas.microsoft.com/office/drawing/2014/main" val="10003"/>
-                  </a:ext>
-                </a:extLst>
               </a:tr>
               <a:tr h="566928">
                 <a:tc>
@@ -11578,11 +12597,18 @@
                           <a:solidFill>
                             <a:srgbClr val="1F3864"/>
                           </a:solidFill>
-                          <a:latin typeface="微软雅黑"/>
-                          <a:ea typeface="微软雅黑"/>
+                          <a:latin typeface="微软雅黑" panose="020B0503020204020204" charset="-122"/>
+                          <a:ea typeface="微软雅黑" panose="020B0503020204020204" charset="-122"/>
                         </a:rPr>
                         <a:t>pvt / worst_case</a:t>
                       </a:r>
+                      <a:endParaRPr sz="1300" b="1">
+                        <a:solidFill>
+                          <a:srgbClr val="1F3864"/>
+                        </a:solidFill>
+                        <a:latin typeface="微软雅黑" panose="020B0503020204020204" charset="-122"/>
+                        <a:ea typeface="微软雅黑" panose="020B0503020204020204" charset="-122"/>
+                      </a:endParaRPr>
                     </a:p>
                   </a:txBody>
                   <a:tcPr>
@@ -11601,11 +12627,18 @@
                           <a:solidFill>
                             <a:srgbClr val="595959"/>
                           </a:solidFill>
-                          <a:latin typeface="微软雅黑"/>
-                          <a:ea typeface="微软雅黑"/>
+                          <a:latin typeface="微软雅黑" panose="020B0503020204020204" charset="-122"/>
+                          <a:ea typeface="微软雅黑" panose="020B0503020204020204" charset="-122"/>
                         </a:rPr>
                         <a:t>all_corners / true</a:t>
                       </a:r>
+                      <a:endParaRPr sz="1300" b="0">
+                        <a:solidFill>
+                          <a:srgbClr val="595959"/>
+                        </a:solidFill>
+                        <a:latin typeface="微软雅黑" panose="020B0503020204020204" charset="-122"/>
+                        <a:ea typeface="微软雅黑" panose="020B0503020204020204" charset="-122"/>
+                      </a:endParaRPr>
                     </a:p>
                   </a:txBody>
                   <a:tcPr>
@@ -11624,11 +12657,18 @@
                           <a:solidFill>
                             <a:srgbClr val="595959"/>
                           </a:solidFill>
-                          <a:latin typeface="微软雅黑"/>
-                          <a:ea typeface="微软雅黑"/>
+                          <a:latin typeface="微软雅黑" panose="020B0503020204020204" charset="-122"/>
+                          <a:ea typeface="微软雅黑" panose="020B0503020204020204" charset="-122"/>
                         </a:rPr>
                         <a:t>✅</a:t>
                       </a:r>
+                      <a:endParaRPr sz="1300" b="0">
+                        <a:solidFill>
+                          <a:srgbClr val="595959"/>
+                        </a:solidFill>
+                        <a:latin typeface="微软雅黑" panose="020B0503020204020204" charset="-122"/>
+                        <a:ea typeface="微软雅黑" panose="020B0503020204020204" charset="-122"/>
+                      </a:endParaRPr>
                     </a:p>
                   </a:txBody>
                   <a:tcPr>
@@ -11637,11 +12677,6 @@
                     </a:solidFill>
                   </a:tcPr>
                 </a:tc>
-                <a:extLst>
-                  <a:ext uri="{0D108BD9-81ED-4DB2-BD59-A6C34878D82A}">
-                    <a16:rowId xmlns:a16="http://schemas.microsoft.com/office/drawing/2014/main" val="10004"/>
-                  </a:ext>
-                </a:extLst>
               </a:tr>
             </a:tbl>
           </a:graphicData>
@@ -11695,14 +12730,45 @@
                 <a:solidFill>
                   <a:srgbClr val="C55A11"/>
                 </a:solidFill>
-                <a:latin typeface="微软雅黑"/>
-                <a:ea typeface="微软雅黑"/>
+                <a:latin typeface="微软雅黑" panose="020B0503020204020204" charset="-122"/>
+                <a:ea typeface="微软雅黑" panose="020B0503020204020204" charset="-122"/>
               </a:rPr>
               <a:t>评分口径：缺一类信息扣 1 分；输入里没写 PM/GM/I_OPA 也要按评分底线补进 constraints</a:t>
             </a:r>
-          </a:p>
-        </p:txBody>
-      </p:sp>
+            <a:endParaRPr sz="1300" b="1">
+              <a:solidFill>
+                <a:srgbClr val="C55A11"/>
+              </a:solidFill>
+              <a:latin typeface="微软雅黑" panose="020B0503020204020204" charset="-122"/>
+              <a:ea typeface="微软雅黑" panose="020B0503020204020204" charset="-122"/>
+            </a:endParaRPr>
+          </a:p>
+        </p:txBody>
+      </p:sp>
+      <p:pic>
+        <p:nvPicPr>
+          <p:cNvPr id="9" name="图片 8" descr="屏幕截图 2026-10-19 221026"/>
+          <p:cNvPicPr>
+            <a:picLocks noChangeAspect="1"/>
+          </p:cNvPicPr>
+          <p:nvPr/>
+        </p:nvPicPr>
+        <p:blipFill>
+          <a:blip r:embed="rId1"/>
+          <a:stretch>
+            <a:fillRect/>
+          </a:stretch>
+        </p:blipFill>
+        <p:spPr>
+          <a:xfrm>
+            <a:off x="1449705" y="4192905"/>
+            <a:ext cx="9010650" cy="901700"/>
+          </a:xfrm>
+          <a:prstGeom prst="rect">
+            <a:avLst/>
+          </a:prstGeom>
+        </p:spPr>
+      </p:pic>
     </p:spTree>
   </p:cSld>
   <p:clrMapOvr>
@@ -11769,7 +12835,6 @@
           <a:lstStyle/>
           <a:p>
             <a:pPr algn="ctr"/>
-            <a:endParaRPr/>
           </a:p>
         </p:txBody>
       </p:sp>
@@ -11800,11 +12865,18 @@
                 <a:solidFill>
                   <a:srgbClr val="FFFFFF"/>
                 </a:solidFill>
-                <a:latin typeface="微软雅黑"/>
-                <a:ea typeface="微软雅黑"/>
+                <a:latin typeface="微软雅黑" panose="020B0503020204020204" charset="-122"/>
+                <a:ea typeface="微软雅黑" panose="020B0503020204020204" charset="-122"/>
               </a:rPr>
               <a:t>模块二：先用图论把「结构」识别对</a:t>
             </a:r>
+            <a:endParaRPr sz="2600" b="1">
+              <a:solidFill>
+                <a:srgbClr val="FFFFFF"/>
+              </a:solidFill>
+              <a:latin typeface="微软雅黑" panose="020B0503020204020204" charset="-122"/>
+              <a:ea typeface="微软雅黑" panose="020B0503020204020204" charset="-122"/>
+            </a:endParaRPr>
           </a:p>
         </p:txBody>
       </p:sp>
@@ -11836,11 +12908,18 @@
                 <a:solidFill>
                   <a:srgbClr val="BDD7EE"/>
                 </a:solidFill>
-                <a:latin typeface="微软雅黑"/>
-                <a:ea typeface="微软雅黑"/>
+                <a:latin typeface="微软雅黑" panose="020B0503020204020204" charset="-122"/>
+                <a:ea typeface="微软雅黑" panose="020B0503020204020204" charset="-122"/>
               </a:rPr>
               <a:t>04 模块二</a:t>
             </a:r>
+            <a:endParaRPr sz="1200" b="0">
+              <a:solidFill>
+                <a:srgbClr val="BDD7EE"/>
+              </a:solidFill>
+              <a:latin typeface="微软雅黑" panose="020B0503020204020204" charset="-122"/>
+              <a:ea typeface="微软雅黑" panose="020B0503020204020204" charset="-122"/>
+            </a:endParaRPr>
           </a:p>
         </p:txBody>
       </p:sp>
@@ -11871,11 +12950,18 @@
                 <a:solidFill>
                   <a:srgbClr val="8C8C8C"/>
                 </a:solidFill>
-                <a:latin typeface="微软雅黑"/>
-                <a:ea typeface="微软雅黑"/>
+                <a:latin typeface="微软雅黑" panose="020B0503020204020204" charset="-122"/>
+                <a:ea typeface="微软雅黑" panose="020B0503020204020204" charset="-122"/>
               </a:rPr>
               <a:t>模拟电路 AI 智能化设计 · 赛题二</a:t>
             </a:r>
+            <a:endParaRPr sz="900" b="0">
+              <a:solidFill>
+                <a:srgbClr val="8C8C8C"/>
+              </a:solidFill>
+              <a:latin typeface="微软雅黑" panose="020B0503020204020204" charset="-122"/>
+              <a:ea typeface="微软雅黑" panose="020B0503020204020204" charset="-122"/>
+            </a:endParaRPr>
           </a:p>
         </p:txBody>
       </p:sp>
@@ -11907,11 +12993,18 @@
                 <a:solidFill>
                   <a:srgbClr val="8C8C8C"/>
                 </a:solidFill>
-                <a:latin typeface="微软雅黑"/>
-                <a:ea typeface="微软雅黑"/>
+                <a:latin typeface="微软雅黑" panose="020B0503020204020204" charset="-122"/>
+                <a:ea typeface="微软雅黑" panose="020B0503020204020204" charset="-122"/>
               </a:rPr>
               <a:t>6</a:t>
             </a:r>
+            <a:endParaRPr sz="900" b="0">
+              <a:solidFill>
+                <a:srgbClr val="8C8C8C"/>
+              </a:solidFill>
+              <a:latin typeface="微软雅黑" panose="020B0503020204020204" charset="-122"/>
+              <a:ea typeface="微软雅黑" panose="020B0503020204020204" charset="-122"/>
+            </a:endParaRPr>
           </a:p>
         </p:txBody>
       </p:sp>
@@ -11934,27 +13027,9 @@
                 <a:tableStyleId>{5C22544A-7EE6-4342-B048-85BDC9FD1C3A}</a:tableStyleId>
               </a:tblPr>
               <a:tblGrid>
-                <a:gridCol w="1828800">
-                  <a:extLst>
-                    <a:ext uri="{9D8B030D-6E8A-4147-A177-3AD203B41FA5}">
-                      <a16:colId xmlns:a16="http://schemas.microsoft.com/office/drawing/2014/main" val="20000"/>
-                    </a:ext>
-                  </a:extLst>
-                </a:gridCol>
-                <a:gridCol w="4754880">
-                  <a:extLst>
-                    <a:ext uri="{9D8B030D-6E8A-4147-A177-3AD203B41FA5}">
-                      <a16:colId xmlns:a16="http://schemas.microsoft.com/office/drawing/2014/main" val="20001"/>
-                    </a:ext>
-                  </a:extLst>
-                </a:gridCol>
-                <a:gridCol w="4389120">
-                  <a:extLst>
-                    <a:ext uri="{9D8B030D-6E8A-4147-A177-3AD203B41FA5}">
-                      <a16:colId xmlns:a16="http://schemas.microsoft.com/office/drawing/2014/main" val="20002"/>
-                    </a:ext>
-                  </a:extLst>
-                </a:gridCol>
+                <a:gridCol w="1828800"/>
+                <a:gridCol w="4754880"/>
+                <a:gridCol w="4389120"/>
               </a:tblGrid>
               <a:tr h="530352">
                 <a:tc>
@@ -11967,11 +13042,18 @@
                           <a:solidFill>
                             <a:srgbClr val="FFFFFF"/>
                           </a:solidFill>
-                          <a:latin typeface="微软雅黑"/>
-                          <a:ea typeface="微软雅黑"/>
+                          <a:latin typeface="微软雅黑" panose="020B0503020204020204" charset="-122"/>
+                          <a:ea typeface="微软雅黑" panose="020B0503020204020204" charset="-122"/>
                         </a:rPr>
                         <a:t>步骤</a:t>
                       </a:r>
+                      <a:endParaRPr sz="1300" b="1">
+                        <a:solidFill>
+                          <a:srgbClr val="FFFFFF"/>
+                        </a:solidFill>
+                        <a:latin typeface="微软雅黑" panose="020B0503020204020204" charset="-122"/>
+                        <a:ea typeface="微软雅黑" panose="020B0503020204020204" charset="-122"/>
+                      </a:endParaRPr>
                     </a:p>
                   </a:txBody>
                   <a:tcPr>
@@ -11990,11 +13072,18 @@
                           <a:solidFill>
                             <a:srgbClr val="FFFFFF"/>
                           </a:solidFill>
-                          <a:latin typeface="微软雅黑"/>
-                          <a:ea typeface="微软雅黑"/>
+                          <a:latin typeface="微软雅黑" panose="020B0503020204020204" charset="-122"/>
+                          <a:ea typeface="微软雅黑" panose="020B0503020204020204" charset="-122"/>
                         </a:rPr>
                         <a:t>方法</a:t>
                       </a:r>
+                      <a:endParaRPr sz="1300" b="1">
+                        <a:solidFill>
+                          <a:srgbClr val="FFFFFF"/>
+                        </a:solidFill>
+                        <a:latin typeface="微软雅黑" panose="020B0503020204020204" charset="-122"/>
+                        <a:ea typeface="微软雅黑" panose="020B0503020204020204" charset="-122"/>
+                      </a:endParaRPr>
                     </a:p>
                   </a:txBody>
                   <a:tcPr>
@@ -12013,11 +13102,18 @@
                           <a:solidFill>
                             <a:srgbClr val="FFFFFF"/>
                           </a:solidFill>
-                          <a:latin typeface="微软雅黑"/>
-                          <a:ea typeface="微软雅黑"/>
+                          <a:latin typeface="微软雅黑" panose="020B0503020204020204" charset="-122"/>
+                          <a:ea typeface="微软雅黑" panose="020B0503020204020204" charset="-122"/>
                         </a:rPr>
                         <a:t>为什么这么做</a:t>
                       </a:r>
+                      <a:endParaRPr sz="1300" b="1">
+                        <a:solidFill>
+                          <a:srgbClr val="FFFFFF"/>
+                        </a:solidFill>
+                        <a:latin typeface="微软雅黑" panose="020B0503020204020204" charset="-122"/>
+                        <a:ea typeface="微软雅黑" panose="020B0503020204020204" charset="-122"/>
+                      </a:endParaRPr>
                     </a:p>
                   </a:txBody>
                   <a:tcPr>
@@ -12026,11 +13122,6 @@
                     </a:solidFill>
                   </a:tcPr>
                 </a:tc>
-                <a:extLst>
-                  <a:ext uri="{0D108BD9-81ED-4DB2-BD59-A6C34878D82A}">
-                    <a16:rowId xmlns:a16="http://schemas.microsoft.com/office/drawing/2014/main" val="10000"/>
-                  </a:ext>
-                </a:extLst>
               </a:tr>
               <a:tr h="530352">
                 <a:tc>
@@ -12043,11 +13134,18 @@
                           <a:solidFill>
                             <a:srgbClr val="1F3864"/>
                           </a:solidFill>
-                          <a:latin typeface="微软雅黑"/>
-                          <a:ea typeface="微软雅黑"/>
+                          <a:latin typeface="微软雅黑" panose="020B0503020204020204" charset="-122"/>
+                          <a:ea typeface="微软雅黑" panose="020B0503020204020204" charset="-122"/>
                         </a:rPr>
                         <a:t>找对称</a:t>
                       </a:r>
+                      <a:endParaRPr sz="1300" b="1">
+                        <a:solidFill>
+                          <a:srgbClr val="1F3864"/>
+                        </a:solidFill>
+                        <a:latin typeface="微软雅黑" panose="020B0503020204020204" charset="-122"/>
+                        <a:ea typeface="微软雅黑" panose="020B0503020204020204" charset="-122"/>
+                      </a:endParaRPr>
                     </a:p>
                   </a:txBody>
                   <a:tcPr>
@@ -12066,11 +13164,18 @@
                           <a:solidFill>
                             <a:srgbClr val="595959"/>
                           </a:solidFill>
-                          <a:latin typeface="微软雅黑"/>
-                          <a:ea typeface="微软雅黑"/>
+                          <a:latin typeface="微软雅黑" panose="020B0503020204020204" charset="-122"/>
+                          <a:ea typeface="微软雅黑" panose="020B0503020204020204" charset="-122"/>
                         </a:rPr>
                         <a:t>Weisfeiler-Lehman 颜色细化求候选</a:t>
                       </a:r>
+                      <a:endParaRPr sz="1300" b="0">
+                        <a:solidFill>
+                          <a:srgbClr val="595959"/>
+                        </a:solidFill>
+                        <a:latin typeface="微软雅黑" panose="020B0503020204020204" charset="-122"/>
+                        <a:ea typeface="微软雅黑" panose="020B0503020204020204" charset="-122"/>
+                      </a:endParaRPr>
                     </a:p>
                   </a:txBody>
                   <a:tcPr>
@@ -12089,11 +13194,18 @@
                           <a:solidFill>
                             <a:srgbClr val="595959"/>
                           </a:solidFill>
-                          <a:latin typeface="微软雅黑"/>
-                          <a:ea typeface="微软雅黑"/>
+                          <a:latin typeface="微软雅黑" panose="020B0503020204020204" charset="-122"/>
+                          <a:ea typeface="微软雅黑" panose="020B0503020204020204" charset="-122"/>
                         </a:rPr>
                         <a:t>参数化后尺寸都是变量名，「比尺寸」永远不相等</a:t>
                       </a:r>
+                      <a:endParaRPr sz="1300" b="0">
+                        <a:solidFill>
+                          <a:srgbClr val="595959"/>
+                        </a:solidFill>
+                        <a:latin typeface="微软雅黑" panose="020B0503020204020204" charset="-122"/>
+                        <a:ea typeface="微软雅黑" panose="020B0503020204020204" charset="-122"/>
+                      </a:endParaRPr>
                     </a:p>
                   </a:txBody>
                   <a:tcPr>
@@ -12102,11 +13214,6 @@
                     </a:solidFill>
                   </a:tcPr>
                 </a:tc>
-                <a:extLst>
-                  <a:ext uri="{0D108BD9-81ED-4DB2-BD59-A6C34878D82A}">
-                    <a16:rowId xmlns:a16="http://schemas.microsoft.com/office/drawing/2014/main" val="10001"/>
-                  </a:ext>
-                </a:extLst>
               </a:tr>
               <a:tr h="530352">
                 <a:tc>
@@ -12119,11 +13226,18 @@
                           <a:solidFill>
                             <a:srgbClr val="1F3864"/>
                           </a:solidFill>
-                          <a:latin typeface="微软雅黑"/>
-                          <a:ea typeface="微软雅黑"/>
+                          <a:latin typeface="微软雅黑" panose="020B0503020204020204" charset="-122"/>
+                          <a:ea typeface="微软雅黑" panose="020B0503020204020204" charset="-122"/>
                         </a:rPr>
                         <a:t>全局校验</a:t>
                       </a:r>
+                      <a:endParaRPr sz="1300" b="1">
+                        <a:solidFill>
+                          <a:srgbClr val="1F3864"/>
+                        </a:solidFill>
+                        <a:latin typeface="微软雅黑" panose="020B0503020204020204" charset="-122"/>
+                        <a:ea typeface="微软雅黑" panose="020B0503020204020204" charset="-122"/>
+                      </a:endParaRPr>
                     </a:p>
                   </a:txBody>
                   <a:tcPr>
@@ -12142,11 +13256,18 @@
                           <a:solidFill>
                             <a:srgbClr val="595959"/>
                           </a:solidFill>
-                          <a:latin typeface="微软雅黑"/>
-                          <a:ea typeface="微软雅黑"/>
+                          <a:latin typeface="微软雅黑" panose="020B0503020204020204" charset="-122"/>
+                          <a:ea typeface="微软雅黑" panose="020B0503020204020204" charset="-122"/>
                         </a:rPr>
                         <a:t>重建置换 σ，检查每个器件都有镜像</a:t>
                       </a:r>
+                      <a:endParaRPr sz="1300" b="0">
+                        <a:solidFill>
+                          <a:srgbClr val="595959"/>
+                        </a:solidFill>
+                        <a:latin typeface="微软雅黑" panose="020B0503020204020204" charset="-122"/>
+                        <a:ea typeface="微软雅黑" panose="020B0503020204020204" charset="-122"/>
+                      </a:endParaRPr>
                     </a:p>
                   </a:txBody>
                   <a:tcPr>
@@ -12165,11 +13286,18 @@
                           <a:solidFill>
                             <a:srgbClr val="595959"/>
                           </a:solidFill>
-                          <a:latin typeface="微软雅黑"/>
-                          <a:ea typeface="微软雅黑"/>
+                          <a:latin typeface="微软雅黑" panose="020B0503020204020204" charset="-122"/>
+                          <a:ea typeface="微软雅黑" panose="020B0503020204020204" charset="-122"/>
                         </a:rPr>
                         <a:t>同色只代表「可能」对称，必须逐器件验证</a:t>
                       </a:r>
+                      <a:endParaRPr sz="1300" b="0">
+                        <a:solidFill>
+                          <a:srgbClr val="595959"/>
+                        </a:solidFill>
+                        <a:latin typeface="微软雅黑" panose="020B0503020204020204" charset="-122"/>
+                        <a:ea typeface="微软雅黑" panose="020B0503020204020204" charset="-122"/>
+                      </a:endParaRPr>
                     </a:p>
                   </a:txBody>
                   <a:tcPr>
@@ -12178,11 +13306,6 @@
                     </a:solidFill>
                   </a:tcPr>
                 </a:tc>
-                <a:extLst>
-                  <a:ext uri="{0D108BD9-81ED-4DB2-BD59-A6C34878D82A}">
-                    <a16:rowId xmlns:a16="http://schemas.microsoft.com/office/drawing/2014/main" val="10002"/>
-                  </a:ext>
-                </a:extLst>
               </a:tr>
               <a:tr h="530352">
                 <a:tc>
@@ -12195,11 +13318,18 @@
                           <a:solidFill>
                             <a:srgbClr val="1F3864"/>
                           </a:solidFill>
-                          <a:latin typeface="微软雅黑"/>
-                          <a:ea typeface="微软雅黑"/>
+                          <a:latin typeface="微软雅黑" panose="020B0503020204020204" charset="-122"/>
+                          <a:ea typeface="微软雅黑" panose="020B0503020204020204" charset="-122"/>
                         </a:rPr>
                         <a:t>找匹配</a:t>
                       </a:r>
+                      <a:endParaRPr sz="1300" b="1">
+                        <a:solidFill>
+                          <a:srgbClr val="1F3864"/>
+                        </a:solidFill>
+                        <a:latin typeface="微软雅黑" panose="020B0503020204020204" charset="-122"/>
+                        <a:ea typeface="微软雅黑" panose="020B0503020204020204" charset="-122"/>
+                      </a:endParaRPr>
                     </a:p>
                   </a:txBody>
                   <a:tcPr>
@@ -12218,11 +13348,18 @@
                           <a:solidFill>
                             <a:srgbClr val="595959"/>
                           </a:solidFill>
-                          <a:latin typeface="微软雅黑"/>
-                          <a:ea typeface="微软雅黑"/>
+                          <a:latin typeface="微软雅黑" panose="020B0503020204020204" charset="-122"/>
+                          <a:ea typeface="微软雅黑" panose="020B0503020204020204" charset="-122"/>
                         </a:rPr>
                         <a:t>差分对作种子，沿两臂对应找同类器件</a:t>
                       </a:r>
+                      <a:endParaRPr sz="1300" b="0">
+                        <a:solidFill>
+                          <a:srgbClr val="595959"/>
+                        </a:solidFill>
+                        <a:latin typeface="微软雅黑" panose="020B0503020204020204" charset="-122"/>
+                        <a:ea typeface="微软雅黑" panose="020B0503020204020204" charset="-122"/>
+                      </a:endParaRPr>
                     </a:p>
                   </a:txBody>
                   <a:tcPr>
@@ -12241,11 +13378,18 @@
                           <a:solidFill>
                             <a:srgbClr val="595959"/>
                           </a:solidFill>
-                          <a:latin typeface="微软雅黑"/>
-                          <a:ea typeface="微软雅黑"/>
+                          <a:latin typeface="微软雅黑" panose="020B0503020204020204" charset="-122"/>
+                          <a:ea typeface="微软雅黑" panose="020B0503020204020204" charset="-122"/>
                         </a:rPr>
                         <a:t>对称是图论性质，匹配是工艺性质，不能混</a:t>
                       </a:r>
+                      <a:endParaRPr sz="1300" b="0">
+                        <a:solidFill>
+                          <a:srgbClr val="595959"/>
+                        </a:solidFill>
+                        <a:latin typeface="微软雅黑" panose="020B0503020204020204" charset="-122"/>
+                        <a:ea typeface="微软雅黑" panose="020B0503020204020204" charset="-122"/>
+                      </a:endParaRPr>
                     </a:p>
                   </a:txBody>
                   <a:tcPr>
@@ -12254,11 +13398,6 @@
                     </a:solidFill>
                   </a:tcPr>
                 </a:tc>
-                <a:extLst>
-                  <a:ext uri="{0D108BD9-81ED-4DB2-BD59-A6C34878D82A}">
-                    <a16:rowId xmlns:a16="http://schemas.microsoft.com/office/drawing/2014/main" val="10003"/>
-                  </a:ext>
-                </a:extLst>
               </a:tr>
               <a:tr h="530352">
                 <a:tc>
@@ -12271,11 +13410,18 @@
                           <a:solidFill>
                             <a:srgbClr val="1F3864"/>
                           </a:solidFill>
-                          <a:latin typeface="微软雅黑"/>
-                          <a:ea typeface="微软雅黑"/>
+                          <a:latin typeface="微软雅黑" panose="020B0503020204020204" charset="-122"/>
+                          <a:ea typeface="微软雅黑" panose="020B0503020204020204" charset="-122"/>
                         </a:rPr>
                         <a:t>补家族</a:t>
                       </a:r>
+                      <a:endParaRPr sz="1300" b="1">
+                        <a:solidFill>
+                          <a:srgbClr val="1F3864"/>
+                        </a:solidFill>
+                        <a:latin typeface="微软雅黑" panose="020B0503020204020204" charset="-122"/>
+                        <a:ea typeface="微软雅黑" panose="020B0503020204020204" charset="-122"/>
+                      </a:endParaRPr>
                     </a:p>
                   </a:txBody>
                   <a:tcPr>
@@ -12294,11 +13440,18 @@
                           <a:solidFill>
                             <a:srgbClr val="595959"/>
                           </a:solidFill>
-                          <a:latin typeface="微软雅黑"/>
-                          <a:ea typeface="微软雅黑"/>
+                          <a:latin typeface="微软雅黑" panose="020B0503020204020204" charset="-122"/>
+                          <a:ea typeface="微软雅黑" panose="020B0503020204020204" charset="-122"/>
                         </a:rPr>
                         <a:t>共源共栅偏置家族（同栅不同源）</a:t>
                       </a:r>
+                      <a:endParaRPr sz="1300" b="0">
+                        <a:solidFill>
+                          <a:srgbClr val="595959"/>
+                        </a:solidFill>
+                        <a:latin typeface="微软雅黑" panose="020B0503020204020204" charset="-122"/>
+                        <a:ea typeface="微软雅黑" panose="020B0503020204020204" charset="-122"/>
+                      </a:endParaRPr>
                     </a:p>
                   </a:txBody>
                   <a:tcPr>
@@ -12317,11 +13470,18 @@
                           <a:solidFill>
                             <a:srgbClr val="595959"/>
                           </a:solidFill>
-                          <a:latin typeface="微软雅黑"/>
-                          <a:ea typeface="微软雅黑"/>
+                          <a:latin typeface="微软雅黑" panose="020B0503020204020204" charset="-122"/>
+                          <a:ea typeface="微软雅黑" panose="020B0503020204020204" charset="-122"/>
                         </a:rPr>
                         <a:t>原判据「同栅同源」会把这族拆散</a:t>
                       </a:r>
+                      <a:endParaRPr sz="1300" b="0">
+                        <a:solidFill>
+                          <a:srgbClr val="595959"/>
+                        </a:solidFill>
+                        <a:latin typeface="微软雅黑" panose="020B0503020204020204" charset="-122"/>
+                        <a:ea typeface="微软雅黑" panose="020B0503020204020204" charset="-122"/>
+                      </a:endParaRPr>
                     </a:p>
                   </a:txBody>
                   <a:tcPr>
@@ -12330,11 +13490,6 @@
                     </a:solidFill>
                   </a:tcPr>
                 </a:tc>
-                <a:extLst>
-                  <a:ext uri="{0D108BD9-81ED-4DB2-BD59-A6C34878D82A}">
-                    <a16:rowId xmlns:a16="http://schemas.microsoft.com/office/drawing/2014/main" val="10004"/>
-                  </a:ext>
-                </a:extLst>
               </a:tr>
             </a:tbl>
           </a:graphicData>
@@ -12388,11 +13543,18 @@
                 <a:solidFill>
                   <a:srgbClr val="C55A11"/>
                 </a:solidFill>
-                <a:latin typeface="微软雅黑"/>
-                <a:ea typeface="微软雅黑"/>
+                <a:latin typeface="微软雅黑" panose="020B0503020204020204" charset="-122"/>
+                <a:ea typeface="微软雅黑" panose="020B0503020204020204" charset="-122"/>
               </a:rPr>
               <a:t>核心认知：对称（可互换）≠ 匹配（版图要一致但电路不等价）</a:t>
             </a:r>
+            <a:endParaRPr sz="1300" b="1">
+              <a:solidFill>
+                <a:srgbClr val="C55A11"/>
+              </a:solidFill>
+              <a:latin typeface="微软雅黑" panose="020B0503020204020204" charset="-122"/>
+              <a:ea typeface="微软雅黑" panose="020B0503020204020204" charset="-122"/>
+            </a:endParaRPr>
           </a:p>
         </p:txBody>
       </p:sp>
@@ -12428,11 +13590,18 @@
                 <a:solidFill>
                   <a:srgbClr val="595959"/>
                 </a:solidFill>
-                <a:latin typeface="微软雅黑"/>
-                <a:ea typeface="微软雅黑"/>
+                <a:latin typeface="微软雅黑" panose="020B0503020204020204" charset="-122"/>
+                <a:ea typeface="微软雅黑" panose="020B0503020204020204" charset="-122"/>
               </a:rPr>
               <a:t>• 初版把 CMFB 差分对当对称种子，导致 8 个器件找不到镜像对象，而冲突检测还报「无冲突」</a:t>
             </a:r>
+            <a:endParaRPr sz="1400" b="0">
+              <a:solidFill>
+                <a:srgbClr val="595959"/>
+              </a:solidFill>
+              <a:latin typeface="微软雅黑" panose="020B0503020204020204" charset="-122"/>
+              <a:ea typeface="微软雅黑" panose="020B0503020204020204" charset="-122"/>
+            </a:endParaRPr>
           </a:p>
         </p:txBody>
       </p:sp>
@@ -12502,7 +13671,6 @@
           <a:lstStyle/>
           <a:p>
             <a:pPr algn="ctr"/>
-            <a:endParaRPr/>
           </a:p>
         </p:txBody>
       </p:sp>
@@ -12533,11 +13701,18 @@
                 <a:solidFill>
                   <a:srgbClr val="FFFFFF"/>
                 </a:solidFill>
-                <a:latin typeface="微软雅黑"/>
-                <a:ea typeface="微软雅黑"/>
+                <a:latin typeface="微软雅黑" panose="020B0503020204020204" charset="-122"/>
+                <a:ea typeface="微软雅黑" panose="020B0503020204020204" charset="-122"/>
               </a:rPr>
               <a:t>模块二：105 → 47，且证明没改坏电路</a:t>
             </a:r>
+            <a:endParaRPr sz="2600" b="1">
+              <a:solidFill>
+                <a:srgbClr val="FFFFFF"/>
+              </a:solidFill>
+              <a:latin typeface="微软雅黑" panose="020B0503020204020204" charset="-122"/>
+              <a:ea typeface="微软雅黑" panose="020B0503020204020204" charset="-122"/>
+            </a:endParaRPr>
           </a:p>
         </p:txBody>
       </p:sp>
@@ -12569,11 +13744,18 @@
                 <a:solidFill>
                   <a:srgbClr val="BDD7EE"/>
                 </a:solidFill>
-                <a:latin typeface="微软雅黑"/>
-                <a:ea typeface="微软雅黑"/>
+                <a:latin typeface="微软雅黑" panose="020B0503020204020204" charset="-122"/>
+                <a:ea typeface="微软雅黑" panose="020B0503020204020204" charset="-122"/>
               </a:rPr>
               <a:t>04 模块二</a:t>
             </a:r>
+            <a:endParaRPr sz="1200" b="0">
+              <a:solidFill>
+                <a:srgbClr val="BDD7EE"/>
+              </a:solidFill>
+              <a:latin typeface="微软雅黑" panose="020B0503020204020204" charset="-122"/>
+              <a:ea typeface="微软雅黑" panose="020B0503020204020204" charset="-122"/>
+            </a:endParaRPr>
           </a:p>
         </p:txBody>
       </p:sp>
@@ -12604,11 +13786,18 @@
                 <a:solidFill>
                   <a:srgbClr val="8C8C8C"/>
                 </a:solidFill>
-                <a:latin typeface="微软雅黑"/>
-                <a:ea typeface="微软雅黑"/>
+                <a:latin typeface="微软雅黑" panose="020B0503020204020204" charset="-122"/>
+                <a:ea typeface="微软雅黑" panose="020B0503020204020204" charset="-122"/>
               </a:rPr>
               <a:t>模拟电路 AI 智能化设计 · 赛题二</a:t>
             </a:r>
+            <a:endParaRPr sz="900" b="0">
+              <a:solidFill>
+                <a:srgbClr val="8C8C8C"/>
+              </a:solidFill>
+              <a:latin typeface="微软雅黑" panose="020B0503020204020204" charset="-122"/>
+              <a:ea typeface="微软雅黑" panose="020B0503020204020204" charset="-122"/>
+            </a:endParaRPr>
           </a:p>
         </p:txBody>
       </p:sp>
@@ -12640,11 +13829,18 @@
                 <a:solidFill>
                   <a:srgbClr val="8C8C8C"/>
                 </a:solidFill>
-                <a:latin typeface="微软雅黑"/>
-                <a:ea typeface="微软雅黑"/>
+                <a:latin typeface="微软雅黑" panose="020B0503020204020204" charset="-122"/>
+                <a:ea typeface="微软雅黑" panose="020B0503020204020204" charset="-122"/>
               </a:rPr>
               <a:t>7</a:t>
             </a:r>
+            <a:endParaRPr sz="900" b="0">
+              <a:solidFill>
+                <a:srgbClr val="8C8C8C"/>
+              </a:solidFill>
+              <a:latin typeface="微软雅黑" panose="020B0503020204020204" charset="-122"/>
+              <a:ea typeface="微软雅黑" panose="020B0503020204020204" charset="-122"/>
+            </a:endParaRPr>
           </a:p>
         </p:txBody>
       </p:sp>
@@ -12658,7 +13854,7 @@
         </p:nvGraphicFramePr>
         <p:xfrm>
           <a:off x="594360" y="1188720"/>
-          <a:ext cx="10972800" cy="3328416"/>
+          <a:ext cx="4239260" cy="5058410"/>
         </p:xfrm>
         <a:graphic>
           <a:graphicData uri="http://schemas.openxmlformats.org/drawingml/2006/table">
@@ -12667,22 +13863,10 @@
                 <a:tableStyleId>{5C22544A-7EE6-4342-B048-85BDC9FD1C3A}</a:tableStyleId>
               </a:tblPr>
               <a:tblGrid>
-                <a:gridCol w="3108960">
-                  <a:extLst>
-                    <a:ext uri="{9D8B030D-6E8A-4147-A177-3AD203B41FA5}">
-                      <a16:colId xmlns:a16="http://schemas.microsoft.com/office/drawing/2014/main" val="20000"/>
-                    </a:ext>
-                  </a:extLst>
-                </a:gridCol>
-                <a:gridCol w="7863840">
-                  <a:extLst>
-                    <a:ext uri="{9D8B030D-6E8A-4147-A177-3AD203B41FA5}">
-                      <a16:colId xmlns:a16="http://schemas.microsoft.com/office/drawing/2014/main" val="20001"/>
-                    </a:ext>
-                  </a:extLst>
-                </a:gridCol>
+                <a:gridCol w="1201420"/>
+                <a:gridCol w="3037840"/>
               </a:tblGrid>
-              <a:tr h="475488">
+              <a:tr h="565785">
                 <a:tc>
                   <a:txBody>
                     <a:bodyPr/>
@@ -12693,11 +13877,18 @@
                           <a:solidFill>
                             <a:srgbClr val="FFFFFF"/>
                           </a:solidFill>
-                          <a:latin typeface="微软雅黑"/>
-                          <a:ea typeface="微软雅黑"/>
+                          <a:latin typeface="微软雅黑" panose="020B0503020204020204" charset="-122"/>
+                          <a:ea typeface="微软雅黑" panose="020B0503020204020204" charset="-122"/>
                         </a:rPr>
                         <a:t>指标</a:t>
                       </a:r>
+                      <a:endParaRPr sz="1300" b="1">
+                        <a:solidFill>
+                          <a:srgbClr val="FFFFFF"/>
+                        </a:solidFill>
+                        <a:latin typeface="微软雅黑" panose="020B0503020204020204" charset="-122"/>
+                        <a:ea typeface="微软雅黑" panose="020B0503020204020204" charset="-122"/>
+                      </a:endParaRPr>
                     </a:p>
                   </a:txBody>
                   <a:tcPr>
@@ -12716,11 +13907,18 @@
                           <a:solidFill>
                             <a:srgbClr val="FFFFFF"/>
                           </a:solidFill>
-                          <a:latin typeface="微软雅黑"/>
-                          <a:ea typeface="微软雅黑"/>
+                          <a:latin typeface="微软雅黑" panose="020B0503020204020204" charset="-122"/>
+                          <a:ea typeface="微软雅黑" panose="020B0503020204020204" charset="-122"/>
                         </a:rPr>
                         <a:t>结果</a:t>
                       </a:r>
+                      <a:endParaRPr sz="1300" b="1">
+                        <a:solidFill>
+                          <a:srgbClr val="FFFFFF"/>
+                        </a:solidFill>
+                        <a:latin typeface="微软雅黑" panose="020B0503020204020204" charset="-122"/>
+                        <a:ea typeface="微软雅黑" panose="020B0503020204020204" charset="-122"/>
+                      </a:endParaRPr>
                     </a:p>
                   </a:txBody>
                   <a:tcPr>
@@ -12729,13 +13927,8 @@
                     </a:solidFill>
                   </a:tcPr>
                 </a:tc>
-                <a:extLst>
-                  <a:ext uri="{0D108BD9-81ED-4DB2-BD59-A6C34878D82A}">
-                    <a16:rowId xmlns:a16="http://schemas.microsoft.com/office/drawing/2014/main" val="10000"/>
-                  </a:ext>
-                </a:extLst>
               </a:tr>
-              <a:tr h="475488">
+              <a:tr h="565785">
                 <a:tc>
                   <a:txBody>
                     <a:bodyPr/>
@@ -12746,11 +13939,18 @@
                           <a:solidFill>
                             <a:srgbClr val="1F3864"/>
                           </a:solidFill>
-                          <a:latin typeface="微软雅黑"/>
-                          <a:ea typeface="微软雅黑"/>
+                          <a:latin typeface="微软雅黑" panose="020B0503020204020204" charset="-122"/>
+                          <a:ea typeface="微软雅黑" panose="020B0503020204020204" charset="-122"/>
                         </a:rPr>
                         <a:t>识别覆盖率</a:t>
                       </a:r>
+                      <a:endParaRPr sz="1400" b="1">
+                        <a:solidFill>
+                          <a:srgbClr val="1F3864"/>
+                        </a:solidFill>
+                        <a:latin typeface="微软雅黑" panose="020B0503020204020204" charset="-122"/>
+                        <a:ea typeface="微软雅黑" panose="020B0503020204020204" charset="-122"/>
+                      </a:endParaRPr>
                     </a:p>
                   </a:txBody>
                   <a:tcPr>
@@ -12769,11 +13969,18 @@
                           <a:solidFill>
                             <a:srgbClr val="595959"/>
                           </a:solidFill>
-                          <a:latin typeface="微软雅黑"/>
-                          <a:ea typeface="微软雅黑"/>
+                          <a:latin typeface="微软雅黑" panose="020B0503020204020204" charset="-122"/>
+                          <a:ea typeface="微软雅黑" panose="020B0503020204020204" charset="-122"/>
                         </a:rPr>
                         <a:t>59 / 59 个器件，无遗漏</a:t>
                       </a:r>
+                      <a:endParaRPr sz="1400" b="0">
+                        <a:solidFill>
+                          <a:srgbClr val="595959"/>
+                        </a:solidFill>
+                        <a:latin typeface="微软雅黑" panose="020B0503020204020204" charset="-122"/>
+                        <a:ea typeface="微软雅黑" panose="020B0503020204020204" charset="-122"/>
+                      </a:endParaRPr>
                     </a:p>
                   </a:txBody>
                   <a:tcPr>
@@ -12782,13 +13989,8 @@
                     </a:solidFill>
                   </a:tcPr>
                 </a:tc>
-                <a:extLst>
-                  <a:ext uri="{0D108BD9-81ED-4DB2-BD59-A6C34878D82A}">
-                    <a16:rowId xmlns:a16="http://schemas.microsoft.com/office/drawing/2014/main" val="10001"/>
-                  </a:ext>
-                </a:extLst>
               </a:tr>
-              <a:tr h="475488">
+              <a:tr h="1156335">
                 <a:tc>
                   <a:txBody>
                     <a:bodyPr/>
@@ -12799,11 +14001,18 @@
                           <a:solidFill>
                             <a:srgbClr val="1F3864"/>
                           </a:solidFill>
-                          <a:latin typeface="微软雅黑"/>
-                          <a:ea typeface="微软雅黑"/>
+                          <a:latin typeface="微软雅黑" panose="020B0503020204020204" charset="-122"/>
+                          <a:ea typeface="微软雅黑" panose="020B0503020204020204" charset="-122"/>
                         </a:rPr>
                         <a:t>功能模块</a:t>
                       </a:r>
+                      <a:endParaRPr sz="1400" b="1">
+                        <a:solidFill>
+                          <a:srgbClr val="1F3864"/>
+                        </a:solidFill>
+                        <a:latin typeface="微软雅黑" panose="020B0503020204020204" charset="-122"/>
+                        <a:ea typeface="微软雅黑" panose="020B0503020204020204" charset="-122"/>
+                      </a:endParaRPr>
                     </a:p>
                   </a:txBody>
                   <a:tcPr>
@@ -12822,11 +14031,18 @@
                           <a:solidFill>
                             <a:srgbClr val="595959"/>
                           </a:solidFill>
-                          <a:latin typeface="微软雅黑"/>
-                          <a:ea typeface="微软雅黑"/>
+                          <a:latin typeface="微软雅黑" panose="020B0503020204020204" charset="-122"/>
+                          <a:ea typeface="微软雅黑" panose="020B0503020204020204" charset="-122"/>
                         </a:rPr>
                         <a:t>13 个（4 电流镜 + 1 共源共栅家族 + 2 差分对 + 输出级 + CMFB + Dummy + 2 匹配）</a:t>
                       </a:r>
+                      <a:endParaRPr sz="1400" b="0">
+                        <a:solidFill>
+                          <a:srgbClr val="595959"/>
+                        </a:solidFill>
+                        <a:latin typeface="微软雅黑" panose="020B0503020204020204" charset="-122"/>
+                        <a:ea typeface="微软雅黑" panose="020B0503020204020204" charset="-122"/>
+                      </a:endParaRPr>
                     </a:p>
                   </a:txBody>
                   <a:tcPr>
@@ -12835,13 +14051,8 @@
                     </a:solidFill>
                   </a:tcPr>
                 </a:tc>
-                <a:extLst>
-                  <a:ext uri="{0D108BD9-81ED-4DB2-BD59-A6C34878D82A}">
-                    <a16:rowId xmlns:a16="http://schemas.microsoft.com/office/drawing/2014/main" val="10002"/>
-                  </a:ext>
-                </a:extLst>
               </a:tr>
-              <a:tr h="475488">
+              <a:tr h="819785">
                 <a:tc>
                   <a:txBody>
                     <a:bodyPr/>
@@ -12852,11 +14063,18 @@
                           <a:solidFill>
                             <a:srgbClr val="1F3864"/>
                           </a:solidFill>
-                          <a:latin typeface="微软雅黑"/>
-                          <a:ea typeface="微软雅黑"/>
+                          <a:latin typeface="微软雅黑" panose="020B0503020204020204" charset="-122"/>
+                          <a:ea typeface="微软雅黑" panose="020B0503020204020204" charset="-122"/>
                         </a:rPr>
                         <a:t>对称 / 匹配 / Dummy</a:t>
                       </a:r>
+                      <a:endParaRPr sz="1400" b="1">
+                        <a:solidFill>
+                          <a:srgbClr val="1F3864"/>
+                        </a:solidFill>
+                        <a:latin typeface="微软雅黑" panose="020B0503020204020204" charset="-122"/>
+                        <a:ea typeface="微软雅黑" panose="020B0503020204020204" charset="-122"/>
+                      </a:endParaRPr>
                     </a:p>
                   </a:txBody>
                   <a:tcPr>
@@ -12875,11 +14093,18 @@
                           <a:solidFill>
                             <a:srgbClr val="595959"/>
                           </a:solidFill>
-                          <a:latin typeface="微软雅黑"/>
-                          <a:ea typeface="微软雅黑"/>
+                          <a:latin typeface="微软雅黑" panose="020B0503020204020204" charset="-122"/>
+                          <a:ea typeface="微软雅黑" panose="020B0503020204020204" charset="-122"/>
                         </a:rPr>
                         <a:t>22 对 / 4 对 / 4 个</a:t>
                       </a:r>
+                      <a:endParaRPr sz="1400" b="0">
+                        <a:solidFill>
+                          <a:srgbClr val="595959"/>
+                        </a:solidFill>
+                        <a:latin typeface="微软雅黑" panose="020B0503020204020204" charset="-122"/>
+                        <a:ea typeface="微软雅黑" panose="020B0503020204020204" charset="-122"/>
+                      </a:endParaRPr>
                     </a:p>
                   </a:txBody>
                   <a:tcPr>
@@ -12888,13 +14113,8 @@
                     </a:solidFill>
                   </a:tcPr>
                 </a:tc>
-                <a:extLst>
-                  <a:ext uri="{0D108BD9-81ED-4DB2-BD59-A6C34878D82A}">
-                    <a16:rowId xmlns:a16="http://schemas.microsoft.com/office/drawing/2014/main" val="10003"/>
-                  </a:ext>
-                </a:extLst>
               </a:tr>
-              <a:tr h="475488">
+              <a:tr h="565785">
                 <a:tc>
                   <a:txBody>
                     <a:bodyPr/>
@@ -12905,11 +14125,18 @@
                           <a:solidFill>
                             <a:srgbClr val="1F3864"/>
                           </a:solidFill>
-                          <a:latin typeface="微软雅黑"/>
-                          <a:ea typeface="微软雅黑"/>
+                          <a:latin typeface="微软雅黑" panose="020B0503020204020204" charset="-122"/>
+                          <a:ea typeface="微软雅黑" panose="020B0503020204020204" charset="-122"/>
                         </a:rPr>
                         <a:t>变量约减</a:t>
                       </a:r>
+                      <a:endParaRPr sz="1400" b="1">
+                        <a:solidFill>
+                          <a:srgbClr val="1F3864"/>
+                        </a:solidFill>
+                        <a:latin typeface="微软雅黑" panose="020B0503020204020204" charset="-122"/>
+                        <a:ea typeface="微软雅黑" panose="020B0503020204020204" charset="-122"/>
+                      </a:endParaRPr>
                     </a:p>
                   </a:txBody>
                   <a:tcPr>
@@ -12928,11 +14155,18 @@
                           <a:solidFill>
                             <a:srgbClr val="595959"/>
                           </a:solidFill>
-                          <a:latin typeface="微软雅黑"/>
-                          <a:ea typeface="微软雅黑"/>
+                          <a:latin typeface="微软雅黑" panose="020B0503020204020204" charset="-122"/>
+                          <a:ea typeface="微软雅黑" panose="020B0503020204020204" charset="-122"/>
                         </a:rPr>
                         <a:t>105 → 47，约减 55.2%</a:t>
                       </a:r>
+                      <a:endParaRPr sz="1400" b="0">
+                        <a:solidFill>
+                          <a:srgbClr val="595959"/>
+                        </a:solidFill>
+                        <a:latin typeface="微软雅黑" panose="020B0503020204020204" charset="-122"/>
+                        <a:ea typeface="微软雅黑" panose="020B0503020204020204" charset="-122"/>
+                      </a:endParaRPr>
                     </a:p>
                   </a:txBody>
                   <a:tcPr>
@@ -12941,13 +14175,8 @@
                     </a:solidFill>
                   </a:tcPr>
                 </a:tc>
-                <a:extLst>
-                  <a:ext uri="{0D108BD9-81ED-4DB2-BD59-A6C34878D82A}">
-                    <a16:rowId xmlns:a16="http://schemas.microsoft.com/office/drawing/2014/main" val="10004"/>
-                  </a:ext>
-                </a:extLst>
               </a:tr>
-              <a:tr h="475488">
+              <a:tr h="565150">
                 <a:tc>
                   <a:txBody>
                     <a:bodyPr/>
@@ -12958,11 +14187,18 @@
                           <a:solidFill>
                             <a:srgbClr val="1F3864"/>
                           </a:solidFill>
-                          <a:latin typeface="微软雅黑"/>
-                          <a:ea typeface="微软雅黑"/>
+                          <a:latin typeface="微软雅黑" panose="020B0503020204020204" charset="-122"/>
+                          <a:ea typeface="微软雅黑" panose="020B0503020204020204" charset="-122"/>
                         </a:rPr>
                         <a:t>闭环校验</a:t>
                       </a:r>
+                      <a:endParaRPr sz="1400" b="1">
+                        <a:solidFill>
+                          <a:srgbClr val="1F3864"/>
+                        </a:solidFill>
+                        <a:latin typeface="微软雅黑" panose="020B0503020204020204" charset="-122"/>
+                        <a:ea typeface="微软雅黑" panose="020B0503020204020204" charset="-122"/>
+                      </a:endParaRPr>
                     </a:p>
                   </a:txBody>
                   <a:tcPr>
@@ -12981,11 +14217,18 @@
                           <a:solidFill>
                             <a:srgbClr val="595959"/>
                           </a:solidFill>
-                          <a:latin typeface="微软雅黑"/>
-                          <a:ea typeface="微软雅黑"/>
+                          <a:latin typeface="微软雅黑" panose="020B0503020204020204" charset="-122"/>
+                          <a:ea typeface="微软雅黑" panose="020B0503020204020204" charset="-122"/>
                         </a:rPr>
                         <a:t>59 → 59 器件，端子连接逐条一致</a:t>
                       </a:r>
+                      <a:endParaRPr sz="1400" b="0">
+                        <a:solidFill>
+                          <a:srgbClr val="595959"/>
+                        </a:solidFill>
+                        <a:latin typeface="微软雅黑" panose="020B0503020204020204" charset="-122"/>
+                        <a:ea typeface="微软雅黑" panose="020B0503020204020204" charset="-122"/>
+                      </a:endParaRPr>
                     </a:p>
                   </a:txBody>
                   <a:tcPr>
@@ -12994,13 +14237,8 @@
                     </a:solidFill>
                   </a:tcPr>
                 </a:tc>
-                <a:extLst>
-                  <a:ext uri="{0D108BD9-81ED-4DB2-BD59-A6C34878D82A}">
-                    <a16:rowId xmlns:a16="http://schemas.microsoft.com/office/drawing/2014/main" val="10005"/>
-                  </a:ext>
-                </a:extLst>
               </a:tr>
-              <a:tr h="475488">
+              <a:tr h="819785">
                 <a:tc>
                   <a:txBody>
                     <a:bodyPr/>
@@ -13011,11 +14249,18 @@
                           <a:solidFill>
                             <a:srgbClr val="1F3864"/>
                           </a:solidFill>
-                          <a:latin typeface="微软雅黑"/>
-                          <a:ea typeface="微软雅黑"/>
+                          <a:latin typeface="微软雅黑" panose="020B0503020204020204" charset="-122"/>
+                          <a:ea typeface="微软雅黑" panose="020B0503020204020204" charset="-122"/>
                         </a:rPr>
                         <a:t>符号账目</a:t>
                       </a:r>
+                      <a:endParaRPr sz="1400" b="1">
+                        <a:solidFill>
+                          <a:srgbClr val="1F3864"/>
+                        </a:solidFill>
+                        <a:latin typeface="微软雅黑" panose="020B0503020204020204" charset="-122"/>
+                        <a:ea typeface="微软雅黑" panose="020B0503020204020204" charset="-122"/>
+                      </a:endParaRPr>
                     </a:p>
                   </a:txBody>
                   <a:tcPr>
@@ -13034,11 +14279,18 @@
                           <a:solidFill>
                             <a:srgbClr val="595959"/>
                           </a:solidFill>
-                          <a:latin typeface="微软雅黑"/>
-                          <a:ea typeface="微软雅黑"/>
+                          <a:latin typeface="微软雅黑" panose="020B0503020204020204" charset="-122"/>
+                          <a:ea typeface="微软雅黑" panose="020B0503020204020204" charset="-122"/>
                         </a:rPr>
                         <a:t>105 = 47 自由变量（覆盖 99 符号）+ 6 Dummy</a:t>
                       </a:r>
+                      <a:endParaRPr sz="1400" b="0">
+                        <a:solidFill>
+                          <a:srgbClr val="595959"/>
+                        </a:solidFill>
+                        <a:latin typeface="微软雅黑" panose="020B0503020204020204" charset="-122"/>
+                        <a:ea typeface="微软雅黑" panose="020B0503020204020204" charset="-122"/>
+                      </a:endParaRPr>
                     </a:p>
                   </a:txBody>
                   <a:tcPr>
@@ -13047,72 +14299,35 @@
                     </a:solidFill>
                   </a:tcPr>
                 </a:tc>
-                <a:extLst>
-                  <a:ext uri="{0D108BD9-81ED-4DB2-BD59-A6C34878D82A}">
-                    <a16:rowId xmlns:a16="http://schemas.microsoft.com/office/drawing/2014/main" val="10006"/>
-                  </a:ext>
-                </a:extLst>
               </a:tr>
             </a:tbl>
           </a:graphicData>
         </a:graphic>
       </p:graphicFrame>
-      <p:sp>
-        <p:nvSpPr>
-          <p:cNvPr id="8" name="Rounded Rectangle 7"/>
-          <p:cNvSpPr/>
+      <p:pic>
+        <p:nvPicPr>
+          <p:cNvPr id="9" name="图片 8" descr="屏幕截图 2026-10-19 221232"/>
+          <p:cNvPicPr>
+            <a:picLocks noChangeAspect="1"/>
+          </p:cNvPicPr>
           <p:nvPr/>
-        </p:nvSpPr>
+        </p:nvPicPr>
+        <p:blipFill>
+          <a:blip r:embed="rId1"/>
+          <a:stretch>
+            <a:fillRect/>
+          </a:stretch>
+        </p:blipFill>
         <p:spPr>
           <a:xfrm>
-            <a:off x="594360" y="5623560"/>
-            <a:ext cx="10972800" cy="566928"/>
+            <a:off x="5252720" y="1080135"/>
+            <a:ext cx="6661785" cy="5134610"/>
           </a:xfrm>
-          <a:prstGeom prst="roundRect">
+          <a:prstGeom prst="rect">
             <a:avLst/>
           </a:prstGeom>
-          <a:solidFill>
-            <a:srgbClr val="FFF4E8"/>
-          </a:solidFill>
-          <a:ln>
-            <a:solidFill>
-              <a:srgbClr val="C55A11"/>
-            </a:solidFill>
-          </a:ln>
-          <a:effectLst/>
         </p:spPr>
-        <p:style>
-          <a:lnRef idx="1">
-            <a:schemeClr val="accent1"/>
-          </a:lnRef>
-          <a:fillRef idx="3">
-            <a:schemeClr val="accent1"/>
-          </a:fillRef>
-          <a:effectRef idx="2">
-            <a:schemeClr val="accent1"/>
-          </a:effectRef>
-          <a:fontRef idx="minor">
-            <a:schemeClr val="lt1"/>
-          </a:fontRef>
-        </p:style>
-        <p:txBody>
-          <a:bodyPr wrap="square" rtlCol="0" anchor="ctr"/>
-          <a:lstStyle/>
-          <a:p>
-            <a:pPr algn="ctr"/>
-            <a:r>
-              <a:rPr sz="1300" b="1">
-                <a:solidFill>
-                  <a:srgbClr val="C55A11"/>
-                </a:solidFill>
-                <a:latin typeface="微软雅黑"/>
-                <a:ea typeface="微软雅黑"/>
-              </a:rPr>
-              <a:t>约减出错不会崩，只会让性能莫名上不去——所以用闭环校验把「静默失效」变成可发现</a:t>
-            </a:r>
-          </a:p>
-        </p:txBody>
-      </p:sp>
+      </p:pic>
     </p:spTree>
   </p:cSld>
   <p:clrMapOvr>
@@ -13179,7 +14394,6 @@
           <a:lstStyle/>
           <a:p>
             <a:pPr algn="ctr"/>
-            <a:endParaRPr/>
           </a:p>
         </p:txBody>
       </p:sp>
@@ -13210,11 +14424,18 @@
                 <a:solidFill>
                   <a:srgbClr val="FFFFFF"/>
                 </a:solidFill>
-                <a:latin typeface="微软雅黑"/>
-                <a:ea typeface="微软雅黑"/>
+                <a:latin typeface="微软雅黑" panose="020B0503020204020204" charset="-122"/>
+                <a:ea typeface="微软雅黑" panose="020B0503020204020204" charset="-122"/>
               </a:rPr>
               <a:t>模块三：把 Spec 变成可算的优化问题</a:t>
             </a:r>
+            <a:endParaRPr sz="2600" b="1">
+              <a:solidFill>
+                <a:srgbClr val="FFFFFF"/>
+              </a:solidFill>
+              <a:latin typeface="微软雅黑" panose="020B0503020204020204" charset="-122"/>
+              <a:ea typeface="微软雅黑" panose="020B0503020204020204" charset="-122"/>
+            </a:endParaRPr>
           </a:p>
         </p:txBody>
       </p:sp>
@@ -13246,11 +14467,18 @@
                 <a:solidFill>
                   <a:srgbClr val="BDD7EE"/>
                 </a:solidFill>
-                <a:latin typeface="微软雅黑"/>
-                <a:ea typeface="微软雅黑"/>
+                <a:latin typeface="微软雅黑" panose="020B0503020204020204" charset="-122"/>
+                <a:ea typeface="微软雅黑" panose="020B0503020204020204" charset="-122"/>
               </a:rPr>
               <a:t>05 模块三</a:t>
             </a:r>
+            <a:endParaRPr sz="1200" b="0">
+              <a:solidFill>
+                <a:srgbClr val="BDD7EE"/>
+              </a:solidFill>
+              <a:latin typeface="微软雅黑" panose="020B0503020204020204" charset="-122"/>
+              <a:ea typeface="微软雅黑" panose="020B0503020204020204" charset="-122"/>
+            </a:endParaRPr>
           </a:p>
         </p:txBody>
       </p:sp>
@@ -13281,11 +14509,18 @@
                 <a:solidFill>
                   <a:srgbClr val="8C8C8C"/>
                 </a:solidFill>
-                <a:latin typeface="微软雅黑"/>
-                <a:ea typeface="微软雅黑"/>
+                <a:latin typeface="微软雅黑" panose="020B0503020204020204" charset="-122"/>
+                <a:ea typeface="微软雅黑" panose="020B0503020204020204" charset="-122"/>
               </a:rPr>
               <a:t>模拟电路 AI 智能化设计 · 赛题二</a:t>
             </a:r>
+            <a:endParaRPr sz="900" b="0">
+              <a:solidFill>
+                <a:srgbClr val="8C8C8C"/>
+              </a:solidFill>
+              <a:latin typeface="微软雅黑" panose="020B0503020204020204" charset="-122"/>
+              <a:ea typeface="微软雅黑" panose="020B0503020204020204" charset="-122"/>
+            </a:endParaRPr>
           </a:p>
         </p:txBody>
       </p:sp>
@@ -13317,11 +14552,18 @@
                 <a:solidFill>
                   <a:srgbClr val="8C8C8C"/>
                 </a:solidFill>
-                <a:latin typeface="微软雅黑"/>
-                <a:ea typeface="微软雅黑"/>
+                <a:latin typeface="微软雅黑" panose="020B0503020204020204" charset="-122"/>
+                <a:ea typeface="微软雅黑" panose="020B0503020204020204" charset="-122"/>
               </a:rPr>
               <a:t>8</a:t>
             </a:r>
+            <a:endParaRPr sz="900" b="0">
+              <a:solidFill>
+                <a:srgbClr val="8C8C8C"/>
+              </a:solidFill>
+              <a:latin typeface="微软雅黑" panose="020B0503020204020204" charset="-122"/>
+              <a:ea typeface="微软雅黑" panose="020B0503020204020204" charset="-122"/>
+            </a:endParaRPr>
           </a:p>
         </p:txBody>
       </p:sp>
@@ -13344,27 +14586,9 @@
                 <a:tableStyleId>{5C22544A-7EE6-4342-B048-85BDC9FD1C3A}</a:tableStyleId>
               </a:tblPr>
               <a:tblGrid>
-                <a:gridCol w="1828800">
-                  <a:extLst>
-                    <a:ext uri="{9D8B030D-6E8A-4147-A177-3AD203B41FA5}">
-                      <a16:colId xmlns:a16="http://schemas.microsoft.com/office/drawing/2014/main" val="20000"/>
-                    </a:ext>
-                  </a:extLst>
-                </a:gridCol>
-                <a:gridCol w="4572000">
-                  <a:extLst>
-                    <a:ext uri="{9D8B030D-6E8A-4147-A177-3AD203B41FA5}">
-                      <a16:colId xmlns:a16="http://schemas.microsoft.com/office/drawing/2014/main" val="20001"/>
-                    </a:ext>
-                  </a:extLst>
-                </a:gridCol>
-                <a:gridCol w="4572000">
-                  <a:extLst>
-                    <a:ext uri="{9D8B030D-6E8A-4147-A177-3AD203B41FA5}">
-                      <a16:colId xmlns:a16="http://schemas.microsoft.com/office/drawing/2014/main" val="20002"/>
-                    </a:ext>
-                  </a:extLst>
-                </a:gridCol>
+                <a:gridCol w="1828800"/>
+                <a:gridCol w="4572000"/>
+                <a:gridCol w="4572000"/>
               </a:tblGrid>
               <a:tr h="502920">
                 <a:tc>
@@ -13377,11 +14601,18 @@
                           <a:solidFill>
                             <a:srgbClr val="FFFFFF"/>
                           </a:solidFill>
-                          <a:latin typeface="微软雅黑"/>
-                          <a:ea typeface="微软雅黑"/>
+                          <a:latin typeface="微软雅黑" panose="020B0503020204020204" charset="-122"/>
+                          <a:ea typeface="微软雅黑" panose="020B0503020204020204" charset="-122"/>
                         </a:rPr>
                         <a:t>类别</a:t>
                       </a:r>
+                      <a:endParaRPr sz="1300" b="1">
+                        <a:solidFill>
+                          <a:srgbClr val="FFFFFF"/>
+                        </a:solidFill>
+                        <a:latin typeface="微软雅黑" panose="020B0503020204020204" charset="-122"/>
+                        <a:ea typeface="微软雅黑" panose="020B0503020204020204" charset="-122"/>
+                      </a:endParaRPr>
                     </a:p>
                   </a:txBody>
                   <a:tcPr>
@@ -13400,11 +14631,18 @@
                           <a:solidFill>
                             <a:srgbClr val="FFFFFF"/>
                           </a:solidFill>
-                          <a:latin typeface="微软雅黑"/>
-                          <a:ea typeface="微软雅黑"/>
+                          <a:latin typeface="微软雅黑" panose="020B0503020204020204" charset="-122"/>
+                          <a:ea typeface="微软雅黑" panose="020B0503020204020204" charset="-122"/>
                         </a:rPr>
                         <a:t>项</a:t>
                       </a:r>
+                      <a:endParaRPr sz="1300" b="1">
+                        <a:solidFill>
+                          <a:srgbClr val="FFFFFF"/>
+                        </a:solidFill>
+                        <a:latin typeface="微软雅黑" panose="020B0503020204020204" charset="-122"/>
+                        <a:ea typeface="微软雅黑" panose="020B0503020204020204" charset="-122"/>
+                      </a:endParaRPr>
                     </a:p>
                   </a:txBody>
                   <a:tcPr>
@@ -13423,11 +14661,18 @@
                           <a:solidFill>
                             <a:srgbClr val="FFFFFF"/>
                           </a:solidFill>
-                          <a:latin typeface="微软雅黑"/>
-                          <a:ea typeface="微软雅黑"/>
+                          <a:latin typeface="微软雅黑" panose="020B0503020204020204" charset="-122"/>
+                          <a:ea typeface="微软雅黑" panose="020B0503020204020204" charset="-122"/>
                         </a:rPr>
                         <a:t>表达式</a:t>
                       </a:r>
+                      <a:endParaRPr sz="1300" b="1">
+                        <a:solidFill>
+                          <a:srgbClr val="FFFFFF"/>
+                        </a:solidFill>
+                        <a:latin typeface="微软雅黑" panose="020B0503020204020204" charset="-122"/>
+                        <a:ea typeface="微软雅黑" panose="020B0503020204020204" charset="-122"/>
+                      </a:endParaRPr>
                     </a:p>
                   </a:txBody>
                   <a:tcPr>
@@ -13436,11 +14681,6 @@
                     </a:solidFill>
                   </a:tcPr>
                 </a:tc>
-                <a:extLst>
-                  <a:ext uri="{0D108BD9-81ED-4DB2-BD59-A6C34878D82A}">
-                    <a16:rowId xmlns:a16="http://schemas.microsoft.com/office/drawing/2014/main" val="10000"/>
-                  </a:ext>
-                </a:extLst>
               </a:tr>
               <a:tr h="502920">
                 <a:tc>
@@ -13453,11 +14693,18 @@
                           <a:solidFill>
                             <a:srgbClr val="1F3864"/>
                           </a:solidFill>
-                          <a:latin typeface="微软雅黑"/>
-                          <a:ea typeface="微软雅黑"/>
+                          <a:latin typeface="微软雅黑" panose="020B0503020204020204" charset="-122"/>
+                          <a:ea typeface="微软雅黑" panose="020B0503020204020204" charset="-122"/>
                         </a:rPr>
                         <a:t>硬约束</a:t>
                       </a:r>
+                      <a:endParaRPr sz="1300" b="1">
+                        <a:solidFill>
+                          <a:srgbClr val="1F3864"/>
+                        </a:solidFill>
+                        <a:latin typeface="微软雅黑" panose="020B0503020204020204" charset="-122"/>
+                        <a:ea typeface="微软雅黑" panose="020B0503020204020204" charset="-122"/>
+                      </a:endParaRPr>
                     </a:p>
                   </a:txBody>
                   <a:tcPr>
@@ -13476,11 +14723,18 @@
                           <a:solidFill>
                             <a:srgbClr val="595959"/>
                           </a:solidFill>
-                          <a:latin typeface="微软雅黑"/>
-                          <a:ea typeface="微软雅黑"/>
+                          <a:latin typeface="微软雅黑" panose="020B0503020204020204" charset="-122"/>
+                          <a:ea typeface="微软雅黑" panose="020B0503020204020204" charset="-122"/>
                         </a:rPr>
                         <a:t>相位裕度 / 增益裕度 / 工作电流</a:t>
                       </a:r>
+                      <a:endParaRPr sz="1300" b="0">
+                        <a:solidFill>
+                          <a:srgbClr val="595959"/>
+                        </a:solidFill>
+                        <a:latin typeface="微软雅黑" panose="020B0503020204020204" charset="-122"/>
+                        <a:ea typeface="微软雅黑" panose="020B0503020204020204" charset="-122"/>
+                      </a:endParaRPr>
                     </a:p>
                   </a:txBody>
                   <a:tcPr>
@@ -13499,11 +14753,18 @@
                           <a:solidFill>
                             <a:srgbClr val="595959"/>
                           </a:solidFill>
-                          <a:latin typeface="微软雅黑"/>
-                          <a:ea typeface="微软雅黑"/>
+                          <a:latin typeface="微软雅黑" panose="020B0503020204020204" charset="-122"/>
+                          <a:ea typeface="微软雅黑" panose="020B0503020204020204" charset="-122"/>
                         </a:rPr>
                         <a:t>PM≥50°；GM≤−10dB；I_OPA≤3mA（全 PVT）</a:t>
                       </a:r>
+                      <a:endParaRPr sz="1300" b="0">
+                        <a:solidFill>
+                          <a:srgbClr val="595959"/>
+                        </a:solidFill>
+                        <a:latin typeface="微软雅黑" panose="020B0503020204020204" charset="-122"/>
+                        <a:ea typeface="微软雅黑" panose="020B0503020204020204" charset="-122"/>
+                      </a:endParaRPr>
                     </a:p>
                   </a:txBody>
                   <a:tcPr>
@@ -13512,11 +14773,6 @@
                     </a:solidFill>
                   </a:tcPr>
                 </a:tc>
-                <a:extLst>
-                  <a:ext uri="{0D108BD9-81ED-4DB2-BD59-A6C34878D82A}">
-                    <a16:rowId xmlns:a16="http://schemas.microsoft.com/office/drawing/2014/main" val="10001"/>
-                  </a:ext>
-                </a:extLst>
               </a:tr>
               <a:tr h="502920">
                 <a:tc>
@@ -13529,11 +14785,18 @@
                           <a:solidFill>
                             <a:srgbClr val="1F3864"/>
                           </a:solidFill>
-                          <a:latin typeface="微软雅黑"/>
-                          <a:ea typeface="微软雅黑"/>
+                          <a:latin typeface="微软雅黑" panose="020B0503020204020204" charset="-122"/>
+                          <a:ea typeface="微软雅黑" panose="020B0503020204020204" charset="-122"/>
                         </a:rPr>
                         <a:t>硬约束</a:t>
                       </a:r>
+                      <a:endParaRPr sz="1300" b="1">
+                        <a:solidFill>
+                          <a:srgbClr val="1F3864"/>
+                        </a:solidFill>
+                        <a:latin typeface="微软雅黑" panose="020B0503020204020204" charset="-122"/>
+                        <a:ea typeface="微软雅黑" panose="020B0503020204020204" charset="-122"/>
+                      </a:endParaRPr>
                     </a:p>
                   </a:txBody>
                   <a:tcPr>
@@ -13552,11 +14815,18 @@
                           <a:solidFill>
                             <a:srgbClr val="595959"/>
                           </a:solidFill>
-                          <a:latin typeface="微软雅黑"/>
-                          <a:ea typeface="微软雅黑"/>
+                          <a:latin typeface="微软雅黑" panose="020B0503020204020204" charset="-122"/>
+                          <a:ea typeface="微软雅黑" panose="020B0503020204020204" charset="-122"/>
                         </a:rPr>
                         <a:t>直流增益门槛</a:t>
                       </a:r>
+                      <a:endParaRPr sz="1300" b="0">
+                        <a:solidFill>
+                          <a:srgbClr val="595959"/>
+                        </a:solidFill>
+                        <a:latin typeface="微软雅黑" panose="020B0503020204020204" charset="-122"/>
+                        <a:ea typeface="微软雅黑" panose="020B0503020204020204" charset="-122"/>
+                      </a:endParaRPr>
                     </a:p>
                   </a:txBody>
                   <a:tcPr>
@@ -13575,11 +14845,18 @@
                           <a:solidFill>
                             <a:srgbClr val="595959"/>
                           </a:solidFill>
-                          <a:latin typeface="微软雅黑"/>
-                          <a:ea typeface="微软雅黑"/>
+                          <a:latin typeface="微软雅黑" panose="020B0503020204020204" charset="-122"/>
+                          <a:ea typeface="微软雅黑" panose="020B0503020204020204" charset="-122"/>
                         </a:rPr>
                         <a:t>DC Gain ≥ 40 dB（低于即该项 0 分）</a:t>
                       </a:r>
+                      <a:endParaRPr sz="1300" b="0">
+                        <a:solidFill>
+                          <a:srgbClr val="595959"/>
+                        </a:solidFill>
+                        <a:latin typeface="微软雅黑" panose="020B0503020204020204" charset="-122"/>
+                        <a:ea typeface="微软雅黑" panose="020B0503020204020204" charset="-122"/>
+                      </a:endParaRPr>
                     </a:p>
                   </a:txBody>
                   <a:tcPr>
@@ -13588,11 +14865,6 @@
                     </a:solidFill>
                   </a:tcPr>
                 </a:tc>
-                <a:extLst>
-                  <a:ext uri="{0D108BD9-81ED-4DB2-BD59-A6C34878D82A}">
-                    <a16:rowId xmlns:a16="http://schemas.microsoft.com/office/drawing/2014/main" val="10002"/>
-                  </a:ext>
-                </a:extLst>
               </a:tr>
               <a:tr h="502920">
                 <a:tc>
@@ -13605,11 +14877,18 @@
                           <a:solidFill>
                             <a:srgbClr val="1F3864"/>
                           </a:solidFill>
-                          <a:latin typeface="微软雅黑"/>
-                          <a:ea typeface="微软雅黑"/>
+                          <a:latin typeface="微软雅黑" panose="020B0503020204020204" charset="-122"/>
+                          <a:ea typeface="微软雅黑" panose="020B0503020204020204" charset="-122"/>
                         </a:rPr>
                         <a:t>优化目标</a:t>
                       </a:r>
+                      <a:endParaRPr sz="1300" b="1">
+                        <a:solidFill>
+                          <a:srgbClr val="1F3864"/>
+                        </a:solidFill>
+                        <a:latin typeface="微软雅黑" panose="020B0503020204020204" charset="-122"/>
+                        <a:ea typeface="微软雅黑" panose="020B0503020204020204" charset="-122"/>
+                      </a:endParaRPr>
                     </a:p>
                   </a:txBody>
                   <a:tcPr>
@@ -13628,11 +14907,18 @@
                           <a:solidFill>
                             <a:srgbClr val="595959"/>
                           </a:solidFill>
-                          <a:latin typeface="微软雅黑"/>
-                          <a:ea typeface="微软雅黑"/>
+                          <a:latin typeface="微软雅黑" panose="020B0503020204020204" charset="-122"/>
+                          <a:ea typeface="微软雅黑" panose="020B0503020204020204" charset="-122"/>
                         </a:rPr>
                         <a:t>增益 / 带宽 / 面积</a:t>
                       </a:r>
+                      <a:endParaRPr sz="1300" b="0">
+                        <a:solidFill>
+                          <a:srgbClr val="595959"/>
+                        </a:solidFill>
+                        <a:latin typeface="微软雅黑" panose="020B0503020204020204" charset="-122"/>
+                        <a:ea typeface="微软雅黑" panose="020B0503020204020204" charset="-122"/>
+                      </a:endParaRPr>
                     </a:p>
                   </a:txBody>
                   <a:tcPr>
@@ -13651,11 +14937,18 @@
                           <a:solidFill>
                             <a:srgbClr val="595959"/>
                           </a:solidFill>
-                          <a:latin typeface="微软雅黑"/>
-                          <a:ea typeface="微软雅黑"/>
+                          <a:latin typeface="微软雅黑" panose="020B0503020204020204" charset="-122"/>
+                          <a:ea typeface="微软雅黑" panose="020B0503020204020204" charset="-122"/>
                         </a:rPr>
                         <a:t>Gain↑、UGB↑、Area↓</a:t>
                       </a:r>
+                      <a:endParaRPr sz="1300" b="0">
+                        <a:solidFill>
+                          <a:srgbClr val="595959"/>
+                        </a:solidFill>
+                        <a:latin typeface="微软雅黑" panose="020B0503020204020204" charset="-122"/>
+                        <a:ea typeface="微软雅黑" panose="020B0503020204020204" charset="-122"/>
+                      </a:endParaRPr>
                     </a:p>
                   </a:txBody>
                   <a:tcPr>
@@ -13664,11 +14957,6 @@
                     </a:solidFill>
                   </a:tcPr>
                 </a:tc>
-                <a:extLst>
-                  <a:ext uri="{0D108BD9-81ED-4DB2-BD59-A6C34878D82A}">
-                    <a16:rowId xmlns:a16="http://schemas.microsoft.com/office/drawing/2014/main" val="10003"/>
-                  </a:ext>
-                </a:extLst>
               </a:tr>
             </a:tbl>
           </a:graphicData>
@@ -13706,11 +14994,18 @@
                 <a:solidFill>
                   <a:srgbClr val="595959"/>
                 </a:solidFill>
-                <a:latin typeface="微软雅黑"/>
-                <a:ea typeface="微软雅黑"/>
+                <a:latin typeface="微软雅黑" panose="020B0503020204020204" charset="-122"/>
+                <a:ea typeface="微软雅黑" panose="020B0503020204020204" charset="-122"/>
               </a:rPr>
               <a:t>• 面积口径与评分器一致：MOS = fw·L·m·1.5，电容 = W·L，电阻 = segW·segL·segments·2</a:t>
             </a:r>
+            <a:endParaRPr sz="1500" b="0">
+              <a:solidFill>
+                <a:srgbClr val="595959"/>
+              </a:solidFill>
+              <a:latin typeface="微软雅黑" panose="020B0503020204020204" charset="-122"/>
+              <a:ea typeface="微软雅黑" panose="020B0503020204020204" charset="-122"/>
+            </a:endParaRPr>
           </a:p>
           <a:p>
             <a:pPr>
@@ -13723,11 +15018,18 @@
                 <a:solidFill>
                   <a:srgbClr val="595959"/>
                 </a:solidFill>
-                <a:latin typeface="微软雅黑"/>
-                <a:ea typeface="微软雅黑"/>
+                <a:latin typeface="微软雅黑" panose="020B0503020204020204" charset="-122"/>
+                <a:ea typeface="微软雅黑" panose="020B0503020204020204" charset="-122"/>
               </a:rPr>
               <a:t>• 变量边界按参数名逐一对齐 score.py 的 clamp，而不是「所有连续参数统一 0.13~20」</a:t>
             </a:r>
+            <a:endParaRPr sz="1500" b="0">
+              <a:solidFill>
+                <a:srgbClr val="595959"/>
+              </a:solidFill>
+              <a:latin typeface="微软雅黑" panose="020B0503020204020204" charset="-122"/>
+              <a:ea typeface="微软雅黑" panose="020B0503020204020204" charset="-122"/>
+            </a:endParaRPr>
           </a:p>
           <a:p>
             <a:pPr>
@@ -13740,11 +15042,18 @@
                 <a:solidFill>
                   <a:srgbClr val="595959"/>
                 </a:solidFill>
-                <a:latin typeface="微软雅黑"/>
-                <a:ea typeface="微软雅黑"/>
+                <a:latin typeface="微软雅黑" panose="020B0503020204020204" charset="-122"/>
+                <a:ea typeface="微软雅黑" panose="020B0503020204020204" charset="-122"/>
               </a:rPr>
               <a:t>• 边界没对齐的后果：优化器在非法区间搜到的点会被评分器夹住，等于白跑仿真</a:t>
             </a:r>
+            <a:endParaRPr sz="1500" b="0">
+              <a:solidFill>
+                <a:srgbClr val="595959"/>
+              </a:solidFill>
+              <a:latin typeface="微软雅黑" panose="020B0503020204020204" charset="-122"/>
+              <a:ea typeface="微软雅黑" panose="020B0503020204020204" charset="-122"/>
+            </a:endParaRPr>
           </a:p>
         </p:txBody>
       </p:sp>
@@ -13814,7 +15123,6 @@
           <a:lstStyle/>
           <a:p>
             <a:pPr algn="ctr"/>
-            <a:endParaRPr/>
           </a:p>
         </p:txBody>
       </p:sp>
@@ -13845,11 +15153,18 @@
                 <a:solidFill>
                   <a:srgbClr val="FFFFFF"/>
                 </a:solidFill>
-                <a:latin typeface="微软雅黑"/>
-                <a:ea typeface="微软雅黑"/>
+                <a:latin typeface="微软雅黑" panose="020B0503020204020204" charset="-122"/>
+                <a:ea typeface="微软雅黑" panose="020B0503020204020204" charset="-122"/>
               </a:rPr>
               <a:t>模块三：差分进化 + 三条保命设计</a:t>
             </a:r>
+            <a:endParaRPr sz="2600" b="1">
+              <a:solidFill>
+                <a:srgbClr val="FFFFFF"/>
+              </a:solidFill>
+              <a:latin typeface="微软雅黑" panose="020B0503020204020204" charset="-122"/>
+              <a:ea typeface="微软雅黑" panose="020B0503020204020204" charset="-122"/>
+            </a:endParaRPr>
           </a:p>
         </p:txBody>
       </p:sp>
@@ -13881,11 +15196,18 @@
                 <a:solidFill>
                   <a:srgbClr val="BDD7EE"/>
                 </a:solidFill>
-                <a:latin typeface="微软雅黑"/>
-                <a:ea typeface="微软雅黑"/>
+                <a:latin typeface="微软雅黑" panose="020B0503020204020204" charset="-122"/>
+                <a:ea typeface="微软雅黑" panose="020B0503020204020204" charset="-122"/>
               </a:rPr>
               <a:t>05 模块三</a:t>
             </a:r>
+            <a:endParaRPr sz="1200" b="0">
+              <a:solidFill>
+                <a:srgbClr val="BDD7EE"/>
+              </a:solidFill>
+              <a:latin typeface="微软雅黑" panose="020B0503020204020204" charset="-122"/>
+              <a:ea typeface="微软雅黑" panose="020B0503020204020204" charset="-122"/>
+            </a:endParaRPr>
           </a:p>
         </p:txBody>
       </p:sp>
@@ -13916,11 +15238,18 @@
                 <a:solidFill>
                   <a:srgbClr val="8C8C8C"/>
                 </a:solidFill>
-                <a:latin typeface="微软雅黑"/>
-                <a:ea typeface="微软雅黑"/>
+                <a:latin typeface="微软雅黑" panose="020B0503020204020204" charset="-122"/>
+                <a:ea typeface="微软雅黑" panose="020B0503020204020204" charset="-122"/>
               </a:rPr>
               <a:t>模拟电路 AI 智能化设计 · 赛题二</a:t>
             </a:r>
+            <a:endParaRPr sz="900" b="0">
+              <a:solidFill>
+                <a:srgbClr val="8C8C8C"/>
+              </a:solidFill>
+              <a:latin typeface="微软雅黑" panose="020B0503020204020204" charset="-122"/>
+              <a:ea typeface="微软雅黑" panose="020B0503020204020204" charset="-122"/>
+            </a:endParaRPr>
           </a:p>
         </p:txBody>
       </p:sp>
@@ -13952,11 +15281,18 @@
                 <a:solidFill>
                   <a:srgbClr val="8C8C8C"/>
                 </a:solidFill>
-                <a:latin typeface="微软雅黑"/>
-                <a:ea typeface="微软雅黑"/>
+                <a:latin typeface="微软雅黑" panose="020B0503020204020204" charset="-122"/>
+                <a:ea typeface="微软雅黑" panose="020B0503020204020204" charset="-122"/>
               </a:rPr>
               <a:t>9</a:t>
             </a:r>
+            <a:endParaRPr sz="900" b="0">
+              <a:solidFill>
+                <a:srgbClr val="8C8C8C"/>
+              </a:solidFill>
+              <a:latin typeface="微软雅黑" panose="020B0503020204020204" charset="-122"/>
+              <a:ea typeface="微软雅黑" panose="020B0503020204020204" charset="-122"/>
+            </a:endParaRPr>
           </a:p>
         </p:txBody>
       </p:sp>
@@ -13979,27 +15315,9 @@
                 <a:tableStyleId>{5C22544A-7EE6-4342-B048-85BDC9FD1C3A}</a:tableStyleId>
               </a:tblPr>
               <a:tblGrid>
-                <a:gridCol w="2194560">
-                  <a:extLst>
-                    <a:ext uri="{9D8B030D-6E8A-4147-A177-3AD203B41FA5}">
-                      <a16:colId xmlns:a16="http://schemas.microsoft.com/office/drawing/2014/main" val="20000"/>
-                    </a:ext>
-                  </a:extLst>
-                </a:gridCol>
-                <a:gridCol w="4754880">
-                  <a:extLst>
-                    <a:ext uri="{9D8B030D-6E8A-4147-A177-3AD203B41FA5}">
-                      <a16:colId xmlns:a16="http://schemas.microsoft.com/office/drawing/2014/main" val="20001"/>
-                    </a:ext>
-                  </a:extLst>
-                </a:gridCol>
-                <a:gridCol w="4023360">
-                  <a:extLst>
-                    <a:ext uri="{9D8B030D-6E8A-4147-A177-3AD203B41FA5}">
-                      <a16:colId xmlns:a16="http://schemas.microsoft.com/office/drawing/2014/main" val="20002"/>
-                    </a:ext>
-                  </a:extLst>
-                </a:gridCol>
+                <a:gridCol w="2194560"/>
+                <a:gridCol w="4754880"/>
+                <a:gridCol w="4023360"/>
               </a:tblGrid>
               <a:tr h="475488">
                 <a:tc>
@@ -14012,11 +15330,18 @@
                           <a:solidFill>
                             <a:srgbClr val="FFFFFF"/>
                           </a:solidFill>
-                          <a:latin typeface="微软雅黑"/>
-                          <a:ea typeface="微软雅黑"/>
+                          <a:latin typeface="微软雅黑" panose="020B0503020204020204" charset="-122"/>
+                          <a:ea typeface="微软雅黑" panose="020B0503020204020204" charset="-122"/>
                         </a:rPr>
                         <a:t>配置项</a:t>
                       </a:r>
+                      <a:endParaRPr sz="1300" b="1">
+                        <a:solidFill>
+                          <a:srgbClr val="FFFFFF"/>
+                        </a:solidFill>
+                        <a:latin typeface="微软雅黑" panose="020B0503020204020204" charset="-122"/>
+                        <a:ea typeface="微软雅黑" panose="020B0503020204020204" charset="-122"/>
+                      </a:endParaRPr>
                     </a:p>
                   </a:txBody>
                   <a:tcPr>
@@ -14035,11 +15360,18 @@
                           <a:solidFill>
                             <a:srgbClr val="FFFFFF"/>
                           </a:solidFill>
-                          <a:latin typeface="微软雅黑"/>
-                          <a:ea typeface="微软雅黑"/>
+                          <a:latin typeface="微软雅黑" panose="020B0503020204020204" charset="-122"/>
+                          <a:ea typeface="微软雅黑" panose="020B0503020204020204" charset="-122"/>
                         </a:rPr>
                         <a:t>取值</a:t>
                       </a:r>
+                      <a:endParaRPr sz="1300" b="1">
+                        <a:solidFill>
+                          <a:srgbClr val="FFFFFF"/>
+                        </a:solidFill>
+                        <a:latin typeface="微软雅黑" panose="020B0503020204020204" charset="-122"/>
+                        <a:ea typeface="微软雅黑" panose="020B0503020204020204" charset="-122"/>
+                      </a:endParaRPr>
                     </a:p>
                   </a:txBody>
                   <a:tcPr>
@@ -14058,11 +15390,18 @@
                           <a:solidFill>
                             <a:srgbClr val="FFFFFF"/>
                           </a:solidFill>
-                          <a:latin typeface="微软雅黑"/>
-                          <a:ea typeface="微软雅黑"/>
+                          <a:latin typeface="微软雅黑" panose="020B0503020204020204" charset="-122"/>
+                          <a:ea typeface="微软雅黑" panose="020B0503020204020204" charset="-122"/>
                         </a:rPr>
                         <a:t>理由</a:t>
                       </a:r>
+                      <a:endParaRPr sz="1300" b="1">
+                        <a:solidFill>
+                          <a:srgbClr val="FFFFFF"/>
+                        </a:solidFill>
+                        <a:latin typeface="微软雅黑" panose="020B0503020204020204" charset="-122"/>
+                        <a:ea typeface="微软雅黑" panose="020B0503020204020204" charset="-122"/>
+                      </a:endParaRPr>
                     </a:p>
                   </a:txBody>
                   <a:tcPr>
@@ -14071,11 +15410,6 @@
                     </a:solidFill>
                   </a:tcPr>
                 </a:tc>
-                <a:extLst>
-                  <a:ext uri="{0D108BD9-81ED-4DB2-BD59-A6C34878D82A}">
-                    <a16:rowId xmlns:a16="http://schemas.microsoft.com/office/drawing/2014/main" val="10000"/>
-                  </a:ext>
-                </a:extLst>
               </a:tr>
               <a:tr h="475488">
                 <a:tc>
@@ -14088,11 +15422,18 @@
                           <a:solidFill>
                             <a:srgbClr val="1F3864"/>
                           </a:solidFill>
-                          <a:latin typeface="微软雅黑"/>
-                          <a:ea typeface="微软雅黑"/>
+                          <a:latin typeface="微软雅黑" panose="020B0503020204020204" charset="-122"/>
+                          <a:ea typeface="微软雅黑" panose="020B0503020204020204" charset="-122"/>
                         </a:rPr>
                         <a:t>算法</a:t>
                       </a:r>
+                      <a:endParaRPr sz="1300" b="1">
+                        <a:solidFill>
+                          <a:srgbClr val="1F3864"/>
+                        </a:solidFill>
+                        <a:latin typeface="微软雅黑" panose="020B0503020204020204" charset="-122"/>
+                        <a:ea typeface="微软雅黑" panose="020B0503020204020204" charset="-122"/>
+                      </a:endParaRPr>
                     </a:p>
                   </a:txBody>
                   <a:tcPr>
@@ -14111,11 +15452,18 @@
                           <a:solidFill>
                             <a:srgbClr val="595959"/>
                           </a:solidFill>
-                          <a:latin typeface="微软雅黑"/>
-                          <a:ea typeface="微软雅黑"/>
+                          <a:latin typeface="微软雅黑" panose="020B0503020204020204" charset="-122"/>
+                          <a:ea typeface="微软雅黑" panose="020B0503020204020204" charset="-122"/>
                         </a:rPr>
                         <a:t>差分进化 DE，strategy=best1bin</a:t>
                       </a:r>
+                      <a:endParaRPr sz="1300" b="0">
+                        <a:solidFill>
+                          <a:srgbClr val="595959"/>
+                        </a:solidFill>
+                        <a:latin typeface="微软雅黑" panose="020B0503020204020204" charset="-122"/>
+                        <a:ea typeface="微软雅黑" panose="020B0503020204020204" charset="-122"/>
+                      </a:endParaRPr>
                     </a:p>
                   </a:txBody>
                   <a:tcPr>
@@ -14134,11 +15482,18 @@
                           <a:solidFill>
                             <a:srgbClr val="595959"/>
                           </a:solidFill>
-                          <a:latin typeface="微软雅黑"/>
-                          <a:ea typeface="微软雅黑"/>
+                          <a:latin typeface="微软雅黑" panose="020B0503020204020204" charset="-122"/>
+                          <a:ea typeface="微软雅黑" panose="020B0503020204020204" charset="-122"/>
                         </a:rPr>
                         <a:t>混合整数、目标函数含大量失败点，梯度法不适用</a:t>
                       </a:r>
+                      <a:endParaRPr sz="1300" b="0">
+                        <a:solidFill>
+                          <a:srgbClr val="595959"/>
+                        </a:solidFill>
+                        <a:latin typeface="微软雅黑" panose="020B0503020204020204" charset="-122"/>
+                        <a:ea typeface="微软雅黑" panose="020B0503020204020204" charset="-122"/>
+                      </a:endParaRPr>
                     </a:p>
                   </a:txBody>
                   <a:tcPr>
@@ -14147,11 +15502,6 @@
                     </a:solidFill>
                   </a:tcPr>
                 </a:tc>
-                <a:extLst>
-                  <a:ext uri="{0D108BD9-81ED-4DB2-BD59-A6C34878D82A}">
-                    <a16:rowId xmlns:a16="http://schemas.microsoft.com/office/drawing/2014/main" val="10001"/>
-                  </a:ext>
-                </a:extLst>
               </a:tr>
               <a:tr h="475488">
                 <a:tc>
@@ -14164,11 +15514,18 @@
                           <a:solidFill>
                             <a:srgbClr val="1F3864"/>
                           </a:solidFill>
-                          <a:latin typeface="微软雅黑"/>
-                          <a:ea typeface="微软雅黑"/>
+                          <a:latin typeface="微软雅黑" panose="020B0503020204020204" charset="-122"/>
+                          <a:ea typeface="微软雅黑" panose="020B0503020204020204" charset="-122"/>
                         </a:rPr>
                         <a:t>种群 / 代数</a:t>
                       </a:r>
+                      <a:endParaRPr sz="1300" b="1">
+                        <a:solidFill>
+                          <a:srgbClr val="1F3864"/>
+                        </a:solidFill>
+                        <a:latin typeface="微软雅黑" panose="020B0503020204020204" charset="-122"/>
+                        <a:ea typeface="微软雅黑" panose="020B0503020204020204" charset="-122"/>
+                      </a:endParaRPr>
                     </a:p>
                   </a:txBody>
                   <a:tcPr>
@@ -14187,11 +15544,18 @@
                           <a:solidFill>
                             <a:srgbClr val="595959"/>
                           </a:solidFill>
-                          <a:latin typeface="微软雅黑"/>
-                          <a:ea typeface="微软雅黑"/>
+                          <a:latin typeface="微软雅黑" panose="020B0503020204020204" charset="-122"/>
+                          <a:ea typeface="微软雅黑" panose="020B0503020204020204" charset="-122"/>
                         </a:rPr>
                         <a:t>20 / 实际 10 代（预算优先）</a:t>
                       </a:r>
+                      <a:endParaRPr sz="1300" b="0">
+                        <a:solidFill>
+                          <a:srgbClr val="595959"/>
+                        </a:solidFill>
+                        <a:latin typeface="微软雅黑" panose="020B0503020204020204" charset="-122"/>
+                        <a:ea typeface="微软雅黑" panose="020B0503020204020204" charset="-122"/>
+                      </a:endParaRPr>
                     </a:p>
                   </a:txBody>
                   <a:tcPr>
@@ -14210,11 +15574,18 @@
                           <a:solidFill>
                             <a:srgbClr val="595959"/>
                           </a:solidFill>
-                          <a:latin typeface="微软雅黑"/>
-                          <a:ea typeface="微软雅黑"/>
+                          <a:latin typeface="微软雅黑" panose="020B0503020204020204" charset="-122"/>
+                          <a:ea typeface="微软雅黑" panose="020B0503020204020204" charset="-122"/>
                         </a:rPr>
                         <a:t>单次仿真约 34 秒，种群过大吃光预算</a:t>
                       </a:r>
+                      <a:endParaRPr sz="1300" b="0">
+                        <a:solidFill>
+                          <a:srgbClr val="595959"/>
+                        </a:solidFill>
+                        <a:latin typeface="微软雅黑" panose="020B0503020204020204" charset="-122"/>
+                        <a:ea typeface="微软雅黑" panose="020B0503020204020204" charset="-122"/>
+                      </a:endParaRPr>
                     </a:p>
                   </a:txBody>
                   <a:tcPr>
@@ -14223,11 +15594,6 @@
                     </a:solidFill>
                   </a:tcPr>
                 </a:tc>
-                <a:extLst>
-                  <a:ext uri="{0D108BD9-81ED-4DB2-BD59-A6C34878D82A}">
-                    <a16:rowId xmlns:a16="http://schemas.microsoft.com/office/drawing/2014/main" val="10002"/>
-                  </a:ext>
-                </a:extLst>
               </a:tr>
               <a:tr h="475488">
                 <a:tc>
@@ -14240,11 +15606,18 @@
                           <a:solidFill>
                             <a:srgbClr val="1F3864"/>
                           </a:solidFill>
-                          <a:latin typeface="微软雅黑"/>
-                          <a:ea typeface="微软雅黑"/>
+                          <a:latin typeface="微软雅黑" panose="020B0503020204020204" charset="-122"/>
+                          <a:ea typeface="微软雅黑" panose="020B0503020204020204" charset="-122"/>
                         </a:rPr>
                         <a:t>初值</a:t>
                       </a:r>
+                      <a:endParaRPr sz="1300" b="1">
+                        <a:solidFill>
+                          <a:srgbClr val="1F3864"/>
+                        </a:solidFill>
+                        <a:latin typeface="微软雅黑" panose="020B0503020204020204" charset="-122"/>
+                        <a:ea typeface="微软雅黑" panose="020B0503020204020204" charset="-122"/>
+                      </a:endParaRPr>
                     </a:p>
                   </a:txBody>
                   <a:tcPr>
@@ -14263,11 +15636,18 @@
                           <a:solidFill>
                             <a:srgbClr val="595959"/>
                           </a:solidFill>
-                          <a:latin typeface="微软雅黑"/>
-                          <a:ea typeface="微软雅黑"/>
+                          <a:latin typeface="微软雅黑" panose="020B0503020204020204" charset="-122"/>
+                          <a:ea typeface="微软雅黑" panose="020B0503020204020204" charset="-122"/>
                         </a:rPr>
                         <a:t>围绕初始解 ±50% 扰动，每次只动 35% 参数</a:t>
                       </a:r>
+                      <a:endParaRPr sz="1300" b="0">
+                        <a:solidFill>
+                          <a:srgbClr val="595959"/>
+                        </a:solidFill>
+                        <a:latin typeface="微软雅黑" panose="020B0503020204020204" charset="-122"/>
+                        <a:ea typeface="微软雅黑" panose="020B0503020204020204" charset="-122"/>
+                      </a:endParaRPr>
                     </a:p>
                   </a:txBody>
                   <a:tcPr>
@@ -14286,11 +15666,18 @@
                           <a:solidFill>
                             <a:srgbClr val="595959"/>
                           </a:solidFill>
-                          <a:latin typeface="微软雅黑"/>
-                          <a:ea typeface="微软雅黑"/>
+                          <a:latin typeface="微软雅黑" panose="020B0503020204020204" charset="-122"/>
+                          <a:ea typeface="微软雅黑" panose="020B0503020204020204" charset="-122"/>
                         </a:rPr>
                         <a:t>全空间随机会把面积打到 1e5~1e6，AC 出不来</a:t>
                       </a:r>
+                      <a:endParaRPr sz="1300" b="0">
+                        <a:solidFill>
+                          <a:srgbClr val="595959"/>
+                        </a:solidFill>
+                        <a:latin typeface="微软雅黑" panose="020B0503020204020204" charset="-122"/>
+                        <a:ea typeface="微软雅黑" panose="020B0503020204020204" charset="-122"/>
+                      </a:endParaRPr>
                     </a:p>
                   </a:txBody>
                   <a:tcPr>
@@ -14299,11 +15686,6 @@
                     </a:solidFill>
                   </a:tcPr>
                 </a:tc>
-                <a:extLst>
-                  <a:ext uri="{0D108BD9-81ED-4DB2-BD59-A6C34878D82A}">
-                    <a16:rowId xmlns:a16="http://schemas.microsoft.com/office/drawing/2014/main" val="10003"/>
-                  </a:ext>
-                </a:extLst>
               </a:tr>
               <a:tr h="475488">
                 <a:tc>
@@ -14316,11 +15698,18 @@
                           <a:solidFill>
                             <a:srgbClr val="1F3864"/>
                           </a:solidFill>
-                          <a:latin typeface="微软雅黑"/>
-                          <a:ea typeface="微软雅黑"/>
+                          <a:latin typeface="微软雅黑" panose="020B0503020204020204" charset="-122"/>
+                          <a:ea typeface="微软雅黑" panose="020B0503020204020204" charset="-122"/>
                         </a:rPr>
                         <a:t>预算</a:t>
                       </a:r>
+                      <a:endParaRPr sz="1300" b="1">
+                        <a:solidFill>
+                          <a:srgbClr val="1F3864"/>
+                        </a:solidFill>
+                        <a:latin typeface="微软雅黑" panose="020B0503020204020204" charset="-122"/>
+                        <a:ea typeface="微软雅黑" panose="020B0503020204020204" charset="-122"/>
+                      </a:endParaRPr>
                     </a:p>
                   </a:txBody>
                   <a:tcPr>
@@ -14339,11 +15728,18 @@
                           <a:solidFill>
                             <a:srgbClr val="595959"/>
                           </a:solidFill>
-                          <a:latin typeface="微软雅黑"/>
-                          <a:ea typeface="微软雅黑"/>
+                          <a:latin typeface="微软雅黑" panose="020B0503020204020204" charset="-122"/>
+                          <a:ea typeface="微软雅黑" panose="020B0503020204020204" charset="-122"/>
                         </a:rPr>
                         <a:t>6900 秒（7200 − 300）</a:t>
                       </a:r>
+                      <a:endParaRPr sz="1300" b="0">
+                        <a:solidFill>
+                          <a:srgbClr val="595959"/>
+                        </a:solidFill>
+                        <a:latin typeface="微软雅黑" panose="020B0503020204020204" charset="-122"/>
+                        <a:ea typeface="微软雅黑" panose="020B0503020204020204" charset="-122"/>
+                      </a:endParaRPr>
                     </a:p>
                   </a:txBody>
                   <a:tcPr>
@@ -14362,11 +15758,18 @@
                           <a:solidFill>
                             <a:srgbClr val="595959"/>
                           </a:solidFill>
-                          <a:latin typeface="微软雅黑"/>
-                          <a:ea typeface="微软雅黑"/>
+                          <a:latin typeface="微软雅黑" panose="020B0503020204020204" charset="-122"/>
+                          <a:ea typeface="微软雅黑" panose="020B0503020204020204" charset="-122"/>
                         </a:rPr>
                         <a:t>时间分在 7200 秒封顶</a:t>
                       </a:r>
+                      <a:endParaRPr sz="1300" b="0">
+                        <a:solidFill>
+                          <a:srgbClr val="595959"/>
+                        </a:solidFill>
+                        <a:latin typeface="微软雅黑" panose="020B0503020204020204" charset="-122"/>
+                        <a:ea typeface="微软雅黑" panose="020B0503020204020204" charset="-122"/>
+                      </a:endParaRPr>
                     </a:p>
                   </a:txBody>
                   <a:tcPr>
@@ -14375,11 +15778,6 @@
                     </a:solidFill>
                   </a:tcPr>
                 </a:tc>
-                <a:extLst>
-                  <a:ext uri="{0D108BD9-81ED-4DB2-BD59-A6C34878D82A}">
-                    <a16:rowId xmlns:a16="http://schemas.microsoft.com/office/drawing/2014/main" val="10004"/>
-                  </a:ext>
-                </a:extLst>
               </a:tr>
             </a:tbl>
           </a:graphicData>
@@ -14433,11 +15831,18 @@
                 <a:solidFill>
                   <a:srgbClr val="C55A11"/>
                 </a:solidFill>
-                <a:latin typeface="微软雅黑"/>
-                <a:ea typeface="微软雅黑"/>
+                <a:latin typeface="微软雅黑" panose="020B0503020204020204" charset="-122"/>
+                <a:ea typeface="微软雅黑" panose="020B0503020204020204" charset="-122"/>
               </a:rPr>
               <a:t>P0-8：MDE 配置写死旧机绝对路径 → 仿真必失败 → 最优解写不出 → score.py 七项全 0</a:t>
             </a:r>
+            <a:endParaRPr sz="1300" b="1">
+              <a:solidFill>
+                <a:srgbClr val="C55A11"/>
+              </a:solidFill>
+              <a:latin typeface="微软雅黑" panose="020B0503020204020204" charset="-122"/>
+              <a:ea typeface="微软雅黑" panose="020B0503020204020204" charset="-122"/>
+            </a:endParaRPr>
           </a:p>
         </p:txBody>
       </p:sp>
@@ -14473,11 +15878,18 @@
                 <a:solidFill>
                   <a:srgbClr val="595959"/>
                 </a:solidFill>
-                <a:latin typeface="微软雅黑"/>
-                <a:ea typeface="微软雅黑"/>
+                <a:latin typeface="微软雅黑" panose="020B0503020204020204" charset="-122"/>
+                <a:ea typeface="微软雅黑" panose="020B0503020204020204" charset="-122"/>
               </a:rPr>
               <a:t>• 这不是算法问题，而是环境问题：官方参考包就是这样 14 秒退出、拿到 0 分</a:t>
             </a:r>
+            <a:endParaRPr sz="1400" b="0">
+              <a:solidFill>
+                <a:srgbClr val="595959"/>
+              </a:solidFill>
+              <a:latin typeface="微软雅黑" panose="020B0503020204020204" charset="-122"/>
+              <a:ea typeface="微软雅黑" panose="020B0503020204020204" charset="-122"/>
+            </a:endParaRPr>
           </a:p>
           <a:p>
             <a:pPr>
@@ -14490,11 +15902,18 @@
                 <a:solidFill>
                   <a:srgbClr val="595959"/>
                 </a:solidFill>
-                <a:latin typeface="微软雅黑"/>
-                <a:ea typeface="微软雅黑"/>
+                <a:latin typeface="微软雅黑" panose="020B0503020204020204" charset="-122"/>
+                <a:ea typeface="微软雅黑" panose="020B0503020204020204" charset="-122"/>
               </a:rPr>
               <a:t>• 另有 P0-9：仿真失败按「最差解」处理，单点失败只赔一次评估，不赔整轮</a:t>
             </a:r>
+            <a:endParaRPr sz="1400" b="0">
+              <a:solidFill>
+                <a:srgbClr val="595959"/>
+              </a:solidFill>
+              <a:latin typeface="微软雅黑" panose="020B0503020204020204" charset="-122"/>
+              <a:ea typeface="微软雅黑" panose="020B0503020204020204" charset="-122"/>
+            </a:endParaRPr>
           </a:p>
         </p:txBody>
       </p:sp>
@@ -14822,7 +16241,11 @@
       </a:style>
     </a:lnDef>
   </a:objectDefaults>
-  <a:extraClrSchemeLst/>
+  <a:extLst>
+    <a:ext uri="{05A4C25C-085E-4340-85A3-A5531E510DB2}">
+      <thm15:themeFamily xmlns:thm15="http://schemas.microsoft.com/office/thememl/2012/main" name="Office Theme" id="{62F939B6-93AF-4DB8-9C6B-D6C7DFDC589F}" vid="{4A3C46E8-61CC-4603-A589-7422A47A8E4A}"/>
+    </a:ext>
+  </a:extLst>
 </a:theme>
 </file>
 
@@ -14869,7 +16292,7 @@
     </a:clrScheme>
     <a:fontScheme name="Office">
       <a:majorFont>
-        <a:latin typeface="等线 Light" panose="020F0302020204030204"/>
+        <a:latin typeface="等线 Light"/>
         <a:ea typeface=""/>
         <a:cs typeface=""/>
         <a:font script="Jpan" typeface="游ゴシック Light"/>
@@ -14902,26 +16325,9 @@
         <a:font script="Viet" typeface="Times New Roman"/>
         <a:font script="Uigh" typeface="Microsoft Uighur"/>
         <a:font script="Geor" typeface="Sylfaen"/>
-        <a:font script="Armn" typeface="Arial"/>
-        <a:font script="Bugi" typeface="Leelawadee UI"/>
-        <a:font script="Bopo" typeface="Microsoft JhengHei"/>
-        <a:font script="Java" typeface="Javanese Text"/>
-        <a:font script="Lisu" typeface="Segoe UI"/>
-        <a:font script="Mymr" typeface="Myanmar Text"/>
-        <a:font script="Nkoo" typeface="Ebrima"/>
-        <a:font script="Olck" typeface="Nirmala UI"/>
-        <a:font script="Osma" typeface="Ebrima"/>
-        <a:font script="Phag" typeface="Phagspa"/>
-        <a:font script="Syrn" typeface="Estrangelo Edessa"/>
-        <a:font script="Syrj" typeface="Estrangelo Edessa"/>
-        <a:font script="Syre" typeface="Estrangelo Edessa"/>
-        <a:font script="Sora" typeface="Nirmala UI"/>
-        <a:font script="Tale" typeface="Microsoft Tai Le"/>
-        <a:font script="Talu" typeface="Microsoft New Tai Lue"/>
-        <a:font script="Tfng" typeface="Ebrima"/>
       </a:majorFont>
       <a:minorFont>
-        <a:latin typeface="等线" panose="020F0502020204030204"/>
+        <a:latin typeface="等线"/>
         <a:ea typeface=""/>
         <a:cs typeface=""/>
         <a:font script="Jpan" typeface="游ゴシック"/>
@@ -14954,23 +16360,6 @@
         <a:font script="Viet" typeface="Arial"/>
         <a:font script="Uigh" typeface="Microsoft Uighur"/>
         <a:font script="Geor" typeface="Sylfaen"/>
-        <a:font script="Armn" typeface="Arial"/>
-        <a:font script="Bugi" typeface="Leelawadee UI"/>
-        <a:font script="Bopo" typeface="Microsoft JhengHei"/>
-        <a:font script="Java" typeface="Javanese Text"/>
-        <a:font script="Lisu" typeface="Segoe UI"/>
-        <a:font script="Mymr" typeface="Myanmar Text"/>
-        <a:font script="Nkoo" typeface="Ebrima"/>
-        <a:font script="Olck" typeface="Nirmala UI"/>
-        <a:font script="Osma" typeface="Ebrima"/>
-        <a:font script="Phag" typeface="Phagspa"/>
-        <a:font script="Syrn" typeface="Estrangelo Edessa"/>
-        <a:font script="Syrj" typeface="Estrangelo Edessa"/>
-        <a:font script="Syre" typeface="Estrangelo Edessa"/>
-        <a:font script="Sora" typeface="Nirmala UI"/>
-        <a:font script="Tale" typeface="Microsoft Tai Le"/>
-        <a:font script="Talu" typeface="Microsoft New Tai Lue"/>
-        <a:font script="Tfng" typeface="Ebrima"/>
       </a:minorFont>
     </a:fontScheme>
     <a:fmtScheme name="Office">
@@ -15111,8 +16500,6 @@
       </a:bgFillStyleLst>
     </a:fmtScheme>
   </a:themeElements>
-  <a:objectDefaults/>
-  <a:extraClrSchemeLst/>
   <a:extLst>
     <a:ext uri="{05A4C25C-085E-4340-85A3-A5531E510DB2}">
       <thm15:themeFamily xmlns:thm15="http://schemas.microsoft.com/office/thememl/2012/main" name="Office Theme" id="{62F939B6-93AF-4DB8-9C6B-D6C7DFDC589F}" vid="{4A3C46E8-61CC-4603-A589-7422A47A8E4A}"/>
